--- a/Lecture_Slides/PH 123 Lecture 06.pptx
+++ b/Lecture_Slides/PH 123 Lecture 06.pptx
@@ -22,44 +22,44 @@
     <p:sldId id="290" r:id="rId13"/>
     <p:sldId id="291" r:id="rId14"/>
     <p:sldId id="312" r:id="rId15"/>
-    <p:sldId id="348" r:id="rId16"/>
-    <p:sldId id="349" r:id="rId17"/>
-    <p:sldId id="350" r:id="rId18"/>
-    <p:sldId id="351" r:id="rId19"/>
-    <p:sldId id="352" r:id="rId20"/>
-    <p:sldId id="353" r:id="rId21"/>
-    <p:sldId id="261" r:id="rId22"/>
-    <p:sldId id="262" r:id="rId23"/>
-    <p:sldId id="263" r:id="rId24"/>
-    <p:sldId id="321" r:id="rId25"/>
-    <p:sldId id="323" r:id="rId26"/>
-    <p:sldId id="354" r:id="rId27"/>
-    <p:sldId id="324" r:id="rId28"/>
-    <p:sldId id="325" r:id="rId29"/>
-    <p:sldId id="326" r:id="rId30"/>
-    <p:sldId id="355" r:id="rId31"/>
-    <p:sldId id="356" r:id="rId32"/>
-    <p:sldId id="357" r:id="rId33"/>
-    <p:sldId id="358" r:id="rId34"/>
-    <p:sldId id="359" r:id="rId35"/>
-    <p:sldId id="360" r:id="rId36"/>
-    <p:sldId id="361" r:id="rId37"/>
-    <p:sldId id="303" r:id="rId38"/>
-    <p:sldId id="328" r:id="rId39"/>
-    <p:sldId id="329" r:id="rId40"/>
-    <p:sldId id="330" r:id="rId41"/>
-    <p:sldId id="331" r:id="rId42"/>
-    <p:sldId id="332" r:id="rId43"/>
-    <p:sldId id="333" r:id="rId44"/>
-    <p:sldId id="334" r:id="rId45"/>
-    <p:sldId id="335" r:id="rId46"/>
-    <p:sldId id="304" r:id="rId47"/>
-    <p:sldId id="368" r:id="rId48"/>
-    <p:sldId id="305" r:id="rId49"/>
-    <p:sldId id="306" r:id="rId50"/>
-    <p:sldId id="307" r:id="rId51"/>
-    <p:sldId id="308" r:id="rId52"/>
-    <p:sldId id="309" r:id="rId53"/>
+    <p:sldId id="321" r:id="rId16"/>
+    <p:sldId id="323" r:id="rId17"/>
+    <p:sldId id="354" r:id="rId18"/>
+    <p:sldId id="324" r:id="rId19"/>
+    <p:sldId id="325" r:id="rId20"/>
+    <p:sldId id="326" r:id="rId21"/>
+    <p:sldId id="355" r:id="rId22"/>
+    <p:sldId id="356" r:id="rId23"/>
+    <p:sldId id="357" r:id="rId24"/>
+    <p:sldId id="358" r:id="rId25"/>
+    <p:sldId id="359" r:id="rId26"/>
+    <p:sldId id="348" r:id="rId27"/>
+    <p:sldId id="349" r:id="rId28"/>
+    <p:sldId id="350" r:id="rId29"/>
+    <p:sldId id="351" r:id="rId30"/>
+    <p:sldId id="352" r:id="rId31"/>
+    <p:sldId id="353" r:id="rId32"/>
+    <p:sldId id="360" r:id="rId33"/>
+    <p:sldId id="361" r:id="rId34"/>
+    <p:sldId id="303" r:id="rId35"/>
+    <p:sldId id="328" r:id="rId36"/>
+    <p:sldId id="329" r:id="rId37"/>
+    <p:sldId id="330" r:id="rId38"/>
+    <p:sldId id="331" r:id="rId39"/>
+    <p:sldId id="332" r:id="rId40"/>
+    <p:sldId id="333" r:id="rId41"/>
+    <p:sldId id="334" r:id="rId42"/>
+    <p:sldId id="335" r:id="rId43"/>
+    <p:sldId id="304" r:id="rId44"/>
+    <p:sldId id="368" r:id="rId45"/>
+    <p:sldId id="305" r:id="rId46"/>
+    <p:sldId id="306" r:id="rId47"/>
+    <p:sldId id="307" r:id="rId48"/>
+    <p:sldId id="308" r:id="rId49"/>
+    <p:sldId id="309" r:id="rId50"/>
+    <p:sldId id="261" r:id="rId51"/>
+    <p:sldId id="262" r:id="rId52"/>
+    <p:sldId id="263" r:id="rId53"/>
     <p:sldId id="265" r:id="rId54"/>
     <p:sldId id="363" r:id="rId55"/>
     <p:sldId id="364" r:id="rId56"/>
@@ -214,7 +214,7 @@
 <file path=ppt/revisionInfo.xml><?xml version="1.0" encoding="utf-8"?>
 <p1510:revInfo xmlns:a="http://schemas.openxmlformats.org/drawingml/2006/main" xmlns:r="http://schemas.openxmlformats.org/officeDocument/2006/relationships" xmlns:p1510="http://schemas.microsoft.com/office/powerpoint/2015/10/main">
   <p1510:revLst>
-    <p1510:client id="{12E905DC-A7E5-4A40-BD03-0BDCEA7D9035}" v="35" dt="2025-04-25T23:21:06.409"/>
+    <p1510:client id="{906CD323-B2B7-401B-B4CD-B57954F6D71C}" v="4" dt="2026-01-15T21:44:49.770"/>
   </p1510:revLst>
 </p1510:revInfo>
 </file>
@@ -222,866 +222,174 @@
 <file path=ppt/changesInfos/changesInfo1.xml><?xml version="1.0" encoding="utf-8"?>
 <pc:chgInfo xmlns:a="http://schemas.openxmlformats.org/drawingml/2006/main" xmlns:r="http://schemas.openxmlformats.org/officeDocument/2006/relationships" xmlns:ac="http://schemas.microsoft.com/office/drawing/2013/main/command" xmlns:pc="http://schemas.microsoft.com/office/powerpoint/2013/main/command">
   <pc:docChgLst>
-    <pc:chgData name="Lines, Todd" userId="afaf7c3a-e8aa-4568-882a-02ad8f9e19b0" providerId="ADAL" clId="{D14D749C-C0D3-485E-8084-7F974543AFC9}"/>
-    <pc:docChg chg="custSel addSld modSld sldOrd">
-      <pc:chgData name="Lines, Todd" userId="afaf7c3a-e8aa-4568-882a-02ad8f9e19b0" providerId="ADAL" clId="{D14D749C-C0D3-485E-8084-7F974543AFC9}" dt="2019-04-30T18:57:28.338" v="60"/>
+    <pc:chgData name="Lines, Todd" userId="afaf7c3a-e8aa-4568-882a-02ad8f9e19b0" providerId="ADAL" clId="{5FF5AC1B-ABA9-43D7-A1E3-2D92732CD6E2}"/>
+    <pc:docChg chg="addSld delSld modSld">
+      <pc:chgData name="Lines, Todd" userId="afaf7c3a-e8aa-4568-882a-02ad8f9e19b0" providerId="ADAL" clId="{5FF5AC1B-ABA9-43D7-A1E3-2D92732CD6E2}" dt="2026-01-15T21:44:49.770" v="8"/>
       <pc:docMkLst>
         <pc:docMk/>
       </pc:docMkLst>
-      <pc:sldChg chg="ord">
-        <pc:chgData name="Lines, Todd" userId="afaf7c3a-e8aa-4568-882a-02ad8f9e19b0" providerId="ADAL" clId="{D14D749C-C0D3-485E-8084-7F974543AFC9}" dt="2019-04-30T18:19:22.249" v="45"/>
-        <pc:sldMkLst>
-          <pc:docMk/>
-          <pc:sldMk cId="3687487709" sldId="287"/>
-        </pc:sldMkLst>
-      </pc:sldChg>
-      <pc:sldChg chg="ord">
-        <pc:chgData name="Lines, Todd" userId="afaf7c3a-e8aa-4568-882a-02ad8f9e19b0" providerId="ADAL" clId="{D14D749C-C0D3-485E-8084-7F974543AFC9}" dt="2019-04-30T18:19:41.998" v="46"/>
-        <pc:sldMkLst>
-          <pc:docMk/>
-          <pc:sldMk cId="3852839569" sldId="289"/>
-        </pc:sldMkLst>
-      </pc:sldChg>
-      <pc:sldChg chg="addSp delSp modSp ord">
-        <pc:chgData name="Lines, Todd" userId="afaf7c3a-e8aa-4568-882a-02ad8f9e19b0" providerId="ADAL" clId="{D14D749C-C0D3-485E-8084-7F974543AFC9}" dt="2019-04-30T18:19:06.778" v="44"/>
-        <pc:sldMkLst>
-          <pc:docMk/>
-          <pc:sldMk cId="1389832616" sldId="310"/>
-        </pc:sldMkLst>
-      </pc:sldChg>
-      <pc:sldChg chg="ord">
-        <pc:chgData name="Lines, Todd" userId="afaf7c3a-e8aa-4568-882a-02ad8f9e19b0" providerId="ADAL" clId="{D14D749C-C0D3-485E-8084-7F974543AFC9}" dt="2019-04-30T18:32:17.690" v="48"/>
-        <pc:sldMkLst>
-          <pc:docMk/>
-          <pc:sldMk cId="1729789265" sldId="311"/>
-        </pc:sldMkLst>
-      </pc:sldChg>
-      <pc:sldChg chg="delSp modSp">
-        <pc:chgData name="Lines, Todd" userId="afaf7c3a-e8aa-4568-882a-02ad8f9e19b0" providerId="ADAL" clId="{D14D749C-C0D3-485E-8084-7F974543AFC9}" dt="2019-04-30T18:53:59.664" v="50"/>
-        <pc:sldMkLst>
-          <pc:docMk/>
-          <pc:sldMk cId="1222242176" sldId="314"/>
-        </pc:sldMkLst>
-      </pc:sldChg>
-      <pc:sldChg chg="delSp modSp">
-        <pc:chgData name="Lines, Todd" userId="afaf7c3a-e8aa-4568-882a-02ad8f9e19b0" providerId="ADAL" clId="{D14D749C-C0D3-485E-8084-7F974543AFC9}" dt="2019-04-30T18:55:25.372" v="52"/>
-        <pc:sldMkLst>
-          <pc:docMk/>
-          <pc:sldMk cId="1189374261" sldId="315"/>
-        </pc:sldMkLst>
-      </pc:sldChg>
-      <pc:sldChg chg="delSp modSp">
-        <pc:chgData name="Lines, Todd" userId="afaf7c3a-e8aa-4568-882a-02ad8f9e19b0" providerId="ADAL" clId="{D14D749C-C0D3-485E-8084-7F974543AFC9}" dt="2019-04-30T18:56:17.180" v="55"/>
-        <pc:sldMkLst>
-          <pc:docMk/>
-          <pc:sldMk cId="1734463390" sldId="316"/>
-        </pc:sldMkLst>
-      </pc:sldChg>
-      <pc:sldChg chg="delSp modSp">
-        <pc:chgData name="Lines, Todd" userId="afaf7c3a-e8aa-4568-882a-02ad8f9e19b0" providerId="ADAL" clId="{D14D749C-C0D3-485E-8084-7F974543AFC9}" dt="2019-04-30T18:56:42.530" v="58"/>
-        <pc:sldMkLst>
-          <pc:docMk/>
-          <pc:sldMk cId="3937303269" sldId="317"/>
-        </pc:sldMkLst>
-      </pc:sldChg>
-      <pc:sldChg chg="delSp modSp">
-        <pc:chgData name="Lines, Todd" userId="afaf7c3a-e8aa-4568-882a-02ad8f9e19b0" providerId="ADAL" clId="{D14D749C-C0D3-485E-8084-7F974543AFC9}" dt="2019-04-30T18:57:28.338" v="60"/>
-        <pc:sldMkLst>
-          <pc:docMk/>
-          <pc:sldMk cId="3726261940" sldId="336"/>
-        </pc:sldMkLst>
-      </pc:sldChg>
-      <pc:sldChg chg="add">
-        <pc:chgData name="Lines, Todd" userId="afaf7c3a-e8aa-4568-882a-02ad8f9e19b0" providerId="ADAL" clId="{D14D749C-C0D3-485E-8084-7F974543AFC9}" dt="2019-04-30T18:26:48.630" v="47"/>
-        <pc:sldMkLst>
-          <pc:docMk/>
-          <pc:sldMk cId="103656388" sldId="344"/>
-        </pc:sldMkLst>
-      </pc:sldChg>
-    </pc:docChg>
-  </pc:docChgLst>
-  <pc:docChgLst>
-    <pc:chgData name="Lines, Todd" userId="afaf7c3a-e8aa-4568-882a-02ad8f9e19b0" providerId="ADAL" clId="{12E905DC-A7E5-4A40-BD03-0BDCEA7D9035}"/>
-    <pc:docChg chg="undo custSel addSld delSld modSld sldOrd">
-      <pc:chgData name="Lines, Todd" userId="afaf7c3a-e8aa-4568-882a-02ad8f9e19b0" providerId="ADAL" clId="{12E905DC-A7E5-4A40-BD03-0BDCEA7D9035}" dt="2025-04-28T23:00:08.353" v="365" actId="1076"/>
-      <pc:docMkLst>
-        <pc:docMk/>
-      </pc:docMkLst>
-      <pc:sldChg chg="add">
-        <pc:chgData name="Lines, Todd" userId="afaf7c3a-e8aa-4568-882a-02ad8f9e19b0" providerId="ADAL" clId="{12E905DC-A7E5-4A40-BD03-0BDCEA7D9035}" dt="2025-04-25T23:21:06.407" v="130"/>
-        <pc:sldMkLst>
-          <pc:docMk/>
-          <pc:sldMk cId="0" sldId="259"/>
-        </pc:sldMkLst>
-      </pc:sldChg>
-      <pc:sldChg chg="add">
-        <pc:chgData name="Lines, Todd" userId="afaf7c3a-e8aa-4568-882a-02ad8f9e19b0" providerId="ADAL" clId="{12E905DC-A7E5-4A40-BD03-0BDCEA7D9035}" dt="2025-04-25T23:13:36.232" v="125"/>
+      <pc:sldChg chg="del">
+        <pc:chgData name="Lines, Todd" userId="afaf7c3a-e8aa-4568-882a-02ad8f9e19b0" providerId="ADAL" clId="{5FF5AC1B-ABA9-43D7-A1E3-2D92732CD6E2}" dt="2026-01-15T21:43:31.987" v="5" actId="2696"/>
         <pc:sldMkLst>
           <pc:docMk/>
           <pc:sldMk cId="0" sldId="261"/>
         </pc:sldMkLst>
       </pc:sldChg>
+      <pc:sldChg chg="add del">
+        <pc:chgData name="Lines, Todd" userId="afaf7c3a-e8aa-4568-882a-02ad8f9e19b0" providerId="ADAL" clId="{5FF5AC1B-ABA9-43D7-A1E3-2D92732CD6E2}" dt="2026-01-15T21:44:18.258" v="7" actId="2696"/>
+        <pc:sldMkLst>
+          <pc:docMk/>
+          <pc:sldMk cId="96676395" sldId="261"/>
+        </pc:sldMkLst>
+      </pc:sldChg>
       <pc:sldChg chg="add">
-        <pc:chgData name="Lines, Todd" userId="afaf7c3a-e8aa-4568-882a-02ad8f9e19b0" providerId="ADAL" clId="{12E905DC-A7E5-4A40-BD03-0BDCEA7D9035}" dt="2025-04-25T23:13:36.232" v="125"/>
+        <pc:chgData name="Lines, Todd" userId="afaf7c3a-e8aa-4568-882a-02ad8f9e19b0" providerId="ADAL" clId="{5FF5AC1B-ABA9-43D7-A1E3-2D92732CD6E2}" dt="2026-01-15T21:44:49.770" v="8"/>
+        <pc:sldMkLst>
+          <pc:docMk/>
+          <pc:sldMk cId="645957708" sldId="261"/>
+        </pc:sldMkLst>
+      </pc:sldChg>
+      <pc:sldChg chg="del">
+        <pc:chgData name="Lines, Todd" userId="afaf7c3a-e8aa-4568-882a-02ad8f9e19b0" providerId="ADAL" clId="{5FF5AC1B-ABA9-43D7-A1E3-2D92732CD6E2}" dt="2026-01-15T21:43:31.987" v="5" actId="2696"/>
         <pc:sldMkLst>
           <pc:docMk/>
           <pc:sldMk cId="0" sldId="262"/>
         </pc:sldMkLst>
       </pc:sldChg>
       <pc:sldChg chg="add">
-        <pc:chgData name="Lines, Todd" userId="afaf7c3a-e8aa-4568-882a-02ad8f9e19b0" providerId="ADAL" clId="{12E905DC-A7E5-4A40-BD03-0BDCEA7D9035}" dt="2025-04-25T23:13:36.232" v="125"/>
+        <pc:chgData name="Lines, Todd" userId="afaf7c3a-e8aa-4568-882a-02ad8f9e19b0" providerId="ADAL" clId="{5FF5AC1B-ABA9-43D7-A1E3-2D92732CD6E2}" dt="2026-01-15T21:44:49.770" v="8"/>
+        <pc:sldMkLst>
+          <pc:docMk/>
+          <pc:sldMk cId="2084675203" sldId="262"/>
+        </pc:sldMkLst>
+      </pc:sldChg>
+      <pc:sldChg chg="add del">
+        <pc:chgData name="Lines, Todd" userId="afaf7c3a-e8aa-4568-882a-02ad8f9e19b0" providerId="ADAL" clId="{5FF5AC1B-ABA9-43D7-A1E3-2D92732CD6E2}" dt="2026-01-15T21:44:18.258" v="7" actId="2696"/>
+        <pc:sldMkLst>
+          <pc:docMk/>
+          <pc:sldMk cId="3109614522" sldId="262"/>
+        </pc:sldMkLst>
+      </pc:sldChg>
+      <pc:sldChg chg="del">
+        <pc:chgData name="Lines, Todd" userId="afaf7c3a-e8aa-4568-882a-02ad8f9e19b0" providerId="ADAL" clId="{5FF5AC1B-ABA9-43D7-A1E3-2D92732CD6E2}" dt="2026-01-15T21:43:31.987" v="5" actId="2696"/>
         <pc:sldMkLst>
           <pc:docMk/>
           <pc:sldMk cId="0" sldId="263"/>
         </pc:sldMkLst>
       </pc:sldChg>
-      <pc:sldChg chg="add">
-        <pc:chgData name="Lines, Todd" userId="afaf7c3a-e8aa-4568-882a-02ad8f9e19b0" providerId="ADAL" clId="{12E905DC-A7E5-4A40-BD03-0BDCEA7D9035}" dt="2025-04-25T23:21:06.407" v="130"/>
+      <pc:sldChg chg="add del">
+        <pc:chgData name="Lines, Todd" userId="afaf7c3a-e8aa-4568-882a-02ad8f9e19b0" providerId="ADAL" clId="{5FF5AC1B-ABA9-43D7-A1E3-2D92732CD6E2}" dt="2026-01-15T21:44:18.258" v="7" actId="2696"/>
         <pc:sldMkLst>
           <pc:docMk/>
-          <pc:sldMk cId="0" sldId="264"/>
+          <pc:sldMk cId="1326243373" sldId="263"/>
         </pc:sldMkLst>
       </pc:sldChg>
       <pc:sldChg chg="add">
-        <pc:chgData name="Lines, Todd" userId="afaf7c3a-e8aa-4568-882a-02ad8f9e19b0" providerId="ADAL" clId="{12E905DC-A7E5-4A40-BD03-0BDCEA7D9035}" dt="2025-04-25T23:21:06.407" v="130"/>
+        <pc:chgData name="Lines, Todd" userId="afaf7c3a-e8aa-4568-882a-02ad8f9e19b0" providerId="ADAL" clId="{5FF5AC1B-ABA9-43D7-A1E3-2D92732CD6E2}" dt="2026-01-15T21:44:49.770" v="8"/>
         <pc:sldMkLst>
           <pc:docMk/>
-          <pc:sldMk cId="0" sldId="265"/>
+          <pc:sldMk cId="2518151769" sldId="263"/>
         </pc:sldMkLst>
       </pc:sldChg>
-      <pc:sldChg chg="add">
-        <pc:chgData name="Lines, Todd" userId="afaf7c3a-e8aa-4568-882a-02ad8f9e19b0" providerId="ADAL" clId="{12E905DC-A7E5-4A40-BD03-0BDCEA7D9035}" dt="2025-04-25T23:21:06.407" v="130"/>
+      <pc:sldChg chg="modSp del mod">
+        <pc:chgData name="Lines, Todd" userId="afaf7c3a-e8aa-4568-882a-02ad8f9e19b0" providerId="ADAL" clId="{5FF5AC1B-ABA9-43D7-A1E3-2D92732CD6E2}" dt="2026-01-15T21:43:31.987" v="5" actId="2696"/>
         <pc:sldMkLst>
           <pc:docMk/>
-          <pc:sldMk cId="0" sldId="266"/>
-        </pc:sldMkLst>
-      </pc:sldChg>
-      <pc:sldChg chg="add">
-        <pc:chgData name="Lines, Todd" userId="afaf7c3a-e8aa-4568-882a-02ad8f9e19b0" providerId="ADAL" clId="{12E905DC-A7E5-4A40-BD03-0BDCEA7D9035}" dt="2025-04-25T23:11:43.561" v="124"/>
-        <pc:sldMkLst>
-          <pc:docMk/>
-          <pc:sldMk cId="1716686287" sldId="285"/>
-        </pc:sldMkLst>
-      </pc:sldChg>
-      <pc:sldChg chg="del">
-        <pc:chgData name="Lines, Todd" userId="afaf7c3a-e8aa-4568-882a-02ad8f9e19b0" providerId="ADAL" clId="{12E905DC-A7E5-4A40-BD03-0BDCEA7D9035}" dt="2025-04-25T23:11:40.322" v="123" actId="2696"/>
-        <pc:sldMkLst>
-          <pc:docMk/>
-          <pc:sldMk cId="1808158932" sldId="285"/>
-        </pc:sldMkLst>
-      </pc:sldChg>
-      <pc:sldChg chg="add">
-        <pc:chgData name="Lines, Todd" userId="afaf7c3a-e8aa-4568-882a-02ad8f9e19b0" providerId="ADAL" clId="{12E905DC-A7E5-4A40-BD03-0BDCEA7D9035}" dt="2025-04-25T23:11:43.561" v="124"/>
-        <pc:sldMkLst>
-          <pc:docMk/>
-          <pc:sldMk cId="514587553" sldId="287"/>
-        </pc:sldMkLst>
-      </pc:sldChg>
-      <pc:sldChg chg="del">
-        <pc:chgData name="Lines, Todd" userId="afaf7c3a-e8aa-4568-882a-02ad8f9e19b0" providerId="ADAL" clId="{12E905DC-A7E5-4A40-BD03-0BDCEA7D9035}" dt="2025-04-25T23:11:40.322" v="123" actId="2696"/>
-        <pc:sldMkLst>
-          <pc:docMk/>
-          <pc:sldMk cId="3687487709" sldId="287"/>
-        </pc:sldMkLst>
-      </pc:sldChg>
-      <pc:sldChg chg="add">
-        <pc:chgData name="Lines, Todd" userId="afaf7c3a-e8aa-4568-882a-02ad8f9e19b0" providerId="ADAL" clId="{12E905DC-A7E5-4A40-BD03-0BDCEA7D9035}" dt="2025-04-25T23:11:43.561" v="124"/>
-        <pc:sldMkLst>
-          <pc:docMk/>
-          <pc:sldMk cId="1620431158" sldId="288"/>
-        </pc:sldMkLst>
-      </pc:sldChg>
-      <pc:sldChg chg="del">
-        <pc:chgData name="Lines, Todd" userId="afaf7c3a-e8aa-4568-882a-02ad8f9e19b0" providerId="ADAL" clId="{12E905DC-A7E5-4A40-BD03-0BDCEA7D9035}" dt="2025-04-25T23:11:40.322" v="123" actId="2696"/>
-        <pc:sldMkLst>
-          <pc:docMk/>
-          <pc:sldMk cId="2416614079" sldId="288"/>
-        </pc:sldMkLst>
-      </pc:sldChg>
-      <pc:sldChg chg="add">
-        <pc:chgData name="Lines, Todd" userId="afaf7c3a-e8aa-4568-882a-02ad8f9e19b0" providerId="ADAL" clId="{12E905DC-A7E5-4A40-BD03-0BDCEA7D9035}" dt="2025-04-25T23:11:43.561" v="124"/>
-        <pc:sldMkLst>
-          <pc:docMk/>
-          <pc:sldMk cId="3655656141" sldId="289"/>
-        </pc:sldMkLst>
-      </pc:sldChg>
-      <pc:sldChg chg="del">
-        <pc:chgData name="Lines, Todd" userId="afaf7c3a-e8aa-4568-882a-02ad8f9e19b0" providerId="ADAL" clId="{12E905DC-A7E5-4A40-BD03-0BDCEA7D9035}" dt="2025-04-25T23:11:40.322" v="123" actId="2696"/>
-        <pc:sldMkLst>
-          <pc:docMk/>
-          <pc:sldMk cId="3852839569" sldId="289"/>
-        </pc:sldMkLst>
-      </pc:sldChg>
-      <pc:sldChg chg="del">
-        <pc:chgData name="Lines, Todd" userId="afaf7c3a-e8aa-4568-882a-02ad8f9e19b0" providerId="ADAL" clId="{12E905DC-A7E5-4A40-BD03-0BDCEA7D9035}" dt="2025-04-25T23:11:40.322" v="123" actId="2696"/>
-        <pc:sldMkLst>
-          <pc:docMk/>
-          <pc:sldMk cId="412948595" sldId="290"/>
-        </pc:sldMkLst>
-      </pc:sldChg>
-      <pc:sldChg chg="add">
-        <pc:chgData name="Lines, Todd" userId="afaf7c3a-e8aa-4568-882a-02ad8f9e19b0" providerId="ADAL" clId="{12E905DC-A7E5-4A40-BD03-0BDCEA7D9035}" dt="2025-04-25T23:11:43.561" v="124"/>
-        <pc:sldMkLst>
-          <pc:docMk/>
-          <pc:sldMk cId="3048466046" sldId="290"/>
-        </pc:sldMkLst>
-      </pc:sldChg>
-      <pc:sldChg chg="del">
-        <pc:chgData name="Lines, Todd" userId="afaf7c3a-e8aa-4568-882a-02ad8f9e19b0" providerId="ADAL" clId="{12E905DC-A7E5-4A40-BD03-0BDCEA7D9035}" dt="2025-04-25T23:11:40.322" v="123" actId="2696"/>
-        <pc:sldMkLst>
-          <pc:docMk/>
-          <pc:sldMk cId="1671892692" sldId="291"/>
-        </pc:sldMkLst>
-      </pc:sldChg>
-      <pc:sldChg chg="add">
-        <pc:chgData name="Lines, Todd" userId="afaf7c3a-e8aa-4568-882a-02ad8f9e19b0" providerId="ADAL" clId="{12E905DC-A7E5-4A40-BD03-0BDCEA7D9035}" dt="2025-04-25T23:11:43.561" v="124"/>
-        <pc:sldMkLst>
-          <pc:docMk/>
-          <pc:sldMk cId="3337956701" sldId="291"/>
-        </pc:sldMkLst>
-      </pc:sldChg>
-      <pc:sldChg chg="add">
-        <pc:chgData name="Lines, Todd" userId="afaf7c3a-e8aa-4568-882a-02ad8f9e19b0" providerId="ADAL" clId="{12E905DC-A7E5-4A40-BD03-0BDCEA7D9035}" dt="2025-04-25T23:15:51.977" v="129"/>
-        <pc:sldMkLst>
-          <pc:docMk/>
-          <pc:sldMk cId="165947626" sldId="303"/>
-        </pc:sldMkLst>
-      </pc:sldChg>
-      <pc:sldChg chg="del">
-        <pc:chgData name="Lines, Todd" userId="afaf7c3a-e8aa-4568-882a-02ad8f9e19b0" providerId="ADAL" clId="{12E905DC-A7E5-4A40-BD03-0BDCEA7D9035}" dt="2025-04-25T23:15:45.690" v="128" actId="2696"/>
-        <pc:sldMkLst>
-          <pc:docMk/>
-          <pc:sldMk cId="2023784669" sldId="303"/>
-        </pc:sldMkLst>
-      </pc:sldChg>
-      <pc:sldChg chg="add">
-        <pc:chgData name="Lines, Todd" userId="afaf7c3a-e8aa-4568-882a-02ad8f9e19b0" providerId="ADAL" clId="{12E905DC-A7E5-4A40-BD03-0BDCEA7D9035}" dt="2025-04-25T23:15:51.977" v="129"/>
-        <pc:sldMkLst>
-          <pc:docMk/>
-          <pc:sldMk cId="2994639295" sldId="304"/>
-        </pc:sldMkLst>
-      </pc:sldChg>
-      <pc:sldChg chg="del">
-        <pc:chgData name="Lines, Todd" userId="afaf7c3a-e8aa-4568-882a-02ad8f9e19b0" providerId="ADAL" clId="{12E905DC-A7E5-4A40-BD03-0BDCEA7D9035}" dt="2025-04-25T23:15:45.690" v="128" actId="2696"/>
-        <pc:sldMkLst>
-          <pc:docMk/>
-          <pc:sldMk cId="3033060997" sldId="304"/>
-        </pc:sldMkLst>
-      </pc:sldChg>
-      <pc:sldChg chg="add">
-        <pc:chgData name="Lines, Todd" userId="afaf7c3a-e8aa-4568-882a-02ad8f9e19b0" providerId="ADAL" clId="{12E905DC-A7E5-4A40-BD03-0BDCEA7D9035}" dt="2025-04-25T23:15:51.977" v="129"/>
-        <pc:sldMkLst>
-          <pc:docMk/>
-          <pc:sldMk cId="270078908" sldId="305"/>
-        </pc:sldMkLst>
-      </pc:sldChg>
-      <pc:sldChg chg="del">
-        <pc:chgData name="Lines, Todd" userId="afaf7c3a-e8aa-4568-882a-02ad8f9e19b0" providerId="ADAL" clId="{12E905DC-A7E5-4A40-BD03-0BDCEA7D9035}" dt="2025-04-25T23:15:45.690" v="128" actId="2696"/>
-        <pc:sldMkLst>
-          <pc:docMk/>
-          <pc:sldMk cId="4273839086" sldId="305"/>
-        </pc:sldMkLst>
-      </pc:sldChg>
-      <pc:sldChg chg="add">
-        <pc:chgData name="Lines, Todd" userId="afaf7c3a-e8aa-4568-882a-02ad8f9e19b0" providerId="ADAL" clId="{12E905DC-A7E5-4A40-BD03-0BDCEA7D9035}" dt="2025-04-25T23:15:51.977" v="129"/>
-        <pc:sldMkLst>
-          <pc:docMk/>
-          <pc:sldMk cId="867714779" sldId="306"/>
-        </pc:sldMkLst>
-      </pc:sldChg>
-      <pc:sldChg chg="del">
-        <pc:chgData name="Lines, Todd" userId="afaf7c3a-e8aa-4568-882a-02ad8f9e19b0" providerId="ADAL" clId="{12E905DC-A7E5-4A40-BD03-0BDCEA7D9035}" dt="2025-04-25T23:15:45.690" v="128" actId="2696"/>
-        <pc:sldMkLst>
-          <pc:docMk/>
-          <pc:sldMk cId="3190734595" sldId="306"/>
-        </pc:sldMkLst>
-      </pc:sldChg>
-      <pc:sldChg chg="add">
-        <pc:chgData name="Lines, Todd" userId="afaf7c3a-e8aa-4568-882a-02ad8f9e19b0" providerId="ADAL" clId="{12E905DC-A7E5-4A40-BD03-0BDCEA7D9035}" dt="2025-04-25T23:15:51.977" v="129"/>
-        <pc:sldMkLst>
-          <pc:docMk/>
-          <pc:sldMk cId="1497180699" sldId="307"/>
-        </pc:sldMkLst>
-      </pc:sldChg>
-      <pc:sldChg chg="del">
-        <pc:chgData name="Lines, Todd" userId="afaf7c3a-e8aa-4568-882a-02ad8f9e19b0" providerId="ADAL" clId="{12E905DC-A7E5-4A40-BD03-0BDCEA7D9035}" dt="2025-04-25T23:15:45.690" v="128" actId="2696"/>
-        <pc:sldMkLst>
-          <pc:docMk/>
-          <pc:sldMk cId="2776645912" sldId="307"/>
-        </pc:sldMkLst>
-      </pc:sldChg>
-      <pc:sldChg chg="del">
-        <pc:chgData name="Lines, Todd" userId="afaf7c3a-e8aa-4568-882a-02ad8f9e19b0" providerId="ADAL" clId="{12E905DC-A7E5-4A40-BD03-0BDCEA7D9035}" dt="2025-04-25T23:15:45.690" v="128" actId="2696"/>
-        <pc:sldMkLst>
-          <pc:docMk/>
-          <pc:sldMk cId="3359018585" sldId="308"/>
-        </pc:sldMkLst>
-      </pc:sldChg>
-      <pc:sldChg chg="add">
-        <pc:chgData name="Lines, Todd" userId="afaf7c3a-e8aa-4568-882a-02ad8f9e19b0" providerId="ADAL" clId="{12E905DC-A7E5-4A40-BD03-0BDCEA7D9035}" dt="2025-04-25T23:15:51.977" v="129"/>
-        <pc:sldMkLst>
-          <pc:docMk/>
-          <pc:sldMk cId="4119617871" sldId="308"/>
-        </pc:sldMkLst>
-      </pc:sldChg>
-      <pc:sldChg chg="add">
-        <pc:chgData name="Lines, Todd" userId="afaf7c3a-e8aa-4568-882a-02ad8f9e19b0" providerId="ADAL" clId="{12E905DC-A7E5-4A40-BD03-0BDCEA7D9035}" dt="2025-04-25T23:15:51.977" v="129"/>
-        <pc:sldMkLst>
-          <pc:docMk/>
-          <pc:sldMk cId="778798007" sldId="309"/>
-        </pc:sldMkLst>
-      </pc:sldChg>
-      <pc:sldChg chg="del">
-        <pc:chgData name="Lines, Todd" userId="afaf7c3a-e8aa-4568-882a-02ad8f9e19b0" providerId="ADAL" clId="{12E905DC-A7E5-4A40-BD03-0BDCEA7D9035}" dt="2025-04-25T23:15:45.690" v="128" actId="2696"/>
-        <pc:sldMkLst>
-          <pc:docMk/>
-          <pc:sldMk cId="3526046064" sldId="309"/>
-        </pc:sldMkLst>
-      </pc:sldChg>
-      <pc:sldChg chg="add">
-        <pc:chgData name="Lines, Todd" userId="afaf7c3a-e8aa-4568-882a-02ad8f9e19b0" providerId="ADAL" clId="{12E905DC-A7E5-4A40-BD03-0BDCEA7D9035}" dt="2025-04-25T23:11:43.561" v="124"/>
-        <pc:sldMkLst>
-          <pc:docMk/>
-          <pc:sldMk cId="1184458295" sldId="310"/>
-        </pc:sldMkLst>
-      </pc:sldChg>
-      <pc:sldChg chg="del">
-        <pc:chgData name="Lines, Todd" userId="afaf7c3a-e8aa-4568-882a-02ad8f9e19b0" providerId="ADAL" clId="{12E905DC-A7E5-4A40-BD03-0BDCEA7D9035}" dt="2025-04-25T23:11:40.322" v="123" actId="2696"/>
-        <pc:sldMkLst>
-          <pc:docMk/>
-          <pc:sldMk cId="1389832616" sldId="310"/>
-        </pc:sldMkLst>
-      </pc:sldChg>
-      <pc:sldChg chg="add">
-        <pc:chgData name="Lines, Todd" userId="afaf7c3a-e8aa-4568-882a-02ad8f9e19b0" providerId="ADAL" clId="{12E905DC-A7E5-4A40-BD03-0BDCEA7D9035}" dt="2025-04-25T23:11:43.561" v="124"/>
-        <pc:sldMkLst>
-          <pc:docMk/>
-          <pc:sldMk cId="942273934" sldId="311"/>
-        </pc:sldMkLst>
-      </pc:sldChg>
-      <pc:sldChg chg="del">
-        <pc:chgData name="Lines, Todd" userId="afaf7c3a-e8aa-4568-882a-02ad8f9e19b0" providerId="ADAL" clId="{12E905DC-A7E5-4A40-BD03-0BDCEA7D9035}" dt="2025-04-25T23:11:40.322" v="123" actId="2696"/>
-        <pc:sldMkLst>
-          <pc:docMk/>
-          <pc:sldMk cId="1729789265" sldId="311"/>
-        </pc:sldMkLst>
-      </pc:sldChg>
-      <pc:sldChg chg="del">
-        <pc:chgData name="Lines, Todd" userId="afaf7c3a-e8aa-4568-882a-02ad8f9e19b0" providerId="ADAL" clId="{12E905DC-A7E5-4A40-BD03-0BDCEA7D9035}" dt="2025-04-25T23:11:40.322" v="123" actId="2696"/>
-        <pc:sldMkLst>
-          <pc:docMk/>
-          <pc:sldMk cId="1315044105" sldId="312"/>
-        </pc:sldMkLst>
-      </pc:sldChg>
-      <pc:sldChg chg="add">
-        <pc:chgData name="Lines, Todd" userId="afaf7c3a-e8aa-4568-882a-02ad8f9e19b0" providerId="ADAL" clId="{12E905DC-A7E5-4A40-BD03-0BDCEA7D9035}" dt="2025-04-25T23:11:43.561" v="124"/>
-        <pc:sldMkLst>
-          <pc:docMk/>
-          <pc:sldMk cId="3767951174" sldId="312"/>
-        </pc:sldMkLst>
-      </pc:sldChg>
-      <pc:sldChg chg="add">
-        <pc:chgData name="Lines, Todd" userId="afaf7c3a-e8aa-4568-882a-02ad8f9e19b0" providerId="ADAL" clId="{12E905DC-A7E5-4A40-BD03-0BDCEA7D9035}" dt="2025-04-25T23:13:36.232" v="125"/>
-        <pc:sldMkLst>
-          <pc:docMk/>
-          <pc:sldMk cId="1437189260" sldId="321"/>
-        </pc:sldMkLst>
-      </pc:sldChg>
-      <pc:sldChg chg="add">
-        <pc:chgData name="Lines, Todd" userId="afaf7c3a-e8aa-4568-882a-02ad8f9e19b0" providerId="ADAL" clId="{12E905DC-A7E5-4A40-BD03-0BDCEA7D9035}" dt="2025-04-25T23:13:36.232" v="125"/>
-        <pc:sldMkLst>
-          <pc:docMk/>
-          <pc:sldMk cId="1981161263" sldId="323"/>
-        </pc:sldMkLst>
-      </pc:sldChg>
-      <pc:sldChg chg="add">
-        <pc:chgData name="Lines, Todd" userId="afaf7c3a-e8aa-4568-882a-02ad8f9e19b0" providerId="ADAL" clId="{12E905DC-A7E5-4A40-BD03-0BDCEA7D9035}" dt="2025-04-25T23:13:36.232" v="125"/>
-        <pc:sldMkLst>
-          <pc:docMk/>
-          <pc:sldMk cId="2655280662" sldId="324"/>
-        </pc:sldMkLst>
-      </pc:sldChg>
-      <pc:sldChg chg="add">
-        <pc:chgData name="Lines, Todd" userId="afaf7c3a-e8aa-4568-882a-02ad8f9e19b0" providerId="ADAL" clId="{12E905DC-A7E5-4A40-BD03-0BDCEA7D9035}" dt="2025-04-25T23:13:36.232" v="125"/>
-        <pc:sldMkLst>
-          <pc:docMk/>
-          <pc:sldMk cId="1882836658" sldId="325"/>
-        </pc:sldMkLst>
-      </pc:sldChg>
-      <pc:sldChg chg="add">
-        <pc:chgData name="Lines, Todd" userId="afaf7c3a-e8aa-4568-882a-02ad8f9e19b0" providerId="ADAL" clId="{12E905DC-A7E5-4A40-BD03-0BDCEA7D9035}" dt="2025-04-25T23:13:36.232" v="125"/>
-        <pc:sldMkLst>
-          <pc:docMk/>
-          <pc:sldMk cId="2850701096" sldId="326"/>
-        </pc:sldMkLst>
-      </pc:sldChg>
-      <pc:sldChg chg="add">
-        <pc:chgData name="Lines, Todd" userId="afaf7c3a-e8aa-4568-882a-02ad8f9e19b0" providerId="ADAL" clId="{12E905DC-A7E5-4A40-BD03-0BDCEA7D9035}" dt="2025-04-25T23:15:51.977" v="129"/>
-        <pc:sldMkLst>
-          <pc:docMk/>
-          <pc:sldMk cId="1784920650" sldId="328"/>
-        </pc:sldMkLst>
-      </pc:sldChg>
-      <pc:sldChg chg="del">
-        <pc:chgData name="Lines, Todd" userId="afaf7c3a-e8aa-4568-882a-02ad8f9e19b0" providerId="ADAL" clId="{12E905DC-A7E5-4A40-BD03-0BDCEA7D9035}" dt="2025-04-25T23:15:45.690" v="128" actId="2696"/>
-        <pc:sldMkLst>
-          <pc:docMk/>
-          <pc:sldMk cId="3704158450" sldId="328"/>
-        </pc:sldMkLst>
-      </pc:sldChg>
-      <pc:sldChg chg="del">
-        <pc:chgData name="Lines, Todd" userId="afaf7c3a-e8aa-4568-882a-02ad8f9e19b0" providerId="ADAL" clId="{12E905DC-A7E5-4A40-BD03-0BDCEA7D9035}" dt="2025-04-25T23:15:45.690" v="128" actId="2696"/>
-        <pc:sldMkLst>
-          <pc:docMk/>
-          <pc:sldMk cId="2415290477" sldId="329"/>
-        </pc:sldMkLst>
-      </pc:sldChg>
-      <pc:sldChg chg="add">
-        <pc:chgData name="Lines, Todd" userId="afaf7c3a-e8aa-4568-882a-02ad8f9e19b0" providerId="ADAL" clId="{12E905DC-A7E5-4A40-BD03-0BDCEA7D9035}" dt="2025-04-25T23:15:51.977" v="129"/>
-        <pc:sldMkLst>
-          <pc:docMk/>
-          <pc:sldMk cId="2606323285" sldId="329"/>
-        </pc:sldMkLst>
-      </pc:sldChg>
-      <pc:sldChg chg="add">
-        <pc:chgData name="Lines, Todd" userId="afaf7c3a-e8aa-4568-882a-02ad8f9e19b0" providerId="ADAL" clId="{12E905DC-A7E5-4A40-BD03-0BDCEA7D9035}" dt="2025-04-25T23:15:51.977" v="129"/>
-        <pc:sldMkLst>
-          <pc:docMk/>
-          <pc:sldMk cId="1617204675" sldId="330"/>
-        </pc:sldMkLst>
-      </pc:sldChg>
-      <pc:sldChg chg="del">
-        <pc:chgData name="Lines, Todd" userId="afaf7c3a-e8aa-4568-882a-02ad8f9e19b0" providerId="ADAL" clId="{12E905DC-A7E5-4A40-BD03-0BDCEA7D9035}" dt="2025-04-25T23:15:45.690" v="128" actId="2696"/>
-        <pc:sldMkLst>
-          <pc:docMk/>
-          <pc:sldMk cId="1747958018" sldId="330"/>
-        </pc:sldMkLst>
-      </pc:sldChg>
-      <pc:sldChg chg="add">
-        <pc:chgData name="Lines, Todd" userId="afaf7c3a-e8aa-4568-882a-02ad8f9e19b0" providerId="ADAL" clId="{12E905DC-A7E5-4A40-BD03-0BDCEA7D9035}" dt="2025-04-25T23:15:51.977" v="129"/>
-        <pc:sldMkLst>
-          <pc:docMk/>
-          <pc:sldMk cId="624319628" sldId="331"/>
-        </pc:sldMkLst>
-      </pc:sldChg>
-      <pc:sldChg chg="del">
-        <pc:chgData name="Lines, Todd" userId="afaf7c3a-e8aa-4568-882a-02ad8f9e19b0" providerId="ADAL" clId="{12E905DC-A7E5-4A40-BD03-0BDCEA7D9035}" dt="2025-04-25T23:15:45.690" v="128" actId="2696"/>
-        <pc:sldMkLst>
-          <pc:docMk/>
-          <pc:sldMk cId="2789505276" sldId="331"/>
-        </pc:sldMkLst>
-      </pc:sldChg>
-      <pc:sldChg chg="del">
-        <pc:chgData name="Lines, Todd" userId="afaf7c3a-e8aa-4568-882a-02ad8f9e19b0" providerId="ADAL" clId="{12E905DC-A7E5-4A40-BD03-0BDCEA7D9035}" dt="2025-04-25T23:15:45.690" v="128" actId="2696"/>
-        <pc:sldMkLst>
-          <pc:docMk/>
-          <pc:sldMk cId="3254989223" sldId="332"/>
-        </pc:sldMkLst>
-      </pc:sldChg>
-      <pc:sldChg chg="add">
-        <pc:chgData name="Lines, Todd" userId="afaf7c3a-e8aa-4568-882a-02ad8f9e19b0" providerId="ADAL" clId="{12E905DC-A7E5-4A40-BD03-0BDCEA7D9035}" dt="2025-04-25T23:15:51.977" v="129"/>
-        <pc:sldMkLst>
-          <pc:docMk/>
-          <pc:sldMk cId="3809518030" sldId="332"/>
-        </pc:sldMkLst>
-      </pc:sldChg>
-      <pc:sldChg chg="del">
-        <pc:chgData name="Lines, Todd" userId="afaf7c3a-e8aa-4568-882a-02ad8f9e19b0" providerId="ADAL" clId="{12E905DC-A7E5-4A40-BD03-0BDCEA7D9035}" dt="2025-04-25T23:15:45.690" v="128" actId="2696"/>
-        <pc:sldMkLst>
-          <pc:docMk/>
-          <pc:sldMk cId="801647242" sldId="333"/>
-        </pc:sldMkLst>
-      </pc:sldChg>
-      <pc:sldChg chg="add">
-        <pc:chgData name="Lines, Todd" userId="afaf7c3a-e8aa-4568-882a-02ad8f9e19b0" providerId="ADAL" clId="{12E905DC-A7E5-4A40-BD03-0BDCEA7D9035}" dt="2025-04-25T23:15:51.977" v="129"/>
-        <pc:sldMkLst>
-          <pc:docMk/>
-          <pc:sldMk cId="3890802091" sldId="333"/>
-        </pc:sldMkLst>
-      </pc:sldChg>
-      <pc:sldChg chg="add">
-        <pc:chgData name="Lines, Todd" userId="afaf7c3a-e8aa-4568-882a-02ad8f9e19b0" providerId="ADAL" clId="{12E905DC-A7E5-4A40-BD03-0BDCEA7D9035}" dt="2025-04-25T23:15:51.977" v="129"/>
-        <pc:sldMkLst>
-          <pc:docMk/>
-          <pc:sldMk cId="592279121" sldId="334"/>
-        </pc:sldMkLst>
-      </pc:sldChg>
-      <pc:sldChg chg="del">
-        <pc:chgData name="Lines, Todd" userId="afaf7c3a-e8aa-4568-882a-02ad8f9e19b0" providerId="ADAL" clId="{12E905DC-A7E5-4A40-BD03-0BDCEA7D9035}" dt="2025-04-25T23:15:45.690" v="128" actId="2696"/>
-        <pc:sldMkLst>
-          <pc:docMk/>
-          <pc:sldMk cId="4038939515" sldId="334"/>
-        </pc:sldMkLst>
-      </pc:sldChg>
-      <pc:sldChg chg="add">
-        <pc:chgData name="Lines, Todd" userId="afaf7c3a-e8aa-4568-882a-02ad8f9e19b0" providerId="ADAL" clId="{12E905DC-A7E5-4A40-BD03-0BDCEA7D9035}" dt="2025-04-25T23:15:51.977" v="129"/>
-        <pc:sldMkLst>
-          <pc:docMk/>
-          <pc:sldMk cId="563619335" sldId="335"/>
-        </pc:sldMkLst>
-      </pc:sldChg>
-      <pc:sldChg chg="del">
-        <pc:chgData name="Lines, Todd" userId="afaf7c3a-e8aa-4568-882a-02ad8f9e19b0" providerId="ADAL" clId="{12E905DC-A7E5-4A40-BD03-0BDCEA7D9035}" dt="2025-04-25T23:15:45.690" v="128" actId="2696"/>
-        <pc:sldMkLst>
-          <pc:docMk/>
-          <pc:sldMk cId="4140843085" sldId="335"/>
-        </pc:sldMkLst>
-      </pc:sldChg>
-      <pc:sldChg chg="del">
-        <pc:chgData name="Lines, Todd" userId="afaf7c3a-e8aa-4568-882a-02ad8f9e19b0" providerId="ADAL" clId="{12E905DC-A7E5-4A40-BD03-0BDCEA7D9035}" dt="2025-04-25T23:11:40.322" v="123" actId="2696"/>
-        <pc:sldMkLst>
-          <pc:docMk/>
-          <pc:sldMk cId="3266778626" sldId="341"/>
-        </pc:sldMkLst>
-      </pc:sldChg>
-      <pc:sldChg chg="add">
-        <pc:chgData name="Lines, Todd" userId="afaf7c3a-e8aa-4568-882a-02ad8f9e19b0" providerId="ADAL" clId="{12E905DC-A7E5-4A40-BD03-0BDCEA7D9035}" dt="2025-04-25T23:11:43.561" v="124"/>
-        <pc:sldMkLst>
-          <pc:docMk/>
-          <pc:sldMk cId="3457296487" sldId="341"/>
-        </pc:sldMkLst>
-      </pc:sldChg>
-      <pc:sldChg chg="del">
-        <pc:chgData name="Lines, Todd" userId="afaf7c3a-e8aa-4568-882a-02ad8f9e19b0" providerId="ADAL" clId="{12E905DC-A7E5-4A40-BD03-0BDCEA7D9035}" dt="2025-04-25T23:11:40.322" v="123" actId="2696"/>
-        <pc:sldMkLst>
-          <pc:docMk/>
-          <pc:sldMk cId="103656388" sldId="344"/>
-        </pc:sldMkLst>
-      </pc:sldChg>
-      <pc:sldChg chg="add">
-        <pc:chgData name="Lines, Todd" userId="afaf7c3a-e8aa-4568-882a-02ad8f9e19b0" providerId="ADAL" clId="{12E905DC-A7E5-4A40-BD03-0BDCEA7D9035}" dt="2025-04-25T23:11:43.561" v="124"/>
-        <pc:sldMkLst>
-          <pc:docMk/>
-          <pc:sldMk cId="3276883631" sldId="344"/>
-        </pc:sldMkLst>
-      </pc:sldChg>
-      <pc:sldChg chg="modSp new mod">
-        <pc:chgData name="Lines, Todd" userId="afaf7c3a-e8aa-4568-882a-02ad8f9e19b0" providerId="ADAL" clId="{12E905DC-A7E5-4A40-BD03-0BDCEA7D9035}" dt="2025-04-22T20:51:26.915" v="9" actId="20577"/>
-        <pc:sldMkLst>
-          <pc:docMk/>
-          <pc:sldMk cId="3875607050" sldId="345"/>
+          <pc:sldMk cId="1203521046" sldId="348"/>
         </pc:sldMkLst>
         <pc:spChg chg="mod">
-          <ac:chgData name="Lines, Todd" userId="afaf7c3a-e8aa-4568-882a-02ad8f9e19b0" providerId="ADAL" clId="{12E905DC-A7E5-4A40-BD03-0BDCEA7D9035}" dt="2025-04-22T20:51:26.915" v="9" actId="20577"/>
+          <ac:chgData name="Lines, Todd" userId="afaf7c3a-e8aa-4568-882a-02ad8f9e19b0" providerId="ADAL" clId="{5FF5AC1B-ABA9-43D7-A1E3-2D92732CD6E2}" dt="2026-01-15T21:41:26.634" v="3" actId="11"/>
           <ac:spMkLst>
             <pc:docMk/>
-            <pc:sldMk cId="3875607050" sldId="345"/>
-            <ac:spMk id="2" creationId="{E1C3A048-6484-8EDE-428B-D7D2F7E8C037}"/>
-          </ac:spMkLst>
-        </pc:spChg>
-      </pc:sldChg>
-      <pc:sldChg chg="addSp delSp modSp new mod modClrScheme chgLayout">
-        <pc:chgData name="Lines, Todd" userId="afaf7c3a-e8aa-4568-882a-02ad8f9e19b0" providerId="ADAL" clId="{12E905DC-A7E5-4A40-BD03-0BDCEA7D9035}" dt="2025-04-22T20:51:34.209" v="14" actId="20577"/>
-        <pc:sldMkLst>
-          <pc:docMk/>
-          <pc:sldMk cId="1412958550" sldId="346"/>
-        </pc:sldMkLst>
-        <pc:spChg chg="add mod ord">
-          <ac:chgData name="Lines, Todd" userId="afaf7c3a-e8aa-4568-882a-02ad8f9e19b0" providerId="ADAL" clId="{12E905DC-A7E5-4A40-BD03-0BDCEA7D9035}" dt="2025-04-22T20:51:34.209" v="14" actId="20577"/>
-          <ac:spMkLst>
-            <pc:docMk/>
-            <pc:sldMk cId="1412958550" sldId="346"/>
-            <ac:spMk id="4" creationId="{1B0358E7-5ABA-69A2-E2B3-B3C44C1A0611}"/>
-          </ac:spMkLst>
-        </pc:spChg>
-        <pc:spChg chg="add mod ord">
-          <ac:chgData name="Lines, Todd" userId="afaf7c3a-e8aa-4568-882a-02ad8f9e19b0" providerId="ADAL" clId="{12E905DC-A7E5-4A40-BD03-0BDCEA7D9035}" dt="2025-04-22T20:51:32.232" v="11" actId="700"/>
-          <ac:spMkLst>
-            <pc:docMk/>
-            <pc:sldMk cId="1412958550" sldId="346"/>
-            <ac:spMk id="5" creationId="{20BA4F39-95C8-22FC-D198-3A41F6A5CD2F}"/>
-          </ac:spMkLst>
-        </pc:spChg>
-      </pc:sldChg>
-      <pc:sldChg chg="addSp delSp modSp new mod">
-        <pc:chgData name="Lines, Todd" userId="afaf7c3a-e8aa-4568-882a-02ad8f9e19b0" providerId="ADAL" clId="{12E905DC-A7E5-4A40-BD03-0BDCEA7D9035}" dt="2025-04-22T21:02:40.986" v="122" actId="21"/>
-        <pc:sldMkLst>
-          <pc:docMk/>
-          <pc:sldMk cId="1643441071" sldId="347"/>
-        </pc:sldMkLst>
-        <pc:spChg chg="add mod">
-          <ac:chgData name="Lines, Todd" userId="afaf7c3a-e8aa-4568-882a-02ad8f9e19b0" providerId="ADAL" clId="{12E905DC-A7E5-4A40-BD03-0BDCEA7D9035}" dt="2025-04-22T20:53:09.399" v="19" actId="2085"/>
-          <ac:spMkLst>
-            <pc:docMk/>
-            <pc:sldMk cId="1643441071" sldId="347"/>
-            <ac:spMk id="4" creationId="{613C0366-ADBD-5FA5-A76A-CC6520D623DA}"/>
-          </ac:spMkLst>
-        </pc:spChg>
-        <pc:spChg chg="add mod">
-          <ac:chgData name="Lines, Todd" userId="afaf7c3a-e8aa-4568-882a-02ad8f9e19b0" providerId="ADAL" clId="{12E905DC-A7E5-4A40-BD03-0BDCEA7D9035}" dt="2025-04-22T20:53:44.218" v="24" actId="207"/>
-          <ac:spMkLst>
-            <pc:docMk/>
-            <pc:sldMk cId="1643441071" sldId="347"/>
-            <ac:spMk id="5" creationId="{8DEE0855-A788-A402-48A5-46F63F828A3E}"/>
-          </ac:spMkLst>
-        </pc:spChg>
-        <pc:spChg chg="add mod">
-          <ac:chgData name="Lines, Todd" userId="afaf7c3a-e8aa-4568-882a-02ad8f9e19b0" providerId="ADAL" clId="{12E905DC-A7E5-4A40-BD03-0BDCEA7D9035}" dt="2025-04-22T20:54:01.816" v="28" actId="207"/>
-          <ac:spMkLst>
-            <pc:docMk/>
-            <pc:sldMk cId="1643441071" sldId="347"/>
-            <ac:spMk id="6" creationId="{70FE5A38-89EB-A82A-AB61-B6D8415A3953}"/>
-          </ac:spMkLst>
-        </pc:spChg>
-        <pc:spChg chg="add mod ord">
-          <ac:chgData name="Lines, Todd" userId="afaf7c3a-e8aa-4568-882a-02ad8f9e19b0" providerId="ADAL" clId="{12E905DC-A7E5-4A40-BD03-0BDCEA7D9035}" dt="2025-04-22T20:54:34.554" v="36" actId="14100"/>
-          <ac:spMkLst>
-            <pc:docMk/>
-            <pc:sldMk cId="1643441071" sldId="347"/>
-            <ac:spMk id="7" creationId="{D8FD1B72-CCBE-CE40-E955-1FAE8C362531}"/>
-          </ac:spMkLst>
-        </pc:spChg>
-        <pc:spChg chg="add mod">
-          <ac:chgData name="Lines, Todd" userId="afaf7c3a-e8aa-4568-882a-02ad8f9e19b0" providerId="ADAL" clId="{12E905DC-A7E5-4A40-BD03-0BDCEA7D9035}" dt="2025-04-22T21:00:33.404" v="107" actId="208"/>
-          <ac:spMkLst>
-            <pc:docMk/>
-            <pc:sldMk cId="1643441071" sldId="347"/>
-            <ac:spMk id="9" creationId="{97BAF4FB-DA6A-6AD6-F1CC-6144FB3A9559}"/>
-          </ac:spMkLst>
-        </pc:spChg>
-        <pc:spChg chg="add mod">
-          <ac:chgData name="Lines, Todd" userId="afaf7c3a-e8aa-4568-882a-02ad8f9e19b0" providerId="ADAL" clId="{12E905DC-A7E5-4A40-BD03-0BDCEA7D9035}" dt="2025-04-22T21:01:32.822" v="117" actId="1076"/>
-          <ac:spMkLst>
-            <pc:docMk/>
-            <pc:sldMk cId="1643441071" sldId="347"/>
-            <ac:spMk id="10" creationId="{72AF48F9-FB2B-4063-8E03-104E1C15DF2D}"/>
-          </ac:spMkLst>
-        </pc:spChg>
-        <pc:spChg chg="add mod">
-          <ac:chgData name="Lines, Todd" userId="afaf7c3a-e8aa-4568-882a-02ad8f9e19b0" providerId="ADAL" clId="{12E905DC-A7E5-4A40-BD03-0BDCEA7D9035}" dt="2025-04-22T21:02:13.592" v="120" actId="1076"/>
-          <ac:spMkLst>
-            <pc:docMk/>
-            <pc:sldMk cId="1643441071" sldId="347"/>
-            <ac:spMk id="11" creationId="{E7585B40-CC23-8828-633D-7F296358D19A}"/>
+            <pc:sldMk cId="1203521046" sldId="348"/>
+            <ac:spMk id="115716" creationId="{00000000-0000-0000-0000-000000000000}"/>
           </ac:spMkLst>
         </pc:spChg>
       </pc:sldChg>
       <pc:sldChg chg="add">
-        <pc:chgData name="Lines, Todd" userId="afaf7c3a-e8aa-4568-882a-02ad8f9e19b0" providerId="ADAL" clId="{12E905DC-A7E5-4A40-BD03-0BDCEA7D9035}" dt="2025-04-25T23:13:36.232" v="125"/>
+        <pc:chgData name="Lines, Todd" userId="afaf7c3a-e8aa-4568-882a-02ad8f9e19b0" providerId="ADAL" clId="{5FF5AC1B-ABA9-43D7-A1E3-2D92732CD6E2}" dt="2026-01-15T21:43:51.892" v="6"/>
         <pc:sldMkLst>
           <pc:docMk/>
-          <pc:sldMk cId="1203521046" sldId="348"/>
+          <pc:sldMk cId="3748942484" sldId="348"/>
         </pc:sldMkLst>
       </pc:sldChg>
-      <pc:sldChg chg="add">
-        <pc:chgData name="Lines, Todd" userId="afaf7c3a-e8aa-4568-882a-02ad8f9e19b0" providerId="ADAL" clId="{12E905DC-A7E5-4A40-BD03-0BDCEA7D9035}" dt="2025-04-25T23:13:36.232" v="125"/>
+      <pc:sldChg chg="modSp del mod">
+        <pc:chgData name="Lines, Todd" userId="afaf7c3a-e8aa-4568-882a-02ad8f9e19b0" providerId="ADAL" clId="{5FF5AC1B-ABA9-43D7-A1E3-2D92732CD6E2}" dt="2026-01-15T21:43:31.987" v="5" actId="2696"/>
         <pc:sldMkLst>
           <pc:docMk/>
           <pc:sldMk cId="3434781075" sldId="349"/>
         </pc:sldMkLst>
+        <pc:spChg chg="mod">
+          <ac:chgData name="Lines, Todd" userId="afaf7c3a-e8aa-4568-882a-02ad8f9e19b0" providerId="ADAL" clId="{5FF5AC1B-ABA9-43D7-A1E3-2D92732CD6E2}" dt="2026-01-15T21:41:40.178" v="4" actId="11"/>
+          <ac:spMkLst>
+            <pc:docMk/>
+            <pc:sldMk cId="3434781075" sldId="349"/>
+            <ac:spMk id="116740" creationId="{00000000-0000-0000-0000-000000000000}"/>
+          </ac:spMkLst>
+        </pc:spChg>
       </pc:sldChg>
       <pc:sldChg chg="add">
-        <pc:chgData name="Lines, Todd" userId="afaf7c3a-e8aa-4568-882a-02ad8f9e19b0" providerId="ADAL" clId="{12E905DC-A7E5-4A40-BD03-0BDCEA7D9035}" dt="2025-04-25T23:13:36.232" v="125"/>
+        <pc:chgData name="Lines, Todd" userId="afaf7c3a-e8aa-4568-882a-02ad8f9e19b0" providerId="ADAL" clId="{5FF5AC1B-ABA9-43D7-A1E3-2D92732CD6E2}" dt="2026-01-15T21:43:51.892" v="6"/>
+        <pc:sldMkLst>
+          <pc:docMk/>
+          <pc:sldMk cId="3521782403" sldId="349"/>
+        </pc:sldMkLst>
+      </pc:sldChg>
+      <pc:sldChg chg="del">
+        <pc:chgData name="Lines, Todd" userId="afaf7c3a-e8aa-4568-882a-02ad8f9e19b0" providerId="ADAL" clId="{5FF5AC1B-ABA9-43D7-A1E3-2D92732CD6E2}" dt="2026-01-15T21:43:31.987" v="5" actId="2696"/>
         <pc:sldMkLst>
           <pc:docMk/>
           <pc:sldMk cId="345946206" sldId="350"/>
         </pc:sldMkLst>
       </pc:sldChg>
       <pc:sldChg chg="add">
-        <pc:chgData name="Lines, Todd" userId="afaf7c3a-e8aa-4568-882a-02ad8f9e19b0" providerId="ADAL" clId="{12E905DC-A7E5-4A40-BD03-0BDCEA7D9035}" dt="2025-04-25T23:13:36.232" v="125"/>
+        <pc:chgData name="Lines, Todd" userId="afaf7c3a-e8aa-4568-882a-02ad8f9e19b0" providerId="ADAL" clId="{5FF5AC1B-ABA9-43D7-A1E3-2D92732CD6E2}" dt="2026-01-15T21:43:51.892" v="6"/>
+        <pc:sldMkLst>
+          <pc:docMk/>
+          <pc:sldMk cId="1339363551" sldId="350"/>
+        </pc:sldMkLst>
+      </pc:sldChg>
+      <pc:sldChg chg="del">
+        <pc:chgData name="Lines, Todd" userId="afaf7c3a-e8aa-4568-882a-02ad8f9e19b0" providerId="ADAL" clId="{5FF5AC1B-ABA9-43D7-A1E3-2D92732CD6E2}" dt="2026-01-15T21:43:31.987" v="5" actId="2696"/>
         <pc:sldMkLst>
           <pc:docMk/>
           <pc:sldMk cId="548597081" sldId="351"/>
         </pc:sldMkLst>
       </pc:sldChg>
       <pc:sldChg chg="add">
-        <pc:chgData name="Lines, Todd" userId="afaf7c3a-e8aa-4568-882a-02ad8f9e19b0" providerId="ADAL" clId="{12E905DC-A7E5-4A40-BD03-0BDCEA7D9035}" dt="2025-04-25T23:13:36.232" v="125"/>
+        <pc:chgData name="Lines, Todd" userId="afaf7c3a-e8aa-4568-882a-02ad8f9e19b0" providerId="ADAL" clId="{5FF5AC1B-ABA9-43D7-A1E3-2D92732CD6E2}" dt="2026-01-15T21:43:51.892" v="6"/>
+        <pc:sldMkLst>
+          <pc:docMk/>
+          <pc:sldMk cId="1349580765" sldId="351"/>
+        </pc:sldMkLst>
+      </pc:sldChg>
+      <pc:sldChg chg="del">
+        <pc:chgData name="Lines, Todd" userId="afaf7c3a-e8aa-4568-882a-02ad8f9e19b0" providerId="ADAL" clId="{5FF5AC1B-ABA9-43D7-A1E3-2D92732CD6E2}" dt="2026-01-15T21:43:31.987" v="5" actId="2696"/>
         <pc:sldMkLst>
           <pc:docMk/>
           <pc:sldMk cId="344528421" sldId="352"/>
         </pc:sldMkLst>
       </pc:sldChg>
       <pc:sldChg chg="add">
-        <pc:chgData name="Lines, Todd" userId="afaf7c3a-e8aa-4568-882a-02ad8f9e19b0" providerId="ADAL" clId="{12E905DC-A7E5-4A40-BD03-0BDCEA7D9035}" dt="2025-04-25T23:13:36.232" v="125"/>
+        <pc:chgData name="Lines, Todd" userId="afaf7c3a-e8aa-4568-882a-02ad8f9e19b0" providerId="ADAL" clId="{5FF5AC1B-ABA9-43D7-A1E3-2D92732CD6E2}" dt="2026-01-15T21:43:51.892" v="6"/>
+        <pc:sldMkLst>
+          <pc:docMk/>
+          <pc:sldMk cId="4006116839" sldId="352"/>
+        </pc:sldMkLst>
+      </pc:sldChg>
+      <pc:sldChg chg="del">
+        <pc:chgData name="Lines, Todd" userId="afaf7c3a-e8aa-4568-882a-02ad8f9e19b0" providerId="ADAL" clId="{5FF5AC1B-ABA9-43D7-A1E3-2D92732CD6E2}" dt="2026-01-15T21:43:31.987" v="5" actId="2696"/>
         <pc:sldMkLst>
           <pc:docMk/>
           <pc:sldMk cId="577912915" sldId="353"/>
         </pc:sldMkLst>
       </pc:sldChg>
       <pc:sldChg chg="add">
-        <pc:chgData name="Lines, Todd" userId="afaf7c3a-e8aa-4568-882a-02ad8f9e19b0" providerId="ADAL" clId="{12E905DC-A7E5-4A40-BD03-0BDCEA7D9035}" dt="2025-04-25T23:13:36.232" v="125"/>
+        <pc:chgData name="Lines, Todd" userId="afaf7c3a-e8aa-4568-882a-02ad8f9e19b0" providerId="ADAL" clId="{5FF5AC1B-ABA9-43D7-A1E3-2D92732CD6E2}" dt="2026-01-15T21:43:51.892" v="6"/>
         <pc:sldMkLst>
           <pc:docMk/>
-          <pc:sldMk cId="668168550" sldId="354"/>
+          <pc:sldMk cId="1637345474" sldId="353"/>
         </pc:sldMkLst>
-      </pc:sldChg>
-      <pc:sldChg chg="add">
-        <pc:chgData name="Lines, Todd" userId="afaf7c3a-e8aa-4568-882a-02ad8f9e19b0" providerId="ADAL" clId="{12E905DC-A7E5-4A40-BD03-0BDCEA7D9035}" dt="2025-04-25T23:13:36.232" v="125"/>
-        <pc:sldMkLst>
-          <pc:docMk/>
-          <pc:sldMk cId="196268225" sldId="355"/>
-        </pc:sldMkLst>
-      </pc:sldChg>
-      <pc:sldChg chg="add">
-        <pc:chgData name="Lines, Todd" userId="afaf7c3a-e8aa-4568-882a-02ad8f9e19b0" providerId="ADAL" clId="{12E905DC-A7E5-4A40-BD03-0BDCEA7D9035}" dt="2025-04-25T23:13:36.232" v="125"/>
-        <pc:sldMkLst>
-          <pc:docMk/>
-          <pc:sldMk cId="3436447161" sldId="356"/>
-        </pc:sldMkLst>
-      </pc:sldChg>
-      <pc:sldChg chg="add">
-        <pc:chgData name="Lines, Todd" userId="afaf7c3a-e8aa-4568-882a-02ad8f9e19b0" providerId="ADAL" clId="{12E905DC-A7E5-4A40-BD03-0BDCEA7D9035}" dt="2025-04-25T23:13:36.232" v="125"/>
-        <pc:sldMkLst>
-          <pc:docMk/>
-          <pc:sldMk cId="1982790131" sldId="357"/>
-        </pc:sldMkLst>
-      </pc:sldChg>
-      <pc:sldChg chg="add">
-        <pc:chgData name="Lines, Todd" userId="afaf7c3a-e8aa-4568-882a-02ad8f9e19b0" providerId="ADAL" clId="{12E905DC-A7E5-4A40-BD03-0BDCEA7D9035}" dt="2025-04-25T23:13:36.232" v="125"/>
-        <pc:sldMkLst>
-          <pc:docMk/>
-          <pc:sldMk cId="619843192" sldId="358"/>
-        </pc:sldMkLst>
-      </pc:sldChg>
-      <pc:sldChg chg="add">
-        <pc:chgData name="Lines, Todd" userId="afaf7c3a-e8aa-4568-882a-02ad8f9e19b0" providerId="ADAL" clId="{12E905DC-A7E5-4A40-BD03-0BDCEA7D9035}" dt="2025-04-25T23:13:36.232" v="125"/>
-        <pc:sldMkLst>
-          <pc:docMk/>
-          <pc:sldMk cId="73473782" sldId="359"/>
-        </pc:sldMkLst>
-      </pc:sldChg>
-      <pc:sldChg chg="add">
-        <pc:chgData name="Lines, Todd" userId="afaf7c3a-e8aa-4568-882a-02ad8f9e19b0" providerId="ADAL" clId="{12E905DC-A7E5-4A40-BD03-0BDCEA7D9035}" dt="2025-04-25T23:13:36.232" v="125"/>
-        <pc:sldMkLst>
-          <pc:docMk/>
-          <pc:sldMk cId="4189658811" sldId="360"/>
-        </pc:sldMkLst>
-      </pc:sldChg>
-      <pc:sldChg chg="add">
-        <pc:chgData name="Lines, Todd" userId="afaf7c3a-e8aa-4568-882a-02ad8f9e19b0" providerId="ADAL" clId="{12E905DC-A7E5-4A40-BD03-0BDCEA7D9035}" dt="2025-04-25T23:13:36.232" v="125"/>
-        <pc:sldMkLst>
-          <pc:docMk/>
-          <pc:sldMk cId="1477081214" sldId="361"/>
-        </pc:sldMkLst>
-      </pc:sldChg>
-      <pc:sldChg chg="add ord">
-        <pc:chgData name="Lines, Todd" userId="afaf7c3a-e8aa-4568-882a-02ad8f9e19b0" providerId="ADAL" clId="{12E905DC-A7E5-4A40-BD03-0BDCEA7D9035}" dt="2025-04-25T23:13:49.588" v="127"/>
-        <pc:sldMkLst>
-          <pc:docMk/>
-          <pc:sldMk cId="0" sldId="362"/>
-        </pc:sldMkLst>
-      </pc:sldChg>
-      <pc:sldChg chg="add">
-        <pc:chgData name="Lines, Todd" userId="afaf7c3a-e8aa-4568-882a-02ad8f9e19b0" providerId="ADAL" clId="{12E905DC-A7E5-4A40-BD03-0BDCEA7D9035}" dt="2025-04-25T23:21:06.407" v="130"/>
-        <pc:sldMkLst>
-          <pc:docMk/>
-          <pc:sldMk cId="0" sldId="363"/>
-        </pc:sldMkLst>
-      </pc:sldChg>
-      <pc:sldChg chg="add">
-        <pc:chgData name="Lines, Todd" userId="afaf7c3a-e8aa-4568-882a-02ad8f9e19b0" providerId="ADAL" clId="{12E905DC-A7E5-4A40-BD03-0BDCEA7D9035}" dt="2025-04-25T23:21:06.407" v="130"/>
-        <pc:sldMkLst>
-          <pc:docMk/>
-          <pc:sldMk cId="0" sldId="364"/>
-        </pc:sldMkLst>
-      </pc:sldChg>
-      <pc:sldChg chg="add">
-        <pc:chgData name="Lines, Todd" userId="afaf7c3a-e8aa-4568-882a-02ad8f9e19b0" providerId="ADAL" clId="{12E905DC-A7E5-4A40-BD03-0BDCEA7D9035}" dt="2025-04-25T23:21:06.407" v="130"/>
-        <pc:sldMkLst>
-          <pc:docMk/>
-          <pc:sldMk cId="342519277" sldId="365"/>
-        </pc:sldMkLst>
-      </pc:sldChg>
-      <pc:sldChg chg="add">
-        <pc:chgData name="Lines, Todd" userId="afaf7c3a-e8aa-4568-882a-02ad8f9e19b0" providerId="ADAL" clId="{12E905DC-A7E5-4A40-BD03-0BDCEA7D9035}" dt="2025-04-25T23:21:06.407" v="130"/>
-        <pc:sldMkLst>
-          <pc:docMk/>
-          <pc:sldMk cId="1990105726" sldId="366"/>
-        </pc:sldMkLst>
-      </pc:sldChg>
-      <pc:sldChg chg="modSp new mod">
-        <pc:chgData name="Lines, Todd" userId="afaf7c3a-e8aa-4568-882a-02ad8f9e19b0" providerId="ADAL" clId="{12E905DC-A7E5-4A40-BD03-0BDCEA7D9035}" dt="2025-04-28T15:55:26.474" v="330" actId="20577"/>
-        <pc:sldMkLst>
-          <pc:docMk/>
-          <pc:sldMk cId="3367812321" sldId="367"/>
-        </pc:sldMkLst>
-        <pc:spChg chg="mod">
-          <ac:chgData name="Lines, Todd" userId="afaf7c3a-e8aa-4568-882a-02ad8f9e19b0" providerId="ADAL" clId="{12E905DC-A7E5-4A40-BD03-0BDCEA7D9035}" dt="2025-04-28T15:53:22.816" v="139" actId="20577"/>
-          <ac:spMkLst>
-            <pc:docMk/>
-            <pc:sldMk cId="3367812321" sldId="367"/>
-            <ac:spMk id="2" creationId="{F7747494-7078-AAFC-9338-9250A519BA53}"/>
-          </ac:spMkLst>
-        </pc:spChg>
-        <pc:spChg chg="mod">
-          <ac:chgData name="Lines, Todd" userId="afaf7c3a-e8aa-4568-882a-02ad8f9e19b0" providerId="ADAL" clId="{12E905DC-A7E5-4A40-BD03-0BDCEA7D9035}" dt="2025-04-28T15:55:26.474" v="330" actId="20577"/>
-          <ac:spMkLst>
-            <pc:docMk/>
-            <pc:sldMk cId="3367812321" sldId="367"/>
-            <ac:spMk id="3" creationId="{68BAD010-38A8-C441-2B4B-5EEF4EC2FC37}"/>
-          </ac:spMkLst>
-        </pc:spChg>
-      </pc:sldChg>
-      <pc:sldChg chg="addSp delSp modSp new mod">
-        <pc:chgData name="Lines, Todd" userId="afaf7c3a-e8aa-4568-882a-02ad8f9e19b0" providerId="ADAL" clId="{12E905DC-A7E5-4A40-BD03-0BDCEA7D9035}" dt="2025-04-28T23:00:08.353" v="365" actId="1076"/>
-        <pc:sldMkLst>
-          <pc:docMk/>
-          <pc:sldMk cId="1724684947" sldId="368"/>
-        </pc:sldMkLst>
-        <pc:spChg chg="del">
-          <ac:chgData name="Lines, Todd" userId="afaf7c3a-e8aa-4568-882a-02ad8f9e19b0" providerId="ADAL" clId="{12E905DC-A7E5-4A40-BD03-0BDCEA7D9035}" dt="2025-04-28T22:58:38.981" v="332" actId="478"/>
-          <ac:spMkLst>
-            <pc:docMk/>
-            <pc:sldMk cId="1724684947" sldId="368"/>
-            <ac:spMk id="2" creationId="{EEFCBA02-237C-3D60-A678-DD82302D8502}"/>
-          </ac:spMkLst>
-        </pc:spChg>
-        <pc:spChg chg="del">
-          <ac:chgData name="Lines, Todd" userId="afaf7c3a-e8aa-4568-882a-02ad8f9e19b0" providerId="ADAL" clId="{12E905DC-A7E5-4A40-BD03-0BDCEA7D9035}" dt="2025-04-28T22:58:38.981" v="332" actId="478"/>
-          <ac:spMkLst>
-            <pc:docMk/>
-            <pc:sldMk cId="1724684947" sldId="368"/>
-            <ac:spMk id="3" creationId="{A02851AA-BCC1-267F-666D-20DC374855AA}"/>
-          </ac:spMkLst>
-        </pc:spChg>
-        <pc:spChg chg="add del">
-          <ac:chgData name="Lines, Todd" userId="afaf7c3a-e8aa-4568-882a-02ad8f9e19b0" providerId="ADAL" clId="{12E905DC-A7E5-4A40-BD03-0BDCEA7D9035}" dt="2025-04-28T22:58:41.015" v="334" actId="22"/>
-          <ac:spMkLst>
-            <pc:docMk/>
-            <pc:sldMk cId="1724684947" sldId="368"/>
-            <ac:spMk id="5" creationId="{53232FD2-4C3C-390E-FFBB-D5118609C3F3}"/>
-          </ac:spMkLst>
-        </pc:spChg>
-        <pc:spChg chg="add del">
-          <ac:chgData name="Lines, Todd" userId="afaf7c3a-e8aa-4568-882a-02ad8f9e19b0" providerId="ADAL" clId="{12E905DC-A7E5-4A40-BD03-0BDCEA7D9035}" dt="2025-04-28T22:58:53.862" v="339" actId="22"/>
-          <ac:spMkLst>
-            <pc:docMk/>
-            <pc:sldMk cId="1724684947" sldId="368"/>
-            <ac:spMk id="9" creationId="{CC6642C1-4760-B2E6-E2FA-BA1AA48443EE}"/>
-          </ac:spMkLst>
-        </pc:spChg>
-        <pc:spChg chg="add mod">
-          <ac:chgData name="Lines, Todd" userId="afaf7c3a-e8aa-4568-882a-02ad8f9e19b0" providerId="ADAL" clId="{12E905DC-A7E5-4A40-BD03-0BDCEA7D9035}" dt="2025-04-28T22:59:51.974" v="356"/>
-          <ac:spMkLst>
-            <pc:docMk/>
-            <pc:sldMk cId="1724684947" sldId="368"/>
-            <ac:spMk id="13" creationId="{994D4C04-DFB7-07C9-41F5-EF5B7B27FA7D}"/>
-          </ac:spMkLst>
-        </pc:spChg>
-        <pc:spChg chg="add mod">
-          <ac:chgData name="Lines, Todd" userId="afaf7c3a-e8aa-4568-882a-02ad8f9e19b0" providerId="ADAL" clId="{12E905DC-A7E5-4A40-BD03-0BDCEA7D9035}" dt="2025-04-28T23:00:08.353" v="365" actId="1076"/>
-          <ac:spMkLst>
-            <pc:docMk/>
-            <pc:sldMk cId="1724684947" sldId="368"/>
-            <ac:spMk id="15" creationId="{60282A0F-BDA5-59B5-B104-AAEECDD47CB5}"/>
-          </ac:spMkLst>
-        </pc:spChg>
-        <pc:picChg chg="add mod">
-          <ac:chgData name="Lines, Todd" userId="afaf7c3a-e8aa-4568-882a-02ad8f9e19b0" providerId="ADAL" clId="{12E905DC-A7E5-4A40-BD03-0BDCEA7D9035}" dt="2025-04-28T22:58:48.067" v="337" actId="14100"/>
-          <ac:picMkLst>
-            <pc:docMk/>
-            <pc:sldMk cId="1724684947" sldId="368"/>
-            <ac:picMk id="7" creationId="{905CFB2C-8482-45E7-1C60-1EC4FF38727A}"/>
-          </ac:picMkLst>
-        </pc:picChg>
-        <pc:picChg chg="add mod">
-          <ac:chgData name="Lines, Todd" userId="afaf7c3a-e8aa-4568-882a-02ad8f9e19b0" providerId="ADAL" clId="{12E905DC-A7E5-4A40-BD03-0BDCEA7D9035}" dt="2025-04-28T22:59:11.355" v="347" actId="14100"/>
-          <ac:picMkLst>
-            <pc:docMk/>
-            <pc:sldMk cId="1724684947" sldId="368"/>
-            <ac:picMk id="11" creationId="{7E74B5DD-1502-7F70-F943-FA98E0CB0879}"/>
-          </ac:picMkLst>
-        </pc:picChg>
       </pc:sldChg>
     </pc:docChg>
   </pc:docChgLst>
@@ -1170,7 +478,7 @@
           <a:p>
             <a:fld id="{DA081139-F0BA-49F9-93A6-6F626C1CF540}" type="datetimeFigureOut">
               <a:rPr lang="en-US" smtClean="0"/>
-              <a:t>4/28/2025</a:t>
+              <a:t>1/15/2026</a:t>
             </a:fld>
             <a:endParaRPr lang="en-US"/>
           </a:p>
@@ -1547,7 +855,7 @@
                   <a:spcPct val="0"/>
                 </a:spcAft>
               </a:pPr>
-              <a:t>45</a:t>
+              <a:t>42</a:t>
             </a:fld>
             <a:endParaRPr lang="en-US"/>
           </a:p>
@@ -1745,7 +1053,7 @@
           <a:p>
             <a:fld id="{EDF140B7-8B0E-44A6-9E20-D5135BF064F6}" type="datetimeFigureOut">
               <a:rPr lang="en-US" smtClean="0"/>
-              <a:t>4/28/2025</a:t>
+              <a:t>1/15/2026</a:t>
             </a:fld>
             <a:endParaRPr lang="en-US"/>
           </a:p>
@@ -1908,7 +1216,7 @@
           <a:p>
             <a:fld id="{EDF140B7-8B0E-44A6-9E20-D5135BF064F6}" type="datetimeFigureOut">
               <a:rPr lang="en-US" smtClean="0"/>
-              <a:t>4/28/2025</a:t>
+              <a:t>1/15/2026</a:t>
             </a:fld>
             <a:endParaRPr lang="en-US"/>
           </a:p>
@@ -2081,7 +1389,7 @@
           <a:p>
             <a:fld id="{EDF140B7-8B0E-44A6-9E20-D5135BF064F6}" type="datetimeFigureOut">
               <a:rPr lang="en-US" smtClean="0"/>
-              <a:t>4/28/2025</a:t>
+              <a:t>1/15/2026</a:t>
             </a:fld>
             <a:endParaRPr lang="en-US"/>
           </a:p>
@@ -2244,7 +1552,7 @@
           <a:p>
             <a:fld id="{EDF140B7-8B0E-44A6-9E20-D5135BF064F6}" type="datetimeFigureOut">
               <a:rPr lang="en-US" smtClean="0"/>
-              <a:t>4/28/2025</a:t>
+              <a:t>1/15/2026</a:t>
             </a:fld>
             <a:endParaRPr lang="en-US"/>
           </a:p>
@@ -2484,7 +1792,7 @@
           <a:p>
             <a:fld id="{EDF140B7-8B0E-44A6-9E20-D5135BF064F6}" type="datetimeFigureOut">
               <a:rPr lang="en-US" smtClean="0"/>
-              <a:t>4/28/2025</a:t>
+              <a:t>1/15/2026</a:t>
             </a:fld>
             <a:endParaRPr lang="en-US"/>
           </a:p>
@@ -2764,7 +2072,7 @@
           <a:p>
             <a:fld id="{EDF140B7-8B0E-44A6-9E20-D5135BF064F6}" type="datetimeFigureOut">
               <a:rPr lang="en-US" smtClean="0"/>
-              <a:t>4/28/2025</a:t>
+              <a:t>1/15/2026</a:t>
             </a:fld>
             <a:endParaRPr lang="en-US"/>
           </a:p>
@@ -3178,7 +2486,7 @@
           <a:p>
             <a:fld id="{EDF140B7-8B0E-44A6-9E20-D5135BF064F6}" type="datetimeFigureOut">
               <a:rPr lang="en-US" smtClean="0"/>
-              <a:t>4/28/2025</a:t>
+              <a:t>1/15/2026</a:t>
             </a:fld>
             <a:endParaRPr lang="en-US"/>
           </a:p>
@@ -3290,7 +2598,7 @@
           <a:p>
             <a:fld id="{EDF140B7-8B0E-44A6-9E20-D5135BF064F6}" type="datetimeFigureOut">
               <a:rPr lang="en-US" smtClean="0"/>
-              <a:t>4/28/2025</a:t>
+              <a:t>1/15/2026</a:t>
             </a:fld>
             <a:endParaRPr lang="en-US"/>
           </a:p>
@@ -3380,7 +2688,7 @@
           <a:p>
             <a:fld id="{EDF140B7-8B0E-44A6-9E20-D5135BF064F6}" type="datetimeFigureOut">
               <a:rPr lang="en-US" smtClean="0"/>
-              <a:t>4/28/2025</a:t>
+              <a:t>1/15/2026</a:t>
             </a:fld>
             <a:endParaRPr lang="en-US"/>
           </a:p>
@@ -3650,7 +2958,7 @@
           <a:p>
             <a:fld id="{EDF140B7-8B0E-44A6-9E20-D5135BF064F6}" type="datetimeFigureOut">
               <a:rPr lang="en-US" smtClean="0"/>
-              <a:t>4/28/2025</a:t>
+              <a:t>1/15/2026</a:t>
             </a:fld>
             <a:endParaRPr lang="en-US"/>
           </a:p>
@@ -3897,7 +3205,7 @@
           <a:p>
             <a:fld id="{EDF140B7-8B0E-44A6-9E20-D5135BF064F6}" type="datetimeFigureOut">
               <a:rPr lang="en-US" smtClean="0"/>
-              <a:t>4/28/2025</a:t>
+              <a:t>1/15/2026</a:t>
             </a:fld>
             <a:endParaRPr lang="en-US"/>
           </a:p>
@@ -4103,7 +3411,7 @@
           <a:p>
             <a:fld id="{EDF140B7-8B0E-44A6-9E20-D5135BF064F6}" type="datetimeFigureOut">
               <a:rPr lang="en-US" smtClean="0"/>
-              <a:t>4/28/2025</a:t>
+              <a:t>1/15/2026</a:t>
             </a:fld>
             <a:endParaRPr lang="en-US"/>
           </a:p>
@@ -7160,2017 +6468,6 @@
       </p:grpSpPr>
       <p:sp>
         <p:nvSpPr>
-          <p:cNvPr id="115714" name="Slide Number Placeholder 5"/>
-          <p:cNvSpPr>
-            <a:spLocks noGrp="1"/>
-          </p:cNvSpPr>
-          <p:nvPr>
-            <p:ph type="sldNum" sz="quarter" idx="12"/>
-          </p:nvPr>
-        </p:nvSpPr>
-        <p:spPr>
-          <a:noFill/>
-        </p:spPr>
-        <p:txBody>
-          <a:bodyPr/>
-          <a:lstStyle/>
-          <a:p>
-            <a:fld id="{E2DA8EDD-E190-4DCB-BB40-24D9141A10B8}" type="slidenum">
-              <a:rPr lang="en-US" smtClean="0"/>
-              <a:pPr/>
-              <a:t>15</a:t>
-            </a:fld>
-            <a:endParaRPr lang="en-US"/>
-          </a:p>
-        </p:txBody>
-      </p:sp>
-      <p:sp>
-        <p:nvSpPr>
-          <p:cNvPr id="115715" name="Rectangle 2"/>
-          <p:cNvSpPr>
-            <a:spLocks noGrp="1" noChangeArrowheads="1"/>
-          </p:cNvSpPr>
-          <p:nvPr>
-            <p:ph type="title"/>
-          </p:nvPr>
-        </p:nvSpPr>
-        <p:spPr/>
-        <p:txBody>
-          <a:bodyPr/>
-          <a:lstStyle/>
-          <a:p>
-            <a:pPr eaLnBrk="1" hangingPunct="1"/>
-            <a:r>
-              <a:rPr lang="en-US" dirty="0"/>
-              <a:t>Question 123.21.6</a:t>
-            </a:r>
-          </a:p>
-        </p:txBody>
-      </p:sp>
-      <p:sp>
-        <p:nvSpPr>
-          <p:cNvPr id="115716" name="Rectangle 3"/>
-          <p:cNvSpPr>
-            <a:spLocks noGrp="1" noChangeArrowheads="1"/>
-          </p:cNvSpPr>
-          <p:nvPr>
-            <p:ph type="body" idx="1"/>
-          </p:nvPr>
-        </p:nvSpPr>
-        <p:spPr/>
-        <p:txBody>
-          <a:bodyPr/>
-          <a:lstStyle/>
-          <a:p>
-            <a:pPr marL="609600" indent="-609600" eaLnBrk="1" hangingPunct="1">
-              <a:buFontTx/>
-              <a:buNone/>
-            </a:pPr>
-            <a:r>
-              <a:rPr lang="en-US"/>
-              <a:t>Does a wave on a string move faster for a heavier or lighter rope?</a:t>
-            </a:r>
-          </a:p>
-          <a:p>
-            <a:pPr marL="609600" indent="-609600" eaLnBrk="1" hangingPunct="1">
-              <a:buFontTx/>
-              <a:buAutoNum type="arabicPeriod"/>
-            </a:pPr>
-            <a:r>
-              <a:rPr lang="en-US"/>
-              <a:t>yes</a:t>
-            </a:r>
-          </a:p>
-          <a:p>
-            <a:pPr marL="609600" indent="-609600" eaLnBrk="1" hangingPunct="1">
-              <a:buFontTx/>
-              <a:buAutoNum type="arabicPeriod"/>
-            </a:pPr>
-            <a:r>
-              <a:rPr lang="en-US"/>
-              <a:t>no</a:t>
-            </a:r>
-          </a:p>
-        </p:txBody>
-      </p:sp>
-    </p:spTree>
-    <p:extLst>
-      <p:ext uri="{BB962C8B-B14F-4D97-AF65-F5344CB8AC3E}">
-        <p14:creationId xmlns:p14="http://schemas.microsoft.com/office/powerpoint/2010/main" val="1203521046"/>
-      </p:ext>
-    </p:extLst>
-  </p:cSld>
-  <p:clrMapOvr>
-    <a:masterClrMapping/>
-  </p:clrMapOvr>
-</p:sld>
-</file>
-
-<file path=ppt/slides/slide16.xml><?xml version="1.0" encoding="utf-8"?>
-<p:sld xmlns:a="http://schemas.openxmlformats.org/drawingml/2006/main" xmlns:r="http://schemas.openxmlformats.org/officeDocument/2006/relationships" xmlns:p="http://schemas.openxmlformats.org/presentationml/2006/main">
-  <p:cSld>
-    <p:spTree>
-      <p:nvGrpSpPr>
-        <p:cNvPr id="1" name=""/>
-        <p:cNvGrpSpPr/>
-        <p:nvPr/>
-      </p:nvGrpSpPr>
-      <p:grpSpPr>
-        <a:xfrm>
-          <a:off x="0" y="0"/>
-          <a:ext cx="0" cy="0"/>
-          <a:chOff x="0" y="0"/>
-          <a:chExt cx="0" cy="0"/>
-        </a:xfrm>
-      </p:grpSpPr>
-      <p:sp>
-        <p:nvSpPr>
-          <p:cNvPr id="116738" name="Slide Number Placeholder 5"/>
-          <p:cNvSpPr>
-            <a:spLocks noGrp="1"/>
-          </p:cNvSpPr>
-          <p:nvPr>
-            <p:ph type="sldNum" sz="quarter" idx="12"/>
-          </p:nvPr>
-        </p:nvSpPr>
-        <p:spPr>
-          <a:noFill/>
-        </p:spPr>
-        <p:txBody>
-          <a:bodyPr/>
-          <a:lstStyle/>
-          <a:p>
-            <a:fld id="{CFFCD0D3-C27D-45E7-B26E-D48722990FFA}" type="slidenum">
-              <a:rPr lang="en-US" smtClean="0"/>
-              <a:pPr/>
-              <a:t>16</a:t>
-            </a:fld>
-            <a:endParaRPr lang="en-US"/>
-          </a:p>
-        </p:txBody>
-      </p:sp>
-      <p:sp>
-        <p:nvSpPr>
-          <p:cNvPr id="116739" name="Rectangle 2"/>
-          <p:cNvSpPr>
-            <a:spLocks noGrp="1" noChangeArrowheads="1"/>
-          </p:cNvSpPr>
-          <p:nvPr>
-            <p:ph type="title"/>
-          </p:nvPr>
-        </p:nvSpPr>
-        <p:spPr/>
-        <p:txBody>
-          <a:bodyPr/>
-          <a:lstStyle/>
-          <a:p>
-            <a:pPr eaLnBrk="1" hangingPunct="1"/>
-            <a:r>
-              <a:rPr lang="en-US" dirty="0"/>
-              <a:t>Question 123.21.7</a:t>
-            </a:r>
-          </a:p>
-        </p:txBody>
-      </p:sp>
-      <p:sp>
-        <p:nvSpPr>
-          <p:cNvPr id="116740" name="Rectangle 3"/>
-          <p:cNvSpPr>
-            <a:spLocks noGrp="1" noChangeArrowheads="1"/>
-          </p:cNvSpPr>
-          <p:nvPr>
-            <p:ph type="body" idx="1"/>
-          </p:nvPr>
-        </p:nvSpPr>
-        <p:spPr/>
-        <p:txBody>
-          <a:bodyPr/>
-          <a:lstStyle/>
-          <a:p>
-            <a:pPr marL="609600" indent="-609600" eaLnBrk="1" hangingPunct="1">
-              <a:buFontTx/>
-              <a:buNone/>
-            </a:pPr>
-            <a:r>
-              <a:rPr lang="en-US" dirty="0"/>
-              <a:t>A wave is traveling on a rope. Does the wave speed increase or decrease as you pull harder on a rope</a:t>
-            </a:r>
-          </a:p>
-          <a:p>
-            <a:pPr marL="609600" indent="-609600" eaLnBrk="1" hangingPunct="1">
-              <a:buFontTx/>
-              <a:buAutoNum type="arabicPeriod"/>
-            </a:pPr>
-            <a:r>
-              <a:rPr lang="en-US" dirty="0"/>
-              <a:t>Increase</a:t>
-            </a:r>
-          </a:p>
-          <a:p>
-            <a:pPr marL="609600" indent="-609600" eaLnBrk="1" hangingPunct="1">
-              <a:buFontTx/>
-              <a:buAutoNum type="arabicPeriod"/>
-            </a:pPr>
-            <a:r>
-              <a:rPr lang="en-US" dirty="0"/>
-              <a:t>Decrease</a:t>
-            </a:r>
-          </a:p>
-        </p:txBody>
-      </p:sp>
-    </p:spTree>
-    <p:extLst>
-      <p:ext uri="{BB962C8B-B14F-4D97-AF65-F5344CB8AC3E}">
-        <p14:creationId xmlns:p14="http://schemas.microsoft.com/office/powerpoint/2010/main" val="3434781075"/>
-      </p:ext>
-    </p:extLst>
-  </p:cSld>
-  <p:clrMapOvr>
-    <a:masterClrMapping/>
-  </p:clrMapOvr>
-</p:sld>
-</file>
-
-<file path=ppt/slides/slide17.xml><?xml version="1.0" encoding="utf-8"?>
-<p:sld xmlns:a="http://schemas.openxmlformats.org/drawingml/2006/main" xmlns:r="http://schemas.openxmlformats.org/officeDocument/2006/relationships" xmlns:p="http://schemas.openxmlformats.org/presentationml/2006/main">
-  <p:cSld>
-    <p:spTree>
-      <p:nvGrpSpPr>
-        <p:cNvPr id="1" name=""/>
-        <p:cNvGrpSpPr/>
-        <p:nvPr/>
-      </p:nvGrpSpPr>
-      <p:grpSpPr>
-        <a:xfrm>
-          <a:off x="0" y="0"/>
-          <a:ext cx="0" cy="0"/>
-          <a:chOff x="0" y="0"/>
-          <a:chExt cx="0" cy="0"/>
-        </a:xfrm>
-      </p:grpSpPr>
-      <p:sp>
-        <p:nvSpPr>
-          <p:cNvPr id="52227" name="Rectangle 2"/>
-          <p:cNvSpPr>
-            <a:spLocks noGrp="1" noChangeArrowheads="1"/>
-          </p:cNvSpPr>
-          <p:nvPr>
-            <p:ph type="title"/>
-          </p:nvPr>
-        </p:nvSpPr>
-        <p:spPr/>
-        <p:txBody>
-          <a:bodyPr/>
-          <a:lstStyle/>
-          <a:p>
-            <a:pPr eaLnBrk="1" hangingPunct="1"/>
-            <a:r>
-              <a:rPr lang="en-US"/>
-              <a:t>Question 16.9</a:t>
-            </a:r>
-          </a:p>
-        </p:txBody>
-      </p:sp>
-      <p:sp>
-        <p:nvSpPr>
-          <p:cNvPr id="52228" name="Rectangle 3"/>
-          <p:cNvSpPr>
-            <a:spLocks noGrp="1" noChangeArrowheads="1"/>
-          </p:cNvSpPr>
-          <p:nvPr>
-            <p:ph idx="1"/>
-          </p:nvPr>
-        </p:nvSpPr>
-        <p:spPr/>
-        <p:txBody>
-          <a:bodyPr/>
-          <a:lstStyle/>
-          <a:p>
-            <a:pPr marL="609600" indent="-609600" eaLnBrk="1" hangingPunct="1">
-              <a:buFontTx/>
-              <a:buNone/>
-            </a:pPr>
-            <a:r>
-              <a:rPr lang="en-US"/>
-              <a:t>A wave travels across a boundary between two different weight ropes. If it goes from the heavier to the lighter rope, the wave speed</a:t>
-            </a:r>
-          </a:p>
-          <a:p>
-            <a:pPr marL="990600" lvl="1" indent="-533400" eaLnBrk="1" hangingPunct="1">
-              <a:buFontTx/>
-              <a:buAutoNum type="alphaLcParenR"/>
-            </a:pPr>
-            <a:r>
-              <a:rPr lang="en-US"/>
-              <a:t>Increases</a:t>
-            </a:r>
-          </a:p>
-          <a:p>
-            <a:pPr marL="990600" lvl="1" indent="-533400" eaLnBrk="1" hangingPunct="1">
-              <a:buFontTx/>
-              <a:buAutoNum type="alphaLcParenR"/>
-            </a:pPr>
-            <a:r>
-              <a:rPr lang="en-US"/>
-              <a:t>Decreases</a:t>
-            </a:r>
-          </a:p>
-          <a:p>
-            <a:pPr marL="990600" lvl="1" indent="-533400" eaLnBrk="1" hangingPunct="1">
-              <a:buFontTx/>
-              <a:buAutoNum type="alphaLcParenR"/>
-            </a:pPr>
-            <a:r>
-              <a:rPr lang="en-US"/>
-              <a:t>Stays the same</a:t>
-            </a:r>
-          </a:p>
-          <a:p>
-            <a:pPr marL="990600" lvl="1" indent="-533400" eaLnBrk="1" hangingPunct="1">
-              <a:buFontTx/>
-              <a:buAutoNum type="alphaLcParenR"/>
-            </a:pPr>
-            <a:r>
-              <a:rPr lang="en-US"/>
-              <a:t>Can’t tell</a:t>
-            </a:r>
-          </a:p>
-        </p:txBody>
-      </p:sp>
-      <p:sp>
-        <p:nvSpPr>
-          <p:cNvPr id="52226" name="Slide Number Placeholder 5"/>
-          <p:cNvSpPr>
-            <a:spLocks noGrp="1"/>
-          </p:cNvSpPr>
-          <p:nvPr>
-            <p:ph type="sldNum" sz="quarter" idx="12"/>
-          </p:nvPr>
-        </p:nvSpPr>
-        <p:spPr>
-          <a:noFill/>
-        </p:spPr>
-        <p:txBody>
-          <a:bodyPr/>
-          <a:lstStyle/>
-          <a:p>
-            <a:fld id="{6A354CA6-2371-4C3D-9BCD-3813C9281DFB}" type="slidenum">
-              <a:rPr lang="en-US" smtClean="0"/>
-              <a:pPr/>
-              <a:t>17</a:t>
-            </a:fld>
-            <a:endParaRPr lang="en-US"/>
-          </a:p>
-        </p:txBody>
-      </p:sp>
-    </p:spTree>
-    <p:extLst>
-      <p:ext uri="{BB962C8B-B14F-4D97-AF65-F5344CB8AC3E}">
-        <p14:creationId xmlns:p14="http://schemas.microsoft.com/office/powerpoint/2010/main" val="345946206"/>
-      </p:ext>
-    </p:extLst>
-  </p:cSld>
-  <p:clrMapOvr>
-    <a:masterClrMapping/>
-  </p:clrMapOvr>
-</p:sld>
-</file>
-
-<file path=ppt/slides/slide18.xml><?xml version="1.0" encoding="utf-8"?>
-<p:sld xmlns:a="http://schemas.openxmlformats.org/drawingml/2006/main" xmlns:r="http://schemas.openxmlformats.org/officeDocument/2006/relationships" xmlns:p="http://schemas.openxmlformats.org/presentationml/2006/main">
-  <p:cSld>
-    <p:spTree>
-      <p:nvGrpSpPr>
-        <p:cNvPr id="1" name=""/>
-        <p:cNvGrpSpPr/>
-        <p:nvPr/>
-      </p:nvGrpSpPr>
-      <p:grpSpPr>
-        <a:xfrm>
-          <a:off x="0" y="0"/>
-          <a:ext cx="0" cy="0"/>
-          <a:chOff x="0" y="0"/>
-          <a:chExt cx="0" cy="0"/>
-        </a:xfrm>
-      </p:grpSpPr>
-      <p:sp>
-        <p:nvSpPr>
-          <p:cNvPr id="53251" name="Rectangle 2"/>
-          <p:cNvSpPr>
-            <a:spLocks noGrp="1" noChangeArrowheads="1"/>
-          </p:cNvSpPr>
-          <p:nvPr>
-            <p:ph type="title"/>
-          </p:nvPr>
-        </p:nvSpPr>
-        <p:spPr/>
-        <p:txBody>
-          <a:bodyPr/>
-          <a:lstStyle/>
-          <a:p>
-            <a:pPr eaLnBrk="1" hangingPunct="1"/>
-            <a:r>
-              <a:rPr lang="en-US" dirty="0"/>
-              <a:t>Question 16.10</a:t>
-            </a:r>
-          </a:p>
-        </p:txBody>
-      </p:sp>
-      <p:sp>
-        <p:nvSpPr>
-          <p:cNvPr id="53252" name="Rectangle 3"/>
-          <p:cNvSpPr>
-            <a:spLocks noGrp="1" noChangeArrowheads="1"/>
-          </p:cNvSpPr>
-          <p:nvPr>
-            <p:ph idx="1"/>
-          </p:nvPr>
-        </p:nvSpPr>
-        <p:spPr/>
-        <p:txBody>
-          <a:bodyPr/>
-          <a:lstStyle/>
-          <a:p>
-            <a:pPr marL="609600" indent="-609600" eaLnBrk="1" hangingPunct="1">
-              <a:buFontTx/>
-              <a:buNone/>
-            </a:pPr>
-            <a:r>
-              <a:rPr lang="en-US"/>
-              <a:t>A wave travels across a boundary between two different weight ropes. If it goes from the lighter to the heavier rope, the reflected wave</a:t>
-            </a:r>
-          </a:p>
-          <a:p>
-            <a:pPr marL="609600" indent="-609600" eaLnBrk="1" hangingPunct="1">
-              <a:buFontTx/>
-              <a:buAutoNum type="alphaLcParenR"/>
-            </a:pPr>
-            <a:r>
-              <a:rPr lang="en-US"/>
-              <a:t>Is inverted</a:t>
-            </a:r>
-          </a:p>
-          <a:p>
-            <a:pPr marL="609600" indent="-609600" eaLnBrk="1" hangingPunct="1">
-              <a:buFontTx/>
-              <a:buAutoNum type="alphaLcParenR"/>
-            </a:pPr>
-            <a:r>
-              <a:rPr lang="en-US"/>
-              <a:t>Is not inverted</a:t>
-            </a:r>
-          </a:p>
-          <a:p>
-            <a:pPr marL="609600" indent="-609600" eaLnBrk="1" hangingPunct="1">
-              <a:buFontTx/>
-              <a:buAutoNum type="alphaLcParenR"/>
-            </a:pPr>
-            <a:r>
-              <a:rPr lang="en-US"/>
-              <a:t>Can’t tell</a:t>
-            </a:r>
-          </a:p>
-        </p:txBody>
-      </p:sp>
-      <p:sp>
-        <p:nvSpPr>
-          <p:cNvPr id="53250" name="Slide Number Placeholder 5"/>
-          <p:cNvSpPr>
-            <a:spLocks noGrp="1"/>
-          </p:cNvSpPr>
-          <p:nvPr>
-            <p:ph type="sldNum" sz="quarter" idx="12"/>
-          </p:nvPr>
-        </p:nvSpPr>
-        <p:spPr>
-          <a:noFill/>
-        </p:spPr>
-        <p:txBody>
-          <a:bodyPr/>
-          <a:lstStyle/>
-          <a:p>
-            <a:fld id="{74CD2813-E4C4-402A-A221-FA93E480D86C}" type="slidenum">
-              <a:rPr lang="en-US" smtClean="0"/>
-              <a:pPr/>
-              <a:t>18</a:t>
-            </a:fld>
-            <a:endParaRPr lang="en-US"/>
-          </a:p>
-        </p:txBody>
-      </p:sp>
-    </p:spTree>
-    <p:extLst>
-      <p:ext uri="{BB962C8B-B14F-4D97-AF65-F5344CB8AC3E}">
-        <p14:creationId xmlns:p14="http://schemas.microsoft.com/office/powerpoint/2010/main" val="548597081"/>
-      </p:ext>
-    </p:extLst>
-  </p:cSld>
-  <p:clrMapOvr>
-    <a:masterClrMapping/>
-  </p:clrMapOvr>
-</p:sld>
-</file>
-
-<file path=ppt/slides/slide19.xml><?xml version="1.0" encoding="utf-8"?>
-<p:sld xmlns:a="http://schemas.openxmlformats.org/drawingml/2006/main" xmlns:r="http://schemas.openxmlformats.org/officeDocument/2006/relationships" xmlns:p="http://schemas.openxmlformats.org/presentationml/2006/main">
-  <p:cSld>
-    <p:spTree>
-      <p:nvGrpSpPr>
-        <p:cNvPr id="1" name=""/>
-        <p:cNvGrpSpPr/>
-        <p:nvPr/>
-      </p:nvGrpSpPr>
-      <p:grpSpPr>
-        <a:xfrm>
-          <a:off x="0" y="0"/>
-          <a:ext cx="0" cy="0"/>
-          <a:chOff x="0" y="0"/>
-          <a:chExt cx="0" cy="0"/>
-        </a:xfrm>
-      </p:grpSpPr>
-      <p:sp>
-        <p:nvSpPr>
-          <p:cNvPr id="54275" name="Rectangle 2"/>
-          <p:cNvSpPr>
-            <a:spLocks noGrp="1" noChangeArrowheads="1"/>
-          </p:cNvSpPr>
-          <p:nvPr>
-            <p:ph type="title"/>
-          </p:nvPr>
-        </p:nvSpPr>
-        <p:spPr/>
-        <p:txBody>
-          <a:bodyPr/>
-          <a:lstStyle/>
-          <a:p>
-            <a:pPr eaLnBrk="1" hangingPunct="1"/>
-            <a:r>
-              <a:rPr lang="en-US"/>
-              <a:t>Question 16.11</a:t>
-            </a:r>
-          </a:p>
-        </p:txBody>
-      </p:sp>
-      <p:sp>
-        <p:nvSpPr>
-          <p:cNvPr id="54276" name="Rectangle 3"/>
-          <p:cNvSpPr>
-            <a:spLocks noGrp="1" noChangeArrowheads="1"/>
-          </p:cNvSpPr>
-          <p:nvPr>
-            <p:ph idx="1"/>
-          </p:nvPr>
-        </p:nvSpPr>
-        <p:spPr/>
-        <p:txBody>
-          <a:bodyPr/>
-          <a:lstStyle/>
-          <a:p>
-            <a:pPr marL="609600" indent="-609600" eaLnBrk="1" hangingPunct="1">
-              <a:lnSpc>
-                <a:spcPct val="90000"/>
-              </a:lnSpc>
-              <a:buFontTx/>
-              <a:buNone/>
-            </a:pPr>
-            <a:r>
-              <a:rPr lang="en-US" sz="2800"/>
-              <a:t>If one end of the rope is fixed to a pole, the reflected wave is inverted because</a:t>
-            </a:r>
-          </a:p>
-          <a:p>
-            <a:pPr marL="609600" indent="-609600" eaLnBrk="1" hangingPunct="1">
-              <a:lnSpc>
-                <a:spcPct val="90000"/>
-              </a:lnSpc>
-              <a:buFontTx/>
-              <a:buAutoNum type="alphaLcParenR"/>
-            </a:pPr>
-            <a:r>
-              <a:rPr lang="en-US" sz="2800"/>
-              <a:t>The rope dissipates energy so the pulse must be lower to account for the lower potential energy</a:t>
-            </a:r>
-          </a:p>
-          <a:p>
-            <a:pPr marL="609600" indent="-609600" eaLnBrk="1" hangingPunct="1">
-              <a:lnSpc>
-                <a:spcPct val="90000"/>
-              </a:lnSpc>
-              <a:buFontTx/>
-              <a:buAutoNum type="alphaLcParenR"/>
-            </a:pPr>
-            <a:r>
-              <a:rPr lang="en-US" sz="2800"/>
-              <a:t>The pole exerts an equal but opposite force on the end of the rope, so it is forced downward</a:t>
-            </a:r>
-          </a:p>
-          <a:p>
-            <a:pPr marL="609600" indent="-609600" eaLnBrk="1" hangingPunct="1">
-              <a:lnSpc>
-                <a:spcPct val="90000"/>
-              </a:lnSpc>
-              <a:buFontTx/>
-              <a:buAutoNum type="alphaLcParenR"/>
-            </a:pPr>
-            <a:r>
-              <a:rPr lang="en-US" sz="2800"/>
-              <a:t>The pull of gravity increases for the end of ropes</a:t>
-            </a:r>
-          </a:p>
-          <a:p>
-            <a:pPr marL="609600" indent="-609600" eaLnBrk="1" hangingPunct="1">
-              <a:lnSpc>
-                <a:spcPct val="90000"/>
-              </a:lnSpc>
-              <a:buFontTx/>
-              <a:buAutoNum type="alphaLcParenR"/>
-            </a:pPr>
-            <a:r>
-              <a:rPr lang="en-US" sz="2800"/>
-              <a:t>Can’t tell</a:t>
-            </a:r>
-          </a:p>
-        </p:txBody>
-      </p:sp>
-      <p:sp>
-        <p:nvSpPr>
-          <p:cNvPr id="54274" name="Slide Number Placeholder 5"/>
-          <p:cNvSpPr>
-            <a:spLocks noGrp="1"/>
-          </p:cNvSpPr>
-          <p:nvPr>
-            <p:ph type="sldNum" sz="quarter" idx="12"/>
-          </p:nvPr>
-        </p:nvSpPr>
-        <p:spPr>
-          <a:noFill/>
-        </p:spPr>
-        <p:txBody>
-          <a:bodyPr/>
-          <a:lstStyle/>
-          <a:p>
-            <a:fld id="{57F00098-A586-4021-A6FD-B25936B14AFD}" type="slidenum">
-              <a:rPr lang="en-US" smtClean="0"/>
-              <a:pPr/>
-              <a:t>19</a:t>
-            </a:fld>
-            <a:endParaRPr lang="en-US"/>
-          </a:p>
-        </p:txBody>
-      </p:sp>
-    </p:spTree>
-    <p:extLst>
-      <p:ext uri="{BB962C8B-B14F-4D97-AF65-F5344CB8AC3E}">
-        <p14:creationId xmlns:p14="http://schemas.microsoft.com/office/powerpoint/2010/main" val="344528421"/>
-      </p:ext>
-    </p:extLst>
-  </p:cSld>
-  <p:clrMapOvr>
-    <a:masterClrMapping/>
-  </p:clrMapOvr>
-</p:sld>
-</file>
-
-<file path=ppt/slides/slide2.xml><?xml version="1.0" encoding="utf-8"?>
-<p:sld xmlns:a="http://schemas.openxmlformats.org/drawingml/2006/main" xmlns:r="http://schemas.openxmlformats.org/officeDocument/2006/relationships" xmlns:p="http://schemas.openxmlformats.org/presentationml/2006/main">
-  <p:cSld>
-    <p:spTree>
-      <p:nvGrpSpPr>
-        <p:cNvPr id="1" name=""/>
-        <p:cNvGrpSpPr/>
-        <p:nvPr/>
-      </p:nvGrpSpPr>
-      <p:grpSpPr>
-        <a:xfrm>
-          <a:off x="0" y="0"/>
-          <a:ext cx="0" cy="0"/>
-          <a:chOff x="0" y="0"/>
-          <a:chExt cx="0" cy="0"/>
-        </a:xfrm>
-      </p:grpSpPr>
-      <p:sp>
-        <p:nvSpPr>
-          <p:cNvPr id="2" name="Title 1">
-            <a:extLst>
-              <a:ext uri="{FF2B5EF4-FFF2-40B4-BE49-F238E27FC236}">
-                <a16:creationId xmlns:a16="http://schemas.microsoft.com/office/drawing/2014/main" id="{F7747494-7078-AAFC-9338-9250A519BA53}"/>
-              </a:ext>
-            </a:extLst>
-          </p:cNvPr>
-          <p:cNvSpPr>
-            <a:spLocks noGrp="1"/>
-          </p:cNvSpPr>
-          <p:nvPr>
-            <p:ph type="title"/>
-          </p:nvPr>
-        </p:nvSpPr>
-        <p:spPr/>
-        <p:txBody>
-          <a:bodyPr/>
-          <a:lstStyle/>
-          <a:p>
-            <a:r>
-              <a:rPr lang="en-US" dirty="0"/>
-              <a:t>Question</a:t>
-            </a:r>
-          </a:p>
-        </p:txBody>
-      </p:sp>
-      <p:sp>
-        <p:nvSpPr>
-          <p:cNvPr id="3" name="Content Placeholder 2">
-            <a:extLst>
-              <a:ext uri="{FF2B5EF4-FFF2-40B4-BE49-F238E27FC236}">
-                <a16:creationId xmlns:a16="http://schemas.microsoft.com/office/drawing/2014/main" id="{68BAD010-38A8-C441-2B4B-5EEF4EC2FC37}"/>
-              </a:ext>
-            </a:extLst>
-          </p:cNvPr>
-          <p:cNvSpPr>
-            <a:spLocks noGrp="1"/>
-          </p:cNvSpPr>
-          <p:nvPr>
-            <p:ph idx="1"/>
-          </p:nvPr>
-        </p:nvSpPr>
-        <p:spPr/>
-        <p:txBody>
-          <a:bodyPr/>
-          <a:lstStyle/>
-          <a:p>
-            <a:pPr marL="0" indent="0">
-              <a:buNone/>
-            </a:pPr>
-            <a:r>
-              <a:rPr lang="en-US" dirty="0"/>
-              <a:t>The power delivered by a wave is proportional to </a:t>
-            </a:r>
-          </a:p>
-          <a:p>
-            <a:pPr marL="514350" indent="-514350">
-              <a:buFont typeface="+mj-lt"/>
-              <a:buAutoNum type="alphaLcParenR"/>
-            </a:pPr>
-            <a:r>
-              <a:rPr lang="en-US" dirty="0"/>
-              <a:t>The position of the end of the wave</a:t>
-            </a:r>
-          </a:p>
-          <a:p>
-            <a:pPr marL="514350" indent="-514350">
-              <a:buFont typeface="+mj-lt"/>
-              <a:buAutoNum type="alphaLcParenR"/>
-            </a:pPr>
-            <a:r>
-              <a:rPr lang="en-US" dirty="0"/>
-              <a:t>The mass of the medium</a:t>
-            </a:r>
-          </a:p>
-          <a:p>
-            <a:pPr marL="514350" indent="-514350">
-              <a:buFont typeface="+mj-lt"/>
-              <a:buAutoNum type="alphaLcParenR"/>
-            </a:pPr>
-            <a:r>
-              <a:rPr lang="en-US" dirty="0"/>
-              <a:t>The amplitude of the </a:t>
-            </a:r>
-            <a:r>
-              <a:rPr lang="en-US"/>
-              <a:t>wave squared</a:t>
-            </a:r>
-            <a:endParaRPr lang="en-US" dirty="0"/>
-          </a:p>
-          <a:p>
-            <a:pPr marL="514350" indent="-514350">
-              <a:buFont typeface="+mj-lt"/>
-              <a:buAutoNum type="alphaLcParenR"/>
-            </a:pPr>
-            <a:r>
-              <a:rPr lang="en-US" dirty="0"/>
-              <a:t>The period of the wave squared</a:t>
-            </a:r>
-          </a:p>
-        </p:txBody>
-      </p:sp>
-    </p:spTree>
-    <p:extLst>
-      <p:ext uri="{BB962C8B-B14F-4D97-AF65-F5344CB8AC3E}">
-        <p14:creationId xmlns:p14="http://schemas.microsoft.com/office/powerpoint/2010/main" val="3367812321"/>
-      </p:ext>
-    </p:extLst>
-  </p:cSld>
-  <p:clrMapOvr>
-    <a:masterClrMapping/>
-  </p:clrMapOvr>
-</p:sld>
-</file>
-
-<file path=ppt/slides/slide20.xml><?xml version="1.0" encoding="utf-8"?>
-<p:sld xmlns:a="http://schemas.openxmlformats.org/drawingml/2006/main" xmlns:r="http://schemas.openxmlformats.org/officeDocument/2006/relationships" xmlns:p="http://schemas.openxmlformats.org/presentationml/2006/main">
-  <p:cSld>
-    <p:spTree>
-      <p:nvGrpSpPr>
-        <p:cNvPr id="1" name=""/>
-        <p:cNvGrpSpPr/>
-        <p:nvPr/>
-      </p:nvGrpSpPr>
-      <p:grpSpPr>
-        <a:xfrm>
-          <a:off x="0" y="0"/>
-          <a:ext cx="0" cy="0"/>
-          <a:chOff x="0" y="0"/>
-          <a:chExt cx="0" cy="0"/>
-        </a:xfrm>
-      </p:grpSpPr>
-      <p:sp>
-        <p:nvSpPr>
-          <p:cNvPr id="59395" name="Rectangle 2"/>
-          <p:cNvSpPr>
-            <a:spLocks noGrp="1" noChangeArrowheads="1"/>
-          </p:cNvSpPr>
-          <p:nvPr>
-            <p:ph type="title"/>
-          </p:nvPr>
-        </p:nvSpPr>
-        <p:spPr/>
-        <p:txBody>
-          <a:bodyPr/>
-          <a:lstStyle/>
-          <a:p>
-            <a:pPr eaLnBrk="1" hangingPunct="1"/>
-            <a:r>
-              <a:rPr lang="en-US" dirty="0"/>
-              <a:t>Question 123.21.8</a:t>
-            </a:r>
-          </a:p>
-        </p:txBody>
-      </p:sp>
-      <p:sp>
-        <p:nvSpPr>
-          <p:cNvPr id="59396" name="Rectangle 3"/>
-          <p:cNvSpPr>
-            <a:spLocks noGrp="1" noChangeArrowheads="1"/>
-          </p:cNvSpPr>
-          <p:nvPr>
-            <p:ph idx="1"/>
-          </p:nvPr>
-        </p:nvSpPr>
-        <p:spPr/>
-        <p:txBody>
-          <a:bodyPr/>
-          <a:lstStyle/>
-          <a:p>
-            <a:pPr marL="609600" indent="-609600" eaLnBrk="1" hangingPunct="1">
-              <a:buFontTx/>
-              <a:buNone/>
-            </a:pPr>
-            <a:r>
-              <a:rPr lang="en-US"/>
-              <a:t>The speed of sound in water is about 1.4km/s. Will the speed of sound be faster or slower in air?</a:t>
-            </a:r>
-          </a:p>
-          <a:p>
-            <a:pPr marL="609600" indent="-609600" eaLnBrk="1" hangingPunct="1">
-              <a:buFontTx/>
-              <a:buAutoNum type="alphaLcParenR"/>
-            </a:pPr>
-            <a:r>
-              <a:rPr lang="en-US"/>
-              <a:t>Faster</a:t>
-            </a:r>
-          </a:p>
-          <a:p>
-            <a:pPr marL="609600" indent="-609600" eaLnBrk="1" hangingPunct="1">
-              <a:buFontTx/>
-              <a:buAutoNum type="alphaLcParenR"/>
-            </a:pPr>
-            <a:r>
-              <a:rPr lang="en-US"/>
-              <a:t>Slower</a:t>
-            </a:r>
-          </a:p>
-          <a:p>
-            <a:pPr marL="609600" indent="-609600" eaLnBrk="1" hangingPunct="1">
-              <a:buFontTx/>
-              <a:buAutoNum type="alphaLcParenR"/>
-            </a:pPr>
-            <a:r>
-              <a:rPr lang="en-US"/>
-              <a:t>Can’t tell</a:t>
-            </a:r>
-          </a:p>
-          <a:p>
-            <a:pPr marL="609600" indent="-609600" eaLnBrk="1" hangingPunct="1"/>
-            <a:endParaRPr lang="en-US"/>
-          </a:p>
-        </p:txBody>
-      </p:sp>
-      <p:sp>
-        <p:nvSpPr>
-          <p:cNvPr id="59394" name="Slide Number Placeholder 5"/>
-          <p:cNvSpPr>
-            <a:spLocks noGrp="1"/>
-          </p:cNvSpPr>
-          <p:nvPr>
-            <p:ph type="sldNum" sz="quarter" idx="12"/>
-          </p:nvPr>
-        </p:nvSpPr>
-        <p:spPr>
-          <a:noFill/>
-        </p:spPr>
-        <p:txBody>
-          <a:bodyPr/>
-          <a:lstStyle/>
-          <a:p>
-            <a:fld id="{1D24A40A-39FE-434B-BF0F-F604B45A6121}" type="slidenum">
-              <a:rPr lang="en-US" smtClean="0"/>
-              <a:pPr/>
-              <a:t>20</a:t>
-            </a:fld>
-            <a:endParaRPr lang="en-US"/>
-          </a:p>
-        </p:txBody>
-      </p:sp>
-    </p:spTree>
-    <p:extLst>
-      <p:ext uri="{BB962C8B-B14F-4D97-AF65-F5344CB8AC3E}">
-        <p14:creationId xmlns:p14="http://schemas.microsoft.com/office/powerpoint/2010/main" val="577912915"/>
-      </p:ext>
-    </p:extLst>
-  </p:cSld>
-  <p:clrMapOvr>
-    <a:masterClrMapping/>
-  </p:clrMapOvr>
-</p:sld>
-</file>
-
-<file path=ppt/slides/slide21.xml><?xml version="1.0" encoding="utf-8"?>
-<p:sld xmlns:a="http://schemas.openxmlformats.org/drawingml/2006/main" xmlns:r="http://schemas.openxmlformats.org/officeDocument/2006/relationships" xmlns:p="http://schemas.openxmlformats.org/presentationml/2006/main">
-  <p:cSld>
-    <p:spTree>
-      <p:nvGrpSpPr>
-        <p:cNvPr id="1" name=""/>
-        <p:cNvGrpSpPr/>
-        <p:nvPr/>
-      </p:nvGrpSpPr>
-      <p:grpSpPr>
-        <a:xfrm>
-          <a:off x="0" y="0"/>
-          <a:ext cx="0" cy="0"/>
-          <a:chOff x="0" y="0"/>
-          <a:chExt cx="0" cy="0"/>
-        </a:xfrm>
-      </p:grpSpPr>
-      <p:sp>
-        <p:nvSpPr>
-          <p:cNvPr id="1030" name="Rectangle 2"/>
-          <p:cNvSpPr>
-            <a:spLocks noGrp="1" noChangeArrowheads="1"/>
-          </p:cNvSpPr>
-          <p:nvPr>
-            <p:ph type="title"/>
-          </p:nvPr>
-        </p:nvSpPr>
-        <p:spPr/>
-        <p:txBody>
-          <a:bodyPr/>
-          <a:lstStyle/>
-          <a:p>
-            <a:pPr eaLnBrk="1" hangingPunct="1"/>
-            <a:r>
-              <a:rPr lang="en-US"/>
-              <a:t>Example</a:t>
-            </a:r>
-          </a:p>
-        </p:txBody>
-      </p:sp>
-      <p:sp>
-        <p:nvSpPr>
-          <p:cNvPr id="1031" name="Rectangle 3"/>
-          <p:cNvSpPr>
-            <a:spLocks noGrp="1" noChangeArrowheads="1"/>
-          </p:cNvSpPr>
-          <p:nvPr>
-            <p:ph type="body" idx="1"/>
-          </p:nvPr>
-        </p:nvSpPr>
-        <p:spPr/>
-        <p:txBody>
-          <a:bodyPr/>
-          <a:lstStyle/>
-          <a:p>
-            <a:pPr eaLnBrk="1" hangingPunct="1"/>
-            <a:endParaRPr lang="en-US"/>
-          </a:p>
-        </p:txBody>
-      </p:sp>
-      <p:pic>
-        <p:nvPicPr>
-          <p:cNvPr id="1032" name="Picture 4"/>
-          <p:cNvPicPr>
-            <a:picLocks noChangeAspect="1" noChangeArrowheads="1"/>
-          </p:cNvPicPr>
-          <p:nvPr/>
-        </p:nvPicPr>
-        <p:blipFill>
-          <a:blip r:embed="rId2" cstate="print"/>
-          <a:srcRect/>
-          <a:stretch>
-            <a:fillRect/>
-          </a:stretch>
-        </p:blipFill>
-        <p:spPr bwMode="auto">
-          <a:xfrm>
-            <a:off x="1438275" y="1550988"/>
-            <a:ext cx="2695575" cy="1790700"/>
-          </a:xfrm>
-          <a:prstGeom prst="rect">
-            <a:avLst/>
-          </a:prstGeom>
-          <a:noFill/>
-          <a:ln w="9525" algn="ctr">
-            <a:noFill/>
-            <a:miter lim="800000"/>
-            <a:headEnd/>
-            <a:tailEnd/>
-          </a:ln>
-        </p:spPr>
-      </p:pic>
-      <p:pic>
-        <p:nvPicPr>
-          <p:cNvPr id="1033" name="Picture 5"/>
-          <p:cNvPicPr>
-            <a:picLocks noChangeAspect="1" noChangeArrowheads="1"/>
-          </p:cNvPicPr>
-          <p:nvPr/>
-        </p:nvPicPr>
-        <p:blipFill>
-          <a:blip r:embed="rId3" cstate="print"/>
-          <a:srcRect/>
-          <a:stretch>
-            <a:fillRect/>
-          </a:stretch>
-        </p:blipFill>
-        <p:spPr bwMode="auto">
-          <a:xfrm>
-            <a:off x="4773613" y="1546225"/>
-            <a:ext cx="2847975" cy="1885950"/>
-          </a:xfrm>
-          <a:prstGeom prst="rect">
-            <a:avLst/>
-          </a:prstGeom>
-          <a:noFill/>
-          <a:ln w="9525" algn="ctr">
-            <a:noFill/>
-            <a:miter lim="800000"/>
-            <a:headEnd/>
-            <a:tailEnd/>
-          </a:ln>
-        </p:spPr>
-      </p:pic>
-      <p:pic>
-        <p:nvPicPr>
-          <p:cNvPr id="1034" name="Picture 6"/>
-          <p:cNvPicPr>
-            <a:picLocks noChangeAspect="1" noChangeArrowheads="1"/>
-          </p:cNvPicPr>
-          <p:nvPr/>
-        </p:nvPicPr>
-        <p:blipFill>
-          <a:blip r:embed="rId4" cstate="print"/>
-          <a:srcRect/>
-          <a:stretch>
-            <a:fillRect/>
-          </a:stretch>
-        </p:blipFill>
-        <p:spPr bwMode="auto">
-          <a:xfrm>
-            <a:off x="3138488" y="3502025"/>
-            <a:ext cx="2981325" cy="1981200"/>
-          </a:xfrm>
-          <a:prstGeom prst="rect">
-            <a:avLst/>
-          </a:prstGeom>
-          <a:noFill/>
-          <a:ln w="9525" algn="ctr">
-            <a:noFill/>
-            <a:miter lim="800000"/>
-            <a:headEnd/>
-            <a:tailEnd/>
-          </a:ln>
-        </p:spPr>
-      </p:pic>
-      <p:sp>
-        <p:nvSpPr>
-          <p:cNvPr id="1035" name="Rectangle 8"/>
-          <p:cNvSpPr>
-            <a:spLocks noChangeArrowheads="1"/>
-          </p:cNvSpPr>
-          <p:nvPr/>
-        </p:nvSpPr>
-        <p:spPr bwMode="auto">
-          <a:xfrm>
-            <a:off x="0" y="3248025"/>
-            <a:ext cx="9144000" cy="0"/>
-          </a:xfrm>
-          <a:prstGeom prst="rect">
-            <a:avLst/>
-          </a:prstGeom>
-          <a:noFill/>
-          <a:ln w="9525" algn="ctr">
-            <a:noFill/>
-            <a:miter lim="800000"/>
-            <a:headEnd/>
-            <a:tailEnd/>
-          </a:ln>
-        </p:spPr>
-        <p:txBody>
-          <a:bodyPr wrap="none" anchor="ctr">
-            <a:spAutoFit/>
-          </a:bodyPr>
-          <a:lstStyle/>
-          <a:p>
-            <a:endParaRPr lang="en-US"/>
-          </a:p>
-        </p:txBody>
-      </p:sp>
-      <p:graphicFrame>
-        <p:nvGraphicFramePr>
-          <p:cNvPr id="1026" name="Object 7"/>
-          <p:cNvGraphicFramePr>
-            <a:graphicFrameLocks noChangeAspect="1"/>
-          </p:cNvGraphicFramePr>
-          <p:nvPr/>
-        </p:nvGraphicFramePr>
-        <p:xfrm>
-          <a:off x="2401888" y="3190875"/>
-          <a:ext cx="1144587" cy="215900"/>
-        </p:xfrm>
-        <a:graphic>
-          <a:graphicData uri="http://schemas.openxmlformats.org/presentationml/2006/ole">
-            <mc:AlternateContent xmlns:mc="http://schemas.openxmlformats.org/markup-compatibility/2006">
-              <mc:Choice xmlns:v="urn:schemas-microsoft-com:vml" Requires="v">
-                <p:oleObj name="Equation" r:id="rId5" imgW="1143000" imgH="215640" progId="Equation.3">
-                  <p:embed/>
-                </p:oleObj>
-              </mc:Choice>
-              <mc:Fallback>
-                <p:oleObj name="Equation" r:id="rId5" imgW="1143000" imgH="215640" progId="Equation.3">
-                  <p:embed/>
-                  <p:pic>
-                    <p:nvPicPr>
-                      <p:cNvPr id="1026" name="Object 7"/>
-                      <p:cNvPicPr>
-                        <a:picLocks noChangeAspect="1" noChangeArrowheads="1"/>
-                      </p:cNvPicPr>
-                      <p:nvPr/>
-                    </p:nvPicPr>
-                    <p:blipFill>
-                      <a:blip r:embed="rId6">
-                        <a:extLst>
-                          <a:ext uri="{28A0092B-C50C-407E-A947-70E740481C1C}">
-                            <a14:useLocalDpi xmlns:a14="http://schemas.microsoft.com/office/drawing/2010/main" val="0"/>
-                          </a:ext>
-                        </a:extLst>
-                      </a:blip>
-                      <a:srcRect/>
-                      <a:stretch>
-                        <a:fillRect/>
-                      </a:stretch>
-                    </p:blipFill>
-                    <p:spPr bwMode="auto">
-                      <a:xfrm>
-                        <a:off x="2401888" y="3190875"/>
-                        <a:ext cx="1144587" cy="215900"/>
-                      </a:xfrm>
-                      <a:prstGeom prst="rect">
-                        <a:avLst/>
-                      </a:prstGeom>
-                      <a:noFill/>
-                      <a:extLst>
-                        <a:ext uri="{909E8E84-426E-40DD-AFC4-6F175D3DCCD1}">
-                          <a14:hiddenFill xmlns:a14="http://schemas.microsoft.com/office/drawing/2010/main">
-                            <a:solidFill>
-                              <a:srgbClr val="FFFFFF"/>
-                            </a:solidFill>
-                          </a14:hiddenFill>
-                        </a:ext>
-                      </a:extLst>
-                    </p:spPr>
-                  </p:pic>
-                </p:oleObj>
-              </mc:Fallback>
-            </mc:AlternateContent>
-          </a:graphicData>
-        </a:graphic>
-      </p:graphicFrame>
-      <p:sp>
-        <p:nvSpPr>
-          <p:cNvPr id="1036" name="Rectangle 10"/>
-          <p:cNvSpPr>
-            <a:spLocks noChangeArrowheads="1"/>
-          </p:cNvSpPr>
-          <p:nvPr/>
-        </p:nvSpPr>
-        <p:spPr bwMode="auto">
-          <a:xfrm>
-            <a:off x="0" y="3248025"/>
-            <a:ext cx="9144000" cy="0"/>
-          </a:xfrm>
-          <a:prstGeom prst="rect">
-            <a:avLst/>
-          </a:prstGeom>
-          <a:noFill/>
-          <a:ln w="9525" algn="ctr">
-            <a:noFill/>
-            <a:miter lim="800000"/>
-            <a:headEnd/>
-            <a:tailEnd/>
-          </a:ln>
-        </p:spPr>
-        <p:txBody>
-          <a:bodyPr wrap="none" anchor="ctr">
-            <a:spAutoFit/>
-          </a:bodyPr>
-          <a:lstStyle/>
-          <a:p>
-            <a:endParaRPr lang="en-US"/>
-          </a:p>
-        </p:txBody>
-      </p:sp>
-      <p:graphicFrame>
-        <p:nvGraphicFramePr>
-          <p:cNvPr id="1027" name="Object 9"/>
-          <p:cNvGraphicFramePr>
-            <a:graphicFrameLocks noChangeAspect="1"/>
-          </p:cNvGraphicFramePr>
-          <p:nvPr/>
-        </p:nvGraphicFramePr>
-        <p:xfrm>
-          <a:off x="5705475" y="3262313"/>
-          <a:ext cx="1373188" cy="217487"/>
-        </p:xfrm>
-        <a:graphic>
-          <a:graphicData uri="http://schemas.openxmlformats.org/presentationml/2006/ole">
-            <mc:AlternateContent xmlns:mc="http://schemas.openxmlformats.org/markup-compatibility/2006">
-              <mc:Choice xmlns:v="urn:schemas-microsoft-com:vml" Requires="v">
-                <p:oleObj name="Equation" r:id="rId7" imgW="1371600" imgH="215640" progId="Equation.3">
-                  <p:embed/>
-                </p:oleObj>
-              </mc:Choice>
-              <mc:Fallback>
-                <p:oleObj name="Equation" r:id="rId7" imgW="1371600" imgH="215640" progId="Equation.3">
-                  <p:embed/>
-                  <p:pic>
-                    <p:nvPicPr>
-                      <p:cNvPr id="1027" name="Object 9"/>
-                      <p:cNvPicPr>
-                        <a:picLocks noChangeAspect="1" noChangeArrowheads="1"/>
-                      </p:cNvPicPr>
-                      <p:nvPr/>
-                    </p:nvPicPr>
-                    <p:blipFill>
-                      <a:blip r:embed="rId8">
-                        <a:extLst>
-                          <a:ext uri="{28A0092B-C50C-407E-A947-70E740481C1C}">
-                            <a14:useLocalDpi xmlns:a14="http://schemas.microsoft.com/office/drawing/2010/main" val="0"/>
-                          </a:ext>
-                        </a:extLst>
-                      </a:blip>
-                      <a:srcRect/>
-                      <a:stretch>
-                        <a:fillRect/>
-                      </a:stretch>
-                    </p:blipFill>
-                    <p:spPr bwMode="auto">
-                      <a:xfrm>
-                        <a:off x="5705475" y="3262313"/>
-                        <a:ext cx="1373188" cy="217487"/>
-                      </a:xfrm>
-                      <a:prstGeom prst="rect">
-                        <a:avLst/>
-                      </a:prstGeom>
-                      <a:noFill/>
-                      <a:extLst>
-                        <a:ext uri="{909E8E84-426E-40DD-AFC4-6F175D3DCCD1}">
-                          <a14:hiddenFill xmlns:a14="http://schemas.microsoft.com/office/drawing/2010/main">
-                            <a:solidFill>
-                              <a:srgbClr val="FFFFFF"/>
-                            </a:solidFill>
-                          </a14:hiddenFill>
-                        </a:ext>
-                      </a:extLst>
-                    </p:spPr>
-                  </p:pic>
-                </p:oleObj>
-              </mc:Fallback>
-            </mc:AlternateContent>
-          </a:graphicData>
-        </a:graphic>
-      </p:graphicFrame>
-      <p:sp>
-        <p:nvSpPr>
-          <p:cNvPr id="1037" name="Rectangle 12"/>
-          <p:cNvSpPr>
-            <a:spLocks noChangeArrowheads="1"/>
-          </p:cNvSpPr>
-          <p:nvPr/>
-        </p:nvSpPr>
-        <p:spPr bwMode="auto">
-          <a:xfrm>
-            <a:off x="0" y="2757488"/>
-            <a:ext cx="9144000" cy="0"/>
-          </a:xfrm>
-          <a:prstGeom prst="rect">
-            <a:avLst/>
-          </a:prstGeom>
-          <a:noFill/>
-          <a:ln w="9525" algn="ctr">
-            <a:noFill/>
-            <a:miter lim="800000"/>
-            <a:headEnd/>
-            <a:tailEnd/>
-          </a:ln>
-        </p:spPr>
-        <p:txBody>
-          <a:bodyPr wrap="none" anchor="ctr">
-            <a:spAutoFit/>
-          </a:bodyPr>
-          <a:lstStyle/>
-          <a:p>
-            <a:endParaRPr lang="en-US"/>
-          </a:p>
-        </p:txBody>
-      </p:sp>
-      <p:graphicFrame>
-        <p:nvGraphicFramePr>
-          <p:cNvPr id="1028" name="Object 11"/>
-          <p:cNvGraphicFramePr>
-            <a:graphicFrameLocks noChangeAspect="1"/>
-          </p:cNvGraphicFramePr>
-          <p:nvPr/>
-        </p:nvGraphicFramePr>
-        <p:xfrm>
-          <a:off x="885825" y="4295775"/>
-          <a:ext cx="419100" cy="1343025"/>
-        </p:xfrm>
-        <a:graphic>
-          <a:graphicData uri="http://schemas.openxmlformats.org/presentationml/2006/ole">
-            <mc:AlternateContent xmlns:mc="http://schemas.openxmlformats.org/markup-compatibility/2006">
-              <mc:Choice xmlns:v="urn:schemas-microsoft-com:vml" Requires="v">
-                <p:oleObj name="Equation" r:id="rId9" imgW="419100" imgH="1346200" progId="Equation.3">
-                  <p:embed/>
-                </p:oleObj>
-              </mc:Choice>
-              <mc:Fallback>
-                <p:oleObj name="Equation" r:id="rId9" imgW="419100" imgH="1346200" progId="Equation.3">
-                  <p:embed/>
-                  <p:pic>
-                    <p:nvPicPr>
-                      <p:cNvPr id="1028" name="Object 11"/>
-                      <p:cNvPicPr>
-                        <a:picLocks noChangeAspect="1" noChangeArrowheads="1"/>
-                      </p:cNvPicPr>
-                      <p:nvPr/>
-                    </p:nvPicPr>
-                    <p:blipFill>
-                      <a:blip r:embed="rId10">
-                        <a:extLst>
-                          <a:ext uri="{28A0092B-C50C-407E-A947-70E740481C1C}">
-                            <a14:useLocalDpi xmlns:a14="http://schemas.microsoft.com/office/drawing/2010/main" val="0"/>
-                          </a:ext>
-                        </a:extLst>
-                      </a:blip>
-                      <a:srcRect/>
-                      <a:stretch>
-                        <a:fillRect/>
-                      </a:stretch>
-                    </p:blipFill>
-                    <p:spPr bwMode="auto">
-                      <a:xfrm>
-                        <a:off x="885825" y="4295775"/>
-                        <a:ext cx="419100" cy="1343025"/>
-                      </a:xfrm>
-                      <a:prstGeom prst="rect">
-                        <a:avLst/>
-                      </a:prstGeom>
-                      <a:noFill/>
-                      <a:extLst>
-                        <a:ext uri="{909E8E84-426E-40DD-AFC4-6F175D3DCCD1}">
-                          <a14:hiddenFill xmlns:a14="http://schemas.microsoft.com/office/drawing/2010/main">
-                            <a:solidFill>
-                              <a:srgbClr val="FFFFFF"/>
-                            </a:solidFill>
-                          </a14:hiddenFill>
-                        </a:ext>
-                      </a:extLst>
-                    </p:spPr>
-                  </p:pic>
-                </p:oleObj>
-              </mc:Fallback>
-            </mc:AlternateContent>
-          </a:graphicData>
-        </a:graphic>
-      </p:graphicFrame>
-      <p:sp>
-        <p:nvSpPr>
-          <p:cNvPr id="1038" name="Rectangle 14"/>
-          <p:cNvSpPr>
-            <a:spLocks noChangeArrowheads="1"/>
-          </p:cNvSpPr>
-          <p:nvPr/>
-        </p:nvSpPr>
-        <p:spPr bwMode="auto">
-          <a:xfrm>
-            <a:off x="0" y="3214688"/>
-            <a:ext cx="9144000" cy="0"/>
-          </a:xfrm>
-          <a:prstGeom prst="rect">
-            <a:avLst/>
-          </a:prstGeom>
-          <a:noFill/>
-          <a:ln w="9525" algn="ctr">
-            <a:noFill/>
-            <a:miter lim="800000"/>
-            <a:headEnd/>
-            <a:tailEnd/>
-          </a:ln>
-        </p:spPr>
-        <p:txBody>
-          <a:bodyPr wrap="none" anchor="ctr">
-            <a:spAutoFit/>
-          </a:bodyPr>
-          <a:lstStyle/>
-          <a:p>
-            <a:endParaRPr lang="en-US"/>
-          </a:p>
-        </p:txBody>
-      </p:sp>
-      <p:graphicFrame>
-        <p:nvGraphicFramePr>
-          <p:cNvPr id="1029" name="Object 13"/>
-          <p:cNvGraphicFramePr>
-            <a:graphicFrameLocks noChangeAspect="1"/>
-          </p:cNvGraphicFramePr>
-          <p:nvPr/>
-        </p:nvGraphicFramePr>
-        <p:xfrm>
-          <a:off x="3787775" y="5581650"/>
-          <a:ext cx="2019300" cy="428625"/>
-        </p:xfrm>
-        <a:graphic>
-          <a:graphicData uri="http://schemas.openxmlformats.org/presentationml/2006/ole">
-            <mc:AlternateContent xmlns:mc="http://schemas.openxmlformats.org/markup-compatibility/2006">
-              <mc:Choice xmlns:v="urn:schemas-microsoft-com:vml" Requires="v">
-                <p:oleObj name="Equation" r:id="rId11" imgW="2019300" imgH="431800" progId="Equation.3">
-                  <p:embed/>
-                </p:oleObj>
-              </mc:Choice>
-              <mc:Fallback>
-                <p:oleObj name="Equation" r:id="rId11" imgW="2019300" imgH="431800" progId="Equation.3">
-                  <p:embed/>
-                  <p:pic>
-                    <p:nvPicPr>
-                      <p:cNvPr id="1029" name="Object 13"/>
-                      <p:cNvPicPr>
-                        <a:picLocks noChangeAspect="1" noChangeArrowheads="1"/>
-                      </p:cNvPicPr>
-                      <p:nvPr/>
-                    </p:nvPicPr>
-                    <p:blipFill>
-                      <a:blip r:embed="rId12">
-                        <a:extLst>
-                          <a:ext uri="{28A0092B-C50C-407E-A947-70E740481C1C}">
-                            <a14:useLocalDpi xmlns:a14="http://schemas.microsoft.com/office/drawing/2010/main" val="0"/>
-                          </a:ext>
-                        </a:extLst>
-                      </a:blip>
-                      <a:srcRect/>
-                      <a:stretch>
-                        <a:fillRect/>
-                      </a:stretch>
-                    </p:blipFill>
-                    <p:spPr bwMode="auto">
-                      <a:xfrm>
-                        <a:off x="3787775" y="5581650"/>
-                        <a:ext cx="2019300" cy="428625"/>
-                      </a:xfrm>
-                      <a:prstGeom prst="rect">
-                        <a:avLst/>
-                      </a:prstGeom>
-                      <a:noFill/>
-                      <a:extLst>
-                        <a:ext uri="{909E8E84-426E-40DD-AFC4-6F175D3DCCD1}">
-                          <a14:hiddenFill xmlns:a14="http://schemas.microsoft.com/office/drawing/2010/main">
-                            <a:solidFill>
-                              <a:srgbClr val="FFFFFF"/>
-                            </a:solidFill>
-                          </a14:hiddenFill>
-                        </a:ext>
-                      </a:extLst>
-                    </p:spPr>
-                  </p:pic>
-                </p:oleObj>
-              </mc:Fallback>
-            </mc:AlternateContent>
-          </a:graphicData>
-        </a:graphic>
-      </p:graphicFrame>
-    </p:spTree>
-  </p:cSld>
-  <p:clrMapOvr>
-    <a:masterClrMapping/>
-  </p:clrMapOvr>
-</p:sld>
-</file>
-
-<file path=ppt/slides/slide22.xml><?xml version="1.0" encoding="utf-8"?>
-<p:sld xmlns:a="http://schemas.openxmlformats.org/drawingml/2006/main" xmlns:r="http://schemas.openxmlformats.org/officeDocument/2006/relationships" xmlns:p="http://schemas.openxmlformats.org/presentationml/2006/main">
-  <p:cSld>
-    <p:spTree>
-      <p:nvGrpSpPr>
-        <p:cNvPr id="1" name=""/>
-        <p:cNvGrpSpPr/>
-        <p:nvPr/>
-      </p:nvGrpSpPr>
-      <p:grpSpPr>
-        <a:xfrm>
-          <a:off x="0" y="0"/>
-          <a:ext cx="0" cy="0"/>
-          <a:chOff x="0" y="0"/>
-          <a:chExt cx="0" cy="0"/>
-        </a:xfrm>
-      </p:grpSpPr>
-      <p:sp>
-        <p:nvSpPr>
-          <p:cNvPr id="2051" name="Rectangle 2"/>
-          <p:cNvSpPr>
-            <a:spLocks noGrp="1" noChangeArrowheads="1"/>
-          </p:cNvSpPr>
-          <p:nvPr>
-            <p:ph type="title"/>
-          </p:nvPr>
-        </p:nvSpPr>
-        <p:spPr/>
-        <p:txBody>
-          <a:bodyPr/>
-          <a:lstStyle/>
-          <a:p>
-            <a:pPr eaLnBrk="1" hangingPunct="1"/>
-            <a:r>
-              <a:rPr lang="en-US"/>
-              <a:t>Amplitude</a:t>
-            </a:r>
-          </a:p>
-        </p:txBody>
-      </p:sp>
-      <p:sp>
-        <p:nvSpPr>
-          <p:cNvPr id="2052" name="Rectangle 3"/>
-          <p:cNvSpPr>
-            <a:spLocks noGrp="1" noChangeArrowheads="1"/>
-          </p:cNvSpPr>
-          <p:nvPr>
-            <p:ph type="body" idx="1"/>
-          </p:nvPr>
-        </p:nvSpPr>
-        <p:spPr/>
-        <p:txBody>
-          <a:bodyPr/>
-          <a:lstStyle/>
-          <a:p>
-            <a:pPr eaLnBrk="1" hangingPunct="1"/>
-            <a:endParaRPr lang="en-US"/>
-          </a:p>
-        </p:txBody>
-      </p:sp>
-      <p:pic>
-        <p:nvPicPr>
-          <p:cNvPr id="2053" name="Picture 4"/>
-          <p:cNvPicPr>
-            <a:picLocks noChangeAspect="1" noChangeArrowheads="1"/>
-          </p:cNvPicPr>
-          <p:nvPr/>
-        </p:nvPicPr>
-        <p:blipFill>
-          <a:blip r:embed="rId2" cstate="print"/>
-          <a:srcRect/>
-          <a:stretch>
-            <a:fillRect/>
-          </a:stretch>
-        </p:blipFill>
-        <p:spPr bwMode="auto">
-          <a:xfrm>
-            <a:off x="4659313" y="2090738"/>
-            <a:ext cx="3832225" cy="2543175"/>
-          </a:xfrm>
-          <a:prstGeom prst="rect">
-            <a:avLst/>
-          </a:prstGeom>
-          <a:noFill/>
-          <a:ln w="9525" algn="ctr">
-            <a:noFill/>
-            <a:miter lim="800000"/>
-            <a:headEnd/>
-            <a:tailEnd/>
-          </a:ln>
-        </p:spPr>
-      </p:pic>
-      <p:sp>
-        <p:nvSpPr>
-          <p:cNvPr id="2054" name="Rectangle 6"/>
-          <p:cNvSpPr>
-            <a:spLocks noChangeArrowheads="1"/>
-          </p:cNvSpPr>
-          <p:nvPr/>
-        </p:nvSpPr>
-        <p:spPr bwMode="auto">
-          <a:xfrm>
-            <a:off x="0" y="3214688"/>
-            <a:ext cx="9144000" cy="0"/>
-          </a:xfrm>
-          <a:prstGeom prst="rect">
-            <a:avLst/>
-          </a:prstGeom>
-          <a:noFill/>
-          <a:ln w="9525" algn="ctr">
-            <a:noFill/>
-            <a:miter lim="800000"/>
-            <a:headEnd/>
-            <a:tailEnd/>
-          </a:ln>
-        </p:spPr>
-        <p:txBody>
-          <a:bodyPr wrap="none" anchor="ctr">
-            <a:spAutoFit/>
-          </a:bodyPr>
-          <a:lstStyle/>
-          <a:p>
-            <a:endParaRPr lang="en-US"/>
-          </a:p>
-        </p:txBody>
-      </p:sp>
-      <p:graphicFrame>
-        <p:nvGraphicFramePr>
-          <p:cNvPr id="2050" name="Object 5"/>
-          <p:cNvGraphicFramePr>
-            <a:graphicFrameLocks noChangeAspect="1"/>
-          </p:cNvGraphicFramePr>
-          <p:nvPr/>
-        </p:nvGraphicFramePr>
-        <p:xfrm>
-          <a:off x="1322388" y="2909888"/>
-          <a:ext cx="1711325" cy="1055687"/>
-        </p:xfrm>
-        <a:graphic>
-          <a:graphicData uri="http://schemas.openxmlformats.org/presentationml/2006/ole">
-            <mc:AlternateContent xmlns:mc="http://schemas.openxmlformats.org/markup-compatibility/2006">
-              <mc:Choice xmlns:v="urn:schemas-microsoft-com:vml" Requires="v">
-                <p:oleObj name="Equation" r:id="rId3" imgW="698197" imgH="431613" progId="Equation.3">
-                  <p:embed/>
-                </p:oleObj>
-              </mc:Choice>
-              <mc:Fallback>
-                <p:oleObj name="Equation" r:id="rId3" imgW="698197" imgH="431613" progId="Equation.3">
-                  <p:embed/>
-                  <p:pic>
-                    <p:nvPicPr>
-                      <p:cNvPr id="2050" name="Object 5"/>
-                      <p:cNvPicPr>
-                        <a:picLocks noChangeAspect="1" noChangeArrowheads="1"/>
-                      </p:cNvPicPr>
-                      <p:nvPr/>
-                    </p:nvPicPr>
-                    <p:blipFill>
-                      <a:blip r:embed="rId4">
-                        <a:extLst>
-                          <a:ext uri="{28A0092B-C50C-407E-A947-70E740481C1C}">
-                            <a14:useLocalDpi xmlns:a14="http://schemas.microsoft.com/office/drawing/2010/main" val="0"/>
-                          </a:ext>
-                        </a:extLst>
-                      </a:blip>
-                      <a:srcRect/>
-                      <a:stretch>
-                        <a:fillRect/>
-                      </a:stretch>
-                    </p:blipFill>
-                    <p:spPr bwMode="auto">
-                      <a:xfrm>
-                        <a:off x="1322388" y="2909888"/>
-                        <a:ext cx="1711325" cy="1055687"/>
-                      </a:xfrm>
-                      <a:prstGeom prst="rect">
-                        <a:avLst/>
-                      </a:prstGeom>
-                      <a:noFill/>
-                      <a:extLst>
-                        <a:ext uri="{909E8E84-426E-40DD-AFC4-6F175D3DCCD1}">
-                          <a14:hiddenFill xmlns:a14="http://schemas.microsoft.com/office/drawing/2010/main">
-                            <a:solidFill>
-                              <a:srgbClr val="FFFFFF"/>
-                            </a:solidFill>
-                          </a14:hiddenFill>
-                        </a:ext>
-                      </a:extLst>
-                    </p:spPr>
-                  </p:pic>
-                </p:oleObj>
-              </mc:Fallback>
-            </mc:AlternateContent>
-          </a:graphicData>
-        </a:graphic>
-      </p:graphicFrame>
-    </p:spTree>
-  </p:cSld>
-  <p:clrMapOvr>
-    <a:masterClrMapping/>
-  </p:clrMapOvr>
-</p:sld>
-</file>
-
-<file path=ppt/slides/slide23.xml><?xml version="1.0" encoding="utf-8"?>
-<p:sld xmlns:a="http://schemas.openxmlformats.org/drawingml/2006/main" xmlns:r="http://schemas.openxmlformats.org/officeDocument/2006/relationships" xmlns:p="http://schemas.openxmlformats.org/presentationml/2006/main">
-  <p:cSld>
-    <p:spTree>
-      <p:nvGrpSpPr>
-        <p:cNvPr id="1" name=""/>
-        <p:cNvGrpSpPr/>
-        <p:nvPr/>
-      </p:nvGrpSpPr>
-      <p:grpSpPr>
-        <a:xfrm>
-          <a:off x="0" y="0"/>
-          <a:ext cx="0" cy="0"/>
-          <a:chOff x="0" y="0"/>
-          <a:chExt cx="0" cy="0"/>
-        </a:xfrm>
-      </p:grpSpPr>
-      <p:sp>
-        <p:nvSpPr>
-          <p:cNvPr id="3076" name="Rectangle 2"/>
-          <p:cNvSpPr>
-            <a:spLocks noGrp="1" noChangeArrowheads="1"/>
-          </p:cNvSpPr>
-          <p:nvPr>
-            <p:ph type="title"/>
-          </p:nvPr>
-        </p:nvSpPr>
-        <p:spPr/>
-        <p:txBody>
-          <a:bodyPr/>
-          <a:lstStyle/>
-          <a:p>
-            <a:pPr eaLnBrk="1" hangingPunct="1"/>
-            <a:r>
-              <a:rPr lang="en-US"/>
-              <a:t>Effect of </a:t>
-            </a:r>
-            <a:r>
-              <a:rPr lang="en-US">
-                <a:sym typeface="Symbol" pitchFamily="18" charset="2"/>
-              </a:rPr>
-              <a:t></a:t>
-            </a:r>
-          </a:p>
-        </p:txBody>
-      </p:sp>
-      <p:sp>
-        <p:nvSpPr>
-          <p:cNvPr id="3077" name="Rectangle 3"/>
-          <p:cNvSpPr>
-            <a:spLocks noGrp="1" noChangeArrowheads="1"/>
-          </p:cNvSpPr>
-          <p:nvPr>
-            <p:ph type="body" idx="1"/>
-          </p:nvPr>
-        </p:nvSpPr>
-        <p:spPr>
-          <a:xfrm>
-            <a:off x="457200" y="1600200"/>
-            <a:ext cx="3613150" cy="4525963"/>
-          </a:xfrm>
-        </p:spPr>
-        <p:txBody>
-          <a:bodyPr/>
-          <a:lstStyle/>
-          <a:p>
-            <a:pPr eaLnBrk="1" hangingPunct="1"/>
-            <a:r>
-              <a:rPr lang="en-US"/>
-              <a:t>Same example, but with different values of </a:t>
-            </a:r>
-            <a:r>
-              <a:rPr lang="en-US">
-                <a:sym typeface="Symbol" pitchFamily="18" charset="2"/>
-              </a:rPr>
-              <a:t></a:t>
-            </a:r>
-            <a:r>
-              <a:rPr lang="en-US"/>
-              <a:t> </a:t>
-            </a:r>
-          </a:p>
-        </p:txBody>
-      </p:sp>
-      <p:pic>
-        <p:nvPicPr>
-          <p:cNvPr id="3078" name="Picture 4"/>
-          <p:cNvPicPr>
-            <a:picLocks noChangeAspect="1" noChangeArrowheads="1"/>
-          </p:cNvPicPr>
-          <p:nvPr/>
-        </p:nvPicPr>
-        <p:blipFill>
-          <a:blip r:embed="rId2" cstate="print"/>
-          <a:srcRect/>
-          <a:stretch>
-            <a:fillRect/>
-          </a:stretch>
-        </p:blipFill>
-        <p:spPr bwMode="auto">
-          <a:xfrm>
-            <a:off x="4173538" y="2097088"/>
-            <a:ext cx="4521200" cy="3014662"/>
-          </a:xfrm>
-          <a:prstGeom prst="rect">
-            <a:avLst/>
-          </a:prstGeom>
-          <a:noFill/>
-          <a:ln w="9525" algn="ctr">
-            <a:noFill/>
-            <a:miter lim="800000"/>
-            <a:headEnd/>
-            <a:tailEnd/>
-          </a:ln>
-        </p:spPr>
-      </p:pic>
-      <p:graphicFrame>
-        <p:nvGraphicFramePr>
-          <p:cNvPr id="3074" name="Object 5"/>
-          <p:cNvGraphicFramePr>
-            <a:graphicFrameLocks noChangeAspect="1"/>
-          </p:cNvGraphicFramePr>
-          <p:nvPr/>
-        </p:nvGraphicFramePr>
-        <p:xfrm>
-          <a:off x="5557838" y="5305425"/>
-          <a:ext cx="2019300" cy="428625"/>
-        </p:xfrm>
-        <a:graphic>
-          <a:graphicData uri="http://schemas.openxmlformats.org/presentationml/2006/ole">
-            <mc:AlternateContent xmlns:mc="http://schemas.openxmlformats.org/markup-compatibility/2006">
-              <mc:Choice xmlns:v="urn:schemas-microsoft-com:vml" Requires="v">
-                <p:oleObj name="Equation" r:id="rId3" imgW="2019300" imgH="431800" progId="Equation.3">
-                  <p:embed/>
-                </p:oleObj>
-              </mc:Choice>
-              <mc:Fallback>
-                <p:oleObj name="Equation" r:id="rId3" imgW="2019300" imgH="431800" progId="Equation.3">
-                  <p:embed/>
-                  <p:pic>
-                    <p:nvPicPr>
-                      <p:cNvPr id="3074" name="Object 5"/>
-                      <p:cNvPicPr>
-                        <a:picLocks noChangeAspect="1" noChangeArrowheads="1"/>
-                      </p:cNvPicPr>
-                      <p:nvPr/>
-                    </p:nvPicPr>
-                    <p:blipFill>
-                      <a:blip r:embed="rId4">
-                        <a:extLst>
-                          <a:ext uri="{28A0092B-C50C-407E-A947-70E740481C1C}">
-                            <a14:useLocalDpi xmlns:a14="http://schemas.microsoft.com/office/drawing/2010/main" val="0"/>
-                          </a:ext>
-                        </a:extLst>
-                      </a:blip>
-                      <a:srcRect/>
-                      <a:stretch>
-                        <a:fillRect/>
-                      </a:stretch>
-                    </p:blipFill>
-                    <p:spPr bwMode="auto">
-                      <a:xfrm>
-                        <a:off x="5557838" y="5305425"/>
-                        <a:ext cx="2019300" cy="428625"/>
-                      </a:xfrm>
-                      <a:prstGeom prst="rect">
-                        <a:avLst/>
-                      </a:prstGeom>
-                      <a:noFill/>
-                      <a:extLst>
-                        <a:ext uri="{909E8E84-426E-40DD-AFC4-6F175D3DCCD1}">
-                          <a14:hiddenFill xmlns:a14="http://schemas.microsoft.com/office/drawing/2010/main">
-                            <a:solidFill>
-                              <a:srgbClr val="FFFFFF"/>
-                            </a:solidFill>
-                          </a14:hiddenFill>
-                        </a:ext>
-                      </a:extLst>
-                    </p:spPr>
-                  </p:pic>
-                </p:oleObj>
-              </mc:Fallback>
-            </mc:AlternateContent>
-          </a:graphicData>
-        </a:graphic>
-      </p:graphicFrame>
-      <p:graphicFrame>
-        <p:nvGraphicFramePr>
-          <p:cNvPr id="3075" name="Object 6"/>
-          <p:cNvGraphicFramePr>
-            <a:graphicFrameLocks noChangeAspect="1"/>
-          </p:cNvGraphicFramePr>
-          <p:nvPr/>
-        </p:nvGraphicFramePr>
-        <p:xfrm>
-          <a:off x="8201025" y="4760913"/>
-          <a:ext cx="419100" cy="1343025"/>
-        </p:xfrm>
-        <a:graphic>
-          <a:graphicData uri="http://schemas.openxmlformats.org/presentationml/2006/ole">
-            <mc:AlternateContent xmlns:mc="http://schemas.openxmlformats.org/markup-compatibility/2006">
-              <mc:Choice xmlns:v="urn:schemas-microsoft-com:vml" Requires="v">
-                <p:oleObj name="Equation" r:id="rId5" imgW="419040" imgH="1346040" progId="Equation.3">
-                  <p:embed/>
-                </p:oleObj>
-              </mc:Choice>
-              <mc:Fallback>
-                <p:oleObj name="Equation" r:id="rId5" imgW="419040" imgH="1346040" progId="Equation.3">
-                  <p:embed/>
-                  <p:pic>
-                    <p:nvPicPr>
-                      <p:cNvPr id="3075" name="Object 6"/>
-                      <p:cNvPicPr>
-                        <a:picLocks noChangeAspect="1" noChangeArrowheads="1"/>
-                      </p:cNvPicPr>
-                      <p:nvPr/>
-                    </p:nvPicPr>
-                    <p:blipFill>
-                      <a:blip r:embed="rId6">
-                        <a:extLst>
-                          <a:ext uri="{28A0092B-C50C-407E-A947-70E740481C1C}">
-                            <a14:useLocalDpi xmlns:a14="http://schemas.microsoft.com/office/drawing/2010/main" val="0"/>
-                          </a:ext>
-                        </a:extLst>
-                      </a:blip>
-                      <a:srcRect/>
-                      <a:stretch>
-                        <a:fillRect/>
-                      </a:stretch>
-                    </p:blipFill>
-                    <p:spPr bwMode="auto">
-                      <a:xfrm>
-                        <a:off x="8201025" y="4760913"/>
-                        <a:ext cx="419100" cy="1343025"/>
-                      </a:xfrm>
-                      <a:prstGeom prst="rect">
-                        <a:avLst/>
-                      </a:prstGeom>
-                      <a:noFill/>
-                      <a:extLst>
-                        <a:ext uri="{909E8E84-426E-40DD-AFC4-6F175D3DCCD1}">
-                          <a14:hiddenFill xmlns:a14="http://schemas.microsoft.com/office/drawing/2010/main">
-                            <a:solidFill>
-                              <a:srgbClr val="FFFFFF"/>
-                            </a:solidFill>
-                          </a14:hiddenFill>
-                        </a:ext>
-                      </a:extLst>
-                    </p:spPr>
-                  </p:pic>
-                </p:oleObj>
-              </mc:Fallback>
-            </mc:AlternateContent>
-          </a:graphicData>
-        </a:graphic>
-      </p:graphicFrame>
-    </p:spTree>
-  </p:cSld>
-  <p:clrMapOvr>
-    <a:masterClrMapping/>
-  </p:clrMapOvr>
-</p:sld>
-</file>
-
-<file path=ppt/slides/slide24.xml><?xml version="1.0" encoding="utf-8"?>
-<p:sld xmlns:a="http://schemas.openxmlformats.org/drawingml/2006/main" xmlns:r="http://schemas.openxmlformats.org/officeDocument/2006/relationships" xmlns:p="http://schemas.openxmlformats.org/presentationml/2006/main">
-  <p:cSld>
-    <p:spTree>
-      <p:nvGrpSpPr>
-        <p:cNvPr id="1" name=""/>
-        <p:cNvGrpSpPr/>
-        <p:nvPr/>
-      </p:nvGrpSpPr>
-      <p:grpSpPr>
-        <a:xfrm>
-          <a:off x="0" y="0"/>
-          <a:ext cx="0" cy="0"/>
-          <a:chOff x="0" y="0"/>
-          <a:chExt cx="0" cy="0"/>
-        </a:xfrm>
-      </p:grpSpPr>
-      <p:sp>
-        <p:nvSpPr>
           <p:cNvPr id="58370" name="Date Placeholder 3"/>
           <p:cNvSpPr>
             <a:spLocks noGrp="1"/>
@@ -9237,7 +6534,7 @@
             <a:fld id="{020877BE-92C3-491C-93AD-A4AD9F2A15F2}" type="slidenum">
               <a:rPr lang="en-US" smtClean="0"/>
               <a:pPr/>
-              <a:t>24</a:t>
+              <a:t>15</a:t>
             </a:fld>
             <a:endParaRPr lang="en-US"/>
           </a:p>
@@ -9366,7 +6663,7 @@
 </p:sld>
 </file>
 
-<file path=ppt/slides/slide25.xml><?xml version="1.0" encoding="utf-8"?>
+<file path=ppt/slides/slide16.xml><?xml version="1.0" encoding="utf-8"?>
 <p:sld xmlns:a="http://schemas.openxmlformats.org/drawingml/2006/main" xmlns:r="http://schemas.openxmlformats.org/officeDocument/2006/relationships" xmlns:p="http://schemas.openxmlformats.org/presentationml/2006/main">
   <p:cSld>
     <p:spTree>
@@ -10697,7 +7994,7 @@
 </p:sld>
 </file>
 
-<file path=ppt/slides/slide26.xml><?xml version="1.0" encoding="utf-8"?>
+<file path=ppt/slides/slide17.xml><?xml version="1.0" encoding="utf-8"?>
 <p:sld xmlns:a="http://schemas.openxmlformats.org/drawingml/2006/main" xmlns:r="http://schemas.openxmlformats.org/officeDocument/2006/relationships" xmlns:p="http://schemas.openxmlformats.org/presentationml/2006/main">
   <p:cSld>
     <p:spTree>
@@ -10773,7 +8070,7 @@
 </p:sld>
 </file>
 
-<file path=ppt/slides/slide27.xml><?xml version="1.0" encoding="utf-8"?>
+<file path=ppt/slides/slide18.xml><?xml version="1.0" encoding="utf-8"?>
 <p:sld xmlns:a="http://schemas.openxmlformats.org/drawingml/2006/main" xmlns:r="http://schemas.openxmlformats.org/officeDocument/2006/relationships" xmlns:p="http://schemas.openxmlformats.org/presentationml/2006/main">
   <p:cSld>
     <p:spTree>
@@ -10858,7 +8155,7 @@
             <a:fld id="{186E64E3-294D-42DF-BB91-93B1EBA0D53D}" type="slidenum">
               <a:rPr lang="en-US" smtClean="0"/>
               <a:pPr/>
-              <a:t>27</a:t>
+              <a:t>18</a:t>
             </a:fld>
             <a:endParaRPr lang="en-US"/>
           </a:p>
@@ -12873,7 +10170,7 @@
 </p:sld>
 </file>
 
-<file path=ppt/slides/slide28.xml><?xml version="1.0" encoding="utf-8"?>
+<file path=ppt/slides/slide19.xml><?xml version="1.0" encoding="utf-8"?>
 <p:sld xmlns:a="http://schemas.openxmlformats.org/drawingml/2006/main" xmlns:r="http://schemas.openxmlformats.org/officeDocument/2006/relationships" xmlns:p="http://schemas.openxmlformats.org/presentationml/2006/main">
   <p:cSld>
     <p:spTree>
@@ -12958,7 +10255,7 @@
             <a:fld id="{D031D312-1489-4696-8AD3-D2B5D5D832E9}" type="slidenum">
               <a:rPr lang="en-US" smtClean="0"/>
               <a:pPr/>
-              <a:t>28</a:t>
+              <a:t>19</a:t>
             </a:fld>
             <a:endParaRPr lang="en-US"/>
           </a:p>
@@ -13857,7 +11154,141 @@
 </p:sld>
 </file>
 
-<file path=ppt/slides/slide29.xml><?xml version="1.0" encoding="utf-8"?>
+<file path=ppt/slides/slide2.xml><?xml version="1.0" encoding="utf-8"?>
+<p:sld xmlns:a="http://schemas.openxmlformats.org/drawingml/2006/main" xmlns:r="http://schemas.openxmlformats.org/officeDocument/2006/relationships" xmlns:p="http://schemas.openxmlformats.org/presentationml/2006/main">
+  <p:cSld>
+    <p:spTree>
+      <p:nvGrpSpPr>
+        <p:cNvPr id="1" name=""/>
+        <p:cNvGrpSpPr/>
+        <p:nvPr/>
+      </p:nvGrpSpPr>
+      <p:grpSpPr>
+        <a:xfrm>
+          <a:off x="0" y="0"/>
+          <a:ext cx="0" cy="0"/>
+          <a:chOff x="0" y="0"/>
+          <a:chExt cx="0" cy="0"/>
+        </a:xfrm>
+      </p:grpSpPr>
+      <p:sp>
+        <p:nvSpPr>
+          <p:cNvPr id="2" name="Title 1">
+            <a:extLst>
+              <a:ext uri="{FF2B5EF4-FFF2-40B4-BE49-F238E27FC236}">
+                <a16:creationId xmlns:a16="http://schemas.microsoft.com/office/drawing/2014/main" id="{F7747494-7078-AAFC-9338-9250A519BA53}"/>
+              </a:ext>
+            </a:extLst>
+          </p:cNvPr>
+          <p:cNvSpPr>
+            <a:spLocks noGrp="1"/>
+          </p:cNvSpPr>
+          <p:nvPr>
+            <p:ph type="title"/>
+          </p:nvPr>
+        </p:nvSpPr>
+        <p:spPr/>
+        <p:txBody>
+          <a:bodyPr/>
+          <a:lstStyle/>
+          <a:p>
+            <a:r>
+              <a:rPr lang="en-US" dirty="0"/>
+              <a:t>Question</a:t>
+            </a:r>
+          </a:p>
+        </p:txBody>
+      </p:sp>
+      <p:sp>
+        <p:nvSpPr>
+          <p:cNvPr id="3" name="Content Placeholder 2">
+            <a:extLst>
+              <a:ext uri="{FF2B5EF4-FFF2-40B4-BE49-F238E27FC236}">
+                <a16:creationId xmlns:a16="http://schemas.microsoft.com/office/drawing/2014/main" id="{68BAD010-38A8-C441-2B4B-5EEF4EC2FC37}"/>
+              </a:ext>
+            </a:extLst>
+          </p:cNvPr>
+          <p:cNvSpPr>
+            <a:spLocks noGrp="1"/>
+          </p:cNvSpPr>
+          <p:nvPr>
+            <p:ph idx="1"/>
+          </p:nvPr>
+        </p:nvSpPr>
+        <p:spPr/>
+        <p:txBody>
+          <a:bodyPr/>
+          <a:lstStyle/>
+          <a:p>
+            <a:pPr marL="0" indent="0">
+              <a:buNone/>
+            </a:pPr>
+            <a:r>
+              <a:rPr lang="en-US" dirty="0"/>
+              <a:t>The power delivered by a wave is proportional to </a:t>
+            </a:r>
+          </a:p>
+          <a:p>
+            <a:pPr marL="514350" indent="-514350">
+              <a:buFont typeface="+mj-lt"/>
+              <a:buAutoNum type="alphaLcParenR"/>
+            </a:pPr>
+            <a:r>
+              <a:rPr lang="en-US" dirty="0"/>
+              <a:t>The position of the end of the wave</a:t>
+            </a:r>
+          </a:p>
+          <a:p>
+            <a:pPr marL="514350" indent="-514350">
+              <a:buFont typeface="+mj-lt"/>
+              <a:buAutoNum type="alphaLcParenR"/>
+            </a:pPr>
+            <a:r>
+              <a:rPr lang="en-US" dirty="0"/>
+              <a:t>The mass of the medium</a:t>
+            </a:r>
+          </a:p>
+          <a:p>
+            <a:pPr marL="514350" indent="-514350">
+              <a:buFont typeface="+mj-lt"/>
+              <a:buAutoNum type="alphaLcParenR"/>
+            </a:pPr>
+            <a:r>
+              <a:rPr lang="en-US" dirty="0"/>
+              <a:t>The amplitude of the </a:t>
+            </a:r>
+            <a:r>
+              <a:rPr lang="en-US"/>
+              <a:t>wave squared</a:t>
+            </a:r>
+            <a:endParaRPr lang="en-US" dirty="0"/>
+          </a:p>
+          <a:p>
+            <a:pPr marL="514350" indent="-514350">
+              <a:buFont typeface="+mj-lt"/>
+              <a:buAutoNum type="alphaLcParenR"/>
+            </a:pPr>
+            <a:r>
+              <a:rPr lang="en-US" dirty="0"/>
+              <a:t>The period of the wave squared</a:t>
+            </a:r>
+          </a:p>
+        </p:txBody>
+      </p:sp>
+    </p:spTree>
+    <p:extLst>
+      <p:ext uri="{BB962C8B-B14F-4D97-AF65-F5344CB8AC3E}">
+        <p14:creationId xmlns:p14="http://schemas.microsoft.com/office/powerpoint/2010/main" val="3367812321"/>
+      </p:ext>
+    </p:extLst>
+  </p:cSld>
+  <p:clrMapOvr>
+    <a:masterClrMapping/>
+  </p:clrMapOvr>
+</p:sld>
+</file>
+
+<file path=ppt/slides/slide20.xml><?xml version="1.0" encoding="utf-8"?>
 <p:sld xmlns:a="http://schemas.openxmlformats.org/drawingml/2006/main" xmlns:r="http://schemas.openxmlformats.org/officeDocument/2006/relationships" xmlns:p="http://schemas.openxmlformats.org/presentationml/2006/main">
   <p:cSld>
     <p:spTree>
@@ -13942,7 +11373,7 @@
             <a:fld id="{308F9FDA-4605-470B-B956-789B87D2F90C}" type="slidenum">
               <a:rPr lang="en-US" smtClean="0"/>
               <a:pPr/>
-              <a:t>29</a:t>
+              <a:t>20</a:t>
             </a:fld>
             <a:endParaRPr lang="en-US"/>
           </a:p>
@@ -14007,701 +11438,7 @@
 </p:sld>
 </file>
 
-<file path=ppt/slides/slide3.xml><?xml version="1.0" encoding="utf-8"?>
-<p:sld xmlns:a="http://schemas.openxmlformats.org/drawingml/2006/main" xmlns:r="http://schemas.openxmlformats.org/officeDocument/2006/relationships" xmlns:p="http://schemas.openxmlformats.org/presentationml/2006/main">
-  <p:cSld>
-    <p:spTree>
-      <p:nvGrpSpPr>
-        <p:cNvPr id="1" name=""/>
-        <p:cNvGrpSpPr/>
-        <p:nvPr/>
-      </p:nvGrpSpPr>
-      <p:grpSpPr>
-        <a:xfrm>
-          <a:off x="0" y="0"/>
-          <a:ext cx="0" cy="0"/>
-          <a:chOff x="0" y="0"/>
-          <a:chExt cx="0" cy="0"/>
-        </a:xfrm>
-      </p:grpSpPr>
-      <p:sp>
-        <p:nvSpPr>
-          <p:cNvPr id="7" name="Rectangle 6">
-            <a:extLst>
-              <a:ext uri="{FF2B5EF4-FFF2-40B4-BE49-F238E27FC236}">
-                <a16:creationId xmlns:a16="http://schemas.microsoft.com/office/drawing/2014/main" id="{D8FD1B72-CCBE-CE40-E955-1FAE8C362531}"/>
-              </a:ext>
-            </a:extLst>
-          </p:cNvPr>
-          <p:cNvSpPr/>
-          <p:nvPr/>
-        </p:nvSpPr>
-        <p:spPr>
-          <a:xfrm>
-            <a:off x="1898904" y="935734"/>
-            <a:ext cx="149352" cy="3617978"/>
-          </a:xfrm>
-          <a:prstGeom prst="rect">
-            <a:avLst/>
-          </a:prstGeom>
-          <a:solidFill>
-            <a:schemeClr val="bg1">
-              <a:lumMod val="65000"/>
-            </a:schemeClr>
-          </a:solidFill>
-          <a:ln>
-            <a:noFill/>
-          </a:ln>
-        </p:spPr>
-        <p:style>
-          <a:lnRef idx="2">
-            <a:schemeClr val="accent1">
-              <a:shade val="15000"/>
-            </a:schemeClr>
-          </a:lnRef>
-          <a:fillRef idx="1">
-            <a:schemeClr val="accent1"/>
-          </a:fillRef>
-          <a:effectRef idx="0">
-            <a:schemeClr val="accent1"/>
-          </a:effectRef>
-          <a:fontRef idx="minor">
-            <a:schemeClr val="lt1"/>
-          </a:fontRef>
-        </p:style>
-        <p:txBody>
-          <a:bodyPr rtlCol="0" anchor="ctr"/>
-          <a:lstStyle/>
-          <a:p>
-            <a:pPr algn="ctr"/>
-            <a:endParaRPr lang="en-US"/>
-          </a:p>
-        </p:txBody>
-      </p:sp>
-      <p:sp>
-        <p:nvSpPr>
-          <p:cNvPr id="4" name="Rectangle 3">
-            <a:extLst>
-              <a:ext uri="{FF2B5EF4-FFF2-40B4-BE49-F238E27FC236}">
-                <a16:creationId xmlns:a16="http://schemas.microsoft.com/office/drawing/2014/main" id="{613C0366-ADBD-5FA5-A76A-CC6520D623DA}"/>
-              </a:ext>
-            </a:extLst>
-          </p:cNvPr>
-          <p:cNvSpPr/>
-          <p:nvPr/>
-        </p:nvSpPr>
-        <p:spPr>
-          <a:xfrm>
-            <a:off x="1143000" y="1517904"/>
-            <a:ext cx="2276856" cy="987552"/>
-          </a:xfrm>
-          <a:prstGeom prst="rect">
-            <a:avLst/>
-          </a:prstGeom>
-          <a:solidFill>
-            <a:schemeClr val="tx1">
-              <a:lumMod val="75000"/>
-              <a:lumOff val="25000"/>
-            </a:schemeClr>
-          </a:solidFill>
-          <a:ln>
-            <a:noFill/>
-          </a:ln>
-        </p:spPr>
-        <p:style>
-          <a:lnRef idx="2">
-            <a:schemeClr val="accent1">
-              <a:shade val="15000"/>
-            </a:schemeClr>
-          </a:lnRef>
-          <a:fillRef idx="1">
-            <a:schemeClr val="accent1"/>
-          </a:fillRef>
-          <a:effectRef idx="0">
-            <a:schemeClr val="accent1"/>
-          </a:effectRef>
-          <a:fontRef idx="minor">
-            <a:schemeClr val="lt1"/>
-          </a:fontRef>
-        </p:style>
-        <p:txBody>
-          <a:bodyPr rtlCol="0" anchor="ctr"/>
-          <a:lstStyle/>
-          <a:p>
-            <a:pPr algn="ctr"/>
-            <a:endParaRPr lang="en-US"/>
-          </a:p>
-        </p:txBody>
-      </p:sp>
-      <p:sp>
-        <p:nvSpPr>
-          <p:cNvPr id="5" name="Rectangle 4">
-            <a:extLst>
-              <a:ext uri="{FF2B5EF4-FFF2-40B4-BE49-F238E27FC236}">
-                <a16:creationId xmlns:a16="http://schemas.microsoft.com/office/drawing/2014/main" id="{8DEE0855-A788-A402-48A5-46F63F828A3E}"/>
-              </a:ext>
-            </a:extLst>
-          </p:cNvPr>
-          <p:cNvSpPr/>
-          <p:nvPr/>
-        </p:nvSpPr>
-        <p:spPr>
-          <a:xfrm>
-            <a:off x="3419856" y="1975104"/>
-            <a:ext cx="512064" cy="64008"/>
-          </a:xfrm>
-          <a:prstGeom prst="rect">
-            <a:avLst/>
-          </a:prstGeom>
-          <a:solidFill>
-            <a:schemeClr val="bg1">
-              <a:lumMod val="65000"/>
-            </a:schemeClr>
-          </a:solidFill>
-          <a:ln>
-            <a:noFill/>
-          </a:ln>
-        </p:spPr>
-        <p:style>
-          <a:lnRef idx="2">
-            <a:schemeClr val="accent1">
-              <a:shade val="15000"/>
-            </a:schemeClr>
-          </a:lnRef>
-          <a:fillRef idx="1">
-            <a:schemeClr val="accent1"/>
-          </a:fillRef>
-          <a:effectRef idx="0">
-            <a:schemeClr val="accent1"/>
-          </a:effectRef>
-          <a:fontRef idx="minor">
-            <a:schemeClr val="lt1"/>
-          </a:fontRef>
-        </p:style>
-        <p:txBody>
-          <a:bodyPr rtlCol="0" anchor="ctr"/>
-          <a:lstStyle/>
-          <a:p>
-            <a:pPr algn="ctr"/>
-            <a:endParaRPr lang="en-US"/>
-          </a:p>
-        </p:txBody>
-      </p:sp>
-      <p:sp>
-        <p:nvSpPr>
-          <p:cNvPr id="6" name="Rectangle 5">
-            <a:extLst>
-              <a:ext uri="{FF2B5EF4-FFF2-40B4-BE49-F238E27FC236}">
-                <a16:creationId xmlns:a16="http://schemas.microsoft.com/office/drawing/2014/main" id="{70FE5A38-89EB-A82A-AB61-B6D8415A3953}"/>
-              </a:ext>
-            </a:extLst>
-          </p:cNvPr>
-          <p:cNvSpPr/>
-          <p:nvPr/>
-        </p:nvSpPr>
-        <p:spPr>
-          <a:xfrm>
-            <a:off x="1143000" y="1972056"/>
-            <a:ext cx="2276856" cy="45719"/>
-          </a:xfrm>
-          <a:prstGeom prst="rect">
-            <a:avLst/>
-          </a:prstGeom>
-          <a:solidFill>
-            <a:schemeClr val="tx1">
-              <a:lumMod val="85000"/>
-              <a:lumOff val="15000"/>
-            </a:schemeClr>
-          </a:solidFill>
-          <a:ln>
-            <a:noFill/>
-          </a:ln>
-        </p:spPr>
-        <p:style>
-          <a:lnRef idx="2">
-            <a:schemeClr val="accent1">
-              <a:shade val="15000"/>
-            </a:schemeClr>
-          </a:lnRef>
-          <a:fillRef idx="1">
-            <a:schemeClr val="accent1"/>
-          </a:fillRef>
-          <a:effectRef idx="0">
-            <a:schemeClr val="accent1"/>
-          </a:effectRef>
-          <a:fontRef idx="minor">
-            <a:schemeClr val="lt1"/>
-          </a:fontRef>
-        </p:style>
-        <p:txBody>
-          <a:bodyPr rtlCol="0" anchor="ctr"/>
-          <a:lstStyle/>
-          <a:p>
-            <a:pPr algn="ctr"/>
-            <a:endParaRPr lang="en-US"/>
-          </a:p>
-        </p:txBody>
-      </p:sp>
-      <p:sp>
-        <p:nvSpPr>
-          <p:cNvPr id="9" name="Freeform: Shape 8">
-            <a:extLst>
-              <a:ext uri="{FF2B5EF4-FFF2-40B4-BE49-F238E27FC236}">
-                <a16:creationId xmlns:a16="http://schemas.microsoft.com/office/drawing/2014/main" id="{97BAF4FB-DA6A-6AD6-F1CC-6144FB3A9559}"/>
-              </a:ext>
-            </a:extLst>
-          </p:cNvPr>
-          <p:cNvSpPr/>
-          <p:nvPr/>
-        </p:nvSpPr>
-        <p:spPr>
-          <a:xfrm>
-            <a:off x="3931920" y="1443569"/>
-            <a:ext cx="3813048" cy="1148411"/>
-          </a:xfrm>
-          <a:custGeom>
-            <a:avLst/>
-            <a:gdLst>
-              <a:gd name="connsiteX0" fmla="*/ 0 w 5632704"/>
-              <a:gd name="connsiteY0" fmla="*/ 2062670 h 4110927"/>
-              <a:gd name="connsiteX1" fmla="*/ 841248 w 5632704"/>
-              <a:gd name="connsiteY1" fmla="*/ 60134 h 4110927"/>
-              <a:gd name="connsiteX2" fmla="*/ 2642616 w 5632704"/>
-              <a:gd name="connsiteY2" fmla="*/ 4110926 h 4110927"/>
-              <a:gd name="connsiteX3" fmla="*/ 4398264 w 5632704"/>
-              <a:gd name="connsiteY3" fmla="*/ 41846 h 4110927"/>
-              <a:gd name="connsiteX4" fmla="*/ 5632704 w 5632704"/>
-              <a:gd name="connsiteY4" fmla="*/ 3205670 h 4110927"/>
-              <a:gd name="connsiteX0" fmla="*/ 0 w 5632704"/>
-              <a:gd name="connsiteY0" fmla="*/ 2030402 h 4078696"/>
-              <a:gd name="connsiteX1" fmla="*/ 905256 w 5632704"/>
-              <a:gd name="connsiteY1" fmla="*/ 91874 h 4078696"/>
-              <a:gd name="connsiteX2" fmla="*/ 2642616 w 5632704"/>
-              <a:gd name="connsiteY2" fmla="*/ 4078658 h 4078696"/>
-              <a:gd name="connsiteX3" fmla="*/ 4398264 w 5632704"/>
-              <a:gd name="connsiteY3" fmla="*/ 9578 h 4078696"/>
-              <a:gd name="connsiteX4" fmla="*/ 5632704 w 5632704"/>
-              <a:gd name="connsiteY4" fmla="*/ 3173402 h 4078696"/>
-              <a:gd name="connsiteX0" fmla="*/ 0 w 5632704"/>
-              <a:gd name="connsiteY0" fmla="*/ 2030402 h 4078692"/>
-              <a:gd name="connsiteX1" fmla="*/ 905256 w 5632704"/>
-              <a:gd name="connsiteY1" fmla="*/ 91874 h 4078692"/>
-              <a:gd name="connsiteX2" fmla="*/ 2642616 w 5632704"/>
-              <a:gd name="connsiteY2" fmla="*/ 4078658 h 4078692"/>
-              <a:gd name="connsiteX3" fmla="*/ 4398264 w 5632704"/>
-              <a:gd name="connsiteY3" fmla="*/ 9578 h 4078692"/>
-              <a:gd name="connsiteX4" fmla="*/ 5632704 w 5632704"/>
-              <a:gd name="connsiteY4" fmla="*/ 3173402 h 4078692"/>
-              <a:gd name="connsiteX0" fmla="*/ 0 w 5632704"/>
-              <a:gd name="connsiteY0" fmla="*/ 2030402 h 4078673"/>
-              <a:gd name="connsiteX1" fmla="*/ 859536 w 5632704"/>
-              <a:gd name="connsiteY1" fmla="*/ 64442 h 4078673"/>
-              <a:gd name="connsiteX2" fmla="*/ 2642616 w 5632704"/>
-              <a:gd name="connsiteY2" fmla="*/ 4078658 h 4078673"/>
-              <a:gd name="connsiteX3" fmla="*/ 4398264 w 5632704"/>
-              <a:gd name="connsiteY3" fmla="*/ 9578 h 4078673"/>
-              <a:gd name="connsiteX4" fmla="*/ 5632704 w 5632704"/>
-              <a:gd name="connsiteY4" fmla="*/ 3173402 h 4078673"/>
-              <a:gd name="connsiteX0" fmla="*/ 0 w 5632704"/>
-              <a:gd name="connsiteY0" fmla="*/ 2030402 h 4078673"/>
-              <a:gd name="connsiteX1" fmla="*/ 859536 w 5632704"/>
-              <a:gd name="connsiteY1" fmla="*/ 64442 h 4078673"/>
-              <a:gd name="connsiteX2" fmla="*/ 2642616 w 5632704"/>
-              <a:gd name="connsiteY2" fmla="*/ 4078658 h 4078673"/>
-              <a:gd name="connsiteX3" fmla="*/ 4398264 w 5632704"/>
-              <a:gd name="connsiteY3" fmla="*/ 9578 h 4078673"/>
-              <a:gd name="connsiteX4" fmla="*/ 5632704 w 5632704"/>
-              <a:gd name="connsiteY4" fmla="*/ 3173402 h 4078673"/>
-              <a:gd name="connsiteX0" fmla="*/ 0 w 5632704"/>
-              <a:gd name="connsiteY0" fmla="*/ 2030402 h 4078673"/>
-              <a:gd name="connsiteX1" fmla="*/ 859536 w 5632704"/>
-              <a:gd name="connsiteY1" fmla="*/ 64442 h 4078673"/>
-              <a:gd name="connsiteX2" fmla="*/ 2642616 w 5632704"/>
-              <a:gd name="connsiteY2" fmla="*/ 4078658 h 4078673"/>
-              <a:gd name="connsiteX3" fmla="*/ 4398264 w 5632704"/>
-              <a:gd name="connsiteY3" fmla="*/ 9578 h 4078673"/>
-              <a:gd name="connsiteX4" fmla="*/ 5632704 w 5632704"/>
-              <a:gd name="connsiteY4" fmla="*/ 3173402 h 4078673"/>
-              <a:gd name="connsiteX0" fmla="*/ 0 w 5632704"/>
-              <a:gd name="connsiteY0" fmla="*/ 2030402 h 4078673"/>
-              <a:gd name="connsiteX1" fmla="*/ 859536 w 5632704"/>
-              <a:gd name="connsiteY1" fmla="*/ 64442 h 4078673"/>
-              <a:gd name="connsiteX2" fmla="*/ 2642616 w 5632704"/>
-              <a:gd name="connsiteY2" fmla="*/ 4078658 h 4078673"/>
-              <a:gd name="connsiteX3" fmla="*/ 4398264 w 5632704"/>
-              <a:gd name="connsiteY3" fmla="*/ 9578 h 4078673"/>
-              <a:gd name="connsiteX4" fmla="*/ 5632704 w 5632704"/>
-              <a:gd name="connsiteY4" fmla="*/ 3173402 h 4078673"/>
-              <a:gd name="connsiteX0" fmla="*/ 0 w 5632704"/>
-              <a:gd name="connsiteY0" fmla="*/ 2030402 h 4078673"/>
-              <a:gd name="connsiteX1" fmla="*/ 859536 w 5632704"/>
-              <a:gd name="connsiteY1" fmla="*/ 64442 h 4078673"/>
-              <a:gd name="connsiteX2" fmla="*/ 2642616 w 5632704"/>
-              <a:gd name="connsiteY2" fmla="*/ 4078658 h 4078673"/>
-              <a:gd name="connsiteX3" fmla="*/ 4398264 w 5632704"/>
-              <a:gd name="connsiteY3" fmla="*/ 9578 h 4078673"/>
-              <a:gd name="connsiteX4" fmla="*/ 5632704 w 5632704"/>
-              <a:gd name="connsiteY4" fmla="*/ 3173402 h 4078673"/>
-              <a:gd name="connsiteX0" fmla="*/ 0 w 5632704"/>
-              <a:gd name="connsiteY0" fmla="*/ 2030402 h 4078673"/>
-              <a:gd name="connsiteX1" fmla="*/ 859536 w 5632704"/>
-              <a:gd name="connsiteY1" fmla="*/ 64442 h 4078673"/>
-              <a:gd name="connsiteX2" fmla="*/ 2642616 w 5632704"/>
-              <a:gd name="connsiteY2" fmla="*/ 4078658 h 4078673"/>
-              <a:gd name="connsiteX3" fmla="*/ 4398264 w 5632704"/>
-              <a:gd name="connsiteY3" fmla="*/ 9578 h 4078673"/>
-              <a:gd name="connsiteX4" fmla="*/ 5632704 w 5632704"/>
-              <a:gd name="connsiteY4" fmla="*/ 3173402 h 4078673"/>
-              <a:gd name="connsiteX0" fmla="*/ 0 w 5632704"/>
-              <a:gd name="connsiteY0" fmla="*/ 2030402 h 4078673"/>
-              <a:gd name="connsiteX1" fmla="*/ 859536 w 5632704"/>
-              <a:gd name="connsiteY1" fmla="*/ 64442 h 4078673"/>
-              <a:gd name="connsiteX2" fmla="*/ 2642616 w 5632704"/>
-              <a:gd name="connsiteY2" fmla="*/ 4078658 h 4078673"/>
-              <a:gd name="connsiteX3" fmla="*/ 4398264 w 5632704"/>
-              <a:gd name="connsiteY3" fmla="*/ 9578 h 4078673"/>
-              <a:gd name="connsiteX4" fmla="*/ 5632704 w 5632704"/>
-              <a:gd name="connsiteY4" fmla="*/ 3173402 h 4078673"/>
-              <a:gd name="connsiteX0" fmla="*/ 0 w 5632704"/>
-              <a:gd name="connsiteY0" fmla="*/ 2030402 h 4078673"/>
-              <a:gd name="connsiteX1" fmla="*/ 859536 w 5632704"/>
-              <a:gd name="connsiteY1" fmla="*/ 64442 h 4078673"/>
-              <a:gd name="connsiteX2" fmla="*/ 2642616 w 5632704"/>
-              <a:gd name="connsiteY2" fmla="*/ 4078658 h 4078673"/>
-              <a:gd name="connsiteX3" fmla="*/ 4398264 w 5632704"/>
-              <a:gd name="connsiteY3" fmla="*/ 9578 h 4078673"/>
-              <a:gd name="connsiteX4" fmla="*/ 5632704 w 5632704"/>
-              <a:gd name="connsiteY4" fmla="*/ 3173402 h 4078673"/>
-              <a:gd name="connsiteX0" fmla="*/ 0 w 5632704"/>
-              <a:gd name="connsiteY0" fmla="*/ 2030402 h 4078673"/>
-              <a:gd name="connsiteX1" fmla="*/ 859536 w 5632704"/>
-              <a:gd name="connsiteY1" fmla="*/ 64442 h 4078673"/>
-              <a:gd name="connsiteX2" fmla="*/ 2642616 w 5632704"/>
-              <a:gd name="connsiteY2" fmla="*/ 4078658 h 4078673"/>
-              <a:gd name="connsiteX3" fmla="*/ 4398264 w 5632704"/>
-              <a:gd name="connsiteY3" fmla="*/ 9578 h 4078673"/>
-              <a:gd name="connsiteX4" fmla="*/ 5632704 w 5632704"/>
-              <a:gd name="connsiteY4" fmla="*/ 3173402 h 4078673"/>
-              <a:gd name="connsiteX0" fmla="*/ 0 w 5632704"/>
-              <a:gd name="connsiteY0" fmla="*/ 2030402 h 4078906"/>
-              <a:gd name="connsiteX1" fmla="*/ 859536 w 5632704"/>
-              <a:gd name="connsiteY1" fmla="*/ 64442 h 4078906"/>
-              <a:gd name="connsiteX2" fmla="*/ 2642616 w 5632704"/>
-              <a:gd name="connsiteY2" fmla="*/ 4078658 h 4078906"/>
-              <a:gd name="connsiteX3" fmla="*/ 4398264 w 5632704"/>
-              <a:gd name="connsiteY3" fmla="*/ 9578 h 4078906"/>
-              <a:gd name="connsiteX4" fmla="*/ 5632704 w 5632704"/>
-              <a:gd name="connsiteY4" fmla="*/ 3173402 h 4078906"/>
-              <a:gd name="connsiteX0" fmla="*/ 0 w 5632704"/>
-              <a:gd name="connsiteY0" fmla="*/ 2030402 h 4078798"/>
-              <a:gd name="connsiteX1" fmla="*/ 859536 w 5632704"/>
-              <a:gd name="connsiteY1" fmla="*/ 64442 h 4078798"/>
-              <a:gd name="connsiteX2" fmla="*/ 2642616 w 5632704"/>
-              <a:gd name="connsiteY2" fmla="*/ 4078658 h 4078798"/>
-              <a:gd name="connsiteX3" fmla="*/ 4398264 w 5632704"/>
-              <a:gd name="connsiteY3" fmla="*/ 9578 h 4078798"/>
-              <a:gd name="connsiteX4" fmla="*/ 5632704 w 5632704"/>
-              <a:gd name="connsiteY4" fmla="*/ 3173402 h 4078798"/>
-              <a:gd name="connsiteX0" fmla="*/ 0 w 5632704"/>
-              <a:gd name="connsiteY0" fmla="*/ 2030402 h 4078798"/>
-              <a:gd name="connsiteX1" fmla="*/ 859536 w 5632704"/>
-              <a:gd name="connsiteY1" fmla="*/ 64442 h 4078798"/>
-              <a:gd name="connsiteX2" fmla="*/ 2642616 w 5632704"/>
-              <a:gd name="connsiteY2" fmla="*/ 4078658 h 4078798"/>
-              <a:gd name="connsiteX3" fmla="*/ 4398264 w 5632704"/>
-              <a:gd name="connsiteY3" fmla="*/ 9578 h 4078798"/>
-              <a:gd name="connsiteX4" fmla="*/ 5632704 w 5632704"/>
-              <a:gd name="connsiteY4" fmla="*/ 3173402 h 4078798"/>
-              <a:gd name="connsiteX0" fmla="*/ 0 w 5632704"/>
-              <a:gd name="connsiteY0" fmla="*/ 2030402 h 4078798"/>
-              <a:gd name="connsiteX1" fmla="*/ 859536 w 5632704"/>
-              <a:gd name="connsiteY1" fmla="*/ 64442 h 4078798"/>
-              <a:gd name="connsiteX2" fmla="*/ 2642616 w 5632704"/>
-              <a:gd name="connsiteY2" fmla="*/ 4078658 h 4078798"/>
-              <a:gd name="connsiteX3" fmla="*/ 4398264 w 5632704"/>
-              <a:gd name="connsiteY3" fmla="*/ 9578 h 4078798"/>
-              <a:gd name="connsiteX4" fmla="*/ 5632704 w 5632704"/>
-              <a:gd name="connsiteY4" fmla="*/ 3173402 h 4078798"/>
-              <a:gd name="connsiteX0" fmla="*/ 0 w 5632704"/>
-              <a:gd name="connsiteY0" fmla="*/ 2030402 h 4078798"/>
-              <a:gd name="connsiteX1" fmla="*/ 859536 w 5632704"/>
-              <a:gd name="connsiteY1" fmla="*/ 64442 h 4078798"/>
-              <a:gd name="connsiteX2" fmla="*/ 2642616 w 5632704"/>
-              <a:gd name="connsiteY2" fmla="*/ 4078658 h 4078798"/>
-              <a:gd name="connsiteX3" fmla="*/ 4398264 w 5632704"/>
-              <a:gd name="connsiteY3" fmla="*/ 9578 h 4078798"/>
-              <a:gd name="connsiteX4" fmla="*/ 5632704 w 5632704"/>
-              <a:gd name="connsiteY4" fmla="*/ 3173402 h 4078798"/>
-              <a:gd name="connsiteX0" fmla="*/ 0 w 5632704"/>
-              <a:gd name="connsiteY0" fmla="*/ 2030402 h 4078798"/>
-              <a:gd name="connsiteX1" fmla="*/ 859536 w 5632704"/>
-              <a:gd name="connsiteY1" fmla="*/ 64442 h 4078798"/>
-              <a:gd name="connsiteX2" fmla="*/ 2642616 w 5632704"/>
-              <a:gd name="connsiteY2" fmla="*/ 4078658 h 4078798"/>
-              <a:gd name="connsiteX3" fmla="*/ 4398264 w 5632704"/>
-              <a:gd name="connsiteY3" fmla="*/ 9578 h 4078798"/>
-              <a:gd name="connsiteX4" fmla="*/ 5632704 w 5632704"/>
-              <a:gd name="connsiteY4" fmla="*/ 3173402 h 4078798"/>
-              <a:gd name="connsiteX0" fmla="*/ 0 w 5632704"/>
-              <a:gd name="connsiteY0" fmla="*/ 2030402 h 4097085"/>
-              <a:gd name="connsiteX1" fmla="*/ 859536 w 5632704"/>
-              <a:gd name="connsiteY1" fmla="*/ 64442 h 4097085"/>
-              <a:gd name="connsiteX2" fmla="*/ 2660904 w 5632704"/>
-              <a:gd name="connsiteY2" fmla="*/ 4096946 h 4097085"/>
-              <a:gd name="connsiteX3" fmla="*/ 4398264 w 5632704"/>
-              <a:gd name="connsiteY3" fmla="*/ 9578 h 4097085"/>
-              <a:gd name="connsiteX4" fmla="*/ 5632704 w 5632704"/>
-              <a:gd name="connsiteY4" fmla="*/ 3173402 h 4097085"/>
-              <a:gd name="connsiteX0" fmla="*/ 0 w 5632704"/>
-              <a:gd name="connsiteY0" fmla="*/ 2030402 h 4097085"/>
-              <a:gd name="connsiteX1" fmla="*/ 859536 w 5632704"/>
-              <a:gd name="connsiteY1" fmla="*/ 64442 h 4097085"/>
-              <a:gd name="connsiteX2" fmla="*/ 2660904 w 5632704"/>
-              <a:gd name="connsiteY2" fmla="*/ 4096946 h 4097085"/>
-              <a:gd name="connsiteX3" fmla="*/ 4398264 w 5632704"/>
-              <a:gd name="connsiteY3" fmla="*/ 9578 h 4097085"/>
-              <a:gd name="connsiteX4" fmla="*/ 5632704 w 5632704"/>
-              <a:gd name="connsiteY4" fmla="*/ 3173402 h 4097085"/>
-              <a:gd name="connsiteX0" fmla="*/ 0 w 5632704"/>
-              <a:gd name="connsiteY0" fmla="*/ 1975837 h 4042520"/>
-              <a:gd name="connsiteX1" fmla="*/ 859536 w 5632704"/>
-              <a:gd name="connsiteY1" fmla="*/ 9877 h 4042520"/>
-              <a:gd name="connsiteX2" fmla="*/ 2660904 w 5632704"/>
-              <a:gd name="connsiteY2" fmla="*/ 4042381 h 4042520"/>
-              <a:gd name="connsiteX3" fmla="*/ 4398264 w 5632704"/>
-              <a:gd name="connsiteY3" fmla="*/ 9877 h 4042520"/>
-              <a:gd name="connsiteX4" fmla="*/ 5632704 w 5632704"/>
-              <a:gd name="connsiteY4" fmla="*/ 3118837 h 4042520"/>
-              <a:gd name="connsiteX0" fmla="*/ 0 w 5632704"/>
-              <a:gd name="connsiteY0" fmla="*/ 1975837 h 4042520"/>
-              <a:gd name="connsiteX1" fmla="*/ 859536 w 5632704"/>
-              <a:gd name="connsiteY1" fmla="*/ 9877 h 4042520"/>
-              <a:gd name="connsiteX2" fmla="*/ 2660904 w 5632704"/>
-              <a:gd name="connsiteY2" fmla="*/ 4042381 h 4042520"/>
-              <a:gd name="connsiteX3" fmla="*/ 4398264 w 5632704"/>
-              <a:gd name="connsiteY3" fmla="*/ 9877 h 4042520"/>
-              <a:gd name="connsiteX4" fmla="*/ 5632704 w 5632704"/>
-              <a:gd name="connsiteY4" fmla="*/ 3118837 h 4042520"/>
-              <a:gd name="connsiteX0" fmla="*/ 0 w 5632704"/>
-              <a:gd name="connsiteY0" fmla="*/ 1975837 h 4042520"/>
-              <a:gd name="connsiteX1" fmla="*/ 859536 w 5632704"/>
-              <a:gd name="connsiteY1" fmla="*/ 9877 h 4042520"/>
-              <a:gd name="connsiteX2" fmla="*/ 2660904 w 5632704"/>
-              <a:gd name="connsiteY2" fmla="*/ 4042381 h 4042520"/>
-              <a:gd name="connsiteX3" fmla="*/ 4398264 w 5632704"/>
-              <a:gd name="connsiteY3" fmla="*/ 9877 h 4042520"/>
-              <a:gd name="connsiteX4" fmla="*/ 5632704 w 5632704"/>
-              <a:gd name="connsiteY4" fmla="*/ 3118837 h 4042520"/>
-              <a:gd name="connsiteX0" fmla="*/ 0 w 5632704"/>
-              <a:gd name="connsiteY0" fmla="*/ 1967657 h 4034340"/>
-              <a:gd name="connsiteX1" fmla="*/ 859536 w 5632704"/>
-              <a:gd name="connsiteY1" fmla="*/ 1697 h 4034340"/>
-              <a:gd name="connsiteX2" fmla="*/ 2660904 w 5632704"/>
-              <a:gd name="connsiteY2" fmla="*/ 4034201 h 4034340"/>
-              <a:gd name="connsiteX3" fmla="*/ 4398264 w 5632704"/>
-              <a:gd name="connsiteY3" fmla="*/ 1697 h 4034340"/>
-              <a:gd name="connsiteX4" fmla="*/ 5632704 w 5632704"/>
-              <a:gd name="connsiteY4" fmla="*/ 3110657 h 4034340"/>
-              <a:gd name="connsiteX0" fmla="*/ 0 w 5632704"/>
-              <a:gd name="connsiteY0" fmla="*/ 1967648 h 4034331"/>
-              <a:gd name="connsiteX1" fmla="*/ 859536 w 5632704"/>
-              <a:gd name="connsiteY1" fmla="*/ 1688 h 4034331"/>
-              <a:gd name="connsiteX2" fmla="*/ 2660904 w 5632704"/>
-              <a:gd name="connsiteY2" fmla="*/ 4034192 h 4034331"/>
-              <a:gd name="connsiteX3" fmla="*/ 4398264 w 5632704"/>
-              <a:gd name="connsiteY3" fmla="*/ 1688 h 4034331"/>
-              <a:gd name="connsiteX4" fmla="*/ 5632704 w 5632704"/>
-              <a:gd name="connsiteY4" fmla="*/ 3110648 h 4034331"/>
-            </a:gdLst>
-            <a:ahLst/>
-            <a:cxnLst>
-              <a:cxn ang="0">
-                <a:pos x="connsiteX0" y="connsiteY0"/>
-              </a:cxn>
-              <a:cxn ang="0">
-                <a:pos x="connsiteX1" y="connsiteY1"/>
-              </a:cxn>
-              <a:cxn ang="0">
-                <a:pos x="connsiteX2" y="connsiteY2"/>
-              </a:cxn>
-              <a:cxn ang="0">
-                <a:pos x="connsiteX3" y="connsiteY3"/>
-              </a:cxn>
-              <a:cxn ang="0">
-                <a:pos x="connsiteX4" y="connsiteY4"/>
-              </a:cxn>
-            </a:cxnLst>
-            <a:rect l="l" t="t" r="r" b="b"/>
-            <a:pathLst>
-              <a:path w="5632704" h="4034331">
-                <a:moveTo>
-                  <a:pt x="0" y="1967648"/>
-                </a:moveTo>
-                <a:cubicBezTo>
-                  <a:pt x="273558" y="804836"/>
-                  <a:pt x="620268" y="-28792"/>
-                  <a:pt x="859536" y="1688"/>
-                </a:cubicBezTo>
-                <a:cubicBezTo>
-                  <a:pt x="1537716" y="32168"/>
-                  <a:pt x="2025396" y="4061624"/>
-                  <a:pt x="2660904" y="4034192"/>
-                </a:cubicBezTo>
-                <a:cubicBezTo>
-                  <a:pt x="3259836" y="4025048"/>
-                  <a:pt x="3790188" y="115988"/>
-                  <a:pt x="4398264" y="1688"/>
-                </a:cubicBezTo>
-                <a:cubicBezTo>
-                  <a:pt x="4777740" y="-57748"/>
-                  <a:pt x="5200650" y="1462442"/>
-                  <a:pt x="5632704" y="3110648"/>
-                </a:cubicBezTo>
-              </a:path>
-            </a:pathLst>
-          </a:custGeom>
-          <a:noFill/>
-          <a:ln w="76200">
-            <a:solidFill>
-              <a:schemeClr val="accent6">
-                <a:lumMod val="60000"/>
-                <a:lumOff val="40000"/>
-              </a:schemeClr>
-            </a:solidFill>
-          </a:ln>
-        </p:spPr>
-        <p:style>
-          <a:lnRef idx="2">
-            <a:schemeClr val="accent1">
-              <a:shade val="15000"/>
-            </a:schemeClr>
-          </a:lnRef>
-          <a:fillRef idx="1">
-            <a:schemeClr val="accent1"/>
-          </a:fillRef>
-          <a:effectRef idx="0">
-            <a:schemeClr val="accent1"/>
-          </a:effectRef>
-          <a:fontRef idx="minor">
-            <a:schemeClr val="lt1"/>
-          </a:fontRef>
-        </p:style>
-        <p:txBody>
-          <a:bodyPr rtlCol="0" anchor="ctr"/>
-          <a:lstStyle/>
-          <a:p>
-            <a:pPr algn="ctr"/>
-            <a:endParaRPr lang="en-US"/>
-          </a:p>
-        </p:txBody>
-      </p:sp>
-      <p:sp>
-        <p:nvSpPr>
-          <p:cNvPr id="10" name="Cylinder 9">
-            <a:extLst>
-              <a:ext uri="{FF2B5EF4-FFF2-40B4-BE49-F238E27FC236}">
-                <a16:creationId xmlns:a16="http://schemas.microsoft.com/office/drawing/2014/main" id="{72AF48F9-FB2B-4063-8E03-104E1C15DF2D}"/>
-              </a:ext>
-            </a:extLst>
-          </p:cNvPr>
-          <p:cNvSpPr/>
-          <p:nvPr/>
-        </p:nvSpPr>
-        <p:spPr>
-          <a:xfrm rot="2488798">
-            <a:off x="4138531" y="1564117"/>
-            <a:ext cx="74456" cy="188896"/>
-          </a:xfrm>
-          <a:prstGeom prst="can">
-            <a:avLst/>
-          </a:prstGeom>
-          <a:solidFill>
-            <a:schemeClr val="tx1">
-              <a:lumMod val="75000"/>
-              <a:lumOff val="25000"/>
-            </a:schemeClr>
-          </a:solidFill>
-          <a:ln>
-            <a:noFill/>
-          </a:ln>
-        </p:spPr>
-        <p:style>
-          <a:lnRef idx="2">
-            <a:schemeClr val="accent1">
-              <a:shade val="15000"/>
-            </a:schemeClr>
-          </a:lnRef>
-          <a:fillRef idx="1">
-            <a:schemeClr val="accent1"/>
-          </a:fillRef>
-          <a:effectRef idx="0">
-            <a:schemeClr val="accent1"/>
-          </a:effectRef>
-          <a:fontRef idx="minor">
-            <a:schemeClr val="lt1"/>
-          </a:fontRef>
-        </p:style>
-        <p:txBody>
-          <a:bodyPr rtlCol="0" anchor="ctr"/>
-          <a:lstStyle/>
-          <a:p>
-            <a:pPr algn="ctr"/>
-            <a:endParaRPr lang="en-US"/>
-          </a:p>
-        </p:txBody>
-      </p:sp>
-      <p:sp>
-        <p:nvSpPr>
-          <p:cNvPr id="11" name="TextBox 10">
-            <a:extLst>
-              <a:ext uri="{FF2B5EF4-FFF2-40B4-BE49-F238E27FC236}">
-                <a16:creationId xmlns:a16="http://schemas.microsoft.com/office/drawing/2014/main" id="{E7585B40-CC23-8828-633D-7F296358D19A}"/>
-              </a:ext>
-            </a:extLst>
-          </p:cNvPr>
-          <p:cNvSpPr txBox="1"/>
-          <p:nvPr/>
-        </p:nvSpPr>
-        <p:spPr>
-          <a:xfrm>
-            <a:off x="4077796" y="1625583"/>
-            <a:ext cx="567784" cy="369332"/>
-          </a:xfrm>
-          <a:prstGeom prst="rect">
-            <a:avLst/>
-          </a:prstGeom>
-          <a:noFill/>
-        </p:spPr>
-        <p:txBody>
-          <a:bodyPr wrap="none" rtlCol="0">
-            <a:spAutoFit/>
-          </a:bodyPr>
-          <a:lstStyle/>
-          <a:p>
-            <a:r>
-              <a:rPr lang="en-US" dirty="0">
-                <a:sym typeface="Symbol" panose="05050102010706020507" pitchFamily="18" charset="2"/>
-              </a:rPr>
-              <a:t>m</a:t>
-            </a:r>
-            <a:endParaRPr lang="en-US" dirty="0"/>
-          </a:p>
-        </p:txBody>
-      </p:sp>
-    </p:spTree>
-    <p:extLst>
-      <p:ext uri="{BB962C8B-B14F-4D97-AF65-F5344CB8AC3E}">
-        <p14:creationId xmlns:p14="http://schemas.microsoft.com/office/powerpoint/2010/main" val="1643441071"/>
-      </p:ext>
-    </p:extLst>
-  </p:cSld>
-  <p:clrMapOvr>
-    <a:masterClrMapping/>
-  </p:clrMapOvr>
-</p:sld>
-</file>
-
-<file path=ppt/slides/slide30.xml><?xml version="1.0" encoding="utf-8"?>
+<file path=ppt/slides/slide21.xml><?xml version="1.0" encoding="utf-8"?>
 <p:sld xmlns:a="http://schemas.openxmlformats.org/drawingml/2006/main" xmlns:r="http://schemas.openxmlformats.org/officeDocument/2006/relationships" xmlns:p="http://schemas.openxmlformats.org/presentationml/2006/main">
   <p:cSld>
     <p:spTree>
@@ -15994,7 +12731,7 @@
 </p:sld>
 </file>
 
-<file path=ppt/slides/slide31.xml><?xml version="1.0" encoding="utf-8"?>
+<file path=ppt/slides/slide22.xml><?xml version="1.0" encoding="utf-8"?>
 <p:sld xmlns:a="http://schemas.openxmlformats.org/drawingml/2006/main" xmlns:r="http://schemas.openxmlformats.org/officeDocument/2006/relationships" xmlns:p="http://schemas.openxmlformats.org/presentationml/2006/main">
   <p:cSld>
     <p:spTree>
@@ -16070,7 +12807,7 @@
 </p:sld>
 </file>
 
-<file path=ppt/slides/slide32.xml><?xml version="1.0" encoding="utf-8"?>
+<file path=ppt/slides/slide23.xml><?xml version="1.0" encoding="utf-8"?>
 <p:sld xmlns:a="http://schemas.openxmlformats.org/drawingml/2006/main" xmlns:r="http://schemas.openxmlformats.org/officeDocument/2006/relationships" xmlns:p="http://schemas.openxmlformats.org/presentationml/2006/main">
   <p:cSld>
     <p:spTree>
@@ -16155,7 +12892,7 @@
             <a:fld id="{59D292EC-ADB3-4B5F-956B-BE6C725E96E4}" type="slidenum">
               <a:rPr lang="en-US" smtClean="0"/>
               <a:pPr/>
-              <a:t>32</a:t>
+              <a:t>23</a:t>
             </a:fld>
             <a:endParaRPr lang="en-US"/>
           </a:p>
@@ -17852,7 +14589,7 @@
 </p:sld>
 </file>
 
-<file path=ppt/slides/slide33.xml><?xml version="1.0" encoding="utf-8"?>
+<file path=ppt/slides/slide24.xml><?xml version="1.0" encoding="utf-8"?>
 <p:sld xmlns:a="http://schemas.openxmlformats.org/drawingml/2006/main" xmlns:r="http://schemas.openxmlformats.org/officeDocument/2006/relationships" xmlns:p="http://schemas.openxmlformats.org/presentationml/2006/main">
   <p:cSld>
     <p:spTree>
@@ -17937,7 +14674,7 @@
             <a:fld id="{FEC60645-FEDE-4321-8C90-8A445AB3CA12}" type="slidenum">
               <a:rPr lang="en-US" smtClean="0"/>
               <a:pPr/>
-              <a:t>33</a:t>
+              <a:t>24</a:t>
             </a:fld>
             <a:endParaRPr lang="en-US"/>
           </a:p>
@@ -18127,7 +14864,7 @@
 </p:sld>
 </file>
 
-<file path=ppt/slides/slide34.xml><?xml version="1.0" encoding="utf-8"?>
+<file path=ppt/slides/slide25.xml><?xml version="1.0" encoding="utf-8"?>
 <p:sld xmlns:a="http://schemas.openxmlformats.org/drawingml/2006/main" xmlns:r="http://schemas.openxmlformats.org/officeDocument/2006/relationships" xmlns:p="http://schemas.openxmlformats.org/presentationml/2006/main">
   <p:cSld>
     <p:spTree>
@@ -18212,7 +14949,7 @@
             <a:fld id="{8AE0FC15-F05C-481F-90B8-18635F0468E7}" type="slidenum">
               <a:rPr lang="en-US" smtClean="0"/>
               <a:pPr/>
-              <a:t>34</a:t>
+              <a:t>25</a:t>
             </a:fld>
             <a:endParaRPr lang="en-US"/>
           </a:p>
@@ -20151,7 +16888,1530 @@
 </p:sld>
 </file>
 
-<file path=ppt/slides/slide35.xml><?xml version="1.0" encoding="utf-8"?>
+<file path=ppt/slides/slide26.xml><?xml version="1.0" encoding="utf-8"?>
+<p:sld xmlns:a="http://schemas.openxmlformats.org/drawingml/2006/main" xmlns:r="http://schemas.openxmlformats.org/officeDocument/2006/relationships" xmlns:p="http://schemas.openxmlformats.org/presentationml/2006/main">
+  <p:cSld>
+    <p:spTree>
+      <p:nvGrpSpPr>
+        <p:cNvPr id="1" name=""/>
+        <p:cNvGrpSpPr/>
+        <p:nvPr/>
+      </p:nvGrpSpPr>
+      <p:grpSpPr>
+        <a:xfrm>
+          <a:off x="0" y="0"/>
+          <a:ext cx="0" cy="0"/>
+          <a:chOff x="0" y="0"/>
+          <a:chExt cx="0" cy="0"/>
+        </a:xfrm>
+      </p:grpSpPr>
+      <p:sp>
+        <p:nvSpPr>
+          <p:cNvPr id="115714" name="Slide Number Placeholder 5"/>
+          <p:cNvSpPr>
+            <a:spLocks noGrp="1"/>
+          </p:cNvSpPr>
+          <p:nvPr>
+            <p:ph type="sldNum" sz="quarter" idx="12"/>
+          </p:nvPr>
+        </p:nvSpPr>
+        <p:spPr>
+          <a:noFill/>
+        </p:spPr>
+        <p:txBody>
+          <a:bodyPr/>
+          <a:lstStyle/>
+          <a:p>
+            <a:fld id="{E2DA8EDD-E190-4DCB-BB40-24D9141A10B8}" type="slidenum">
+              <a:rPr lang="en-US" smtClean="0"/>
+              <a:pPr/>
+              <a:t>26</a:t>
+            </a:fld>
+            <a:endParaRPr lang="en-US"/>
+          </a:p>
+        </p:txBody>
+      </p:sp>
+      <p:sp>
+        <p:nvSpPr>
+          <p:cNvPr id="115715" name="Rectangle 2"/>
+          <p:cNvSpPr>
+            <a:spLocks noGrp="1" noChangeArrowheads="1"/>
+          </p:cNvSpPr>
+          <p:nvPr>
+            <p:ph type="title"/>
+          </p:nvPr>
+        </p:nvSpPr>
+        <p:spPr/>
+        <p:txBody>
+          <a:bodyPr/>
+          <a:lstStyle/>
+          <a:p>
+            <a:pPr eaLnBrk="1" hangingPunct="1"/>
+            <a:r>
+              <a:rPr lang="en-US" dirty="0"/>
+              <a:t>Question 123.21.6</a:t>
+            </a:r>
+          </a:p>
+        </p:txBody>
+      </p:sp>
+      <p:sp>
+        <p:nvSpPr>
+          <p:cNvPr id="115716" name="Rectangle 3"/>
+          <p:cNvSpPr>
+            <a:spLocks noGrp="1" noChangeArrowheads="1"/>
+          </p:cNvSpPr>
+          <p:nvPr>
+            <p:ph type="body" idx="1"/>
+          </p:nvPr>
+        </p:nvSpPr>
+        <p:spPr/>
+        <p:txBody>
+          <a:bodyPr/>
+          <a:lstStyle/>
+          <a:p>
+            <a:pPr marL="609600" indent="-609600" eaLnBrk="1" hangingPunct="1">
+              <a:buFontTx/>
+              <a:buNone/>
+            </a:pPr>
+            <a:r>
+              <a:rPr lang="en-US" dirty="0"/>
+              <a:t>Does a wave on a string move faster for a heavier or lighter rope?</a:t>
+            </a:r>
+          </a:p>
+          <a:p>
+            <a:pPr marL="609600" indent="-609600">
+              <a:buFont typeface="+mj-lt"/>
+              <a:buAutoNum type="alphaLcParenR"/>
+            </a:pPr>
+            <a:r>
+              <a:rPr lang="en-US" dirty="0"/>
+              <a:t>heavier </a:t>
+            </a:r>
+          </a:p>
+          <a:p>
+            <a:pPr marL="609600" indent="-609600">
+              <a:buFont typeface="+mj-lt"/>
+              <a:buAutoNum type="alphaLcParenR"/>
+            </a:pPr>
+            <a:r>
+              <a:rPr lang="en-US" dirty="0"/>
+              <a:t>lighter</a:t>
+            </a:r>
+          </a:p>
+        </p:txBody>
+      </p:sp>
+    </p:spTree>
+    <p:extLst>
+      <p:ext uri="{BB962C8B-B14F-4D97-AF65-F5344CB8AC3E}">
+        <p14:creationId xmlns:p14="http://schemas.microsoft.com/office/powerpoint/2010/main" val="3748942484"/>
+      </p:ext>
+    </p:extLst>
+  </p:cSld>
+  <p:clrMapOvr>
+    <a:masterClrMapping/>
+  </p:clrMapOvr>
+</p:sld>
+</file>
+
+<file path=ppt/slides/slide27.xml><?xml version="1.0" encoding="utf-8"?>
+<p:sld xmlns:a="http://schemas.openxmlformats.org/drawingml/2006/main" xmlns:r="http://schemas.openxmlformats.org/officeDocument/2006/relationships" xmlns:p="http://schemas.openxmlformats.org/presentationml/2006/main">
+  <p:cSld>
+    <p:spTree>
+      <p:nvGrpSpPr>
+        <p:cNvPr id="1" name=""/>
+        <p:cNvGrpSpPr/>
+        <p:nvPr/>
+      </p:nvGrpSpPr>
+      <p:grpSpPr>
+        <a:xfrm>
+          <a:off x="0" y="0"/>
+          <a:ext cx="0" cy="0"/>
+          <a:chOff x="0" y="0"/>
+          <a:chExt cx="0" cy="0"/>
+        </a:xfrm>
+      </p:grpSpPr>
+      <p:sp>
+        <p:nvSpPr>
+          <p:cNvPr id="116738" name="Slide Number Placeholder 5"/>
+          <p:cNvSpPr>
+            <a:spLocks noGrp="1"/>
+          </p:cNvSpPr>
+          <p:nvPr>
+            <p:ph type="sldNum" sz="quarter" idx="12"/>
+          </p:nvPr>
+        </p:nvSpPr>
+        <p:spPr>
+          <a:noFill/>
+        </p:spPr>
+        <p:txBody>
+          <a:bodyPr/>
+          <a:lstStyle/>
+          <a:p>
+            <a:fld id="{CFFCD0D3-C27D-45E7-B26E-D48722990FFA}" type="slidenum">
+              <a:rPr lang="en-US" smtClean="0"/>
+              <a:pPr/>
+              <a:t>27</a:t>
+            </a:fld>
+            <a:endParaRPr lang="en-US"/>
+          </a:p>
+        </p:txBody>
+      </p:sp>
+      <p:sp>
+        <p:nvSpPr>
+          <p:cNvPr id="116739" name="Rectangle 2"/>
+          <p:cNvSpPr>
+            <a:spLocks noGrp="1" noChangeArrowheads="1"/>
+          </p:cNvSpPr>
+          <p:nvPr>
+            <p:ph type="title"/>
+          </p:nvPr>
+        </p:nvSpPr>
+        <p:spPr/>
+        <p:txBody>
+          <a:bodyPr/>
+          <a:lstStyle/>
+          <a:p>
+            <a:pPr eaLnBrk="1" hangingPunct="1"/>
+            <a:r>
+              <a:rPr lang="en-US" dirty="0"/>
+              <a:t>Question 123.21.7</a:t>
+            </a:r>
+          </a:p>
+        </p:txBody>
+      </p:sp>
+      <p:sp>
+        <p:nvSpPr>
+          <p:cNvPr id="116740" name="Rectangle 3"/>
+          <p:cNvSpPr>
+            <a:spLocks noGrp="1" noChangeArrowheads="1"/>
+          </p:cNvSpPr>
+          <p:nvPr>
+            <p:ph type="body" idx="1"/>
+          </p:nvPr>
+        </p:nvSpPr>
+        <p:spPr/>
+        <p:txBody>
+          <a:bodyPr/>
+          <a:lstStyle/>
+          <a:p>
+            <a:pPr marL="609600" indent="-609600" eaLnBrk="1" hangingPunct="1">
+              <a:buFontTx/>
+              <a:buNone/>
+            </a:pPr>
+            <a:r>
+              <a:rPr lang="en-US" dirty="0"/>
+              <a:t>A wave is traveling on a rope. Does the wave speed increase or decrease as you pull harder on a rope</a:t>
+            </a:r>
+          </a:p>
+          <a:p>
+            <a:pPr marL="609600" indent="-609600" eaLnBrk="1" hangingPunct="1">
+              <a:buFont typeface="+mj-lt"/>
+              <a:buAutoNum type="alphaLcParenR"/>
+            </a:pPr>
+            <a:r>
+              <a:rPr lang="en-US" dirty="0"/>
+              <a:t>Increase</a:t>
+            </a:r>
+          </a:p>
+          <a:p>
+            <a:pPr marL="609600" indent="-609600" eaLnBrk="1" hangingPunct="1">
+              <a:buFont typeface="+mj-lt"/>
+              <a:buAutoNum type="alphaLcParenR"/>
+            </a:pPr>
+            <a:r>
+              <a:rPr lang="en-US" dirty="0"/>
+              <a:t>Decrease</a:t>
+            </a:r>
+          </a:p>
+        </p:txBody>
+      </p:sp>
+    </p:spTree>
+    <p:extLst>
+      <p:ext uri="{BB962C8B-B14F-4D97-AF65-F5344CB8AC3E}">
+        <p14:creationId xmlns:p14="http://schemas.microsoft.com/office/powerpoint/2010/main" val="3521782403"/>
+      </p:ext>
+    </p:extLst>
+  </p:cSld>
+  <p:clrMapOvr>
+    <a:masterClrMapping/>
+  </p:clrMapOvr>
+</p:sld>
+</file>
+
+<file path=ppt/slides/slide28.xml><?xml version="1.0" encoding="utf-8"?>
+<p:sld xmlns:a="http://schemas.openxmlformats.org/drawingml/2006/main" xmlns:r="http://schemas.openxmlformats.org/officeDocument/2006/relationships" xmlns:p="http://schemas.openxmlformats.org/presentationml/2006/main">
+  <p:cSld>
+    <p:spTree>
+      <p:nvGrpSpPr>
+        <p:cNvPr id="1" name=""/>
+        <p:cNvGrpSpPr/>
+        <p:nvPr/>
+      </p:nvGrpSpPr>
+      <p:grpSpPr>
+        <a:xfrm>
+          <a:off x="0" y="0"/>
+          <a:ext cx="0" cy="0"/>
+          <a:chOff x="0" y="0"/>
+          <a:chExt cx="0" cy="0"/>
+        </a:xfrm>
+      </p:grpSpPr>
+      <p:sp>
+        <p:nvSpPr>
+          <p:cNvPr id="52227" name="Rectangle 2"/>
+          <p:cNvSpPr>
+            <a:spLocks noGrp="1" noChangeArrowheads="1"/>
+          </p:cNvSpPr>
+          <p:nvPr>
+            <p:ph type="title"/>
+          </p:nvPr>
+        </p:nvSpPr>
+        <p:spPr/>
+        <p:txBody>
+          <a:bodyPr/>
+          <a:lstStyle/>
+          <a:p>
+            <a:pPr eaLnBrk="1" hangingPunct="1"/>
+            <a:r>
+              <a:rPr lang="en-US"/>
+              <a:t>Question 16.9</a:t>
+            </a:r>
+          </a:p>
+        </p:txBody>
+      </p:sp>
+      <p:sp>
+        <p:nvSpPr>
+          <p:cNvPr id="52228" name="Rectangle 3"/>
+          <p:cNvSpPr>
+            <a:spLocks noGrp="1" noChangeArrowheads="1"/>
+          </p:cNvSpPr>
+          <p:nvPr>
+            <p:ph idx="1"/>
+          </p:nvPr>
+        </p:nvSpPr>
+        <p:spPr/>
+        <p:txBody>
+          <a:bodyPr/>
+          <a:lstStyle/>
+          <a:p>
+            <a:pPr marL="609600" indent="-609600" eaLnBrk="1" hangingPunct="1">
+              <a:buFontTx/>
+              <a:buNone/>
+            </a:pPr>
+            <a:r>
+              <a:rPr lang="en-US"/>
+              <a:t>A wave travels across a boundary between two different weight ropes. If it goes from the heavier to the lighter rope, the wave speed</a:t>
+            </a:r>
+          </a:p>
+          <a:p>
+            <a:pPr marL="990600" lvl="1" indent="-533400" eaLnBrk="1" hangingPunct="1">
+              <a:buFontTx/>
+              <a:buAutoNum type="alphaLcParenR"/>
+            </a:pPr>
+            <a:r>
+              <a:rPr lang="en-US"/>
+              <a:t>Increases</a:t>
+            </a:r>
+          </a:p>
+          <a:p>
+            <a:pPr marL="990600" lvl="1" indent="-533400" eaLnBrk="1" hangingPunct="1">
+              <a:buFontTx/>
+              <a:buAutoNum type="alphaLcParenR"/>
+            </a:pPr>
+            <a:r>
+              <a:rPr lang="en-US"/>
+              <a:t>Decreases</a:t>
+            </a:r>
+          </a:p>
+          <a:p>
+            <a:pPr marL="990600" lvl="1" indent="-533400" eaLnBrk="1" hangingPunct="1">
+              <a:buFontTx/>
+              <a:buAutoNum type="alphaLcParenR"/>
+            </a:pPr>
+            <a:r>
+              <a:rPr lang="en-US"/>
+              <a:t>Stays the same</a:t>
+            </a:r>
+          </a:p>
+          <a:p>
+            <a:pPr marL="990600" lvl="1" indent="-533400" eaLnBrk="1" hangingPunct="1">
+              <a:buFontTx/>
+              <a:buAutoNum type="alphaLcParenR"/>
+            </a:pPr>
+            <a:r>
+              <a:rPr lang="en-US"/>
+              <a:t>Can’t tell</a:t>
+            </a:r>
+          </a:p>
+        </p:txBody>
+      </p:sp>
+      <p:sp>
+        <p:nvSpPr>
+          <p:cNvPr id="52226" name="Slide Number Placeholder 5"/>
+          <p:cNvSpPr>
+            <a:spLocks noGrp="1"/>
+          </p:cNvSpPr>
+          <p:nvPr>
+            <p:ph type="sldNum" sz="quarter" idx="12"/>
+          </p:nvPr>
+        </p:nvSpPr>
+        <p:spPr>
+          <a:noFill/>
+        </p:spPr>
+        <p:txBody>
+          <a:bodyPr/>
+          <a:lstStyle/>
+          <a:p>
+            <a:fld id="{6A354CA6-2371-4C3D-9BCD-3813C9281DFB}" type="slidenum">
+              <a:rPr lang="en-US" smtClean="0"/>
+              <a:pPr/>
+              <a:t>28</a:t>
+            </a:fld>
+            <a:endParaRPr lang="en-US"/>
+          </a:p>
+        </p:txBody>
+      </p:sp>
+    </p:spTree>
+    <p:extLst>
+      <p:ext uri="{BB962C8B-B14F-4D97-AF65-F5344CB8AC3E}">
+        <p14:creationId xmlns:p14="http://schemas.microsoft.com/office/powerpoint/2010/main" val="1339363551"/>
+      </p:ext>
+    </p:extLst>
+  </p:cSld>
+  <p:clrMapOvr>
+    <a:masterClrMapping/>
+  </p:clrMapOvr>
+</p:sld>
+</file>
+
+<file path=ppt/slides/slide29.xml><?xml version="1.0" encoding="utf-8"?>
+<p:sld xmlns:a="http://schemas.openxmlformats.org/drawingml/2006/main" xmlns:r="http://schemas.openxmlformats.org/officeDocument/2006/relationships" xmlns:p="http://schemas.openxmlformats.org/presentationml/2006/main">
+  <p:cSld>
+    <p:spTree>
+      <p:nvGrpSpPr>
+        <p:cNvPr id="1" name=""/>
+        <p:cNvGrpSpPr/>
+        <p:nvPr/>
+      </p:nvGrpSpPr>
+      <p:grpSpPr>
+        <a:xfrm>
+          <a:off x="0" y="0"/>
+          <a:ext cx="0" cy="0"/>
+          <a:chOff x="0" y="0"/>
+          <a:chExt cx="0" cy="0"/>
+        </a:xfrm>
+      </p:grpSpPr>
+      <p:sp>
+        <p:nvSpPr>
+          <p:cNvPr id="53251" name="Rectangle 2"/>
+          <p:cNvSpPr>
+            <a:spLocks noGrp="1" noChangeArrowheads="1"/>
+          </p:cNvSpPr>
+          <p:nvPr>
+            <p:ph type="title"/>
+          </p:nvPr>
+        </p:nvSpPr>
+        <p:spPr/>
+        <p:txBody>
+          <a:bodyPr/>
+          <a:lstStyle/>
+          <a:p>
+            <a:pPr eaLnBrk="1" hangingPunct="1"/>
+            <a:r>
+              <a:rPr lang="en-US" dirty="0"/>
+              <a:t>Question 16.10</a:t>
+            </a:r>
+          </a:p>
+        </p:txBody>
+      </p:sp>
+      <p:sp>
+        <p:nvSpPr>
+          <p:cNvPr id="53252" name="Rectangle 3"/>
+          <p:cNvSpPr>
+            <a:spLocks noGrp="1" noChangeArrowheads="1"/>
+          </p:cNvSpPr>
+          <p:nvPr>
+            <p:ph idx="1"/>
+          </p:nvPr>
+        </p:nvSpPr>
+        <p:spPr/>
+        <p:txBody>
+          <a:bodyPr/>
+          <a:lstStyle/>
+          <a:p>
+            <a:pPr marL="609600" indent="-609600" eaLnBrk="1" hangingPunct="1">
+              <a:buFontTx/>
+              <a:buNone/>
+            </a:pPr>
+            <a:r>
+              <a:rPr lang="en-US"/>
+              <a:t>A wave travels across a boundary between two different weight ropes. If it goes from the lighter to the heavier rope, the reflected wave</a:t>
+            </a:r>
+          </a:p>
+          <a:p>
+            <a:pPr marL="609600" indent="-609600" eaLnBrk="1" hangingPunct="1">
+              <a:buFontTx/>
+              <a:buAutoNum type="alphaLcParenR"/>
+            </a:pPr>
+            <a:r>
+              <a:rPr lang="en-US"/>
+              <a:t>Is inverted</a:t>
+            </a:r>
+          </a:p>
+          <a:p>
+            <a:pPr marL="609600" indent="-609600" eaLnBrk="1" hangingPunct="1">
+              <a:buFontTx/>
+              <a:buAutoNum type="alphaLcParenR"/>
+            </a:pPr>
+            <a:r>
+              <a:rPr lang="en-US"/>
+              <a:t>Is not inverted</a:t>
+            </a:r>
+          </a:p>
+          <a:p>
+            <a:pPr marL="609600" indent="-609600" eaLnBrk="1" hangingPunct="1">
+              <a:buFontTx/>
+              <a:buAutoNum type="alphaLcParenR"/>
+            </a:pPr>
+            <a:r>
+              <a:rPr lang="en-US"/>
+              <a:t>Can’t tell</a:t>
+            </a:r>
+          </a:p>
+        </p:txBody>
+      </p:sp>
+      <p:sp>
+        <p:nvSpPr>
+          <p:cNvPr id="53250" name="Slide Number Placeholder 5"/>
+          <p:cNvSpPr>
+            <a:spLocks noGrp="1"/>
+          </p:cNvSpPr>
+          <p:nvPr>
+            <p:ph type="sldNum" sz="quarter" idx="12"/>
+          </p:nvPr>
+        </p:nvSpPr>
+        <p:spPr>
+          <a:noFill/>
+        </p:spPr>
+        <p:txBody>
+          <a:bodyPr/>
+          <a:lstStyle/>
+          <a:p>
+            <a:fld id="{74CD2813-E4C4-402A-A221-FA93E480D86C}" type="slidenum">
+              <a:rPr lang="en-US" smtClean="0"/>
+              <a:pPr/>
+              <a:t>29</a:t>
+            </a:fld>
+            <a:endParaRPr lang="en-US"/>
+          </a:p>
+        </p:txBody>
+      </p:sp>
+    </p:spTree>
+    <p:extLst>
+      <p:ext uri="{BB962C8B-B14F-4D97-AF65-F5344CB8AC3E}">
+        <p14:creationId xmlns:p14="http://schemas.microsoft.com/office/powerpoint/2010/main" val="1349580765"/>
+      </p:ext>
+    </p:extLst>
+  </p:cSld>
+  <p:clrMapOvr>
+    <a:masterClrMapping/>
+  </p:clrMapOvr>
+</p:sld>
+</file>
+
+<file path=ppt/slides/slide3.xml><?xml version="1.0" encoding="utf-8"?>
+<p:sld xmlns:a="http://schemas.openxmlformats.org/drawingml/2006/main" xmlns:r="http://schemas.openxmlformats.org/officeDocument/2006/relationships" xmlns:p="http://schemas.openxmlformats.org/presentationml/2006/main">
+  <p:cSld>
+    <p:spTree>
+      <p:nvGrpSpPr>
+        <p:cNvPr id="1" name=""/>
+        <p:cNvGrpSpPr/>
+        <p:nvPr/>
+      </p:nvGrpSpPr>
+      <p:grpSpPr>
+        <a:xfrm>
+          <a:off x="0" y="0"/>
+          <a:ext cx="0" cy="0"/>
+          <a:chOff x="0" y="0"/>
+          <a:chExt cx="0" cy="0"/>
+        </a:xfrm>
+      </p:grpSpPr>
+      <p:sp>
+        <p:nvSpPr>
+          <p:cNvPr id="7" name="Rectangle 6">
+            <a:extLst>
+              <a:ext uri="{FF2B5EF4-FFF2-40B4-BE49-F238E27FC236}">
+                <a16:creationId xmlns:a16="http://schemas.microsoft.com/office/drawing/2014/main" id="{D8FD1B72-CCBE-CE40-E955-1FAE8C362531}"/>
+              </a:ext>
+            </a:extLst>
+          </p:cNvPr>
+          <p:cNvSpPr/>
+          <p:nvPr/>
+        </p:nvSpPr>
+        <p:spPr>
+          <a:xfrm>
+            <a:off x="1898904" y="935734"/>
+            <a:ext cx="149352" cy="3617978"/>
+          </a:xfrm>
+          <a:prstGeom prst="rect">
+            <a:avLst/>
+          </a:prstGeom>
+          <a:solidFill>
+            <a:schemeClr val="bg1">
+              <a:lumMod val="65000"/>
+            </a:schemeClr>
+          </a:solidFill>
+          <a:ln>
+            <a:noFill/>
+          </a:ln>
+        </p:spPr>
+        <p:style>
+          <a:lnRef idx="2">
+            <a:schemeClr val="accent1">
+              <a:shade val="15000"/>
+            </a:schemeClr>
+          </a:lnRef>
+          <a:fillRef idx="1">
+            <a:schemeClr val="accent1"/>
+          </a:fillRef>
+          <a:effectRef idx="0">
+            <a:schemeClr val="accent1"/>
+          </a:effectRef>
+          <a:fontRef idx="minor">
+            <a:schemeClr val="lt1"/>
+          </a:fontRef>
+        </p:style>
+        <p:txBody>
+          <a:bodyPr rtlCol="0" anchor="ctr"/>
+          <a:lstStyle/>
+          <a:p>
+            <a:pPr algn="ctr"/>
+            <a:endParaRPr lang="en-US"/>
+          </a:p>
+        </p:txBody>
+      </p:sp>
+      <p:sp>
+        <p:nvSpPr>
+          <p:cNvPr id="4" name="Rectangle 3">
+            <a:extLst>
+              <a:ext uri="{FF2B5EF4-FFF2-40B4-BE49-F238E27FC236}">
+                <a16:creationId xmlns:a16="http://schemas.microsoft.com/office/drawing/2014/main" id="{613C0366-ADBD-5FA5-A76A-CC6520D623DA}"/>
+              </a:ext>
+            </a:extLst>
+          </p:cNvPr>
+          <p:cNvSpPr/>
+          <p:nvPr/>
+        </p:nvSpPr>
+        <p:spPr>
+          <a:xfrm>
+            <a:off x="1143000" y="1517904"/>
+            <a:ext cx="2276856" cy="987552"/>
+          </a:xfrm>
+          <a:prstGeom prst="rect">
+            <a:avLst/>
+          </a:prstGeom>
+          <a:solidFill>
+            <a:schemeClr val="tx1">
+              <a:lumMod val="75000"/>
+              <a:lumOff val="25000"/>
+            </a:schemeClr>
+          </a:solidFill>
+          <a:ln>
+            <a:noFill/>
+          </a:ln>
+        </p:spPr>
+        <p:style>
+          <a:lnRef idx="2">
+            <a:schemeClr val="accent1">
+              <a:shade val="15000"/>
+            </a:schemeClr>
+          </a:lnRef>
+          <a:fillRef idx="1">
+            <a:schemeClr val="accent1"/>
+          </a:fillRef>
+          <a:effectRef idx="0">
+            <a:schemeClr val="accent1"/>
+          </a:effectRef>
+          <a:fontRef idx="minor">
+            <a:schemeClr val="lt1"/>
+          </a:fontRef>
+        </p:style>
+        <p:txBody>
+          <a:bodyPr rtlCol="0" anchor="ctr"/>
+          <a:lstStyle/>
+          <a:p>
+            <a:pPr algn="ctr"/>
+            <a:endParaRPr lang="en-US"/>
+          </a:p>
+        </p:txBody>
+      </p:sp>
+      <p:sp>
+        <p:nvSpPr>
+          <p:cNvPr id="5" name="Rectangle 4">
+            <a:extLst>
+              <a:ext uri="{FF2B5EF4-FFF2-40B4-BE49-F238E27FC236}">
+                <a16:creationId xmlns:a16="http://schemas.microsoft.com/office/drawing/2014/main" id="{8DEE0855-A788-A402-48A5-46F63F828A3E}"/>
+              </a:ext>
+            </a:extLst>
+          </p:cNvPr>
+          <p:cNvSpPr/>
+          <p:nvPr/>
+        </p:nvSpPr>
+        <p:spPr>
+          <a:xfrm>
+            <a:off x="3419856" y="1975104"/>
+            <a:ext cx="512064" cy="64008"/>
+          </a:xfrm>
+          <a:prstGeom prst="rect">
+            <a:avLst/>
+          </a:prstGeom>
+          <a:solidFill>
+            <a:schemeClr val="bg1">
+              <a:lumMod val="65000"/>
+            </a:schemeClr>
+          </a:solidFill>
+          <a:ln>
+            <a:noFill/>
+          </a:ln>
+        </p:spPr>
+        <p:style>
+          <a:lnRef idx="2">
+            <a:schemeClr val="accent1">
+              <a:shade val="15000"/>
+            </a:schemeClr>
+          </a:lnRef>
+          <a:fillRef idx="1">
+            <a:schemeClr val="accent1"/>
+          </a:fillRef>
+          <a:effectRef idx="0">
+            <a:schemeClr val="accent1"/>
+          </a:effectRef>
+          <a:fontRef idx="minor">
+            <a:schemeClr val="lt1"/>
+          </a:fontRef>
+        </p:style>
+        <p:txBody>
+          <a:bodyPr rtlCol="0" anchor="ctr"/>
+          <a:lstStyle/>
+          <a:p>
+            <a:pPr algn="ctr"/>
+            <a:endParaRPr lang="en-US"/>
+          </a:p>
+        </p:txBody>
+      </p:sp>
+      <p:sp>
+        <p:nvSpPr>
+          <p:cNvPr id="6" name="Rectangle 5">
+            <a:extLst>
+              <a:ext uri="{FF2B5EF4-FFF2-40B4-BE49-F238E27FC236}">
+                <a16:creationId xmlns:a16="http://schemas.microsoft.com/office/drawing/2014/main" id="{70FE5A38-89EB-A82A-AB61-B6D8415A3953}"/>
+              </a:ext>
+            </a:extLst>
+          </p:cNvPr>
+          <p:cNvSpPr/>
+          <p:nvPr/>
+        </p:nvSpPr>
+        <p:spPr>
+          <a:xfrm>
+            <a:off x="1143000" y="1972056"/>
+            <a:ext cx="2276856" cy="45719"/>
+          </a:xfrm>
+          <a:prstGeom prst="rect">
+            <a:avLst/>
+          </a:prstGeom>
+          <a:solidFill>
+            <a:schemeClr val="tx1">
+              <a:lumMod val="85000"/>
+              <a:lumOff val="15000"/>
+            </a:schemeClr>
+          </a:solidFill>
+          <a:ln>
+            <a:noFill/>
+          </a:ln>
+        </p:spPr>
+        <p:style>
+          <a:lnRef idx="2">
+            <a:schemeClr val="accent1">
+              <a:shade val="15000"/>
+            </a:schemeClr>
+          </a:lnRef>
+          <a:fillRef idx="1">
+            <a:schemeClr val="accent1"/>
+          </a:fillRef>
+          <a:effectRef idx="0">
+            <a:schemeClr val="accent1"/>
+          </a:effectRef>
+          <a:fontRef idx="minor">
+            <a:schemeClr val="lt1"/>
+          </a:fontRef>
+        </p:style>
+        <p:txBody>
+          <a:bodyPr rtlCol="0" anchor="ctr"/>
+          <a:lstStyle/>
+          <a:p>
+            <a:pPr algn="ctr"/>
+            <a:endParaRPr lang="en-US"/>
+          </a:p>
+        </p:txBody>
+      </p:sp>
+      <p:sp>
+        <p:nvSpPr>
+          <p:cNvPr id="9" name="Freeform: Shape 8">
+            <a:extLst>
+              <a:ext uri="{FF2B5EF4-FFF2-40B4-BE49-F238E27FC236}">
+                <a16:creationId xmlns:a16="http://schemas.microsoft.com/office/drawing/2014/main" id="{97BAF4FB-DA6A-6AD6-F1CC-6144FB3A9559}"/>
+              </a:ext>
+            </a:extLst>
+          </p:cNvPr>
+          <p:cNvSpPr/>
+          <p:nvPr/>
+        </p:nvSpPr>
+        <p:spPr>
+          <a:xfrm>
+            <a:off x="3931920" y="1443569"/>
+            <a:ext cx="3813048" cy="1148411"/>
+          </a:xfrm>
+          <a:custGeom>
+            <a:avLst/>
+            <a:gdLst>
+              <a:gd name="connsiteX0" fmla="*/ 0 w 5632704"/>
+              <a:gd name="connsiteY0" fmla="*/ 2062670 h 4110927"/>
+              <a:gd name="connsiteX1" fmla="*/ 841248 w 5632704"/>
+              <a:gd name="connsiteY1" fmla="*/ 60134 h 4110927"/>
+              <a:gd name="connsiteX2" fmla="*/ 2642616 w 5632704"/>
+              <a:gd name="connsiteY2" fmla="*/ 4110926 h 4110927"/>
+              <a:gd name="connsiteX3" fmla="*/ 4398264 w 5632704"/>
+              <a:gd name="connsiteY3" fmla="*/ 41846 h 4110927"/>
+              <a:gd name="connsiteX4" fmla="*/ 5632704 w 5632704"/>
+              <a:gd name="connsiteY4" fmla="*/ 3205670 h 4110927"/>
+              <a:gd name="connsiteX0" fmla="*/ 0 w 5632704"/>
+              <a:gd name="connsiteY0" fmla="*/ 2030402 h 4078696"/>
+              <a:gd name="connsiteX1" fmla="*/ 905256 w 5632704"/>
+              <a:gd name="connsiteY1" fmla="*/ 91874 h 4078696"/>
+              <a:gd name="connsiteX2" fmla="*/ 2642616 w 5632704"/>
+              <a:gd name="connsiteY2" fmla="*/ 4078658 h 4078696"/>
+              <a:gd name="connsiteX3" fmla="*/ 4398264 w 5632704"/>
+              <a:gd name="connsiteY3" fmla="*/ 9578 h 4078696"/>
+              <a:gd name="connsiteX4" fmla="*/ 5632704 w 5632704"/>
+              <a:gd name="connsiteY4" fmla="*/ 3173402 h 4078696"/>
+              <a:gd name="connsiteX0" fmla="*/ 0 w 5632704"/>
+              <a:gd name="connsiteY0" fmla="*/ 2030402 h 4078692"/>
+              <a:gd name="connsiteX1" fmla="*/ 905256 w 5632704"/>
+              <a:gd name="connsiteY1" fmla="*/ 91874 h 4078692"/>
+              <a:gd name="connsiteX2" fmla="*/ 2642616 w 5632704"/>
+              <a:gd name="connsiteY2" fmla="*/ 4078658 h 4078692"/>
+              <a:gd name="connsiteX3" fmla="*/ 4398264 w 5632704"/>
+              <a:gd name="connsiteY3" fmla="*/ 9578 h 4078692"/>
+              <a:gd name="connsiteX4" fmla="*/ 5632704 w 5632704"/>
+              <a:gd name="connsiteY4" fmla="*/ 3173402 h 4078692"/>
+              <a:gd name="connsiteX0" fmla="*/ 0 w 5632704"/>
+              <a:gd name="connsiteY0" fmla="*/ 2030402 h 4078673"/>
+              <a:gd name="connsiteX1" fmla="*/ 859536 w 5632704"/>
+              <a:gd name="connsiteY1" fmla="*/ 64442 h 4078673"/>
+              <a:gd name="connsiteX2" fmla="*/ 2642616 w 5632704"/>
+              <a:gd name="connsiteY2" fmla="*/ 4078658 h 4078673"/>
+              <a:gd name="connsiteX3" fmla="*/ 4398264 w 5632704"/>
+              <a:gd name="connsiteY3" fmla="*/ 9578 h 4078673"/>
+              <a:gd name="connsiteX4" fmla="*/ 5632704 w 5632704"/>
+              <a:gd name="connsiteY4" fmla="*/ 3173402 h 4078673"/>
+              <a:gd name="connsiteX0" fmla="*/ 0 w 5632704"/>
+              <a:gd name="connsiteY0" fmla="*/ 2030402 h 4078673"/>
+              <a:gd name="connsiteX1" fmla="*/ 859536 w 5632704"/>
+              <a:gd name="connsiteY1" fmla="*/ 64442 h 4078673"/>
+              <a:gd name="connsiteX2" fmla="*/ 2642616 w 5632704"/>
+              <a:gd name="connsiteY2" fmla="*/ 4078658 h 4078673"/>
+              <a:gd name="connsiteX3" fmla="*/ 4398264 w 5632704"/>
+              <a:gd name="connsiteY3" fmla="*/ 9578 h 4078673"/>
+              <a:gd name="connsiteX4" fmla="*/ 5632704 w 5632704"/>
+              <a:gd name="connsiteY4" fmla="*/ 3173402 h 4078673"/>
+              <a:gd name="connsiteX0" fmla="*/ 0 w 5632704"/>
+              <a:gd name="connsiteY0" fmla="*/ 2030402 h 4078673"/>
+              <a:gd name="connsiteX1" fmla="*/ 859536 w 5632704"/>
+              <a:gd name="connsiteY1" fmla="*/ 64442 h 4078673"/>
+              <a:gd name="connsiteX2" fmla="*/ 2642616 w 5632704"/>
+              <a:gd name="connsiteY2" fmla="*/ 4078658 h 4078673"/>
+              <a:gd name="connsiteX3" fmla="*/ 4398264 w 5632704"/>
+              <a:gd name="connsiteY3" fmla="*/ 9578 h 4078673"/>
+              <a:gd name="connsiteX4" fmla="*/ 5632704 w 5632704"/>
+              <a:gd name="connsiteY4" fmla="*/ 3173402 h 4078673"/>
+              <a:gd name="connsiteX0" fmla="*/ 0 w 5632704"/>
+              <a:gd name="connsiteY0" fmla="*/ 2030402 h 4078673"/>
+              <a:gd name="connsiteX1" fmla="*/ 859536 w 5632704"/>
+              <a:gd name="connsiteY1" fmla="*/ 64442 h 4078673"/>
+              <a:gd name="connsiteX2" fmla="*/ 2642616 w 5632704"/>
+              <a:gd name="connsiteY2" fmla="*/ 4078658 h 4078673"/>
+              <a:gd name="connsiteX3" fmla="*/ 4398264 w 5632704"/>
+              <a:gd name="connsiteY3" fmla="*/ 9578 h 4078673"/>
+              <a:gd name="connsiteX4" fmla="*/ 5632704 w 5632704"/>
+              <a:gd name="connsiteY4" fmla="*/ 3173402 h 4078673"/>
+              <a:gd name="connsiteX0" fmla="*/ 0 w 5632704"/>
+              <a:gd name="connsiteY0" fmla="*/ 2030402 h 4078673"/>
+              <a:gd name="connsiteX1" fmla="*/ 859536 w 5632704"/>
+              <a:gd name="connsiteY1" fmla="*/ 64442 h 4078673"/>
+              <a:gd name="connsiteX2" fmla="*/ 2642616 w 5632704"/>
+              <a:gd name="connsiteY2" fmla="*/ 4078658 h 4078673"/>
+              <a:gd name="connsiteX3" fmla="*/ 4398264 w 5632704"/>
+              <a:gd name="connsiteY3" fmla="*/ 9578 h 4078673"/>
+              <a:gd name="connsiteX4" fmla="*/ 5632704 w 5632704"/>
+              <a:gd name="connsiteY4" fmla="*/ 3173402 h 4078673"/>
+              <a:gd name="connsiteX0" fmla="*/ 0 w 5632704"/>
+              <a:gd name="connsiteY0" fmla="*/ 2030402 h 4078673"/>
+              <a:gd name="connsiteX1" fmla="*/ 859536 w 5632704"/>
+              <a:gd name="connsiteY1" fmla="*/ 64442 h 4078673"/>
+              <a:gd name="connsiteX2" fmla="*/ 2642616 w 5632704"/>
+              <a:gd name="connsiteY2" fmla="*/ 4078658 h 4078673"/>
+              <a:gd name="connsiteX3" fmla="*/ 4398264 w 5632704"/>
+              <a:gd name="connsiteY3" fmla="*/ 9578 h 4078673"/>
+              <a:gd name="connsiteX4" fmla="*/ 5632704 w 5632704"/>
+              <a:gd name="connsiteY4" fmla="*/ 3173402 h 4078673"/>
+              <a:gd name="connsiteX0" fmla="*/ 0 w 5632704"/>
+              <a:gd name="connsiteY0" fmla="*/ 2030402 h 4078673"/>
+              <a:gd name="connsiteX1" fmla="*/ 859536 w 5632704"/>
+              <a:gd name="connsiteY1" fmla="*/ 64442 h 4078673"/>
+              <a:gd name="connsiteX2" fmla="*/ 2642616 w 5632704"/>
+              <a:gd name="connsiteY2" fmla="*/ 4078658 h 4078673"/>
+              <a:gd name="connsiteX3" fmla="*/ 4398264 w 5632704"/>
+              <a:gd name="connsiteY3" fmla="*/ 9578 h 4078673"/>
+              <a:gd name="connsiteX4" fmla="*/ 5632704 w 5632704"/>
+              <a:gd name="connsiteY4" fmla="*/ 3173402 h 4078673"/>
+              <a:gd name="connsiteX0" fmla="*/ 0 w 5632704"/>
+              <a:gd name="connsiteY0" fmla="*/ 2030402 h 4078673"/>
+              <a:gd name="connsiteX1" fmla="*/ 859536 w 5632704"/>
+              <a:gd name="connsiteY1" fmla="*/ 64442 h 4078673"/>
+              <a:gd name="connsiteX2" fmla="*/ 2642616 w 5632704"/>
+              <a:gd name="connsiteY2" fmla="*/ 4078658 h 4078673"/>
+              <a:gd name="connsiteX3" fmla="*/ 4398264 w 5632704"/>
+              <a:gd name="connsiteY3" fmla="*/ 9578 h 4078673"/>
+              <a:gd name="connsiteX4" fmla="*/ 5632704 w 5632704"/>
+              <a:gd name="connsiteY4" fmla="*/ 3173402 h 4078673"/>
+              <a:gd name="connsiteX0" fmla="*/ 0 w 5632704"/>
+              <a:gd name="connsiteY0" fmla="*/ 2030402 h 4078673"/>
+              <a:gd name="connsiteX1" fmla="*/ 859536 w 5632704"/>
+              <a:gd name="connsiteY1" fmla="*/ 64442 h 4078673"/>
+              <a:gd name="connsiteX2" fmla="*/ 2642616 w 5632704"/>
+              <a:gd name="connsiteY2" fmla="*/ 4078658 h 4078673"/>
+              <a:gd name="connsiteX3" fmla="*/ 4398264 w 5632704"/>
+              <a:gd name="connsiteY3" fmla="*/ 9578 h 4078673"/>
+              <a:gd name="connsiteX4" fmla="*/ 5632704 w 5632704"/>
+              <a:gd name="connsiteY4" fmla="*/ 3173402 h 4078673"/>
+              <a:gd name="connsiteX0" fmla="*/ 0 w 5632704"/>
+              <a:gd name="connsiteY0" fmla="*/ 2030402 h 4078906"/>
+              <a:gd name="connsiteX1" fmla="*/ 859536 w 5632704"/>
+              <a:gd name="connsiteY1" fmla="*/ 64442 h 4078906"/>
+              <a:gd name="connsiteX2" fmla="*/ 2642616 w 5632704"/>
+              <a:gd name="connsiteY2" fmla="*/ 4078658 h 4078906"/>
+              <a:gd name="connsiteX3" fmla="*/ 4398264 w 5632704"/>
+              <a:gd name="connsiteY3" fmla="*/ 9578 h 4078906"/>
+              <a:gd name="connsiteX4" fmla="*/ 5632704 w 5632704"/>
+              <a:gd name="connsiteY4" fmla="*/ 3173402 h 4078906"/>
+              <a:gd name="connsiteX0" fmla="*/ 0 w 5632704"/>
+              <a:gd name="connsiteY0" fmla="*/ 2030402 h 4078798"/>
+              <a:gd name="connsiteX1" fmla="*/ 859536 w 5632704"/>
+              <a:gd name="connsiteY1" fmla="*/ 64442 h 4078798"/>
+              <a:gd name="connsiteX2" fmla="*/ 2642616 w 5632704"/>
+              <a:gd name="connsiteY2" fmla="*/ 4078658 h 4078798"/>
+              <a:gd name="connsiteX3" fmla="*/ 4398264 w 5632704"/>
+              <a:gd name="connsiteY3" fmla="*/ 9578 h 4078798"/>
+              <a:gd name="connsiteX4" fmla="*/ 5632704 w 5632704"/>
+              <a:gd name="connsiteY4" fmla="*/ 3173402 h 4078798"/>
+              <a:gd name="connsiteX0" fmla="*/ 0 w 5632704"/>
+              <a:gd name="connsiteY0" fmla="*/ 2030402 h 4078798"/>
+              <a:gd name="connsiteX1" fmla="*/ 859536 w 5632704"/>
+              <a:gd name="connsiteY1" fmla="*/ 64442 h 4078798"/>
+              <a:gd name="connsiteX2" fmla="*/ 2642616 w 5632704"/>
+              <a:gd name="connsiteY2" fmla="*/ 4078658 h 4078798"/>
+              <a:gd name="connsiteX3" fmla="*/ 4398264 w 5632704"/>
+              <a:gd name="connsiteY3" fmla="*/ 9578 h 4078798"/>
+              <a:gd name="connsiteX4" fmla="*/ 5632704 w 5632704"/>
+              <a:gd name="connsiteY4" fmla="*/ 3173402 h 4078798"/>
+              <a:gd name="connsiteX0" fmla="*/ 0 w 5632704"/>
+              <a:gd name="connsiteY0" fmla="*/ 2030402 h 4078798"/>
+              <a:gd name="connsiteX1" fmla="*/ 859536 w 5632704"/>
+              <a:gd name="connsiteY1" fmla="*/ 64442 h 4078798"/>
+              <a:gd name="connsiteX2" fmla="*/ 2642616 w 5632704"/>
+              <a:gd name="connsiteY2" fmla="*/ 4078658 h 4078798"/>
+              <a:gd name="connsiteX3" fmla="*/ 4398264 w 5632704"/>
+              <a:gd name="connsiteY3" fmla="*/ 9578 h 4078798"/>
+              <a:gd name="connsiteX4" fmla="*/ 5632704 w 5632704"/>
+              <a:gd name="connsiteY4" fmla="*/ 3173402 h 4078798"/>
+              <a:gd name="connsiteX0" fmla="*/ 0 w 5632704"/>
+              <a:gd name="connsiteY0" fmla="*/ 2030402 h 4078798"/>
+              <a:gd name="connsiteX1" fmla="*/ 859536 w 5632704"/>
+              <a:gd name="connsiteY1" fmla="*/ 64442 h 4078798"/>
+              <a:gd name="connsiteX2" fmla="*/ 2642616 w 5632704"/>
+              <a:gd name="connsiteY2" fmla="*/ 4078658 h 4078798"/>
+              <a:gd name="connsiteX3" fmla="*/ 4398264 w 5632704"/>
+              <a:gd name="connsiteY3" fmla="*/ 9578 h 4078798"/>
+              <a:gd name="connsiteX4" fmla="*/ 5632704 w 5632704"/>
+              <a:gd name="connsiteY4" fmla="*/ 3173402 h 4078798"/>
+              <a:gd name="connsiteX0" fmla="*/ 0 w 5632704"/>
+              <a:gd name="connsiteY0" fmla="*/ 2030402 h 4078798"/>
+              <a:gd name="connsiteX1" fmla="*/ 859536 w 5632704"/>
+              <a:gd name="connsiteY1" fmla="*/ 64442 h 4078798"/>
+              <a:gd name="connsiteX2" fmla="*/ 2642616 w 5632704"/>
+              <a:gd name="connsiteY2" fmla="*/ 4078658 h 4078798"/>
+              <a:gd name="connsiteX3" fmla="*/ 4398264 w 5632704"/>
+              <a:gd name="connsiteY3" fmla="*/ 9578 h 4078798"/>
+              <a:gd name="connsiteX4" fmla="*/ 5632704 w 5632704"/>
+              <a:gd name="connsiteY4" fmla="*/ 3173402 h 4078798"/>
+              <a:gd name="connsiteX0" fmla="*/ 0 w 5632704"/>
+              <a:gd name="connsiteY0" fmla="*/ 2030402 h 4097085"/>
+              <a:gd name="connsiteX1" fmla="*/ 859536 w 5632704"/>
+              <a:gd name="connsiteY1" fmla="*/ 64442 h 4097085"/>
+              <a:gd name="connsiteX2" fmla="*/ 2660904 w 5632704"/>
+              <a:gd name="connsiteY2" fmla="*/ 4096946 h 4097085"/>
+              <a:gd name="connsiteX3" fmla="*/ 4398264 w 5632704"/>
+              <a:gd name="connsiteY3" fmla="*/ 9578 h 4097085"/>
+              <a:gd name="connsiteX4" fmla="*/ 5632704 w 5632704"/>
+              <a:gd name="connsiteY4" fmla="*/ 3173402 h 4097085"/>
+              <a:gd name="connsiteX0" fmla="*/ 0 w 5632704"/>
+              <a:gd name="connsiteY0" fmla="*/ 2030402 h 4097085"/>
+              <a:gd name="connsiteX1" fmla="*/ 859536 w 5632704"/>
+              <a:gd name="connsiteY1" fmla="*/ 64442 h 4097085"/>
+              <a:gd name="connsiteX2" fmla="*/ 2660904 w 5632704"/>
+              <a:gd name="connsiteY2" fmla="*/ 4096946 h 4097085"/>
+              <a:gd name="connsiteX3" fmla="*/ 4398264 w 5632704"/>
+              <a:gd name="connsiteY3" fmla="*/ 9578 h 4097085"/>
+              <a:gd name="connsiteX4" fmla="*/ 5632704 w 5632704"/>
+              <a:gd name="connsiteY4" fmla="*/ 3173402 h 4097085"/>
+              <a:gd name="connsiteX0" fmla="*/ 0 w 5632704"/>
+              <a:gd name="connsiteY0" fmla="*/ 1975837 h 4042520"/>
+              <a:gd name="connsiteX1" fmla="*/ 859536 w 5632704"/>
+              <a:gd name="connsiteY1" fmla="*/ 9877 h 4042520"/>
+              <a:gd name="connsiteX2" fmla="*/ 2660904 w 5632704"/>
+              <a:gd name="connsiteY2" fmla="*/ 4042381 h 4042520"/>
+              <a:gd name="connsiteX3" fmla="*/ 4398264 w 5632704"/>
+              <a:gd name="connsiteY3" fmla="*/ 9877 h 4042520"/>
+              <a:gd name="connsiteX4" fmla="*/ 5632704 w 5632704"/>
+              <a:gd name="connsiteY4" fmla="*/ 3118837 h 4042520"/>
+              <a:gd name="connsiteX0" fmla="*/ 0 w 5632704"/>
+              <a:gd name="connsiteY0" fmla="*/ 1975837 h 4042520"/>
+              <a:gd name="connsiteX1" fmla="*/ 859536 w 5632704"/>
+              <a:gd name="connsiteY1" fmla="*/ 9877 h 4042520"/>
+              <a:gd name="connsiteX2" fmla="*/ 2660904 w 5632704"/>
+              <a:gd name="connsiteY2" fmla="*/ 4042381 h 4042520"/>
+              <a:gd name="connsiteX3" fmla="*/ 4398264 w 5632704"/>
+              <a:gd name="connsiteY3" fmla="*/ 9877 h 4042520"/>
+              <a:gd name="connsiteX4" fmla="*/ 5632704 w 5632704"/>
+              <a:gd name="connsiteY4" fmla="*/ 3118837 h 4042520"/>
+              <a:gd name="connsiteX0" fmla="*/ 0 w 5632704"/>
+              <a:gd name="connsiteY0" fmla="*/ 1975837 h 4042520"/>
+              <a:gd name="connsiteX1" fmla="*/ 859536 w 5632704"/>
+              <a:gd name="connsiteY1" fmla="*/ 9877 h 4042520"/>
+              <a:gd name="connsiteX2" fmla="*/ 2660904 w 5632704"/>
+              <a:gd name="connsiteY2" fmla="*/ 4042381 h 4042520"/>
+              <a:gd name="connsiteX3" fmla="*/ 4398264 w 5632704"/>
+              <a:gd name="connsiteY3" fmla="*/ 9877 h 4042520"/>
+              <a:gd name="connsiteX4" fmla="*/ 5632704 w 5632704"/>
+              <a:gd name="connsiteY4" fmla="*/ 3118837 h 4042520"/>
+              <a:gd name="connsiteX0" fmla="*/ 0 w 5632704"/>
+              <a:gd name="connsiteY0" fmla="*/ 1967657 h 4034340"/>
+              <a:gd name="connsiteX1" fmla="*/ 859536 w 5632704"/>
+              <a:gd name="connsiteY1" fmla="*/ 1697 h 4034340"/>
+              <a:gd name="connsiteX2" fmla="*/ 2660904 w 5632704"/>
+              <a:gd name="connsiteY2" fmla="*/ 4034201 h 4034340"/>
+              <a:gd name="connsiteX3" fmla="*/ 4398264 w 5632704"/>
+              <a:gd name="connsiteY3" fmla="*/ 1697 h 4034340"/>
+              <a:gd name="connsiteX4" fmla="*/ 5632704 w 5632704"/>
+              <a:gd name="connsiteY4" fmla="*/ 3110657 h 4034340"/>
+              <a:gd name="connsiteX0" fmla="*/ 0 w 5632704"/>
+              <a:gd name="connsiteY0" fmla="*/ 1967648 h 4034331"/>
+              <a:gd name="connsiteX1" fmla="*/ 859536 w 5632704"/>
+              <a:gd name="connsiteY1" fmla="*/ 1688 h 4034331"/>
+              <a:gd name="connsiteX2" fmla="*/ 2660904 w 5632704"/>
+              <a:gd name="connsiteY2" fmla="*/ 4034192 h 4034331"/>
+              <a:gd name="connsiteX3" fmla="*/ 4398264 w 5632704"/>
+              <a:gd name="connsiteY3" fmla="*/ 1688 h 4034331"/>
+              <a:gd name="connsiteX4" fmla="*/ 5632704 w 5632704"/>
+              <a:gd name="connsiteY4" fmla="*/ 3110648 h 4034331"/>
+            </a:gdLst>
+            <a:ahLst/>
+            <a:cxnLst>
+              <a:cxn ang="0">
+                <a:pos x="connsiteX0" y="connsiteY0"/>
+              </a:cxn>
+              <a:cxn ang="0">
+                <a:pos x="connsiteX1" y="connsiteY1"/>
+              </a:cxn>
+              <a:cxn ang="0">
+                <a:pos x="connsiteX2" y="connsiteY2"/>
+              </a:cxn>
+              <a:cxn ang="0">
+                <a:pos x="connsiteX3" y="connsiteY3"/>
+              </a:cxn>
+              <a:cxn ang="0">
+                <a:pos x="connsiteX4" y="connsiteY4"/>
+              </a:cxn>
+            </a:cxnLst>
+            <a:rect l="l" t="t" r="r" b="b"/>
+            <a:pathLst>
+              <a:path w="5632704" h="4034331">
+                <a:moveTo>
+                  <a:pt x="0" y="1967648"/>
+                </a:moveTo>
+                <a:cubicBezTo>
+                  <a:pt x="273558" y="804836"/>
+                  <a:pt x="620268" y="-28792"/>
+                  <a:pt x="859536" y="1688"/>
+                </a:cubicBezTo>
+                <a:cubicBezTo>
+                  <a:pt x="1537716" y="32168"/>
+                  <a:pt x="2025396" y="4061624"/>
+                  <a:pt x="2660904" y="4034192"/>
+                </a:cubicBezTo>
+                <a:cubicBezTo>
+                  <a:pt x="3259836" y="4025048"/>
+                  <a:pt x="3790188" y="115988"/>
+                  <a:pt x="4398264" y="1688"/>
+                </a:cubicBezTo>
+                <a:cubicBezTo>
+                  <a:pt x="4777740" y="-57748"/>
+                  <a:pt x="5200650" y="1462442"/>
+                  <a:pt x="5632704" y="3110648"/>
+                </a:cubicBezTo>
+              </a:path>
+            </a:pathLst>
+          </a:custGeom>
+          <a:noFill/>
+          <a:ln w="76200">
+            <a:solidFill>
+              <a:schemeClr val="accent6">
+                <a:lumMod val="60000"/>
+                <a:lumOff val="40000"/>
+              </a:schemeClr>
+            </a:solidFill>
+          </a:ln>
+        </p:spPr>
+        <p:style>
+          <a:lnRef idx="2">
+            <a:schemeClr val="accent1">
+              <a:shade val="15000"/>
+            </a:schemeClr>
+          </a:lnRef>
+          <a:fillRef idx="1">
+            <a:schemeClr val="accent1"/>
+          </a:fillRef>
+          <a:effectRef idx="0">
+            <a:schemeClr val="accent1"/>
+          </a:effectRef>
+          <a:fontRef idx="minor">
+            <a:schemeClr val="lt1"/>
+          </a:fontRef>
+        </p:style>
+        <p:txBody>
+          <a:bodyPr rtlCol="0" anchor="ctr"/>
+          <a:lstStyle/>
+          <a:p>
+            <a:pPr algn="ctr"/>
+            <a:endParaRPr lang="en-US"/>
+          </a:p>
+        </p:txBody>
+      </p:sp>
+      <p:sp>
+        <p:nvSpPr>
+          <p:cNvPr id="10" name="Cylinder 9">
+            <a:extLst>
+              <a:ext uri="{FF2B5EF4-FFF2-40B4-BE49-F238E27FC236}">
+                <a16:creationId xmlns:a16="http://schemas.microsoft.com/office/drawing/2014/main" id="{72AF48F9-FB2B-4063-8E03-104E1C15DF2D}"/>
+              </a:ext>
+            </a:extLst>
+          </p:cNvPr>
+          <p:cNvSpPr/>
+          <p:nvPr/>
+        </p:nvSpPr>
+        <p:spPr>
+          <a:xfrm rot="2488798">
+            <a:off x="4138531" y="1564117"/>
+            <a:ext cx="74456" cy="188896"/>
+          </a:xfrm>
+          <a:prstGeom prst="can">
+            <a:avLst/>
+          </a:prstGeom>
+          <a:solidFill>
+            <a:schemeClr val="tx1">
+              <a:lumMod val="75000"/>
+              <a:lumOff val="25000"/>
+            </a:schemeClr>
+          </a:solidFill>
+          <a:ln>
+            <a:noFill/>
+          </a:ln>
+        </p:spPr>
+        <p:style>
+          <a:lnRef idx="2">
+            <a:schemeClr val="accent1">
+              <a:shade val="15000"/>
+            </a:schemeClr>
+          </a:lnRef>
+          <a:fillRef idx="1">
+            <a:schemeClr val="accent1"/>
+          </a:fillRef>
+          <a:effectRef idx="0">
+            <a:schemeClr val="accent1"/>
+          </a:effectRef>
+          <a:fontRef idx="minor">
+            <a:schemeClr val="lt1"/>
+          </a:fontRef>
+        </p:style>
+        <p:txBody>
+          <a:bodyPr rtlCol="0" anchor="ctr"/>
+          <a:lstStyle/>
+          <a:p>
+            <a:pPr algn="ctr"/>
+            <a:endParaRPr lang="en-US"/>
+          </a:p>
+        </p:txBody>
+      </p:sp>
+      <p:sp>
+        <p:nvSpPr>
+          <p:cNvPr id="11" name="TextBox 10">
+            <a:extLst>
+              <a:ext uri="{FF2B5EF4-FFF2-40B4-BE49-F238E27FC236}">
+                <a16:creationId xmlns:a16="http://schemas.microsoft.com/office/drawing/2014/main" id="{E7585B40-CC23-8828-633D-7F296358D19A}"/>
+              </a:ext>
+            </a:extLst>
+          </p:cNvPr>
+          <p:cNvSpPr txBox="1"/>
+          <p:nvPr/>
+        </p:nvSpPr>
+        <p:spPr>
+          <a:xfrm>
+            <a:off x="4077796" y="1625583"/>
+            <a:ext cx="567784" cy="369332"/>
+          </a:xfrm>
+          <a:prstGeom prst="rect">
+            <a:avLst/>
+          </a:prstGeom>
+          <a:noFill/>
+        </p:spPr>
+        <p:txBody>
+          <a:bodyPr wrap="none" rtlCol="0">
+            <a:spAutoFit/>
+          </a:bodyPr>
+          <a:lstStyle/>
+          <a:p>
+            <a:r>
+              <a:rPr lang="en-US" dirty="0">
+                <a:sym typeface="Symbol" panose="05050102010706020507" pitchFamily="18" charset="2"/>
+              </a:rPr>
+              <a:t>m</a:t>
+            </a:r>
+            <a:endParaRPr lang="en-US" dirty="0"/>
+          </a:p>
+        </p:txBody>
+      </p:sp>
+    </p:spTree>
+    <p:extLst>
+      <p:ext uri="{BB962C8B-B14F-4D97-AF65-F5344CB8AC3E}">
+        <p14:creationId xmlns:p14="http://schemas.microsoft.com/office/powerpoint/2010/main" val="1643441071"/>
+      </p:ext>
+    </p:extLst>
+  </p:cSld>
+  <p:clrMapOvr>
+    <a:masterClrMapping/>
+  </p:clrMapOvr>
+</p:sld>
+</file>
+
+<file path=ppt/slides/slide30.xml><?xml version="1.0" encoding="utf-8"?>
+<p:sld xmlns:a="http://schemas.openxmlformats.org/drawingml/2006/main" xmlns:r="http://schemas.openxmlformats.org/officeDocument/2006/relationships" xmlns:p="http://schemas.openxmlformats.org/presentationml/2006/main">
+  <p:cSld>
+    <p:spTree>
+      <p:nvGrpSpPr>
+        <p:cNvPr id="1" name=""/>
+        <p:cNvGrpSpPr/>
+        <p:nvPr/>
+      </p:nvGrpSpPr>
+      <p:grpSpPr>
+        <a:xfrm>
+          <a:off x="0" y="0"/>
+          <a:ext cx="0" cy="0"/>
+          <a:chOff x="0" y="0"/>
+          <a:chExt cx="0" cy="0"/>
+        </a:xfrm>
+      </p:grpSpPr>
+      <p:sp>
+        <p:nvSpPr>
+          <p:cNvPr id="54275" name="Rectangle 2"/>
+          <p:cNvSpPr>
+            <a:spLocks noGrp="1" noChangeArrowheads="1"/>
+          </p:cNvSpPr>
+          <p:nvPr>
+            <p:ph type="title"/>
+          </p:nvPr>
+        </p:nvSpPr>
+        <p:spPr/>
+        <p:txBody>
+          <a:bodyPr/>
+          <a:lstStyle/>
+          <a:p>
+            <a:pPr eaLnBrk="1" hangingPunct="1"/>
+            <a:r>
+              <a:rPr lang="en-US"/>
+              <a:t>Question 16.11</a:t>
+            </a:r>
+          </a:p>
+        </p:txBody>
+      </p:sp>
+      <p:sp>
+        <p:nvSpPr>
+          <p:cNvPr id="54276" name="Rectangle 3"/>
+          <p:cNvSpPr>
+            <a:spLocks noGrp="1" noChangeArrowheads="1"/>
+          </p:cNvSpPr>
+          <p:nvPr>
+            <p:ph idx="1"/>
+          </p:nvPr>
+        </p:nvSpPr>
+        <p:spPr/>
+        <p:txBody>
+          <a:bodyPr/>
+          <a:lstStyle/>
+          <a:p>
+            <a:pPr marL="609600" indent="-609600" eaLnBrk="1" hangingPunct="1">
+              <a:lnSpc>
+                <a:spcPct val="90000"/>
+              </a:lnSpc>
+              <a:buFontTx/>
+              <a:buNone/>
+            </a:pPr>
+            <a:r>
+              <a:rPr lang="en-US" sz="2800"/>
+              <a:t>If one end of the rope is fixed to a pole, the reflected wave is inverted because</a:t>
+            </a:r>
+          </a:p>
+          <a:p>
+            <a:pPr marL="609600" indent="-609600" eaLnBrk="1" hangingPunct="1">
+              <a:lnSpc>
+                <a:spcPct val="90000"/>
+              </a:lnSpc>
+              <a:buFontTx/>
+              <a:buAutoNum type="alphaLcParenR"/>
+            </a:pPr>
+            <a:r>
+              <a:rPr lang="en-US" sz="2800"/>
+              <a:t>The rope dissipates energy so the pulse must be lower to account for the lower potential energy</a:t>
+            </a:r>
+          </a:p>
+          <a:p>
+            <a:pPr marL="609600" indent="-609600" eaLnBrk="1" hangingPunct="1">
+              <a:lnSpc>
+                <a:spcPct val="90000"/>
+              </a:lnSpc>
+              <a:buFontTx/>
+              <a:buAutoNum type="alphaLcParenR"/>
+            </a:pPr>
+            <a:r>
+              <a:rPr lang="en-US" sz="2800"/>
+              <a:t>The pole exerts an equal but opposite force on the end of the rope, so it is forced downward</a:t>
+            </a:r>
+          </a:p>
+          <a:p>
+            <a:pPr marL="609600" indent="-609600" eaLnBrk="1" hangingPunct="1">
+              <a:lnSpc>
+                <a:spcPct val="90000"/>
+              </a:lnSpc>
+              <a:buFontTx/>
+              <a:buAutoNum type="alphaLcParenR"/>
+            </a:pPr>
+            <a:r>
+              <a:rPr lang="en-US" sz="2800"/>
+              <a:t>The pull of gravity increases for the end of ropes</a:t>
+            </a:r>
+          </a:p>
+          <a:p>
+            <a:pPr marL="609600" indent="-609600" eaLnBrk="1" hangingPunct="1">
+              <a:lnSpc>
+                <a:spcPct val="90000"/>
+              </a:lnSpc>
+              <a:buFontTx/>
+              <a:buAutoNum type="alphaLcParenR"/>
+            </a:pPr>
+            <a:r>
+              <a:rPr lang="en-US" sz="2800"/>
+              <a:t>Can’t tell</a:t>
+            </a:r>
+          </a:p>
+        </p:txBody>
+      </p:sp>
+      <p:sp>
+        <p:nvSpPr>
+          <p:cNvPr id="54274" name="Slide Number Placeholder 5"/>
+          <p:cNvSpPr>
+            <a:spLocks noGrp="1"/>
+          </p:cNvSpPr>
+          <p:nvPr>
+            <p:ph type="sldNum" sz="quarter" idx="12"/>
+          </p:nvPr>
+        </p:nvSpPr>
+        <p:spPr>
+          <a:noFill/>
+        </p:spPr>
+        <p:txBody>
+          <a:bodyPr/>
+          <a:lstStyle/>
+          <a:p>
+            <a:fld id="{57F00098-A586-4021-A6FD-B25936B14AFD}" type="slidenum">
+              <a:rPr lang="en-US" smtClean="0"/>
+              <a:pPr/>
+              <a:t>30</a:t>
+            </a:fld>
+            <a:endParaRPr lang="en-US"/>
+          </a:p>
+        </p:txBody>
+      </p:sp>
+    </p:spTree>
+    <p:extLst>
+      <p:ext uri="{BB962C8B-B14F-4D97-AF65-F5344CB8AC3E}">
+        <p14:creationId xmlns:p14="http://schemas.microsoft.com/office/powerpoint/2010/main" val="4006116839"/>
+      </p:ext>
+    </p:extLst>
+  </p:cSld>
+  <p:clrMapOvr>
+    <a:masterClrMapping/>
+  </p:clrMapOvr>
+</p:sld>
+</file>
+
+<file path=ppt/slides/slide31.xml><?xml version="1.0" encoding="utf-8"?>
+<p:sld xmlns:a="http://schemas.openxmlformats.org/drawingml/2006/main" xmlns:r="http://schemas.openxmlformats.org/officeDocument/2006/relationships" xmlns:p="http://schemas.openxmlformats.org/presentationml/2006/main">
+  <p:cSld>
+    <p:spTree>
+      <p:nvGrpSpPr>
+        <p:cNvPr id="1" name=""/>
+        <p:cNvGrpSpPr/>
+        <p:nvPr/>
+      </p:nvGrpSpPr>
+      <p:grpSpPr>
+        <a:xfrm>
+          <a:off x="0" y="0"/>
+          <a:ext cx="0" cy="0"/>
+          <a:chOff x="0" y="0"/>
+          <a:chExt cx="0" cy="0"/>
+        </a:xfrm>
+      </p:grpSpPr>
+      <p:sp>
+        <p:nvSpPr>
+          <p:cNvPr id="59395" name="Rectangle 2"/>
+          <p:cNvSpPr>
+            <a:spLocks noGrp="1" noChangeArrowheads="1"/>
+          </p:cNvSpPr>
+          <p:nvPr>
+            <p:ph type="title"/>
+          </p:nvPr>
+        </p:nvSpPr>
+        <p:spPr/>
+        <p:txBody>
+          <a:bodyPr/>
+          <a:lstStyle/>
+          <a:p>
+            <a:pPr eaLnBrk="1" hangingPunct="1"/>
+            <a:r>
+              <a:rPr lang="en-US" dirty="0"/>
+              <a:t>Question 123.21.8</a:t>
+            </a:r>
+          </a:p>
+        </p:txBody>
+      </p:sp>
+      <p:sp>
+        <p:nvSpPr>
+          <p:cNvPr id="59396" name="Rectangle 3"/>
+          <p:cNvSpPr>
+            <a:spLocks noGrp="1" noChangeArrowheads="1"/>
+          </p:cNvSpPr>
+          <p:nvPr>
+            <p:ph idx="1"/>
+          </p:nvPr>
+        </p:nvSpPr>
+        <p:spPr/>
+        <p:txBody>
+          <a:bodyPr/>
+          <a:lstStyle/>
+          <a:p>
+            <a:pPr marL="609600" indent="-609600" eaLnBrk="1" hangingPunct="1">
+              <a:buFontTx/>
+              <a:buNone/>
+            </a:pPr>
+            <a:r>
+              <a:rPr lang="en-US"/>
+              <a:t>The speed of sound in water is about 1.4km/s. Will the speed of sound be faster or slower in air?</a:t>
+            </a:r>
+          </a:p>
+          <a:p>
+            <a:pPr marL="609600" indent="-609600" eaLnBrk="1" hangingPunct="1">
+              <a:buFontTx/>
+              <a:buAutoNum type="alphaLcParenR"/>
+            </a:pPr>
+            <a:r>
+              <a:rPr lang="en-US"/>
+              <a:t>Faster</a:t>
+            </a:r>
+          </a:p>
+          <a:p>
+            <a:pPr marL="609600" indent="-609600" eaLnBrk="1" hangingPunct="1">
+              <a:buFontTx/>
+              <a:buAutoNum type="alphaLcParenR"/>
+            </a:pPr>
+            <a:r>
+              <a:rPr lang="en-US"/>
+              <a:t>Slower</a:t>
+            </a:r>
+          </a:p>
+          <a:p>
+            <a:pPr marL="609600" indent="-609600" eaLnBrk="1" hangingPunct="1">
+              <a:buFontTx/>
+              <a:buAutoNum type="alphaLcParenR"/>
+            </a:pPr>
+            <a:r>
+              <a:rPr lang="en-US"/>
+              <a:t>Can’t tell</a:t>
+            </a:r>
+          </a:p>
+          <a:p>
+            <a:pPr marL="609600" indent="-609600" eaLnBrk="1" hangingPunct="1"/>
+            <a:endParaRPr lang="en-US"/>
+          </a:p>
+        </p:txBody>
+      </p:sp>
+      <p:sp>
+        <p:nvSpPr>
+          <p:cNvPr id="59394" name="Slide Number Placeholder 5"/>
+          <p:cNvSpPr>
+            <a:spLocks noGrp="1"/>
+          </p:cNvSpPr>
+          <p:nvPr>
+            <p:ph type="sldNum" sz="quarter" idx="12"/>
+          </p:nvPr>
+        </p:nvSpPr>
+        <p:spPr>
+          <a:noFill/>
+        </p:spPr>
+        <p:txBody>
+          <a:bodyPr/>
+          <a:lstStyle/>
+          <a:p>
+            <a:fld id="{1D24A40A-39FE-434B-BF0F-F604B45A6121}" type="slidenum">
+              <a:rPr lang="en-US" smtClean="0"/>
+              <a:pPr/>
+              <a:t>31</a:t>
+            </a:fld>
+            <a:endParaRPr lang="en-US"/>
+          </a:p>
+        </p:txBody>
+      </p:sp>
+    </p:spTree>
+    <p:extLst>
+      <p:ext uri="{BB962C8B-B14F-4D97-AF65-F5344CB8AC3E}">
+        <p14:creationId xmlns:p14="http://schemas.microsoft.com/office/powerpoint/2010/main" val="1637345474"/>
+      </p:ext>
+    </p:extLst>
+  </p:cSld>
+  <p:clrMapOvr>
+    <a:masterClrMapping/>
+  </p:clrMapOvr>
+</p:sld>
+</file>
+
+<file path=ppt/slides/slide32.xml><?xml version="1.0" encoding="utf-8"?>
 <p:sld xmlns:a="http://schemas.openxmlformats.org/drawingml/2006/main" xmlns:r="http://schemas.openxmlformats.org/officeDocument/2006/relationships" xmlns:p="http://schemas.openxmlformats.org/presentationml/2006/main">
   <p:cSld>
     <p:spTree>
@@ -20236,7 +18496,7 @@
             <a:fld id="{6983E60E-D79A-4609-A31C-60EED159D95A}" type="slidenum">
               <a:rPr lang="en-US" smtClean="0"/>
               <a:pPr/>
-              <a:t>35</a:t>
+              <a:t>32</a:t>
             </a:fld>
             <a:endParaRPr lang="en-US"/>
           </a:p>
@@ -20854,7 +19114,7 @@
 </p:sld>
 </file>
 
-<file path=ppt/slides/slide36.xml><?xml version="1.0" encoding="utf-8"?>
+<file path=ppt/slides/slide33.xml><?xml version="1.0" encoding="utf-8"?>
 <p:sld xmlns:a="http://schemas.openxmlformats.org/drawingml/2006/main" xmlns:r="http://schemas.openxmlformats.org/officeDocument/2006/relationships" xmlns:p="http://schemas.openxmlformats.org/presentationml/2006/main">
   <p:cSld>
     <p:spTree>
@@ -21030,7 +19290,7 @@
 </p:sld>
 </file>
 
-<file path=ppt/slides/slide37.xml><?xml version="1.0" encoding="utf-8"?>
+<file path=ppt/slides/slide34.xml><?xml version="1.0" encoding="utf-8"?>
 <p:sld xmlns:a="http://schemas.openxmlformats.org/drawingml/2006/main" xmlns:r="http://schemas.openxmlformats.org/officeDocument/2006/relationships" xmlns:p="http://schemas.openxmlformats.org/presentationml/2006/main">
   <p:cSld>
     <p:spTree>
@@ -21576,7 +19836,7 @@
 </p:sld>
 </file>
 
-<file path=ppt/slides/slide38.xml><?xml version="1.0" encoding="utf-8"?>
+<file path=ppt/slides/slide35.xml><?xml version="1.0" encoding="utf-8"?>
 <p:sld xmlns:a="http://schemas.openxmlformats.org/drawingml/2006/main" xmlns:r="http://schemas.openxmlformats.org/officeDocument/2006/relationships" xmlns:p="http://schemas.openxmlformats.org/presentationml/2006/main">
   <p:cSld>
     <p:spTree>
@@ -21652,7 +19912,7 @@
 </p:sld>
 </file>
 
-<file path=ppt/slides/slide39.xml><?xml version="1.0" encoding="utf-8"?>
+<file path=ppt/slides/slide36.xml><?xml version="1.0" encoding="utf-8"?>
 <p:sld xmlns:a="http://schemas.openxmlformats.org/drawingml/2006/main" xmlns:r="http://schemas.openxmlformats.org/officeDocument/2006/relationships" xmlns:p="http://schemas.openxmlformats.org/presentationml/2006/main">
   <p:cSld>
     <p:spTree>
@@ -21887,169 +20147,7 @@
 </p:sld>
 </file>
 
-<file path=ppt/slides/slide4.xml><?xml version="1.0" encoding="utf-8"?>
-<p:sld xmlns:a="http://schemas.openxmlformats.org/drawingml/2006/main" xmlns:r="http://schemas.openxmlformats.org/officeDocument/2006/relationships" xmlns:p="http://schemas.openxmlformats.org/presentationml/2006/main">
-  <p:cSld>
-    <p:spTree>
-      <p:nvGrpSpPr>
-        <p:cNvPr id="1" name=""/>
-        <p:cNvGrpSpPr/>
-        <p:nvPr/>
-      </p:nvGrpSpPr>
-      <p:grpSpPr>
-        <a:xfrm>
-          <a:off x="0" y="0"/>
-          <a:ext cx="0" cy="0"/>
-          <a:chOff x="0" y="0"/>
-          <a:chExt cx="0" cy="0"/>
-        </a:xfrm>
-      </p:grpSpPr>
-      <p:sp>
-        <p:nvSpPr>
-          <p:cNvPr id="2" name="Title 1"/>
-          <p:cNvSpPr>
-            <a:spLocks noGrp="1"/>
-          </p:cNvSpPr>
-          <p:nvPr>
-            <p:ph type="title"/>
-          </p:nvPr>
-        </p:nvSpPr>
-        <p:spPr/>
-        <p:txBody>
-          <a:bodyPr/>
-          <a:lstStyle/>
-          <a:p>
-            <a:r>
-              <a:rPr lang="en-US" dirty="0"/>
-              <a:t>Question  223.4.5     123.22.1</a:t>
-            </a:r>
-          </a:p>
-        </p:txBody>
-      </p:sp>
-      <p:sp>
-        <p:nvSpPr>
-          <p:cNvPr id="3" name="Content Placeholder 2"/>
-          <p:cNvSpPr>
-            <a:spLocks noGrp="1"/>
-          </p:cNvSpPr>
-          <p:nvPr>
-            <p:ph idx="1"/>
-          </p:nvPr>
-        </p:nvSpPr>
-        <p:spPr/>
-        <p:txBody>
-          <a:bodyPr/>
-          <a:lstStyle/>
-          <a:p>
-            <a:pPr>
-              <a:buNone/>
-            </a:pPr>
-            <a:r>
-              <a:rPr lang="en-US" dirty="0"/>
-              <a:t>A 60W light bulb is allowed to burn for 3600s. How much energy has been used?</a:t>
-            </a:r>
-          </a:p>
-          <a:p>
-            <a:pPr marL="514350" indent="-514350">
-              <a:buFont typeface="+mj-lt"/>
-              <a:buAutoNum type="alphaLcParenR"/>
-            </a:pPr>
-            <a:r>
-              <a:rPr lang="en-US" dirty="0"/>
-              <a:t>36000J</a:t>
-            </a:r>
-          </a:p>
-          <a:p>
-            <a:pPr marL="514350" indent="-514350">
-              <a:buFont typeface="+mj-lt"/>
-              <a:buAutoNum type="alphaLcParenR"/>
-            </a:pPr>
-            <a:r>
-              <a:rPr lang="en-US" dirty="0"/>
-              <a:t>72000J</a:t>
-            </a:r>
-          </a:p>
-          <a:p>
-            <a:pPr marL="514350" indent="-514350">
-              <a:buFont typeface="+mj-lt"/>
-              <a:buAutoNum type="alphaLcParenR"/>
-            </a:pPr>
-            <a:r>
-              <a:rPr lang="en-US" dirty="0"/>
-              <a:t>144000J</a:t>
-            </a:r>
-          </a:p>
-          <a:p>
-            <a:pPr marL="514350" indent="-514350">
-              <a:buFont typeface="+mj-lt"/>
-              <a:buAutoNum type="alphaLcParenR"/>
-            </a:pPr>
-            <a:r>
-              <a:rPr lang="en-US" dirty="0"/>
-              <a:t>216000J</a:t>
-            </a:r>
-          </a:p>
-          <a:p>
-            <a:pPr marL="514350" indent="-514350">
-              <a:buFont typeface="+mj-lt"/>
-              <a:buAutoNum type="alphaLcParenR"/>
-            </a:pPr>
-            <a:r>
-              <a:rPr lang="en-US" dirty="0"/>
-              <a:t>5400000J</a:t>
-            </a:r>
-          </a:p>
-          <a:p>
-            <a:pPr>
-              <a:buNone/>
-            </a:pPr>
-            <a:endParaRPr lang="en-US" dirty="0"/>
-          </a:p>
-        </p:txBody>
-      </p:sp>
-      <p:sp>
-        <p:nvSpPr>
-          <p:cNvPr id="4" name="Slide Number Placeholder 3"/>
-          <p:cNvSpPr>
-            <a:spLocks noGrp="1"/>
-          </p:cNvSpPr>
-          <p:nvPr>
-            <p:ph type="sldNum" sz="quarter" idx="12"/>
-          </p:nvPr>
-        </p:nvSpPr>
-        <p:spPr/>
-        <p:txBody>
-          <a:bodyPr/>
-          <a:lstStyle/>
-          <a:p>
-            <a:pPr>
-              <a:defRPr/>
-            </a:pPr>
-            <a:fld id="{64137B81-8888-4253-92EC-0AED2A590749}" type="slidenum">
-              <a:rPr lang="en-US" smtClean="0"/>
-              <a:pPr>
-                <a:defRPr/>
-              </a:pPr>
-              <a:t>4</a:t>
-            </a:fld>
-            <a:endParaRPr lang="en-US"/>
-          </a:p>
-        </p:txBody>
-      </p:sp>
-    </p:spTree>
-    <p:extLst>
-      <p:ext uri="{BB962C8B-B14F-4D97-AF65-F5344CB8AC3E}">
-        <p14:creationId xmlns:p14="http://schemas.microsoft.com/office/powerpoint/2010/main" val="1716686287"/>
-      </p:ext>
-    </p:extLst>
-  </p:cSld>
-  <p:clrMapOvr>
-    <a:masterClrMapping/>
-  </p:clrMapOvr>
-</p:sld>
-</file>
-
-<file path=ppt/slides/slide40.xml><?xml version="1.0" encoding="utf-8"?>
+<file path=ppt/slides/slide37.xml><?xml version="1.0" encoding="utf-8"?>
 <p:sld xmlns:a="http://schemas.openxmlformats.org/drawingml/2006/main" xmlns:r="http://schemas.openxmlformats.org/officeDocument/2006/relationships" xmlns:p="http://schemas.openxmlformats.org/presentationml/2006/main">
   <p:cSld>
     <p:spTree>
@@ -22400,7 +20498,7 @@
 </p:sld>
 </file>
 
-<file path=ppt/slides/slide41.xml><?xml version="1.0" encoding="utf-8"?>
+<file path=ppt/slides/slide38.xml><?xml version="1.0" encoding="utf-8"?>
 <p:sld xmlns:a="http://schemas.openxmlformats.org/drawingml/2006/main" xmlns:r="http://schemas.openxmlformats.org/officeDocument/2006/relationships" xmlns:p="http://schemas.openxmlformats.org/presentationml/2006/main">
   <p:cSld>
     <p:spTree>
@@ -22944,7 +21042,7 @@
 </p:sld>
 </file>
 
-<file path=ppt/slides/slide42.xml><?xml version="1.0" encoding="utf-8"?>
+<file path=ppt/slides/slide39.xml><?xml version="1.0" encoding="utf-8"?>
 <p:sld xmlns:a="http://schemas.openxmlformats.org/drawingml/2006/main" xmlns:r="http://schemas.openxmlformats.org/officeDocument/2006/relationships" xmlns:p="http://schemas.openxmlformats.org/presentationml/2006/main">
   <p:cSld>
     <p:spTree>
@@ -23179,7 +21277,169 @@
 </p:sld>
 </file>
 
-<file path=ppt/slides/slide43.xml><?xml version="1.0" encoding="utf-8"?>
+<file path=ppt/slides/slide4.xml><?xml version="1.0" encoding="utf-8"?>
+<p:sld xmlns:a="http://schemas.openxmlformats.org/drawingml/2006/main" xmlns:r="http://schemas.openxmlformats.org/officeDocument/2006/relationships" xmlns:p="http://schemas.openxmlformats.org/presentationml/2006/main">
+  <p:cSld>
+    <p:spTree>
+      <p:nvGrpSpPr>
+        <p:cNvPr id="1" name=""/>
+        <p:cNvGrpSpPr/>
+        <p:nvPr/>
+      </p:nvGrpSpPr>
+      <p:grpSpPr>
+        <a:xfrm>
+          <a:off x="0" y="0"/>
+          <a:ext cx="0" cy="0"/>
+          <a:chOff x="0" y="0"/>
+          <a:chExt cx="0" cy="0"/>
+        </a:xfrm>
+      </p:grpSpPr>
+      <p:sp>
+        <p:nvSpPr>
+          <p:cNvPr id="2" name="Title 1"/>
+          <p:cNvSpPr>
+            <a:spLocks noGrp="1"/>
+          </p:cNvSpPr>
+          <p:nvPr>
+            <p:ph type="title"/>
+          </p:nvPr>
+        </p:nvSpPr>
+        <p:spPr/>
+        <p:txBody>
+          <a:bodyPr/>
+          <a:lstStyle/>
+          <a:p>
+            <a:r>
+              <a:rPr lang="en-US" dirty="0"/>
+              <a:t>Question  223.4.5     123.22.1</a:t>
+            </a:r>
+          </a:p>
+        </p:txBody>
+      </p:sp>
+      <p:sp>
+        <p:nvSpPr>
+          <p:cNvPr id="3" name="Content Placeholder 2"/>
+          <p:cNvSpPr>
+            <a:spLocks noGrp="1"/>
+          </p:cNvSpPr>
+          <p:nvPr>
+            <p:ph idx="1"/>
+          </p:nvPr>
+        </p:nvSpPr>
+        <p:spPr/>
+        <p:txBody>
+          <a:bodyPr/>
+          <a:lstStyle/>
+          <a:p>
+            <a:pPr>
+              <a:buNone/>
+            </a:pPr>
+            <a:r>
+              <a:rPr lang="en-US" dirty="0"/>
+              <a:t>A 60W light bulb is allowed to burn for 3600s. How much energy has been used?</a:t>
+            </a:r>
+          </a:p>
+          <a:p>
+            <a:pPr marL="514350" indent="-514350">
+              <a:buFont typeface="+mj-lt"/>
+              <a:buAutoNum type="alphaLcParenR"/>
+            </a:pPr>
+            <a:r>
+              <a:rPr lang="en-US" dirty="0"/>
+              <a:t>36000J</a:t>
+            </a:r>
+          </a:p>
+          <a:p>
+            <a:pPr marL="514350" indent="-514350">
+              <a:buFont typeface="+mj-lt"/>
+              <a:buAutoNum type="alphaLcParenR"/>
+            </a:pPr>
+            <a:r>
+              <a:rPr lang="en-US" dirty="0"/>
+              <a:t>72000J</a:t>
+            </a:r>
+          </a:p>
+          <a:p>
+            <a:pPr marL="514350" indent="-514350">
+              <a:buFont typeface="+mj-lt"/>
+              <a:buAutoNum type="alphaLcParenR"/>
+            </a:pPr>
+            <a:r>
+              <a:rPr lang="en-US" dirty="0"/>
+              <a:t>144000J</a:t>
+            </a:r>
+          </a:p>
+          <a:p>
+            <a:pPr marL="514350" indent="-514350">
+              <a:buFont typeface="+mj-lt"/>
+              <a:buAutoNum type="alphaLcParenR"/>
+            </a:pPr>
+            <a:r>
+              <a:rPr lang="en-US" dirty="0"/>
+              <a:t>216000J</a:t>
+            </a:r>
+          </a:p>
+          <a:p>
+            <a:pPr marL="514350" indent="-514350">
+              <a:buFont typeface="+mj-lt"/>
+              <a:buAutoNum type="alphaLcParenR"/>
+            </a:pPr>
+            <a:r>
+              <a:rPr lang="en-US" dirty="0"/>
+              <a:t>5400000J</a:t>
+            </a:r>
+          </a:p>
+          <a:p>
+            <a:pPr>
+              <a:buNone/>
+            </a:pPr>
+            <a:endParaRPr lang="en-US" dirty="0"/>
+          </a:p>
+        </p:txBody>
+      </p:sp>
+      <p:sp>
+        <p:nvSpPr>
+          <p:cNvPr id="4" name="Slide Number Placeholder 3"/>
+          <p:cNvSpPr>
+            <a:spLocks noGrp="1"/>
+          </p:cNvSpPr>
+          <p:nvPr>
+            <p:ph type="sldNum" sz="quarter" idx="12"/>
+          </p:nvPr>
+        </p:nvSpPr>
+        <p:spPr/>
+        <p:txBody>
+          <a:bodyPr/>
+          <a:lstStyle/>
+          <a:p>
+            <a:pPr>
+              <a:defRPr/>
+            </a:pPr>
+            <a:fld id="{64137B81-8888-4253-92EC-0AED2A590749}" type="slidenum">
+              <a:rPr lang="en-US" smtClean="0"/>
+              <a:pPr>
+                <a:defRPr/>
+              </a:pPr>
+              <a:t>4</a:t>
+            </a:fld>
+            <a:endParaRPr lang="en-US"/>
+          </a:p>
+        </p:txBody>
+      </p:sp>
+    </p:spTree>
+    <p:extLst>
+      <p:ext uri="{BB962C8B-B14F-4D97-AF65-F5344CB8AC3E}">
+        <p14:creationId xmlns:p14="http://schemas.microsoft.com/office/powerpoint/2010/main" val="1716686287"/>
+      </p:ext>
+    </p:extLst>
+  </p:cSld>
+  <p:clrMapOvr>
+    <a:masterClrMapping/>
+  </p:clrMapOvr>
+</p:sld>
+</file>
+
+<file path=ppt/slides/slide40.xml><?xml version="1.0" encoding="utf-8"?>
 <p:sld xmlns:a="http://schemas.openxmlformats.org/drawingml/2006/main" xmlns:r="http://schemas.openxmlformats.org/officeDocument/2006/relationships" xmlns:p="http://schemas.openxmlformats.org/presentationml/2006/main">
   <p:cSld>
     <p:spTree>
@@ -23241,7 +21501,7 @@
 </p:sld>
 </file>
 
-<file path=ppt/slides/slide44.xml><?xml version="1.0" encoding="utf-8"?>
+<file path=ppt/slides/slide41.xml><?xml version="1.0" encoding="utf-8"?>
 <p:sld xmlns:a="http://schemas.openxmlformats.org/drawingml/2006/main" xmlns:r="http://schemas.openxmlformats.org/officeDocument/2006/relationships" xmlns:p="http://schemas.openxmlformats.org/presentationml/2006/main">
   <p:cSld>
     <p:spTree>
@@ -23297,7 +21557,7 @@
 </p:sld>
 </file>
 
-<file path=ppt/slides/slide45.xml><?xml version="1.0" encoding="utf-8"?>
+<file path=ppt/slides/slide42.xml><?xml version="1.0" encoding="utf-8"?>
 <p:sld xmlns:a="http://schemas.openxmlformats.org/drawingml/2006/main" xmlns:r="http://schemas.openxmlformats.org/officeDocument/2006/relationships" xmlns:p="http://schemas.openxmlformats.org/presentationml/2006/main">
   <p:cSld>
     <p:spTree>
@@ -23353,7 +21613,7 @@
 </p:sld>
 </file>
 
-<file path=ppt/slides/slide46.xml><?xml version="1.0" encoding="utf-8"?>
+<file path=ppt/slides/slide43.xml><?xml version="1.0" encoding="utf-8"?>
 <p:sld xmlns:a="http://schemas.openxmlformats.org/drawingml/2006/main" xmlns:r="http://schemas.openxmlformats.org/officeDocument/2006/relationships" xmlns:p="http://schemas.openxmlformats.org/presentationml/2006/main">
   <p:cSld>
     <p:spTree>
@@ -23498,7 +21758,7 @@
             <a:fld id="{85539879-F00E-4549-815A-3F0634DD4490}" type="slidenum">
               <a:rPr lang="en-US" smtClean="0"/>
               <a:pPr/>
-              <a:t>46</a:t>
+              <a:t>43</a:t>
             </a:fld>
             <a:endParaRPr lang="en-US"/>
           </a:p>
@@ -23517,7 +21777,7 @@
 </p:sld>
 </file>
 
-<file path=ppt/slides/slide47.xml><?xml version="1.0" encoding="utf-8"?>
+<file path=ppt/slides/slide44.xml><?xml version="1.0" encoding="utf-8"?>
 <p:sld xmlns:a="http://schemas.openxmlformats.org/drawingml/2006/main" xmlns:r="http://schemas.openxmlformats.org/officeDocument/2006/relationships" xmlns:p="http://schemas.openxmlformats.org/presentationml/2006/main">
   <p:cSld>
     <p:spTree>
@@ -23678,7 +21938,7 @@
 </p:sld>
 </file>
 
-<file path=ppt/slides/slide48.xml><?xml version="1.0" encoding="utf-8"?>
+<file path=ppt/slides/slide45.xml><?xml version="1.0" encoding="utf-8"?>
 <p:sld xmlns:a="http://schemas.openxmlformats.org/drawingml/2006/main" xmlns:r="http://schemas.openxmlformats.org/officeDocument/2006/relationships" xmlns:p="http://schemas.openxmlformats.org/presentationml/2006/main">
   <p:cSld>
     <p:spTree>
@@ -23867,7 +22127,7 @@
 </p:sld>
 </file>
 
-<file path=ppt/slides/slide49.xml><?xml version="1.0" encoding="utf-8"?>
+<file path=ppt/slides/slide46.xml><?xml version="1.0" encoding="utf-8"?>
 <p:sld xmlns:a="http://schemas.openxmlformats.org/drawingml/2006/main" xmlns:r="http://schemas.openxmlformats.org/officeDocument/2006/relationships" xmlns:p="http://schemas.openxmlformats.org/presentationml/2006/main">
   <p:cSld>
     <p:spTree>
@@ -24056,6 +22316,416 @@
 </p:sld>
 </file>
 
+<file path=ppt/slides/slide47.xml><?xml version="1.0" encoding="utf-8"?>
+<p:sld xmlns:a="http://schemas.openxmlformats.org/drawingml/2006/main" xmlns:r="http://schemas.openxmlformats.org/officeDocument/2006/relationships" xmlns:p="http://schemas.openxmlformats.org/presentationml/2006/main">
+  <p:cSld>
+    <p:spTree>
+      <p:nvGrpSpPr>
+        <p:cNvPr id="1" name=""/>
+        <p:cNvGrpSpPr/>
+        <p:nvPr/>
+      </p:nvGrpSpPr>
+      <p:grpSpPr>
+        <a:xfrm>
+          <a:off x="0" y="0"/>
+          <a:ext cx="0" cy="0"/>
+          <a:chOff x="0" y="0"/>
+          <a:chExt cx="0" cy="0"/>
+        </a:xfrm>
+      </p:grpSpPr>
+      <p:sp>
+        <p:nvSpPr>
+          <p:cNvPr id="2" name="Title 1"/>
+          <p:cNvSpPr>
+            <a:spLocks noGrp="1"/>
+          </p:cNvSpPr>
+          <p:nvPr>
+            <p:ph type="title"/>
+          </p:nvPr>
+        </p:nvSpPr>
+        <p:spPr/>
+        <p:txBody>
+          <a:bodyPr/>
+          <a:lstStyle/>
+          <a:p>
+            <a:r>
+              <a:rPr lang="en-US" dirty="0"/>
+              <a:t>Question 223.6.0.1</a:t>
+            </a:r>
+          </a:p>
+        </p:txBody>
+      </p:sp>
+      <p:sp>
+        <p:nvSpPr>
+          <p:cNvPr id="3" name="Content Placeholder 2"/>
+          <p:cNvSpPr>
+            <a:spLocks noGrp="1"/>
+          </p:cNvSpPr>
+          <p:nvPr>
+            <p:ph idx="1"/>
+          </p:nvPr>
+        </p:nvSpPr>
+        <p:spPr/>
+        <p:txBody>
+          <a:bodyPr/>
+          <a:lstStyle/>
+          <a:p>
+            <a:pPr marL="0" indent="0">
+              <a:buNone/>
+            </a:pPr>
+            <a:r>
+              <a:rPr lang="en-US" dirty="0"/>
+              <a:t>I have two sinusoidal waves in the same medium. The waves travel the same direction (unlike our class demonstration).  If the resultant wave has a larger amplitude than the original waves we call this…</a:t>
+            </a:r>
+          </a:p>
+          <a:p>
+            <a:pPr marL="514350" indent="-514350">
+              <a:buAutoNum type="alphaLcParenR"/>
+            </a:pPr>
+            <a:r>
+              <a:rPr lang="en-US" dirty="0"/>
+              <a:t>Constructive interference</a:t>
+            </a:r>
+          </a:p>
+          <a:p>
+            <a:pPr marL="514350" indent="-514350">
+              <a:buAutoNum type="alphaLcParenR"/>
+            </a:pPr>
+            <a:r>
+              <a:rPr lang="en-US" dirty="0"/>
+              <a:t>Destructive interference</a:t>
+            </a:r>
+          </a:p>
+          <a:p>
+            <a:pPr marL="514350" indent="-514350">
+              <a:buAutoNum type="alphaLcParenR"/>
+            </a:pPr>
+            <a:r>
+              <a:rPr lang="en-US" dirty="0"/>
+              <a:t>A miracle</a:t>
+            </a:r>
+          </a:p>
+        </p:txBody>
+      </p:sp>
+      <p:sp>
+        <p:nvSpPr>
+          <p:cNvPr id="4" name="Slide Number Placeholder 3"/>
+          <p:cNvSpPr>
+            <a:spLocks noGrp="1"/>
+          </p:cNvSpPr>
+          <p:nvPr>
+            <p:ph type="sldNum" sz="quarter" idx="12"/>
+          </p:nvPr>
+        </p:nvSpPr>
+        <p:spPr/>
+        <p:txBody>
+          <a:bodyPr/>
+          <a:lstStyle/>
+          <a:p>
+            <a:pPr>
+              <a:defRPr/>
+            </a:pPr>
+            <a:fld id="{64137B81-8888-4253-92EC-0AED2A590749}" type="slidenum">
+              <a:rPr lang="en-US" smtClean="0"/>
+              <a:pPr>
+                <a:defRPr/>
+              </a:pPr>
+              <a:t>47</a:t>
+            </a:fld>
+            <a:endParaRPr lang="en-US"/>
+          </a:p>
+        </p:txBody>
+      </p:sp>
+    </p:spTree>
+    <p:extLst>
+      <p:ext uri="{BB962C8B-B14F-4D97-AF65-F5344CB8AC3E}">
+        <p14:creationId xmlns:p14="http://schemas.microsoft.com/office/powerpoint/2010/main" val="1497180699"/>
+      </p:ext>
+    </p:extLst>
+  </p:cSld>
+  <p:clrMapOvr>
+    <a:masterClrMapping/>
+  </p:clrMapOvr>
+</p:sld>
+</file>
+
+<file path=ppt/slides/slide48.xml><?xml version="1.0" encoding="utf-8"?>
+<p:sld xmlns:a="http://schemas.openxmlformats.org/drawingml/2006/main" xmlns:r="http://schemas.openxmlformats.org/officeDocument/2006/relationships" xmlns:p="http://schemas.openxmlformats.org/presentationml/2006/main">
+  <p:cSld>
+    <p:spTree>
+      <p:nvGrpSpPr>
+        <p:cNvPr id="1" name=""/>
+        <p:cNvGrpSpPr/>
+        <p:nvPr/>
+      </p:nvGrpSpPr>
+      <p:grpSpPr>
+        <a:xfrm>
+          <a:off x="0" y="0"/>
+          <a:ext cx="0" cy="0"/>
+          <a:chOff x="0" y="0"/>
+          <a:chExt cx="0" cy="0"/>
+        </a:xfrm>
+      </p:grpSpPr>
+      <p:sp>
+        <p:nvSpPr>
+          <p:cNvPr id="2" name="Title 1"/>
+          <p:cNvSpPr>
+            <a:spLocks noGrp="1"/>
+          </p:cNvSpPr>
+          <p:nvPr>
+            <p:ph type="title"/>
+          </p:nvPr>
+        </p:nvSpPr>
+        <p:spPr/>
+        <p:txBody>
+          <a:bodyPr/>
+          <a:lstStyle/>
+          <a:p>
+            <a:r>
+              <a:rPr lang="en-US" dirty="0"/>
+              <a:t>Question 223.6.0.2</a:t>
+            </a:r>
+          </a:p>
+        </p:txBody>
+      </p:sp>
+      <p:sp>
+        <p:nvSpPr>
+          <p:cNvPr id="3" name="Content Placeholder 2"/>
+          <p:cNvSpPr>
+            <a:spLocks noGrp="1"/>
+          </p:cNvSpPr>
+          <p:nvPr>
+            <p:ph idx="1"/>
+          </p:nvPr>
+        </p:nvSpPr>
+        <p:spPr/>
+        <p:txBody>
+          <a:bodyPr/>
+          <a:lstStyle/>
+          <a:p>
+            <a:pPr marL="0" indent="0">
+              <a:buNone/>
+            </a:pPr>
+            <a:r>
+              <a:rPr lang="en-US" dirty="0"/>
+              <a:t>I have two sinusoidal waves in the same medium. The waves travel the same direction (unlike our class demonstration).  If the resultant wave has a smaller amplitude than the original waves we call this…</a:t>
+            </a:r>
+          </a:p>
+          <a:p>
+            <a:pPr marL="514350" indent="-514350">
+              <a:buAutoNum type="alphaLcParenR"/>
+            </a:pPr>
+            <a:r>
+              <a:rPr lang="en-US" dirty="0"/>
+              <a:t>Constructive interference</a:t>
+            </a:r>
+          </a:p>
+          <a:p>
+            <a:pPr marL="514350" indent="-514350">
+              <a:buAutoNum type="alphaLcParenR"/>
+            </a:pPr>
+            <a:r>
+              <a:rPr lang="en-US" dirty="0"/>
+              <a:t>Destructive interference</a:t>
+            </a:r>
+          </a:p>
+          <a:p>
+            <a:pPr marL="514350" indent="-514350">
+              <a:buAutoNum type="alphaLcParenR"/>
+            </a:pPr>
+            <a:r>
+              <a:rPr lang="en-US" dirty="0"/>
+              <a:t>Depressing</a:t>
+            </a:r>
+          </a:p>
+        </p:txBody>
+      </p:sp>
+      <p:sp>
+        <p:nvSpPr>
+          <p:cNvPr id="4" name="Slide Number Placeholder 3"/>
+          <p:cNvSpPr>
+            <a:spLocks noGrp="1"/>
+          </p:cNvSpPr>
+          <p:nvPr>
+            <p:ph type="sldNum" sz="quarter" idx="12"/>
+          </p:nvPr>
+        </p:nvSpPr>
+        <p:spPr/>
+        <p:txBody>
+          <a:bodyPr/>
+          <a:lstStyle/>
+          <a:p>
+            <a:pPr>
+              <a:defRPr/>
+            </a:pPr>
+            <a:fld id="{64137B81-8888-4253-92EC-0AED2A590749}" type="slidenum">
+              <a:rPr lang="en-US" smtClean="0"/>
+              <a:pPr>
+                <a:defRPr/>
+              </a:pPr>
+              <a:t>48</a:t>
+            </a:fld>
+            <a:endParaRPr lang="en-US"/>
+          </a:p>
+        </p:txBody>
+      </p:sp>
+    </p:spTree>
+    <p:extLst>
+      <p:ext uri="{BB962C8B-B14F-4D97-AF65-F5344CB8AC3E}">
+        <p14:creationId xmlns:p14="http://schemas.microsoft.com/office/powerpoint/2010/main" val="4119617871"/>
+      </p:ext>
+    </p:extLst>
+  </p:cSld>
+  <p:clrMapOvr>
+    <a:masterClrMapping/>
+  </p:clrMapOvr>
+</p:sld>
+</file>
+
+<file path=ppt/slides/slide49.xml><?xml version="1.0" encoding="utf-8"?>
+<p:sld xmlns:a="http://schemas.openxmlformats.org/drawingml/2006/main" xmlns:r="http://schemas.openxmlformats.org/officeDocument/2006/relationships" xmlns:p="http://schemas.openxmlformats.org/presentationml/2006/main">
+  <p:cSld>
+    <p:spTree>
+      <p:nvGrpSpPr>
+        <p:cNvPr id="1" name=""/>
+        <p:cNvGrpSpPr/>
+        <p:nvPr/>
+      </p:nvGrpSpPr>
+      <p:grpSpPr>
+        <a:xfrm>
+          <a:off x="0" y="0"/>
+          <a:ext cx="0" cy="0"/>
+          <a:chOff x="0" y="0"/>
+          <a:chExt cx="0" cy="0"/>
+        </a:xfrm>
+      </p:grpSpPr>
+      <p:sp>
+        <p:nvSpPr>
+          <p:cNvPr id="2" name="Title 1"/>
+          <p:cNvSpPr>
+            <a:spLocks noGrp="1"/>
+          </p:cNvSpPr>
+          <p:nvPr>
+            <p:ph type="title"/>
+          </p:nvPr>
+        </p:nvSpPr>
+        <p:spPr/>
+        <p:txBody>
+          <a:bodyPr/>
+          <a:lstStyle/>
+          <a:p>
+            <a:r>
+              <a:rPr lang="en-US" dirty="0"/>
+              <a:t>Question 223.6.0.3</a:t>
+            </a:r>
+          </a:p>
+        </p:txBody>
+      </p:sp>
+      <p:sp>
+        <p:nvSpPr>
+          <p:cNvPr id="3" name="Content Placeholder 2"/>
+          <p:cNvSpPr>
+            <a:spLocks noGrp="1"/>
+          </p:cNvSpPr>
+          <p:nvPr>
+            <p:ph idx="1"/>
+          </p:nvPr>
+        </p:nvSpPr>
+        <p:spPr/>
+        <p:txBody>
+          <a:bodyPr>
+            <a:normAutofit lnSpcReduction="10000"/>
+          </a:bodyPr>
+          <a:lstStyle/>
+          <a:p>
+            <a:pPr marL="0" indent="0">
+              <a:buNone/>
+            </a:pPr>
+            <a:r>
+              <a:rPr lang="en-US" dirty="0"/>
+              <a:t>I have two sinusoidal waves in the same medium. The waves travel the same direction (unlike our class demonstration).  Sometimes we get constructive and sometimes destructive interference. What makes the difference?</a:t>
+            </a:r>
+          </a:p>
+          <a:p>
+            <a:pPr marL="514350" indent="-514350">
+              <a:buAutoNum type="alphaLcParenR"/>
+            </a:pPr>
+            <a:r>
+              <a:rPr lang="en-US" dirty="0"/>
+              <a:t>The relative amplitude of the waves</a:t>
+            </a:r>
+          </a:p>
+          <a:p>
+            <a:pPr marL="514350" indent="-514350">
+              <a:buAutoNum type="alphaLcParenR"/>
+            </a:pPr>
+            <a:r>
+              <a:rPr lang="en-US" dirty="0"/>
+              <a:t>The relative phase constant of the waves</a:t>
+            </a:r>
+          </a:p>
+          <a:p>
+            <a:pPr marL="514350" indent="-514350">
+              <a:buAutoNum type="alphaLcParenR"/>
+            </a:pPr>
+            <a:r>
+              <a:rPr lang="en-US" dirty="0"/>
+              <a:t>The wavelength of the waves</a:t>
+            </a:r>
+          </a:p>
+          <a:p>
+            <a:pPr marL="514350" indent="-514350">
+              <a:buAutoNum type="alphaLcParenR"/>
+            </a:pPr>
+            <a:r>
+              <a:rPr lang="en-US" dirty="0"/>
+              <a:t>Random processes</a:t>
+            </a:r>
+          </a:p>
+        </p:txBody>
+      </p:sp>
+      <p:sp>
+        <p:nvSpPr>
+          <p:cNvPr id="4" name="Slide Number Placeholder 3"/>
+          <p:cNvSpPr>
+            <a:spLocks noGrp="1"/>
+          </p:cNvSpPr>
+          <p:nvPr>
+            <p:ph type="sldNum" sz="quarter" idx="12"/>
+          </p:nvPr>
+        </p:nvSpPr>
+        <p:spPr/>
+        <p:txBody>
+          <a:bodyPr/>
+          <a:lstStyle/>
+          <a:p>
+            <a:pPr>
+              <a:defRPr/>
+            </a:pPr>
+            <a:fld id="{64137B81-8888-4253-92EC-0AED2A590749}" type="slidenum">
+              <a:rPr lang="en-US" smtClean="0"/>
+              <a:pPr>
+                <a:defRPr/>
+              </a:pPr>
+              <a:t>49</a:t>
+            </a:fld>
+            <a:endParaRPr lang="en-US"/>
+          </a:p>
+        </p:txBody>
+      </p:sp>
+    </p:spTree>
+    <p:extLst>
+      <p:ext uri="{BB962C8B-B14F-4D97-AF65-F5344CB8AC3E}">
+        <p14:creationId xmlns:p14="http://schemas.microsoft.com/office/powerpoint/2010/main" val="778798007"/>
+      </p:ext>
+    </p:extLst>
+  </p:cSld>
+  <p:clrMapOvr>
+    <a:masterClrMapping/>
+  </p:clrMapOvr>
+</p:sld>
+</file>
+
 <file path=ppt/slides/slide5.xml><?xml version="1.0" encoding="utf-8"?>
 <p:sld xmlns:a="http://schemas.openxmlformats.org/drawingml/2006/main" xmlns:r="http://schemas.openxmlformats.org/officeDocument/2006/relationships" xmlns:p="http://schemas.openxmlformats.org/presentationml/2006/main">
   <p:cSld>
@@ -24206,9 +22876,9 @@
       </p:grpSpPr>
       <p:sp>
         <p:nvSpPr>
-          <p:cNvPr id="2" name="Title 1"/>
+          <p:cNvPr id="1030" name="Rectangle 2"/>
           <p:cNvSpPr>
-            <a:spLocks noGrp="1"/>
+            <a:spLocks noGrp="1" noChangeArrowheads="1"/>
           </p:cNvSpPr>
           <p:nvPr>
             <p:ph type="title"/>
@@ -24219,21 +22889,22 @@
           <a:bodyPr/>
           <a:lstStyle/>
           <a:p>
+            <a:pPr eaLnBrk="1" hangingPunct="1"/>
             <a:r>
-              <a:rPr lang="en-US" dirty="0"/>
-              <a:t>Question 223.6.0.1</a:t>
+              <a:rPr lang="en-US"/>
+              <a:t>Example</a:t>
             </a:r>
           </a:p>
         </p:txBody>
       </p:sp>
       <p:sp>
         <p:nvSpPr>
-          <p:cNvPr id="3" name="Content Placeholder 2"/>
+          <p:cNvPr id="1031" name="Rectangle 3"/>
           <p:cNvSpPr>
-            <a:spLocks noGrp="1"/>
+            <a:spLocks noGrp="1" noChangeArrowheads="1"/>
           </p:cNvSpPr>
           <p:nvPr>
-            <p:ph idx="1"/>
+            <p:ph type="body" idx="1"/>
           </p:nvPr>
         </p:nvSpPr>
         <p:spPr/>
@@ -24241,76 +22912,527 @@
           <a:bodyPr/>
           <a:lstStyle/>
           <a:p>
-            <a:pPr marL="0" indent="0">
-              <a:buNone/>
-            </a:pPr>
-            <a:r>
-              <a:rPr lang="en-US" dirty="0"/>
-              <a:t>I have two sinusoidal waves in the same medium. The waves travel the same direction (unlike our class demonstration).  If the resultant wave has a larger amplitude than the original waves we call this…</a:t>
-            </a:r>
-          </a:p>
-          <a:p>
-            <a:pPr marL="514350" indent="-514350">
-              <a:buAutoNum type="alphaLcParenR"/>
-            </a:pPr>
-            <a:r>
-              <a:rPr lang="en-US" dirty="0"/>
-              <a:t>Constructive interference</a:t>
-            </a:r>
-          </a:p>
-          <a:p>
-            <a:pPr marL="514350" indent="-514350">
-              <a:buAutoNum type="alphaLcParenR"/>
-            </a:pPr>
-            <a:r>
-              <a:rPr lang="en-US" dirty="0"/>
-              <a:t>Destructive interference</a:t>
-            </a:r>
-          </a:p>
-          <a:p>
-            <a:pPr marL="514350" indent="-514350">
-              <a:buAutoNum type="alphaLcParenR"/>
-            </a:pPr>
-            <a:r>
-              <a:rPr lang="en-US" dirty="0"/>
-              <a:t>A miracle</a:t>
-            </a:r>
+            <a:pPr eaLnBrk="1" hangingPunct="1"/>
+            <a:endParaRPr lang="en-US"/>
           </a:p>
         </p:txBody>
       </p:sp>
+      <p:pic>
+        <p:nvPicPr>
+          <p:cNvPr id="1032" name="Picture 4"/>
+          <p:cNvPicPr>
+            <a:picLocks noChangeAspect="1" noChangeArrowheads="1"/>
+          </p:cNvPicPr>
+          <p:nvPr/>
+        </p:nvPicPr>
+        <p:blipFill>
+          <a:blip r:embed="rId2" cstate="print"/>
+          <a:srcRect/>
+          <a:stretch>
+            <a:fillRect/>
+          </a:stretch>
+        </p:blipFill>
+        <p:spPr bwMode="auto">
+          <a:xfrm>
+            <a:off x="1438275" y="1550988"/>
+            <a:ext cx="2695575" cy="1790700"/>
+          </a:xfrm>
+          <a:prstGeom prst="rect">
+            <a:avLst/>
+          </a:prstGeom>
+          <a:noFill/>
+          <a:ln w="9525" algn="ctr">
+            <a:noFill/>
+            <a:miter lim="800000"/>
+            <a:headEnd/>
+            <a:tailEnd/>
+          </a:ln>
+        </p:spPr>
+      </p:pic>
+      <p:pic>
+        <p:nvPicPr>
+          <p:cNvPr id="1033" name="Picture 5"/>
+          <p:cNvPicPr>
+            <a:picLocks noChangeAspect="1" noChangeArrowheads="1"/>
+          </p:cNvPicPr>
+          <p:nvPr/>
+        </p:nvPicPr>
+        <p:blipFill>
+          <a:blip r:embed="rId3" cstate="print"/>
+          <a:srcRect/>
+          <a:stretch>
+            <a:fillRect/>
+          </a:stretch>
+        </p:blipFill>
+        <p:spPr bwMode="auto">
+          <a:xfrm>
+            <a:off x="4773613" y="1546225"/>
+            <a:ext cx="2847975" cy="1885950"/>
+          </a:xfrm>
+          <a:prstGeom prst="rect">
+            <a:avLst/>
+          </a:prstGeom>
+          <a:noFill/>
+          <a:ln w="9525" algn="ctr">
+            <a:noFill/>
+            <a:miter lim="800000"/>
+            <a:headEnd/>
+            <a:tailEnd/>
+          </a:ln>
+        </p:spPr>
+      </p:pic>
+      <p:pic>
+        <p:nvPicPr>
+          <p:cNvPr id="1034" name="Picture 6"/>
+          <p:cNvPicPr>
+            <a:picLocks noChangeAspect="1" noChangeArrowheads="1"/>
+          </p:cNvPicPr>
+          <p:nvPr/>
+        </p:nvPicPr>
+        <p:blipFill>
+          <a:blip r:embed="rId4" cstate="print"/>
+          <a:srcRect/>
+          <a:stretch>
+            <a:fillRect/>
+          </a:stretch>
+        </p:blipFill>
+        <p:spPr bwMode="auto">
+          <a:xfrm>
+            <a:off x="3138488" y="3502025"/>
+            <a:ext cx="2981325" cy="1981200"/>
+          </a:xfrm>
+          <a:prstGeom prst="rect">
+            <a:avLst/>
+          </a:prstGeom>
+          <a:noFill/>
+          <a:ln w="9525" algn="ctr">
+            <a:noFill/>
+            <a:miter lim="800000"/>
+            <a:headEnd/>
+            <a:tailEnd/>
+          </a:ln>
+        </p:spPr>
+      </p:pic>
       <p:sp>
         <p:nvSpPr>
-          <p:cNvPr id="4" name="Slide Number Placeholder 3"/>
+          <p:cNvPr id="1035" name="Rectangle 8"/>
           <p:cNvSpPr>
-            <a:spLocks noGrp="1"/>
+            <a:spLocks noChangeArrowheads="1"/>
           </p:cNvSpPr>
-          <p:nvPr>
-            <p:ph type="sldNum" sz="quarter" idx="12"/>
-          </p:nvPr>
+          <p:nvPr/>
         </p:nvSpPr>
-        <p:spPr/>
+        <p:spPr bwMode="auto">
+          <a:xfrm>
+            <a:off x="0" y="3248025"/>
+            <a:ext cx="9144000" cy="0"/>
+          </a:xfrm>
+          <a:prstGeom prst="rect">
+            <a:avLst/>
+          </a:prstGeom>
+          <a:noFill/>
+          <a:ln w="9525" algn="ctr">
+            <a:noFill/>
+            <a:miter lim="800000"/>
+            <a:headEnd/>
+            <a:tailEnd/>
+          </a:ln>
+        </p:spPr>
         <p:txBody>
-          <a:bodyPr/>
+          <a:bodyPr wrap="none" anchor="ctr">
+            <a:spAutoFit/>
+          </a:bodyPr>
           <a:lstStyle/>
           <a:p>
-            <a:pPr>
-              <a:defRPr/>
-            </a:pPr>
-            <a:fld id="{64137B81-8888-4253-92EC-0AED2A590749}" type="slidenum">
-              <a:rPr lang="en-US" smtClean="0"/>
-              <a:pPr>
-                <a:defRPr/>
-              </a:pPr>
-              <a:t>50</a:t>
-            </a:fld>
             <a:endParaRPr lang="en-US"/>
           </a:p>
         </p:txBody>
       </p:sp>
+      <p:graphicFrame>
+        <p:nvGraphicFramePr>
+          <p:cNvPr id="1026" name="Object 7"/>
+          <p:cNvGraphicFramePr>
+            <a:graphicFrameLocks noChangeAspect="1"/>
+          </p:cNvGraphicFramePr>
+          <p:nvPr/>
+        </p:nvGraphicFramePr>
+        <p:xfrm>
+          <a:off x="2401888" y="3190875"/>
+          <a:ext cx="1144587" cy="215900"/>
+        </p:xfrm>
+        <a:graphic>
+          <a:graphicData uri="http://schemas.openxmlformats.org/presentationml/2006/ole">
+            <mc:AlternateContent xmlns:mc="http://schemas.openxmlformats.org/markup-compatibility/2006">
+              <mc:Choice xmlns:v="urn:schemas-microsoft-com:vml" Requires="v">
+                <p:oleObj name="Equation" r:id="rId5" imgW="1143000" imgH="215640" progId="Equation.3">
+                  <p:embed/>
+                </p:oleObj>
+              </mc:Choice>
+              <mc:Fallback>
+                <p:oleObj name="Equation" r:id="rId5" imgW="1143000" imgH="215640" progId="Equation.3">
+                  <p:embed/>
+                  <p:pic>
+                    <p:nvPicPr>
+                      <p:cNvPr id="1026" name="Object 7"/>
+                      <p:cNvPicPr>
+                        <a:picLocks noChangeAspect="1" noChangeArrowheads="1"/>
+                      </p:cNvPicPr>
+                      <p:nvPr/>
+                    </p:nvPicPr>
+                    <p:blipFill>
+                      <a:blip r:embed="rId6">
+                        <a:extLst>
+                          <a:ext uri="{28A0092B-C50C-407E-A947-70E740481C1C}">
+                            <a14:useLocalDpi xmlns:a14="http://schemas.microsoft.com/office/drawing/2010/main" val="0"/>
+                          </a:ext>
+                        </a:extLst>
+                      </a:blip>
+                      <a:srcRect/>
+                      <a:stretch>
+                        <a:fillRect/>
+                      </a:stretch>
+                    </p:blipFill>
+                    <p:spPr bwMode="auto">
+                      <a:xfrm>
+                        <a:off x="2401888" y="3190875"/>
+                        <a:ext cx="1144587" cy="215900"/>
+                      </a:xfrm>
+                      <a:prstGeom prst="rect">
+                        <a:avLst/>
+                      </a:prstGeom>
+                      <a:noFill/>
+                      <a:extLst>
+                        <a:ext uri="{909E8E84-426E-40DD-AFC4-6F175D3DCCD1}">
+                          <a14:hiddenFill xmlns:a14="http://schemas.microsoft.com/office/drawing/2010/main">
+                            <a:solidFill>
+                              <a:srgbClr val="FFFFFF"/>
+                            </a:solidFill>
+                          </a14:hiddenFill>
+                        </a:ext>
+                      </a:extLst>
+                    </p:spPr>
+                  </p:pic>
+                </p:oleObj>
+              </mc:Fallback>
+            </mc:AlternateContent>
+          </a:graphicData>
+        </a:graphic>
+      </p:graphicFrame>
+      <p:sp>
+        <p:nvSpPr>
+          <p:cNvPr id="1036" name="Rectangle 10"/>
+          <p:cNvSpPr>
+            <a:spLocks noChangeArrowheads="1"/>
+          </p:cNvSpPr>
+          <p:nvPr/>
+        </p:nvSpPr>
+        <p:spPr bwMode="auto">
+          <a:xfrm>
+            <a:off x="0" y="3248025"/>
+            <a:ext cx="9144000" cy="0"/>
+          </a:xfrm>
+          <a:prstGeom prst="rect">
+            <a:avLst/>
+          </a:prstGeom>
+          <a:noFill/>
+          <a:ln w="9525" algn="ctr">
+            <a:noFill/>
+            <a:miter lim="800000"/>
+            <a:headEnd/>
+            <a:tailEnd/>
+          </a:ln>
+        </p:spPr>
+        <p:txBody>
+          <a:bodyPr wrap="none" anchor="ctr">
+            <a:spAutoFit/>
+          </a:bodyPr>
+          <a:lstStyle/>
+          <a:p>
+            <a:endParaRPr lang="en-US"/>
+          </a:p>
+        </p:txBody>
+      </p:sp>
+      <p:graphicFrame>
+        <p:nvGraphicFramePr>
+          <p:cNvPr id="1027" name="Object 9"/>
+          <p:cNvGraphicFramePr>
+            <a:graphicFrameLocks noChangeAspect="1"/>
+          </p:cNvGraphicFramePr>
+          <p:nvPr/>
+        </p:nvGraphicFramePr>
+        <p:xfrm>
+          <a:off x="5705475" y="3262313"/>
+          <a:ext cx="1373188" cy="217487"/>
+        </p:xfrm>
+        <a:graphic>
+          <a:graphicData uri="http://schemas.openxmlformats.org/presentationml/2006/ole">
+            <mc:AlternateContent xmlns:mc="http://schemas.openxmlformats.org/markup-compatibility/2006">
+              <mc:Choice xmlns:v="urn:schemas-microsoft-com:vml" Requires="v">
+                <p:oleObj name="Equation" r:id="rId7" imgW="1371600" imgH="215640" progId="Equation.3">
+                  <p:embed/>
+                </p:oleObj>
+              </mc:Choice>
+              <mc:Fallback>
+                <p:oleObj name="Equation" r:id="rId7" imgW="1371600" imgH="215640" progId="Equation.3">
+                  <p:embed/>
+                  <p:pic>
+                    <p:nvPicPr>
+                      <p:cNvPr id="1027" name="Object 9"/>
+                      <p:cNvPicPr>
+                        <a:picLocks noChangeAspect="1" noChangeArrowheads="1"/>
+                      </p:cNvPicPr>
+                      <p:nvPr/>
+                    </p:nvPicPr>
+                    <p:blipFill>
+                      <a:blip r:embed="rId8">
+                        <a:extLst>
+                          <a:ext uri="{28A0092B-C50C-407E-A947-70E740481C1C}">
+                            <a14:useLocalDpi xmlns:a14="http://schemas.microsoft.com/office/drawing/2010/main" val="0"/>
+                          </a:ext>
+                        </a:extLst>
+                      </a:blip>
+                      <a:srcRect/>
+                      <a:stretch>
+                        <a:fillRect/>
+                      </a:stretch>
+                    </p:blipFill>
+                    <p:spPr bwMode="auto">
+                      <a:xfrm>
+                        <a:off x="5705475" y="3262313"/>
+                        <a:ext cx="1373188" cy="217487"/>
+                      </a:xfrm>
+                      <a:prstGeom prst="rect">
+                        <a:avLst/>
+                      </a:prstGeom>
+                      <a:noFill/>
+                      <a:extLst>
+                        <a:ext uri="{909E8E84-426E-40DD-AFC4-6F175D3DCCD1}">
+                          <a14:hiddenFill xmlns:a14="http://schemas.microsoft.com/office/drawing/2010/main">
+                            <a:solidFill>
+                              <a:srgbClr val="FFFFFF"/>
+                            </a:solidFill>
+                          </a14:hiddenFill>
+                        </a:ext>
+                      </a:extLst>
+                    </p:spPr>
+                  </p:pic>
+                </p:oleObj>
+              </mc:Fallback>
+            </mc:AlternateContent>
+          </a:graphicData>
+        </a:graphic>
+      </p:graphicFrame>
+      <p:sp>
+        <p:nvSpPr>
+          <p:cNvPr id="1037" name="Rectangle 12"/>
+          <p:cNvSpPr>
+            <a:spLocks noChangeArrowheads="1"/>
+          </p:cNvSpPr>
+          <p:nvPr/>
+        </p:nvSpPr>
+        <p:spPr bwMode="auto">
+          <a:xfrm>
+            <a:off x="0" y="2757488"/>
+            <a:ext cx="9144000" cy="0"/>
+          </a:xfrm>
+          <a:prstGeom prst="rect">
+            <a:avLst/>
+          </a:prstGeom>
+          <a:noFill/>
+          <a:ln w="9525" algn="ctr">
+            <a:noFill/>
+            <a:miter lim="800000"/>
+            <a:headEnd/>
+            <a:tailEnd/>
+          </a:ln>
+        </p:spPr>
+        <p:txBody>
+          <a:bodyPr wrap="none" anchor="ctr">
+            <a:spAutoFit/>
+          </a:bodyPr>
+          <a:lstStyle/>
+          <a:p>
+            <a:endParaRPr lang="en-US"/>
+          </a:p>
+        </p:txBody>
+      </p:sp>
+      <p:graphicFrame>
+        <p:nvGraphicFramePr>
+          <p:cNvPr id="1028" name="Object 11"/>
+          <p:cNvGraphicFramePr>
+            <a:graphicFrameLocks noChangeAspect="1"/>
+          </p:cNvGraphicFramePr>
+          <p:nvPr/>
+        </p:nvGraphicFramePr>
+        <p:xfrm>
+          <a:off x="885825" y="4295775"/>
+          <a:ext cx="419100" cy="1343025"/>
+        </p:xfrm>
+        <a:graphic>
+          <a:graphicData uri="http://schemas.openxmlformats.org/presentationml/2006/ole">
+            <mc:AlternateContent xmlns:mc="http://schemas.openxmlformats.org/markup-compatibility/2006">
+              <mc:Choice xmlns:v="urn:schemas-microsoft-com:vml" Requires="v">
+                <p:oleObj name="Equation" r:id="rId9" imgW="419100" imgH="1346200" progId="Equation.3">
+                  <p:embed/>
+                </p:oleObj>
+              </mc:Choice>
+              <mc:Fallback>
+                <p:oleObj name="Equation" r:id="rId9" imgW="419100" imgH="1346200" progId="Equation.3">
+                  <p:embed/>
+                  <p:pic>
+                    <p:nvPicPr>
+                      <p:cNvPr id="1028" name="Object 11"/>
+                      <p:cNvPicPr>
+                        <a:picLocks noChangeAspect="1" noChangeArrowheads="1"/>
+                      </p:cNvPicPr>
+                      <p:nvPr/>
+                    </p:nvPicPr>
+                    <p:blipFill>
+                      <a:blip r:embed="rId10">
+                        <a:extLst>
+                          <a:ext uri="{28A0092B-C50C-407E-A947-70E740481C1C}">
+                            <a14:useLocalDpi xmlns:a14="http://schemas.microsoft.com/office/drawing/2010/main" val="0"/>
+                          </a:ext>
+                        </a:extLst>
+                      </a:blip>
+                      <a:srcRect/>
+                      <a:stretch>
+                        <a:fillRect/>
+                      </a:stretch>
+                    </p:blipFill>
+                    <p:spPr bwMode="auto">
+                      <a:xfrm>
+                        <a:off x="885825" y="4295775"/>
+                        <a:ext cx="419100" cy="1343025"/>
+                      </a:xfrm>
+                      <a:prstGeom prst="rect">
+                        <a:avLst/>
+                      </a:prstGeom>
+                      <a:noFill/>
+                      <a:extLst>
+                        <a:ext uri="{909E8E84-426E-40DD-AFC4-6F175D3DCCD1}">
+                          <a14:hiddenFill xmlns:a14="http://schemas.microsoft.com/office/drawing/2010/main">
+                            <a:solidFill>
+                              <a:srgbClr val="FFFFFF"/>
+                            </a:solidFill>
+                          </a14:hiddenFill>
+                        </a:ext>
+                      </a:extLst>
+                    </p:spPr>
+                  </p:pic>
+                </p:oleObj>
+              </mc:Fallback>
+            </mc:AlternateContent>
+          </a:graphicData>
+        </a:graphic>
+      </p:graphicFrame>
+      <p:sp>
+        <p:nvSpPr>
+          <p:cNvPr id="1038" name="Rectangle 14"/>
+          <p:cNvSpPr>
+            <a:spLocks noChangeArrowheads="1"/>
+          </p:cNvSpPr>
+          <p:nvPr/>
+        </p:nvSpPr>
+        <p:spPr bwMode="auto">
+          <a:xfrm>
+            <a:off x="0" y="3214688"/>
+            <a:ext cx="9144000" cy="0"/>
+          </a:xfrm>
+          <a:prstGeom prst="rect">
+            <a:avLst/>
+          </a:prstGeom>
+          <a:noFill/>
+          <a:ln w="9525" algn="ctr">
+            <a:noFill/>
+            <a:miter lim="800000"/>
+            <a:headEnd/>
+            <a:tailEnd/>
+          </a:ln>
+        </p:spPr>
+        <p:txBody>
+          <a:bodyPr wrap="none" anchor="ctr">
+            <a:spAutoFit/>
+          </a:bodyPr>
+          <a:lstStyle/>
+          <a:p>
+            <a:endParaRPr lang="en-US"/>
+          </a:p>
+        </p:txBody>
+      </p:sp>
+      <p:graphicFrame>
+        <p:nvGraphicFramePr>
+          <p:cNvPr id="1029" name="Object 13"/>
+          <p:cNvGraphicFramePr>
+            <a:graphicFrameLocks noChangeAspect="1"/>
+          </p:cNvGraphicFramePr>
+          <p:nvPr/>
+        </p:nvGraphicFramePr>
+        <p:xfrm>
+          <a:off x="3787775" y="5581650"/>
+          <a:ext cx="2019300" cy="428625"/>
+        </p:xfrm>
+        <a:graphic>
+          <a:graphicData uri="http://schemas.openxmlformats.org/presentationml/2006/ole">
+            <mc:AlternateContent xmlns:mc="http://schemas.openxmlformats.org/markup-compatibility/2006">
+              <mc:Choice xmlns:v="urn:schemas-microsoft-com:vml" Requires="v">
+                <p:oleObj name="Equation" r:id="rId11" imgW="2019300" imgH="431800" progId="Equation.3">
+                  <p:embed/>
+                </p:oleObj>
+              </mc:Choice>
+              <mc:Fallback>
+                <p:oleObj name="Equation" r:id="rId11" imgW="2019300" imgH="431800" progId="Equation.3">
+                  <p:embed/>
+                  <p:pic>
+                    <p:nvPicPr>
+                      <p:cNvPr id="1029" name="Object 13"/>
+                      <p:cNvPicPr>
+                        <a:picLocks noChangeAspect="1" noChangeArrowheads="1"/>
+                      </p:cNvPicPr>
+                      <p:nvPr/>
+                    </p:nvPicPr>
+                    <p:blipFill>
+                      <a:blip r:embed="rId12">
+                        <a:extLst>
+                          <a:ext uri="{28A0092B-C50C-407E-A947-70E740481C1C}">
+                            <a14:useLocalDpi xmlns:a14="http://schemas.microsoft.com/office/drawing/2010/main" val="0"/>
+                          </a:ext>
+                        </a:extLst>
+                      </a:blip>
+                      <a:srcRect/>
+                      <a:stretch>
+                        <a:fillRect/>
+                      </a:stretch>
+                    </p:blipFill>
+                    <p:spPr bwMode="auto">
+                      <a:xfrm>
+                        <a:off x="3787775" y="5581650"/>
+                        <a:ext cx="2019300" cy="428625"/>
+                      </a:xfrm>
+                      <a:prstGeom prst="rect">
+                        <a:avLst/>
+                      </a:prstGeom>
+                      <a:noFill/>
+                      <a:extLst>
+                        <a:ext uri="{909E8E84-426E-40DD-AFC4-6F175D3DCCD1}">
+                          <a14:hiddenFill xmlns:a14="http://schemas.microsoft.com/office/drawing/2010/main">
+                            <a:solidFill>
+                              <a:srgbClr val="FFFFFF"/>
+                            </a:solidFill>
+                          </a14:hiddenFill>
+                        </a:ext>
+                      </a:extLst>
+                    </p:spPr>
+                  </p:pic>
+                </p:oleObj>
+              </mc:Fallback>
+            </mc:AlternateContent>
+          </a:graphicData>
+        </a:graphic>
+      </p:graphicFrame>
     </p:spTree>
     <p:extLst>
       <p:ext uri="{BB962C8B-B14F-4D97-AF65-F5344CB8AC3E}">
-        <p14:creationId xmlns:p14="http://schemas.microsoft.com/office/powerpoint/2010/main" val="1497180699"/>
+        <p14:creationId xmlns:p14="http://schemas.microsoft.com/office/powerpoint/2010/main" val="645957708"/>
       </p:ext>
     </p:extLst>
   </p:cSld>
@@ -24339,9 +23461,9 @@
       </p:grpSpPr>
       <p:sp>
         <p:nvSpPr>
-          <p:cNvPr id="2" name="Title 1"/>
+          <p:cNvPr id="2051" name="Rectangle 2"/>
           <p:cNvSpPr>
-            <a:spLocks noGrp="1"/>
+            <a:spLocks noGrp="1" noChangeArrowheads="1"/>
           </p:cNvSpPr>
           <p:nvPr>
             <p:ph type="title"/>
@@ -24352,21 +23474,22 @@
           <a:bodyPr/>
           <a:lstStyle/>
           <a:p>
+            <a:pPr eaLnBrk="1" hangingPunct="1"/>
             <a:r>
-              <a:rPr lang="en-US" dirty="0"/>
-              <a:t>Question 223.6.0.2</a:t>
+              <a:rPr lang="en-US"/>
+              <a:t>Amplitude</a:t>
             </a:r>
           </a:p>
         </p:txBody>
       </p:sp>
       <p:sp>
         <p:nvSpPr>
-          <p:cNvPr id="3" name="Content Placeholder 2"/>
+          <p:cNvPr id="2052" name="Rectangle 3"/>
           <p:cNvSpPr>
-            <a:spLocks noGrp="1"/>
+            <a:spLocks noGrp="1" noChangeArrowheads="1"/>
           </p:cNvSpPr>
           <p:nvPr>
-            <p:ph idx="1"/>
+            <p:ph type="body" idx="1"/>
           </p:nvPr>
         </p:nvSpPr>
         <p:spPr/>
@@ -24374,76 +23497,151 @@
           <a:bodyPr/>
           <a:lstStyle/>
           <a:p>
-            <a:pPr marL="0" indent="0">
-              <a:buNone/>
-            </a:pPr>
-            <a:r>
-              <a:rPr lang="en-US" dirty="0"/>
-              <a:t>I have two sinusoidal waves in the same medium. The waves travel the same direction (unlike our class demonstration).  If the resultant wave has a smaller amplitude than the original waves we call this…</a:t>
-            </a:r>
-          </a:p>
-          <a:p>
-            <a:pPr marL="514350" indent="-514350">
-              <a:buAutoNum type="alphaLcParenR"/>
-            </a:pPr>
-            <a:r>
-              <a:rPr lang="en-US" dirty="0"/>
-              <a:t>Constructive interference</a:t>
-            </a:r>
-          </a:p>
-          <a:p>
-            <a:pPr marL="514350" indent="-514350">
-              <a:buAutoNum type="alphaLcParenR"/>
-            </a:pPr>
-            <a:r>
-              <a:rPr lang="en-US" dirty="0"/>
-              <a:t>Destructive interference</a:t>
-            </a:r>
-          </a:p>
-          <a:p>
-            <a:pPr marL="514350" indent="-514350">
-              <a:buAutoNum type="alphaLcParenR"/>
-            </a:pPr>
-            <a:r>
-              <a:rPr lang="en-US" dirty="0"/>
-              <a:t>Depressing</a:t>
-            </a:r>
+            <a:pPr eaLnBrk="1" hangingPunct="1"/>
+            <a:endParaRPr lang="en-US"/>
           </a:p>
         </p:txBody>
       </p:sp>
+      <p:pic>
+        <p:nvPicPr>
+          <p:cNvPr id="2053" name="Picture 4"/>
+          <p:cNvPicPr>
+            <a:picLocks noChangeAspect="1" noChangeArrowheads="1"/>
+          </p:cNvPicPr>
+          <p:nvPr/>
+        </p:nvPicPr>
+        <p:blipFill>
+          <a:blip r:embed="rId2" cstate="print"/>
+          <a:srcRect/>
+          <a:stretch>
+            <a:fillRect/>
+          </a:stretch>
+        </p:blipFill>
+        <p:spPr bwMode="auto">
+          <a:xfrm>
+            <a:off x="4659313" y="2090738"/>
+            <a:ext cx="3832225" cy="2543175"/>
+          </a:xfrm>
+          <a:prstGeom prst="rect">
+            <a:avLst/>
+          </a:prstGeom>
+          <a:noFill/>
+          <a:ln w="9525" algn="ctr">
+            <a:noFill/>
+            <a:miter lim="800000"/>
+            <a:headEnd/>
+            <a:tailEnd/>
+          </a:ln>
+        </p:spPr>
+      </p:pic>
       <p:sp>
         <p:nvSpPr>
-          <p:cNvPr id="4" name="Slide Number Placeholder 3"/>
+          <p:cNvPr id="2054" name="Rectangle 6"/>
           <p:cNvSpPr>
-            <a:spLocks noGrp="1"/>
+            <a:spLocks noChangeArrowheads="1"/>
           </p:cNvSpPr>
-          <p:nvPr>
-            <p:ph type="sldNum" sz="quarter" idx="12"/>
-          </p:nvPr>
+          <p:nvPr/>
         </p:nvSpPr>
-        <p:spPr/>
+        <p:spPr bwMode="auto">
+          <a:xfrm>
+            <a:off x="0" y="3214688"/>
+            <a:ext cx="9144000" cy="0"/>
+          </a:xfrm>
+          <a:prstGeom prst="rect">
+            <a:avLst/>
+          </a:prstGeom>
+          <a:noFill/>
+          <a:ln w="9525" algn="ctr">
+            <a:noFill/>
+            <a:miter lim="800000"/>
+            <a:headEnd/>
+            <a:tailEnd/>
+          </a:ln>
+        </p:spPr>
         <p:txBody>
-          <a:bodyPr/>
+          <a:bodyPr wrap="none" anchor="ctr">
+            <a:spAutoFit/>
+          </a:bodyPr>
           <a:lstStyle/>
           <a:p>
-            <a:pPr>
-              <a:defRPr/>
-            </a:pPr>
-            <a:fld id="{64137B81-8888-4253-92EC-0AED2A590749}" type="slidenum">
-              <a:rPr lang="en-US" smtClean="0"/>
-              <a:pPr>
-                <a:defRPr/>
-              </a:pPr>
-              <a:t>51</a:t>
-            </a:fld>
             <a:endParaRPr lang="en-US"/>
           </a:p>
         </p:txBody>
       </p:sp>
+      <p:graphicFrame>
+        <p:nvGraphicFramePr>
+          <p:cNvPr id="2050" name="Object 5"/>
+          <p:cNvGraphicFramePr>
+            <a:graphicFrameLocks noChangeAspect="1"/>
+          </p:cNvGraphicFramePr>
+          <p:nvPr/>
+        </p:nvGraphicFramePr>
+        <p:xfrm>
+          <a:off x="1322388" y="2909888"/>
+          <a:ext cx="1711325" cy="1055687"/>
+        </p:xfrm>
+        <a:graphic>
+          <a:graphicData uri="http://schemas.openxmlformats.org/presentationml/2006/ole">
+            <mc:AlternateContent xmlns:mc="http://schemas.openxmlformats.org/markup-compatibility/2006">
+              <mc:Choice xmlns:v="urn:schemas-microsoft-com:vml" Requires="v">
+                <p:oleObj name="Equation" r:id="rId3" imgW="698197" imgH="431613" progId="Equation.3">
+                  <p:embed/>
+                </p:oleObj>
+              </mc:Choice>
+              <mc:Fallback>
+                <p:oleObj name="Equation" r:id="rId3" imgW="698197" imgH="431613" progId="Equation.3">
+                  <p:embed/>
+                  <p:pic>
+                    <p:nvPicPr>
+                      <p:cNvPr id="2050" name="Object 5"/>
+                      <p:cNvPicPr>
+                        <a:picLocks noChangeAspect="1" noChangeArrowheads="1"/>
+                      </p:cNvPicPr>
+                      <p:nvPr/>
+                    </p:nvPicPr>
+                    <p:blipFill>
+                      <a:blip r:embed="rId4">
+                        <a:extLst>
+                          <a:ext uri="{28A0092B-C50C-407E-A947-70E740481C1C}">
+                            <a14:useLocalDpi xmlns:a14="http://schemas.microsoft.com/office/drawing/2010/main" val="0"/>
+                          </a:ext>
+                        </a:extLst>
+                      </a:blip>
+                      <a:srcRect/>
+                      <a:stretch>
+                        <a:fillRect/>
+                      </a:stretch>
+                    </p:blipFill>
+                    <p:spPr bwMode="auto">
+                      <a:xfrm>
+                        <a:off x="1322388" y="2909888"/>
+                        <a:ext cx="1711325" cy="1055687"/>
+                      </a:xfrm>
+                      <a:prstGeom prst="rect">
+                        <a:avLst/>
+                      </a:prstGeom>
+                      <a:noFill/>
+                      <a:extLst>
+                        <a:ext uri="{909E8E84-426E-40DD-AFC4-6F175D3DCCD1}">
+                          <a14:hiddenFill xmlns:a14="http://schemas.microsoft.com/office/drawing/2010/main">
+                            <a:solidFill>
+                              <a:srgbClr val="FFFFFF"/>
+                            </a:solidFill>
+                          </a14:hiddenFill>
+                        </a:ext>
+                      </a:extLst>
+                    </p:spPr>
+                  </p:pic>
+                </p:oleObj>
+              </mc:Fallback>
+            </mc:AlternateContent>
+          </a:graphicData>
+        </a:graphic>
+      </p:graphicFrame>
     </p:spTree>
     <p:extLst>
       <p:ext uri="{BB962C8B-B14F-4D97-AF65-F5344CB8AC3E}">
-        <p14:creationId xmlns:p14="http://schemas.microsoft.com/office/powerpoint/2010/main" val="4119617871"/>
+        <p14:creationId xmlns:p14="http://schemas.microsoft.com/office/powerpoint/2010/main" val="2084675203"/>
       </p:ext>
     </p:extLst>
   </p:cSld>
@@ -24472,9 +23670,9 @@
       </p:grpSpPr>
       <p:sp>
         <p:nvSpPr>
-          <p:cNvPr id="2" name="Title 1"/>
+          <p:cNvPr id="3076" name="Rectangle 2"/>
           <p:cNvSpPr>
-            <a:spLocks noGrp="1"/>
+            <a:spLocks noGrp="1" noChangeArrowheads="1"/>
           </p:cNvSpPr>
           <p:nvPr>
             <p:ph type="title"/>
@@ -24485,109 +23683,234 @@
           <a:bodyPr/>
           <a:lstStyle/>
           <a:p>
+            <a:pPr eaLnBrk="1" hangingPunct="1"/>
             <a:r>
-              <a:rPr lang="en-US" dirty="0"/>
-              <a:t>Question 223.6.0.3</a:t>
+              <a:rPr lang="en-US"/>
+              <a:t>Effect of </a:t>
+            </a:r>
+            <a:r>
+              <a:rPr lang="en-US">
+                <a:sym typeface="Symbol" pitchFamily="18" charset="2"/>
+              </a:rPr>
+              <a:t></a:t>
             </a:r>
           </a:p>
         </p:txBody>
       </p:sp>
       <p:sp>
         <p:nvSpPr>
-          <p:cNvPr id="3" name="Content Placeholder 2"/>
+          <p:cNvPr id="3077" name="Rectangle 3"/>
           <p:cNvSpPr>
-            <a:spLocks noGrp="1"/>
+            <a:spLocks noGrp="1" noChangeArrowheads="1"/>
           </p:cNvSpPr>
           <p:nvPr>
-            <p:ph idx="1"/>
+            <p:ph type="body" idx="1"/>
           </p:nvPr>
         </p:nvSpPr>
-        <p:spPr/>
-        <p:txBody>
-          <a:bodyPr>
-            <a:normAutofit lnSpcReduction="10000"/>
-          </a:bodyPr>
-          <a:lstStyle/>
-          <a:p>
-            <a:pPr marL="0" indent="0">
-              <a:buNone/>
-            </a:pPr>
-            <a:r>
-              <a:rPr lang="en-US" dirty="0"/>
-              <a:t>I have two sinusoidal waves in the same medium. The waves travel the same direction (unlike our class demonstration).  Sometimes we get constructive and sometimes destructive interference. What makes the difference?</a:t>
-            </a:r>
-          </a:p>
-          <a:p>
-            <a:pPr marL="514350" indent="-514350">
-              <a:buAutoNum type="alphaLcParenR"/>
-            </a:pPr>
-            <a:r>
-              <a:rPr lang="en-US" dirty="0"/>
-              <a:t>The relative amplitude of the waves</a:t>
-            </a:r>
-          </a:p>
-          <a:p>
-            <a:pPr marL="514350" indent="-514350">
-              <a:buAutoNum type="alphaLcParenR"/>
-            </a:pPr>
-            <a:r>
-              <a:rPr lang="en-US" dirty="0"/>
-              <a:t>The relative phase constant of the waves</a:t>
-            </a:r>
-          </a:p>
-          <a:p>
-            <a:pPr marL="514350" indent="-514350">
-              <a:buAutoNum type="alphaLcParenR"/>
-            </a:pPr>
-            <a:r>
-              <a:rPr lang="en-US" dirty="0"/>
-              <a:t>The wavelength of the waves</a:t>
-            </a:r>
-          </a:p>
-          <a:p>
-            <a:pPr marL="514350" indent="-514350">
-              <a:buAutoNum type="alphaLcParenR"/>
-            </a:pPr>
-            <a:r>
-              <a:rPr lang="en-US" dirty="0"/>
-              <a:t>Random processes</a:t>
-            </a:r>
-          </a:p>
-        </p:txBody>
-      </p:sp>
-      <p:sp>
-        <p:nvSpPr>
-          <p:cNvPr id="4" name="Slide Number Placeholder 3"/>
-          <p:cNvSpPr>
-            <a:spLocks noGrp="1"/>
-          </p:cNvSpPr>
-          <p:nvPr>
-            <p:ph type="sldNum" sz="quarter" idx="12"/>
-          </p:nvPr>
-        </p:nvSpPr>
-        <p:spPr/>
+        <p:spPr>
+          <a:xfrm>
+            <a:off x="457200" y="1600200"/>
+            <a:ext cx="3613150" cy="4525963"/>
+          </a:xfrm>
+        </p:spPr>
         <p:txBody>
           <a:bodyPr/>
           <a:lstStyle/>
           <a:p>
-            <a:pPr>
-              <a:defRPr/>
-            </a:pPr>
-            <a:fld id="{64137B81-8888-4253-92EC-0AED2A590749}" type="slidenum">
-              <a:rPr lang="en-US" smtClean="0"/>
-              <a:pPr>
-                <a:defRPr/>
-              </a:pPr>
-              <a:t>52</a:t>
-            </a:fld>
-            <a:endParaRPr lang="en-US"/>
+            <a:pPr eaLnBrk="1" hangingPunct="1"/>
+            <a:r>
+              <a:rPr lang="en-US"/>
+              <a:t>Same example, but with different values of </a:t>
+            </a:r>
+            <a:r>
+              <a:rPr lang="en-US">
+                <a:sym typeface="Symbol" pitchFamily="18" charset="2"/>
+              </a:rPr>
+              <a:t></a:t>
+            </a:r>
+            <a:r>
+              <a:rPr lang="en-US"/>
+              <a:t> </a:t>
+            </a:r>
           </a:p>
         </p:txBody>
       </p:sp>
+      <p:pic>
+        <p:nvPicPr>
+          <p:cNvPr id="3078" name="Picture 4"/>
+          <p:cNvPicPr>
+            <a:picLocks noChangeAspect="1" noChangeArrowheads="1"/>
+          </p:cNvPicPr>
+          <p:nvPr/>
+        </p:nvPicPr>
+        <p:blipFill>
+          <a:blip r:embed="rId2" cstate="print"/>
+          <a:srcRect/>
+          <a:stretch>
+            <a:fillRect/>
+          </a:stretch>
+        </p:blipFill>
+        <p:spPr bwMode="auto">
+          <a:xfrm>
+            <a:off x="4173538" y="2097088"/>
+            <a:ext cx="4521200" cy="3014662"/>
+          </a:xfrm>
+          <a:prstGeom prst="rect">
+            <a:avLst/>
+          </a:prstGeom>
+          <a:noFill/>
+          <a:ln w="9525" algn="ctr">
+            <a:noFill/>
+            <a:miter lim="800000"/>
+            <a:headEnd/>
+            <a:tailEnd/>
+          </a:ln>
+        </p:spPr>
+      </p:pic>
+      <p:graphicFrame>
+        <p:nvGraphicFramePr>
+          <p:cNvPr id="3074" name="Object 5"/>
+          <p:cNvGraphicFramePr>
+            <a:graphicFrameLocks noChangeAspect="1"/>
+          </p:cNvGraphicFramePr>
+          <p:nvPr/>
+        </p:nvGraphicFramePr>
+        <p:xfrm>
+          <a:off x="5557838" y="5305425"/>
+          <a:ext cx="2019300" cy="428625"/>
+        </p:xfrm>
+        <a:graphic>
+          <a:graphicData uri="http://schemas.openxmlformats.org/presentationml/2006/ole">
+            <mc:AlternateContent xmlns:mc="http://schemas.openxmlformats.org/markup-compatibility/2006">
+              <mc:Choice xmlns:v="urn:schemas-microsoft-com:vml" Requires="v">
+                <p:oleObj name="Equation" r:id="rId3" imgW="2019300" imgH="431800" progId="Equation.3">
+                  <p:embed/>
+                </p:oleObj>
+              </mc:Choice>
+              <mc:Fallback>
+                <p:oleObj name="Equation" r:id="rId3" imgW="2019300" imgH="431800" progId="Equation.3">
+                  <p:embed/>
+                  <p:pic>
+                    <p:nvPicPr>
+                      <p:cNvPr id="3074" name="Object 5"/>
+                      <p:cNvPicPr>
+                        <a:picLocks noChangeAspect="1" noChangeArrowheads="1"/>
+                      </p:cNvPicPr>
+                      <p:nvPr/>
+                    </p:nvPicPr>
+                    <p:blipFill>
+                      <a:blip r:embed="rId4">
+                        <a:extLst>
+                          <a:ext uri="{28A0092B-C50C-407E-A947-70E740481C1C}">
+                            <a14:useLocalDpi xmlns:a14="http://schemas.microsoft.com/office/drawing/2010/main" val="0"/>
+                          </a:ext>
+                        </a:extLst>
+                      </a:blip>
+                      <a:srcRect/>
+                      <a:stretch>
+                        <a:fillRect/>
+                      </a:stretch>
+                    </p:blipFill>
+                    <p:spPr bwMode="auto">
+                      <a:xfrm>
+                        <a:off x="5557838" y="5305425"/>
+                        <a:ext cx="2019300" cy="428625"/>
+                      </a:xfrm>
+                      <a:prstGeom prst="rect">
+                        <a:avLst/>
+                      </a:prstGeom>
+                      <a:noFill/>
+                      <a:extLst>
+                        <a:ext uri="{909E8E84-426E-40DD-AFC4-6F175D3DCCD1}">
+                          <a14:hiddenFill xmlns:a14="http://schemas.microsoft.com/office/drawing/2010/main">
+                            <a:solidFill>
+                              <a:srgbClr val="FFFFFF"/>
+                            </a:solidFill>
+                          </a14:hiddenFill>
+                        </a:ext>
+                      </a:extLst>
+                    </p:spPr>
+                  </p:pic>
+                </p:oleObj>
+              </mc:Fallback>
+            </mc:AlternateContent>
+          </a:graphicData>
+        </a:graphic>
+      </p:graphicFrame>
+      <p:graphicFrame>
+        <p:nvGraphicFramePr>
+          <p:cNvPr id="3075" name="Object 6"/>
+          <p:cNvGraphicFramePr>
+            <a:graphicFrameLocks noChangeAspect="1"/>
+          </p:cNvGraphicFramePr>
+          <p:nvPr/>
+        </p:nvGraphicFramePr>
+        <p:xfrm>
+          <a:off x="8201025" y="4760913"/>
+          <a:ext cx="419100" cy="1343025"/>
+        </p:xfrm>
+        <a:graphic>
+          <a:graphicData uri="http://schemas.openxmlformats.org/presentationml/2006/ole">
+            <mc:AlternateContent xmlns:mc="http://schemas.openxmlformats.org/markup-compatibility/2006">
+              <mc:Choice xmlns:v="urn:schemas-microsoft-com:vml" Requires="v">
+                <p:oleObj name="Equation" r:id="rId5" imgW="419040" imgH="1346040" progId="Equation.3">
+                  <p:embed/>
+                </p:oleObj>
+              </mc:Choice>
+              <mc:Fallback>
+                <p:oleObj name="Equation" r:id="rId5" imgW="419040" imgH="1346040" progId="Equation.3">
+                  <p:embed/>
+                  <p:pic>
+                    <p:nvPicPr>
+                      <p:cNvPr id="3075" name="Object 6"/>
+                      <p:cNvPicPr>
+                        <a:picLocks noChangeAspect="1" noChangeArrowheads="1"/>
+                      </p:cNvPicPr>
+                      <p:nvPr/>
+                    </p:nvPicPr>
+                    <p:blipFill>
+                      <a:blip r:embed="rId6">
+                        <a:extLst>
+                          <a:ext uri="{28A0092B-C50C-407E-A947-70E740481C1C}">
+                            <a14:useLocalDpi xmlns:a14="http://schemas.microsoft.com/office/drawing/2010/main" val="0"/>
+                          </a:ext>
+                        </a:extLst>
+                      </a:blip>
+                      <a:srcRect/>
+                      <a:stretch>
+                        <a:fillRect/>
+                      </a:stretch>
+                    </p:blipFill>
+                    <p:spPr bwMode="auto">
+                      <a:xfrm>
+                        <a:off x="8201025" y="4760913"/>
+                        <a:ext cx="419100" cy="1343025"/>
+                      </a:xfrm>
+                      <a:prstGeom prst="rect">
+                        <a:avLst/>
+                      </a:prstGeom>
+                      <a:noFill/>
+                      <a:extLst>
+                        <a:ext uri="{909E8E84-426E-40DD-AFC4-6F175D3DCCD1}">
+                          <a14:hiddenFill xmlns:a14="http://schemas.microsoft.com/office/drawing/2010/main">
+                            <a:solidFill>
+                              <a:srgbClr val="FFFFFF"/>
+                            </a:solidFill>
+                          </a14:hiddenFill>
+                        </a:ext>
+                      </a:extLst>
+                    </p:spPr>
+                  </p:pic>
+                </p:oleObj>
+              </mc:Fallback>
+            </mc:AlternateContent>
+          </a:graphicData>
+        </a:graphic>
+      </p:graphicFrame>
     </p:spTree>
     <p:extLst>
       <p:ext uri="{BB962C8B-B14F-4D97-AF65-F5344CB8AC3E}">
-        <p14:creationId xmlns:p14="http://schemas.microsoft.com/office/powerpoint/2010/main" val="778798007"/>
+        <p14:creationId xmlns:p14="http://schemas.microsoft.com/office/powerpoint/2010/main" val="2518151769"/>
       </p:ext>
     </p:extLst>
   </p:cSld>

--- a/Lecture_Slides/PH 123 Lecture 06.pptx
+++ b/Lecture_Slides/PH 123 Lecture 06.pptx
@@ -214,7 +214,7 @@
 <file path=ppt/revisionInfo.xml><?xml version="1.0" encoding="utf-8"?>
 <p1510:revInfo xmlns:a="http://schemas.openxmlformats.org/drawingml/2006/main" xmlns:r="http://schemas.openxmlformats.org/officeDocument/2006/relationships" xmlns:p1510="http://schemas.microsoft.com/office/powerpoint/2015/10/main">
   <p1510:revLst>
-    <p1510:client id="{906CD323-B2B7-401B-B4CD-B57954F6D71C}" v="4" dt="2026-01-15T21:44:49.770"/>
+    <p1510:client id="{161164B0-73E3-413D-AC9E-BBA2869A21ED}" v="9" dt="2026-04-24T20:16:45.207"/>
   </p1510:revLst>
 </p1510:revInfo>
 </file>
@@ -223,173 +223,104 @@
 <pc:chgInfo xmlns:a="http://schemas.openxmlformats.org/drawingml/2006/main" xmlns:r="http://schemas.openxmlformats.org/officeDocument/2006/relationships" xmlns:ac="http://schemas.microsoft.com/office/drawing/2013/main/command" xmlns:pc="http://schemas.microsoft.com/office/powerpoint/2013/main/command">
   <pc:docChgLst>
     <pc:chgData name="Lines, Todd" userId="afaf7c3a-e8aa-4568-882a-02ad8f9e19b0" providerId="ADAL" clId="{5FF5AC1B-ABA9-43D7-A1E3-2D92732CD6E2}"/>
-    <pc:docChg chg="addSld delSld modSld">
-      <pc:chgData name="Lines, Todd" userId="afaf7c3a-e8aa-4568-882a-02ad8f9e19b0" providerId="ADAL" clId="{5FF5AC1B-ABA9-43D7-A1E3-2D92732CD6E2}" dt="2026-01-15T21:44:49.770" v="8"/>
+    <pc:docChg chg="undo custSel addSld delSld modSld">
+      <pc:chgData name="Lines, Todd" userId="afaf7c3a-e8aa-4568-882a-02ad8f9e19b0" providerId="ADAL" clId="{5FF5AC1B-ABA9-43D7-A1E3-2D92732CD6E2}" dt="2026-04-24T20:33:12.171" v="62" actId="1076"/>
       <pc:docMkLst>
         <pc:docMk/>
       </pc:docMkLst>
-      <pc:sldChg chg="del">
-        <pc:chgData name="Lines, Todd" userId="afaf7c3a-e8aa-4568-882a-02ad8f9e19b0" providerId="ADAL" clId="{5FF5AC1B-ABA9-43D7-A1E3-2D92732CD6E2}" dt="2026-01-15T21:43:31.987" v="5" actId="2696"/>
+      <pc:sldChg chg="delSp modSp mod">
+        <pc:chgData name="Lines, Todd" userId="afaf7c3a-e8aa-4568-882a-02ad8f9e19b0" providerId="ADAL" clId="{5FF5AC1B-ABA9-43D7-A1E3-2D92732CD6E2}" dt="2026-04-24T20:16:54.261" v="55" actId="21"/>
         <pc:sldMkLst>
           <pc:docMk/>
-          <pc:sldMk cId="0" sldId="261"/>
+          <pc:sldMk cId="1643441071" sldId="347"/>
         </pc:sldMkLst>
+        <pc:spChg chg="mod">
+          <ac:chgData name="Lines, Todd" userId="afaf7c3a-e8aa-4568-882a-02ad8f9e19b0" providerId="ADAL" clId="{5FF5AC1B-ABA9-43D7-A1E3-2D92732CD6E2}" dt="2026-04-24T20:15:20.819" v="15" actId="1076"/>
+          <ac:spMkLst>
+            <pc:docMk/>
+            <pc:sldMk cId="1643441071" sldId="347"/>
+            <ac:spMk id="5" creationId="{8DEE0855-A788-A402-48A5-46F63F828A3E}"/>
+          </ac:spMkLst>
+        </pc:spChg>
+        <pc:spChg chg="mod">
+          <ac:chgData name="Lines, Todd" userId="afaf7c3a-e8aa-4568-882a-02ad8f9e19b0" providerId="ADAL" clId="{5FF5AC1B-ABA9-43D7-A1E3-2D92732CD6E2}" dt="2026-04-24T20:16:37.606" v="53" actId="1035"/>
+          <ac:spMkLst>
+            <pc:docMk/>
+            <pc:sldMk cId="1643441071" sldId="347"/>
+            <ac:spMk id="9" creationId="{97BAF4FB-DA6A-6AD6-F1CC-6144FB3A9559}"/>
+          </ac:spMkLst>
+        </pc:spChg>
+        <pc:spChg chg="mod">
+          <ac:chgData name="Lines, Todd" userId="afaf7c3a-e8aa-4568-882a-02ad8f9e19b0" providerId="ADAL" clId="{5FF5AC1B-ABA9-43D7-A1E3-2D92732CD6E2}" dt="2026-04-24T20:16:37.606" v="53" actId="1035"/>
+          <ac:spMkLst>
+            <pc:docMk/>
+            <pc:sldMk cId="1643441071" sldId="347"/>
+            <ac:spMk id="10" creationId="{72AF48F9-FB2B-4063-8E03-104E1C15DF2D}"/>
+          </ac:spMkLst>
+        </pc:spChg>
+        <pc:spChg chg="mod">
+          <ac:chgData name="Lines, Todd" userId="afaf7c3a-e8aa-4568-882a-02ad8f9e19b0" providerId="ADAL" clId="{5FF5AC1B-ABA9-43D7-A1E3-2D92732CD6E2}" dt="2026-04-24T20:16:37.606" v="53" actId="1035"/>
+          <ac:spMkLst>
+            <pc:docMk/>
+            <pc:sldMk cId="1643441071" sldId="347"/>
+            <ac:spMk id="11" creationId="{E7585B40-CC23-8828-633D-7F296358D19A}"/>
+          </ac:spMkLst>
+        </pc:spChg>
+        <pc:picChg chg="del">
+          <ac:chgData name="Lines, Todd" userId="afaf7c3a-e8aa-4568-882a-02ad8f9e19b0" providerId="ADAL" clId="{5FF5AC1B-ABA9-43D7-A1E3-2D92732CD6E2}" dt="2026-04-24T20:16:09.674" v="45" actId="478"/>
+          <ac:picMkLst>
+            <pc:docMk/>
+            <pc:sldMk cId="1643441071" sldId="347"/>
+            <ac:picMk id="2" creationId="{3BDD161A-FF67-C485-9258-A5DFBE8652EF}"/>
+          </ac:picMkLst>
+        </pc:picChg>
+        <pc:picChg chg="del">
+          <ac:chgData name="Lines, Todd" userId="afaf7c3a-e8aa-4568-882a-02ad8f9e19b0" providerId="ADAL" clId="{5FF5AC1B-ABA9-43D7-A1E3-2D92732CD6E2}" dt="2026-04-24T20:16:29.447" v="50" actId="478"/>
+          <ac:picMkLst>
+            <pc:docMk/>
+            <pc:sldMk cId="1643441071" sldId="347"/>
+            <ac:picMk id="3" creationId="{D210F6D0-1984-60DB-37BB-096A9A7F3E3B}"/>
+          </ac:picMkLst>
+        </pc:picChg>
+        <pc:picChg chg="del mod">
+          <ac:chgData name="Lines, Todd" userId="afaf7c3a-e8aa-4568-882a-02ad8f9e19b0" providerId="ADAL" clId="{5FF5AC1B-ABA9-43D7-A1E3-2D92732CD6E2}" dt="2026-04-24T20:16:54.261" v="55" actId="21"/>
+          <ac:picMkLst>
+            <pc:docMk/>
+            <pc:sldMk cId="1643441071" sldId="347"/>
+            <ac:picMk id="8" creationId="{EA45425E-DD19-94FA-FBFC-13DF269603B2}"/>
+          </ac:picMkLst>
+        </pc:picChg>
       </pc:sldChg>
-      <pc:sldChg chg="add del">
-        <pc:chgData name="Lines, Todd" userId="afaf7c3a-e8aa-4568-882a-02ad8f9e19b0" providerId="ADAL" clId="{5FF5AC1B-ABA9-43D7-A1E3-2D92732CD6E2}" dt="2026-01-15T21:44:18.258" v="7" actId="2696"/>
+      <pc:sldChg chg="addSp delSp modSp mod">
+        <pc:chgData name="Lines, Todd" userId="afaf7c3a-e8aa-4568-882a-02ad8f9e19b0" providerId="ADAL" clId="{5FF5AC1B-ABA9-43D7-A1E3-2D92732CD6E2}" dt="2026-04-24T20:33:12.171" v="62" actId="1076"/>
         <pc:sldMkLst>
           <pc:docMk/>
-          <pc:sldMk cId="96676395" sldId="261"/>
+          <pc:sldMk cId="619843192" sldId="358"/>
         </pc:sldMkLst>
-      </pc:sldChg>
-      <pc:sldChg chg="add">
-        <pc:chgData name="Lines, Todd" userId="afaf7c3a-e8aa-4568-882a-02ad8f9e19b0" providerId="ADAL" clId="{5FF5AC1B-ABA9-43D7-A1E3-2D92732CD6E2}" dt="2026-01-15T21:44:49.770" v="8"/>
-        <pc:sldMkLst>
-          <pc:docMk/>
-          <pc:sldMk cId="645957708" sldId="261"/>
-        </pc:sldMkLst>
-      </pc:sldChg>
-      <pc:sldChg chg="del">
-        <pc:chgData name="Lines, Todd" userId="afaf7c3a-e8aa-4568-882a-02ad8f9e19b0" providerId="ADAL" clId="{5FF5AC1B-ABA9-43D7-A1E3-2D92732CD6E2}" dt="2026-01-15T21:43:31.987" v="5" actId="2696"/>
-        <pc:sldMkLst>
-          <pc:docMk/>
-          <pc:sldMk cId="0" sldId="262"/>
-        </pc:sldMkLst>
-      </pc:sldChg>
-      <pc:sldChg chg="add">
-        <pc:chgData name="Lines, Todd" userId="afaf7c3a-e8aa-4568-882a-02ad8f9e19b0" providerId="ADAL" clId="{5FF5AC1B-ABA9-43D7-A1E3-2D92732CD6E2}" dt="2026-01-15T21:44:49.770" v="8"/>
-        <pc:sldMkLst>
-          <pc:docMk/>
-          <pc:sldMk cId="2084675203" sldId="262"/>
-        </pc:sldMkLst>
-      </pc:sldChg>
-      <pc:sldChg chg="add del">
-        <pc:chgData name="Lines, Todd" userId="afaf7c3a-e8aa-4568-882a-02ad8f9e19b0" providerId="ADAL" clId="{5FF5AC1B-ABA9-43D7-A1E3-2D92732CD6E2}" dt="2026-01-15T21:44:18.258" v="7" actId="2696"/>
-        <pc:sldMkLst>
-          <pc:docMk/>
-          <pc:sldMk cId="3109614522" sldId="262"/>
-        </pc:sldMkLst>
-      </pc:sldChg>
-      <pc:sldChg chg="del">
-        <pc:chgData name="Lines, Todd" userId="afaf7c3a-e8aa-4568-882a-02ad8f9e19b0" providerId="ADAL" clId="{5FF5AC1B-ABA9-43D7-A1E3-2D92732CD6E2}" dt="2026-01-15T21:43:31.987" v="5" actId="2696"/>
-        <pc:sldMkLst>
-          <pc:docMk/>
-          <pc:sldMk cId="0" sldId="263"/>
-        </pc:sldMkLst>
-      </pc:sldChg>
-      <pc:sldChg chg="add del">
-        <pc:chgData name="Lines, Todd" userId="afaf7c3a-e8aa-4568-882a-02ad8f9e19b0" providerId="ADAL" clId="{5FF5AC1B-ABA9-43D7-A1E3-2D92732CD6E2}" dt="2026-01-15T21:44:18.258" v="7" actId="2696"/>
-        <pc:sldMkLst>
-          <pc:docMk/>
-          <pc:sldMk cId="1326243373" sldId="263"/>
-        </pc:sldMkLst>
-      </pc:sldChg>
-      <pc:sldChg chg="add">
-        <pc:chgData name="Lines, Todd" userId="afaf7c3a-e8aa-4568-882a-02ad8f9e19b0" providerId="ADAL" clId="{5FF5AC1B-ABA9-43D7-A1E3-2D92732CD6E2}" dt="2026-01-15T21:44:49.770" v="8"/>
-        <pc:sldMkLst>
-          <pc:docMk/>
-          <pc:sldMk cId="2518151769" sldId="263"/>
-        </pc:sldMkLst>
-      </pc:sldChg>
-      <pc:sldChg chg="modSp del mod">
-        <pc:chgData name="Lines, Todd" userId="afaf7c3a-e8aa-4568-882a-02ad8f9e19b0" providerId="ADAL" clId="{5FF5AC1B-ABA9-43D7-A1E3-2D92732CD6E2}" dt="2026-01-15T21:43:31.987" v="5" actId="2696"/>
-        <pc:sldMkLst>
-          <pc:docMk/>
-          <pc:sldMk cId="1203521046" sldId="348"/>
-        </pc:sldMkLst>
-        <pc:spChg chg="mod">
-          <ac:chgData name="Lines, Todd" userId="afaf7c3a-e8aa-4568-882a-02ad8f9e19b0" providerId="ADAL" clId="{5FF5AC1B-ABA9-43D7-A1E3-2D92732CD6E2}" dt="2026-01-15T21:41:26.634" v="3" actId="11"/>
+        <pc:spChg chg="add del">
+          <ac:chgData name="Lines, Todd" userId="afaf7c3a-e8aa-4568-882a-02ad8f9e19b0" providerId="ADAL" clId="{5FF5AC1B-ABA9-43D7-A1E3-2D92732CD6E2}" dt="2026-04-24T20:33:04.519" v="58" actId="22"/>
           <ac:spMkLst>
             <pc:docMk/>
-            <pc:sldMk cId="1203521046" sldId="348"/>
-            <ac:spMk id="115716" creationId="{00000000-0000-0000-0000-000000000000}"/>
+            <pc:sldMk cId="619843192" sldId="358"/>
+            <ac:spMk id="4" creationId="{1DA6E969-146E-E931-71AA-EDFE996DD6BB}"/>
           </ac:spMkLst>
         </pc:spChg>
-      </pc:sldChg>
-      <pc:sldChg chg="add">
-        <pc:chgData name="Lines, Todd" userId="afaf7c3a-e8aa-4568-882a-02ad8f9e19b0" providerId="ADAL" clId="{5FF5AC1B-ABA9-43D7-A1E3-2D92732CD6E2}" dt="2026-01-15T21:43:51.892" v="6"/>
-        <pc:sldMkLst>
-          <pc:docMk/>
-          <pc:sldMk cId="3748942484" sldId="348"/>
-        </pc:sldMkLst>
-      </pc:sldChg>
-      <pc:sldChg chg="modSp del mod">
-        <pc:chgData name="Lines, Todd" userId="afaf7c3a-e8aa-4568-882a-02ad8f9e19b0" providerId="ADAL" clId="{5FF5AC1B-ABA9-43D7-A1E3-2D92732CD6E2}" dt="2026-01-15T21:43:31.987" v="5" actId="2696"/>
-        <pc:sldMkLst>
-          <pc:docMk/>
-          <pc:sldMk cId="3434781075" sldId="349"/>
-        </pc:sldMkLst>
-        <pc:spChg chg="mod">
-          <ac:chgData name="Lines, Todd" userId="afaf7c3a-e8aa-4568-882a-02ad8f9e19b0" providerId="ADAL" clId="{5FF5AC1B-ABA9-43D7-A1E3-2D92732CD6E2}" dt="2026-01-15T21:41:40.178" v="4" actId="11"/>
-          <ac:spMkLst>
+        <pc:grpChg chg="del">
+          <ac:chgData name="Lines, Todd" userId="afaf7c3a-e8aa-4568-882a-02ad8f9e19b0" providerId="ADAL" clId="{5FF5AC1B-ABA9-43D7-A1E3-2D92732CD6E2}" dt="2026-04-24T20:33:02.362" v="56" actId="478"/>
+          <ac:grpSpMkLst>
             <pc:docMk/>
-            <pc:sldMk cId="3434781075" sldId="349"/>
-            <ac:spMk id="116740" creationId="{00000000-0000-0000-0000-000000000000}"/>
-          </ac:spMkLst>
-        </pc:spChg>
-      </pc:sldChg>
-      <pc:sldChg chg="add">
-        <pc:chgData name="Lines, Todd" userId="afaf7c3a-e8aa-4568-882a-02ad8f9e19b0" providerId="ADAL" clId="{5FF5AC1B-ABA9-43D7-A1E3-2D92732CD6E2}" dt="2026-01-15T21:43:51.892" v="6"/>
-        <pc:sldMkLst>
-          <pc:docMk/>
-          <pc:sldMk cId="3521782403" sldId="349"/>
-        </pc:sldMkLst>
-      </pc:sldChg>
-      <pc:sldChg chg="del">
-        <pc:chgData name="Lines, Todd" userId="afaf7c3a-e8aa-4568-882a-02ad8f9e19b0" providerId="ADAL" clId="{5FF5AC1B-ABA9-43D7-A1E3-2D92732CD6E2}" dt="2026-01-15T21:43:31.987" v="5" actId="2696"/>
-        <pc:sldMkLst>
-          <pc:docMk/>
-          <pc:sldMk cId="345946206" sldId="350"/>
-        </pc:sldMkLst>
-      </pc:sldChg>
-      <pc:sldChg chg="add">
-        <pc:chgData name="Lines, Todd" userId="afaf7c3a-e8aa-4568-882a-02ad8f9e19b0" providerId="ADAL" clId="{5FF5AC1B-ABA9-43D7-A1E3-2D92732CD6E2}" dt="2026-01-15T21:43:51.892" v="6"/>
-        <pc:sldMkLst>
-          <pc:docMk/>
-          <pc:sldMk cId="1339363551" sldId="350"/>
-        </pc:sldMkLst>
-      </pc:sldChg>
-      <pc:sldChg chg="del">
-        <pc:chgData name="Lines, Todd" userId="afaf7c3a-e8aa-4568-882a-02ad8f9e19b0" providerId="ADAL" clId="{5FF5AC1B-ABA9-43D7-A1E3-2D92732CD6E2}" dt="2026-01-15T21:43:31.987" v="5" actId="2696"/>
-        <pc:sldMkLst>
-          <pc:docMk/>
-          <pc:sldMk cId="548597081" sldId="351"/>
-        </pc:sldMkLst>
-      </pc:sldChg>
-      <pc:sldChg chg="add">
-        <pc:chgData name="Lines, Todd" userId="afaf7c3a-e8aa-4568-882a-02ad8f9e19b0" providerId="ADAL" clId="{5FF5AC1B-ABA9-43D7-A1E3-2D92732CD6E2}" dt="2026-01-15T21:43:51.892" v="6"/>
-        <pc:sldMkLst>
-          <pc:docMk/>
-          <pc:sldMk cId="1349580765" sldId="351"/>
-        </pc:sldMkLst>
-      </pc:sldChg>
-      <pc:sldChg chg="del">
-        <pc:chgData name="Lines, Todd" userId="afaf7c3a-e8aa-4568-882a-02ad8f9e19b0" providerId="ADAL" clId="{5FF5AC1B-ABA9-43D7-A1E3-2D92732CD6E2}" dt="2026-01-15T21:43:31.987" v="5" actId="2696"/>
-        <pc:sldMkLst>
-          <pc:docMk/>
-          <pc:sldMk cId="344528421" sldId="352"/>
-        </pc:sldMkLst>
-      </pc:sldChg>
-      <pc:sldChg chg="add">
-        <pc:chgData name="Lines, Todd" userId="afaf7c3a-e8aa-4568-882a-02ad8f9e19b0" providerId="ADAL" clId="{5FF5AC1B-ABA9-43D7-A1E3-2D92732CD6E2}" dt="2026-01-15T21:43:51.892" v="6"/>
-        <pc:sldMkLst>
-          <pc:docMk/>
-          <pc:sldMk cId="4006116839" sldId="352"/>
-        </pc:sldMkLst>
-      </pc:sldChg>
-      <pc:sldChg chg="del">
-        <pc:chgData name="Lines, Todd" userId="afaf7c3a-e8aa-4568-882a-02ad8f9e19b0" providerId="ADAL" clId="{5FF5AC1B-ABA9-43D7-A1E3-2D92732CD6E2}" dt="2026-01-15T21:43:31.987" v="5" actId="2696"/>
-        <pc:sldMkLst>
-          <pc:docMk/>
-          <pc:sldMk cId="577912915" sldId="353"/>
-        </pc:sldMkLst>
-      </pc:sldChg>
-      <pc:sldChg chg="add">
-        <pc:chgData name="Lines, Todd" userId="afaf7c3a-e8aa-4568-882a-02ad8f9e19b0" providerId="ADAL" clId="{5FF5AC1B-ABA9-43D7-A1E3-2D92732CD6E2}" dt="2026-01-15T21:43:51.892" v="6"/>
-        <pc:sldMkLst>
-          <pc:docMk/>
-          <pc:sldMk cId="1637345474" sldId="353"/>
-        </pc:sldMkLst>
+            <pc:sldMk cId="619843192" sldId="358"/>
+            <ac:grpSpMk id="2" creationId="{00000000-0000-0000-0000-000000000000}"/>
+          </ac:grpSpMkLst>
+        </pc:grpChg>
+        <pc:picChg chg="add mod">
+          <ac:chgData name="Lines, Todd" userId="afaf7c3a-e8aa-4568-882a-02ad8f9e19b0" providerId="ADAL" clId="{5FF5AC1B-ABA9-43D7-A1E3-2D92732CD6E2}" dt="2026-04-24T20:33:12.171" v="62" actId="1076"/>
+          <ac:picMkLst>
+            <pc:docMk/>
+            <pc:sldMk cId="619843192" sldId="358"/>
+            <ac:picMk id="6" creationId="{EAE5FC2A-0A7E-59BF-C54F-818F688A10F7}"/>
+          </ac:picMkLst>
+        </pc:picChg>
       </pc:sldChg>
     </pc:docChg>
   </pc:docChgLst>
@@ -478,7 +409,7 @@
           <a:p>
             <a:fld id="{DA081139-F0BA-49F9-93A6-6F626C1CF540}" type="datetimeFigureOut">
               <a:rPr lang="en-US" smtClean="0"/>
-              <a:t>1/15/2026</a:t>
+              <a:t>4/24/2026</a:t>
             </a:fld>
             <a:endParaRPr lang="en-US"/>
           </a:p>
@@ -1053,7 +984,7 @@
           <a:p>
             <a:fld id="{EDF140B7-8B0E-44A6-9E20-D5135BF064F6}" type="datetimeFigureOut">
               <a:rPr lang="en-US" smtClean="0"/>
-              <a:t>1/15/2026</a:t>
+              <a:t>4/24/2026</a:t>
             </a:fld>
             <a:endParaRPr lang="en-US"/>
           </a:p>
@@ -1216,7 +1147,7 @@
           <a:p>
             <a:fld id="{EDF140B7-8B0E-44A6-9E20-D5135BF064F6}" type="datetimeFigureOut">
               <a:rPr lang="en-US" smtClean="0"/>
-              <a:t>1/15/2026</a:t>
+              <a:t>4/24/2026</a:t>
             </a:fld>
             <a:endParaRPr lang="en-US"/>
           </a:p>
@@ -1389,7 +1320,7 @@
           <a:p>
             <a:fld id="{EDF140B7-8B0E-44A6-9E20-D5135BF064F6}" type="datetimeFigureOut">
               <a:rPr lang="en-US" smtClean="0"/>
-              <a:t>1/15/2026</a:t>
+              <a:t>4/24/2026</a:t>
             </a:fld>
             <a:endParaRPr lang="en-US"/>
           </a:p>
@@ -1552,7 +1483,7 @@
           <a:p>
             <a:fld id="{EDF140B7-8B0E-44A6-9E20-D5135BF064F6}" type="datetimeFigureOut">
               <a:rPr lang="en-US" smtClean="0"/>
-              <a:t>1/15/2026</a:t>
+              <a:t>4/24/2026</a:t>
             </a:fld>
             <a:endParaRPr lang="en-US"/>
           </a:p>
@@ -1792,7 +1723,7 @@
           <a:p>
             <a:fld id="{EDF140B7-8B0E-44A6-9E20-D5135BF064F6}" type="datetimeFigureOut">
               <a:rPr lang="en-US" smtClean="0"/>
-              <a:t>1/15/2026</a:t>
+              <a:t>4/24/2026</a:t>
             </a:fld>
             <a:endParaRPr lang="en-US"/>
           </a:p>
@@ -2072,7 +2003,7 @@
           <a:p>
             <a:fld id="{EDF140B7-8B0E-44A6-9E20-D5135BF064F6}" type="datetimeFigureOut">
               <a:rPr lang="en-US" smtClean="0"/>
-              <a:t>1/15/2026</a:t>
+              <a:t>4/24/2026</a:t>
             </a:fld>
             <a:endParaRPr lang="en-US"/>
           </a:p>
@@ -2486,7 +2417,7 @@
           <a:p>
             <a:fld id="{EDF140B7-8B0E-44A6-9E20-D5135BF064F6}" type="datetimeFigureOut">
               <a:rPr lang="en-US" smtClean="0"/>
-              <a:t>1/15/2026</a:t>
+              <a:t>4/24/2026</a:t>
             </a:fld>
             <a:endParaRPr lang="en-US"/>
           </a:p>
@@ -2598,7 +2529,7 @@
           <a:p>
             <a:fld id="{EDF140B7-8B0E-44A6-9E20-D5135BF064F6}" type="datetimeFigureOut">
               <a:rPr lang="en-US" smtClean="0"/>
-              <a:t>1/15/2026</a:t>
+              <a:t>4/24/2026</a:t>
             </a:fld>
             <a:endParaRPr lang="en-US"/>
           </a:p>
@@ -2688,7 +2619,7 @@
           <a:p>
             <a:fld id="{EDF140B7-8B0E-44A6-9E20-D5135BF064F6}" type="datetimeFigureOut">
               <a:rPr lang="en-US" smtClean="0"/>
-              <a:t>1/15/2026</a:t>
+              <a:t>4/24/2026</a:t>
             </a:fld>
             <a:endParaRPr lang="en-US"/>
           </a:p>
@@ -2958,7 +2889,7 @@
           <a:p>
             <a:fld id="{EDF140B7-8B0E-44A6-9E20-D5135BF064F6}" type="datetimeFigureOut">
               <a:rPr lang="en-US" smtClean="0"/>
-              <a:t>1/15/2026</a:t>
+              <a:t>4/24/2026</a:t>
             </a:fld>
             <a:endParaRPr lang="en-US"/>
           </a:p>
@@ -3205,7 +3136,7 @@
           <a:p>
             <a:fld id="{EDF140B7-8B0E-44A6-9E20-D5135BF064F6}" type="datetimeFigureOut">
               <a:rPr lang="en-US" smtClean="0"/>
-              <a:t>1/15/2026</a:t>
+              <a:t>4/24/2026</a:t>
             </a:fld>
             <a:endParaRPr lang="en-US"/>
           </a:p>
@@ -3411,7 +3342,7 @@
           <a:p>
             <a:fld id="{EDF140B7-8B0E-44A6-9E20-D5135BF064F6}" type="datetimeFigureOut">
               <a:rPr lang="en-US" smtClean="0"/>
-              <a:t>1/15/2026</a:t>
+              <a:t>4/24/2026</a:t>
             </a:fld>
             <a:endParaRPr lang="en-US"/>
           </a:p>
@@ -14768,89 +14699,36 @@
           </a:p>
         </p:txBody>
       </p:sp>
-      <p:grpSp>
-        <p:nvGrpSpPr>
-          <p:cNvPr id="2" name="Group 6"/>
-          <p:cNvGrpSpPr>
-            <a:grpSpLocks/>
-          </p:cNvGrpSpPr>
+      <p:pic>
+        <p:nvPicPr>
+          <p:cNvPr id="6" name="Picture 5">
+            <a:extLst>
+              <a:ext uri="{FF2B5EF4-FFF2-40B4-BE49-F238E27FC236}">
+                <a16:creationId xmlns:a16="http://schemas.microsoft.com/office/drawing/2014/main" id="{EAE5FC2A-0A7E-59BF-C54F-818F688A10F7}"/>
+              </a:ext>
+            </a:extLst>
+          </p:cNvPr>
+          <p:cNvPicPr>
+            <a:picLocks noChangeAspect="1"/>
+          </p:cNvPicPr>
           <p:nvPr/>
-        </p:nvGrpSpPr>
-        <p:grpSpPr bwMode="auto">
+        </p:nvPicPr>
+        <p:blipFill>
+          <a:blip r:embed="rId2"/>
+          <a:stretch>
+            <a:fillRect/>
+          </a:stretch>
+        </p:blipFill>
+        <p:spPr>
           <a:xfrm>
-            <a:off x="3802063" y="1944688"/>
-            <a:ext cx="5167312" cy="4427537"/>
-            <a:chOff x="2395" y="1225"/>
-            <a:chExt cx="3255" cy="2789"/>
+            <a:off x="4201125" y="1851025"/>
+            <a:ext cx="4321985" cy="3384076"/>
           </a:xfrm>
-        </p:grpSpPr>
-        <p:sp>
-          <p:nvSpPr>
-            <p:cNvPr id="63496" name="Rectangle 5"/>
-            <p:cNvSpPr>
-              <a:spLocks noChangeArrowheads="1"/>
-            </p:cNvSpPr>
-            <p:nvPr/>
-          </p:nvSpPr>
-          <p:spPr bwMode="auto">
-            <a:xfrm>
-              <a:off x="2395" y="1225"/>
-              <a:ext cx="3255" cy="2789"/>
-            </a:xfrm>
-            <a:prstGeom prst="rect">
-              <a:avLst/>
-            </a:prstGeom>
-            <a:solidFill>
-              <a:schemeClr val="bg1"/>
-            </a:solidFill>
-            <a:ln w="9525" algn="ctr">
-              <a:noFill/>
-              <a:miter lim="800000"/>
-              <a:headEnd/>
-              <a:tailEnd/>
-            </a:ln>
-          </p:spPr>
-          <p:txBody>
-            <a:bodyPr wrap="none" anchor="ctr"/>
-            <a:lstStyle/>
-            <a:p>
-              <a:endParaRPr lang="en-US"/>
-            </a:p>
-          </p:txBody>
-        </p:sp>
-        <p:pic>
-          <p:nvPicPr>
-            <p:cNvPr id="63497" name="Picture 4" descr="11_33"/>
-            <p:cNvPicPr>
-              <a:picLocks noChangeAspect="1" noChangeArrowheads="1"/>
-            </p:cNvPicPr>
-            <p:nvPr/>
-          </p:nvPicPr>
-          <p:blipFill>
-            <a:blip r:embed="rId2" cstate="print"/>
-            <a:srcRect/>
-            <a:stretch>
-              <a:fillRect/>
-            </a:stretch>
-          </p:blipFill>
-          <p:spPr bwMode="auto">
-            <a:xfrm>
-              <a:off x="2496" y="1348"/>
-              <a:ext cx="3072" cy="2537"/>
-            </a:xfrm>
-            <a:prstGeom prst="rect">
-              <a:avLst/>
-            </a:prstGeom>
-            <a:noFill/>
-            <a:ln w="9525">
-              <a:noFill/>
-              <a:miter lim="800000"/>
-              <a:headEnd/>
-              <a:tailEnd/>
-            </a:ln>
-          </p:spPr>
-        </p:pic>
-      </p:grpSp>
+          <a:prstGeom prst="rect">
+            <a:avLst/>
+          </a:prstGeom>
+        </p:spPr>
+      </p:pic>
     </p:spTree>
     <p:extLst>
       <p:ext uri="{BB962C8B-B14F-4D97-AF65-F5344CB8AC3E}">
@@ -17667,8 +17545,8 @@
         </p:nvSpPr>
         <p:spPr>
           <a:xfrm>
-            <a:off x="3931920" y="1443569"/>
-            <a:ext cx="3813048" cy="1148411"/>
+            <a:off x="3841609" y="1454858"/>
+            <a:ext cx="4095270" cy="1148411"/>
           </a:xfrm>
           <a:custGeom>
             <a:avLst/>
@@ -17923,50 +17801,110 @@
               <a:gd name="connsiteY3" fmla="*/ 1688 h 4034331"/>
               <a:gd name="connsiteX4" fmla="*/ 5632704 w 5632704"/>
               <a:gd name="connsiteY4" fmla="*/ 3110648 h 4034331"/>
+              <a:gd name="csX0" fmla="*/ 0 w 5632704"/>
+              <a:gd name="csY0" fmla="*/ 1967648 h 4034331"/>
+              <a:gd name="csX1" fmla="*/ 859536 w 5632704"/>
+              <a:gd name="csY1" fmla="*/ 1688 h 4034331"/>
+              <a:gd name="csX2" fmla="*/ 2660904 w 5632704"/>
+              <a:gd name="csY2" fmla="*/ 4034192 h 4034331"/>
+              <a:gd name="csX3" fmla="*/ 4398264 w 5632704"/>
+              <a:gd name="csY3" fmla="*/ 1688 h 4034331"/>
+              <a:gd name="csX4" fmla="*/ 5632704 w 5632704"/>
+              <a:gd name="csY4" fmla="*/ 3110648 h 4034331"/>
+              <a:gd name="csX0" fmla="*/ 0 w 5949551"/>
+              <a:gd name="csY0" fmla="*/ 2086622 h 4034331"/>
+              <a:gd name="csX1" fmla="*/ 1176383 w 5949551"/>
+              <a:gd name="csY1" fmla="*/ 1688 h 4034331"/>
+              <a:gd name="csX2" fmla="*/ 2977751 w 5949551"/>
+              <a:gd name="csY2" fmla="*/ 4034192 h 4034331"/>
+              <a:gd name="csX3" fmla="*/ 4715111 w 5949551"/>
+              <a:gd name="csY3" fmla="*/ 1688 h 4034331"/>
+              <a:gd name="csX4" fmla="*/ 5949551 w 5949551"/>
+              <a:gd name="csY4" fmla="*/ 3110648 h 4034331"/>
+              <a:gd name="csX0" fmla="*/ 0 w 5949551"/>
+              <a:gd name="csY0" fmla="*/ 2086622 h 4034331"/>
+              <a:gd name="csX1" fmla="*/ 1176383 w 5949551"/>
+              <a:gd name="csY1" fmla="*/ 1688 h 4034331"/>
+              <a:gd name="csX2" fmla="*/ 2977751 w 5949551"/>
+              <a:gd name="csY2" fmla="*/ 4034192 h 4034331"/>
+              <a:gd name="csX3" fmla="*/ 4715111 w 5949551"/>
+              <a:gd name="csY3" fmla="*/ 1688 h 4034331"/>
+              <a:gd name="csX4" fmla="*/ 5949551 w 5949551"/>
+              <a:gd name="csY4" fmla="*/ 3110648 h 4034331"/>
+              <a:gd name="csX0" fmla="*/ 0 w 6049607"/>
+              <a:gd name="csY0" fmla="*/ 1927991 h 4034331"/>
+              <a:gd name="csX1" fmla="*/ 1276439 w 6049607"/>
+              <a:gd name="csY1" fmla="*/ 1688 h 4034331"/>
+              <a:gd name="csX2" fmla="*/ 3077807 w 6049607"/>
+              <a:gd name="csY2" fmla="*/ 4034192 h 4034331"/>
+              <a:gd name="csX3" fmla="*/ 4815167 w 6049607"/>
+              <a:gd name="csY3" fmla="*/ 1688 h 4034331"/>
+              <a:gd name="csX4" fmla="*/ 6049607 w 6049607"/>
+              <a:gd name="csY4" fmla="*/ 3110648 h 4034331"/>
+              <a:gd name="csX0" fmla="*/ 0 w 6049607"/>
+              <a:gd name="csY0" fmla="*/ 1927991 h 4034331"/>
+              <a:gd name="csX1" fmla="*/ 1276439 w 6049607"/>
+              <a:gd name="csY1" fmla="*/ 1688 h 4034331"/>
+              <a:gd name="csX2" fmla="*/ 3077807 w 6049607"/>
+              <a:gd name="csY2" fmla="*/ 4034192 h 4034331"/>
+              <a:gd name="csX3" fmla="*/ 4815167 w 6049607"/>
+              <a:gd name="csY3" fmla="*/ 1688 h 4034331"/>
+              <a:gd name="csX4" fmla="*/ 6049607 w 6049607"/>
+              <a:gd name="csY4" fmla="*/ 3110648 h 4034331"/>
+              <a:gd name="csX0" fmla="*/ 0 w 6049607"/>
+              <a:gd name="csY0" fmla="*/ 1927991 h 4034331"/>
+              <a:gd name="csX1" fmla="*/ 1276439 w 6049607"/>
+              <a:gd name="csY1" fmla="*/ 1688 h 4034331"/>
+              <a:gd name="csX2" fmla="*/ 3077807 w 6049607"/>
+              <a:gd name="csY2" fmla="*/ 4034192 h 4034331"/>
+              <a:gd name="csX3" fmla="*/ 4815167 w 6049607"/>
+              <a:gd name="csY3" fmla="*/ 1688 h 4034331"/>
+              <a:gd name="csX4" fmla="*/ 6049607 w 6049607"/>
+              <a:gd name="csY4" fmla="*/ 3110648 h 4034331"/>
             </a:gdLst>
             <a:ahLst/>
             <a:cxnLst>
               <a:cxn ang="0">
-                <a:pos x="connsiteX0" y="connsiteY0"/>
+                <a:pos x="csX0" y="csY0"/>
               </a:cxn>
               <a:cxn ang="0">
-                <a:pos x="connsiteX1" y="connsiteY1"/>
+                <a:pos x="csX1" y="csY1"/>
               </a:cxn>
               <a:cxn ang="0">
-                <a:pos x="connsiteX2" y="connsiteY2"/>
+                <a:pos x="csX2" y="csY2"/>
               </a:cxn>
               <a:cxn ang="0">
-                <a:pos x="connsiteX3" y="connsiteY3"/>
+                <a:pos x="csX3" y="csY3"/>
               </a:cxn>
               <a:cxn ang="0">
-                <a:pos x="connsiteX4" y="connsiteY4"/>
+                <a:pos x="csX4" y="csY4"/>
               </a:cxn>
             </a:cxnLst>
             <a:rect l="l" t="t" r="r" b="b"/>
             <a:pathLst>
-              <a:path w="5632704" h="4034331">
+              <a:path w="6049607" h="4034331">
                 <a:moveTo>
-                  <a:pt x="0" y="1967648"/>
+                  <a:pt x="0" y="1927991"/>
                 </a:moveTo>
                 <a:cubicBezTo>
-                  <a:pt x="273558" y="804836"/>
-                  <a:pt x="620268" y="-28792"/>
-                  <a:pt x="859536" y="1688"/>
+                  <a:pt x="807193" y="2073877"/>
+                  <a:pt x="720324" y="10866"/>
+                  <a:pt x="1276439" y="1688"/>
                 </a:cubicBezTo>
                 <a:cubicBezTo>
-                  <a:pt x="1537716" y="32168"/>
-                  <a:pt x="2025396" y="4061624"/>
-                  <a:pt x="2660904" y="4034192"/>
+                  <a:pt x="1954619" y="32168"/>
+                  <a:pt x="2442299" y="4061624"/>
+                  <a:pt x="3077807" y="4034192"/>
                 </a:cubicBezTo>
                 <a:cubicBezTo>
-                  <a:pt x="3259836" y="4025048"/>
-                  <a:pt x="3790188" y="115988"/>
-                  <a:pt x="4398264" y="1688"/>
+                  <a:pt x="3676739" y="4025048"/>
+                  <a:pt x="4207091" y="115988"/>
+                  <a:pt x="4815167" y="1688"/>
                 </a:cubicBezTo>
                 <a:cubicBezTo>
-                  <a:pt x="4777740" y="-57748"/>
-                  <a:pt x="5200650" y="1462442"/>
-                  <a:pt x="5632704" y="3110648"/>
+                  <a:pt x="5194643" y="-57748"/>
+                  <a:pt x="5617553" y="1462442"/>
+                  <a:pt x="6049607" y="3110648"/>
                 </a:cubicBezTo>
               </a:path>
             </a:pathLst>
@@ -18020,7 +17958,7 @@
         </p:nvSpPr>
         <p:spPr>
           <a:xfrm rot="2488798">
-            <a:off x="4138531" y="1564117"/>
+            <a:off x="4364311" y="1575406"/>
             <a:ext cx="74456" cy="188896"/>
           </a:xfrm>
           <a:prstGeom prst="can">
@@ -18075,7 +18013,7 @@
         </p:nvSpPr>
         <p:spPr>
           <a:xfrm>
-            <a:off x="4077796" y="1625583"/>
+            <a:off x="4303576" y="1636872"/>
             <a:ext cx="567784" cy="369332"/>
           </a:xfrm>
           <a:prstGeom prst="rect">

--- a/Lecture_Slides/PH 123 Lecture 06.pptx
+++ b/Lecture_Slides/PH 123 Lecture 06.pptx
@@ -5,7 +5,7 @@
     <p:sldMasterId id="2147483648" r:id="rId1"/>
   </p:sldMasterIdLst>
   <p:notesMasterIdLst>
-    <p:notesMasterId r:id="rId88"/>
+    <p:notesMasterId r:id="rId90"/>
   </p:notesMasterIdLst>
   <p:sldIdLst>
     <p:sldId id="345" r:id="rId2"/>
@@ -20,8 +20,8 @@
     <p:sldId id="288" r:id="rId11"/>
     <p:sldId id="311" r:id="rId12"/>
     <p:sldId id="290" r:id="rId13"/>
-    <p:sldId id="291" r:id="rId14"/>
-    <p:sldId id="312" r:id="rId15"/>
+    <p:sldId id="312" r:id="rId14"/>
+    <p:sldId id="291" r:id="rId15"/>
     <p:sldId id="321" r:id="rId16"/>
     <p:sldId id="323" r:id="rId17"/>
     <p:sldId id="354" r:id="rId18"/>
@@ -46,54 +46,56 @@
     <p:sldId id="329" r:id="rId37"/>
     <p:sldId id="330" r:id="rId38"/>
     <p:sldId id="331" r:id="rId39"/>
-    <p:sldId id="332" r:id="rId40"/>
-    <p:sldId id="333" r:id="rId41"/>
-    <p:sldId id="334" r:id="rId42"/>
-    <p:sldId id="335" r:id="rId43"/>
-    <p:sldId id="304" r:id="rId44"/>
-    <p:sldId id="368" r:id="rId45"/>
-    <p:sldId id="305" r:id="rId46"/>
-    <p:sldId id="306" r:id="rId47"/>
-    <p:sldId id="307" r:id="rId48"/>
-    <p:sldId id="308" r:id="rId49"/>
-    <p:sldId id="309" r:id="rId50"/>
-    <p:sldId id="261" r:id="rId51"/>
-    <p:sldId id="262" r:id="rId52"/>
-    <p:sldId id="263" r:id="rId53"/>
-    <p:sldId id="265" r:id="rId54"/>
-    <p:sldId id="363" r:id="rId55"/>
-    <p:sldId id="364" r:id="rId56"/>
-    <p:sldId id="259" r:id="rId57"/>
-    <p:sldId id="264" r:id="rId58"/>
-    <p:sldId id="365" r:id="rId59"/>
-    <p:sldId id="366" r:id="rId60"/>
-    <p:sldId id="266" r:id="rId61"/>
-    <p:sldId id="346" r:id="rId62"/>
-    <p:sldId id="362" r:id="rId63"/>
-    <p:sldId id="286" r:id="rId64"/>
-    <p:sldId id="292" r:id="rId65"/>
-    <p:sldId id="313" r:id="rId66"/>
-    <p:sldId id="293" r:id="rId67"/>
-    <p:sldId id="294" r:id="rId68"/>
-    <p:sldId id="295" r:id="rId69"/>
-    <p:sldId id="296" r:id="rId70"/>
-    <p:sldId id="297" r:id="rId71"/>
-    <p:sldId id="298" r:id="rId72"/>
-    <p:sldId id="314" r:id="rId73"/>
-    <p:sldId id="315" r:id="rId74"/>
-    <p:sldId id="316" r:id="rId75"/>
-    <p:sldId id="317" r:id="rId76"/>
-    <p:sldId id="299" r:id="rId77"/>
-    <p:sldId id="300" r:id="rId78"/>
-    <p:sldId id="301" r:id="rId79"/>
-    <p:sldId id="302" r:id="rId80"/>
-    <p:sldId id="336" r:id="rId81"/>
-    <p:sldId id="337" r:id="rId82"/>
-    <p:sldId id="342" r:id="rId83"/>
-    <p:sldId id="343" r:id="rId84"/>
-    <p:sldId id="339" r:id="rId85"/>
-    <p:sldId id="340" r:id="rId86"/>
-    <p:sldId id="284" r:id="rId87"/>
+    <p:sldId id="369" r:id="rId40"/>
+    <p:sldId id="370" r:id="rId41"/>
+    <p:sldId id="332" r:id="rId42"/>
+    <p:sldId id="333" r:id="rId43"/>
+    <p:sldId id="334" r:id="rId44"/>
+    <p:sldId id="335" r:id="rId45"/>
+    <p:sldId id="304" r:id="rId46"/>
+    <p:sldId id="368" r:id="rId47"/>
+    <p:sldId id="305" r:id="rId48"/>
+    <p:sldId id="306" r:id="rId49"/>
+    <p:sldId id="307" r:id="rId50"/>
+    <p:sldId id="308" r:id="rId51"/>
+    <p:sldId id="309" r:id="rId52"/>
+    <p:sldId id="261" r:id="rId53"/>
+    <p:sldId id="262" r:id="rId54"/>
+    <p:sldId id="263" r:id="rId55"/>
+    <p:sldId id="265" r:id="rId56"/>
+    <p:sldId id="363" r:id="rId57"/>
+    <p:sldId id="364" r:id="rId58"/>
+    <p:sldId id="259" r:id="rId59"/>
+    <p:sldId id="264" r:id="rId60"/>
+    <p:sldId id="365" r:id="rId61"/>
+    <p:sldId id="366" r:id="rId62"/>
+    <p:sldId id="266" r:id="rId63"/>
+    <p:sldId id="346" r:id="rId64"/>
+    <p:sldId id="362" r:id="rId65"/>
+    <p:sldId id="286" r:id="rId66"/>
+    <p:sldId id="292" r:id="rId67"/>
+    <p:sldId id="313" r:id="rId68"/>
+    <p:sldId id="293" r:id="rId69"/>
+    <p:sldId id="294" r:id="rId70"/>
+    <p:sldId id="295" r:id="rId71"/>
+    <p:sldId id="296" r:id="rId72"/>
+    <p:sldId id="297" r:id="rId73"/>
+    <p:sldId id="298" r:id="rId74"/>
+    <p:sldId id="314" r:id="rId75"/>
+    <p:sldId id="315" r:id="rId76"/>
+    <p:sldId id="316" r:id="rId77"/>
+    <p:sldId id="317" r:id="rId78"/>
+    <p:sldId id="299" r:id="rId79"/>
+    <p:sldId id="300" r:id="rId80"/>
+    <p:sldId id="301" r:id="rId81"/>
+    <p:sldId id="302" r:id="rId82"/>
+    <p:sldId id="336" r:id="rId83"/>
+    <p:sldId id="337" r:id="rId84"/>
+    <p:sldId id="342" r:id="rId85"/>
+    <p:sldId id="343" r:id="rId86"/>
+    <p:sldId id="339" r:id="rId87"/>
+    <p:sldId id="340" r:id="rId88"/>
+    <p:sldId id="284" r:id="rId89"/>
   </p:sldIdLst>
   <p:sldSz cx="9144000" cy="6858000" type="screen4x3"/>
   <p:notesSz cx="6858000" cy="9144000"/>
@@ -214,7 +216,7 @@
 <file path=ppt/revisionInfo.xml><?xml version="1.0" encoding="utf-8"?>
 <p1510:revInfo xmlns:a="http://schemas.openxmlformats.org/drawingml/2006/main" xmlns:r="http://schemas.openxmlformats.org/officeDocument/2006/relationships" xmlns:p1510="http://schemas.microsoft.com/office/powerpoint/2015/10/main">
   <p1510:revLst>
-    <p1510:client id="{161164B0-73E3-413D-AC9E-BBA2869A21ED}" v="9" dt="2026-04-24T20:16:45.207"/>
+    <p1510:client id="{161164B0-73E3-413D-AC9E-BBA2869A21ED}" v="11" dt="2026-04-27T15:44:36.690"/>
   </p1510:revLst>
 </p1510:revInfo>
 </file>
@@ -223,11 +225,18 @@
 <pc:chgInfo xmlns:a="http://schemas.openxmlformats.org/drawingml/2006/main" xmlns:r="http://schemas.openxmlformats.org/officeDocument/2006/relationships" xmlns:ac="http://schemas.microsoft.com/office/drawing/2013/main/command" xmlns:pc="http://schemas.microsoft.com/office/powerpoint/2013/main/command">
   <pc:docChgLst>
     <pc:chgData name="Lines, Todd" userId="afaf7c3a-e8aa-4568-882a-02ad8f9e19b0" providerId="ADAL" clId="{5FF5AC1B-ABA9-43D7-A1E3-2D92732CD6E2}"/>
-    <pc:docChg chg="undo custSel addSld delSld modSld">
-      <pc:chgData name="Lines, Todd" userId="afaf7c3a-e8aa-4568-882a-02ad8f9e19b0" providerId="ADAL" clId="{5FF5AC1B-ABA9-43D7-A1E3-2D92732CD6E2}" dt="2026-04-24T20:33:12.171" v="62" actId="1076"/>
+    <pc:docChg chg="undo custSel addSld delSld modSld sldOrd">
+      <pc:chgData name="Lines, Todd" userId="afaf7c3a-e8aa-4568-882a-02ad8f9e19b0" providerId="ADAL" clId="{5FF5AC1B-ABA9-43D7-A1E3-2D92732CD6E2}" dt="2026-04-27T15:44:36.687" v="66"/>
       <pc:docMkLst>
         <pc:docMk/>
       </pc:docMkLst>
+      <pc:sldChg chg="ord">
+        <pc:chgData name="Lines, Todd" userId="afaf7c3a-e8aa-4568-882a-02ad8f9e19b0" providerId="ADAL" clId="{5FF5AC1B-ABA9-43D7-A1E3-2D92732CD6E2}" dt="2026-04-27T15:43:26.605" v="64"/>
+        <pc:sldMkLst>
+          <pc:docMk/>
+          <pc:sldMk cId="3767951174" sldId="312"/>
+        </pc:sldMkLst>
+      </pc:sldChg>
       <pc:sldChg chg="delSp modSp mod">
         <pc:chgData name="Lines, Todd" userId="afaf7c3a-e8aa-4568-882a-02ad8f9e19b0" providerId="ADAL" clId="{5FF5AC1B-ABA9-43D7-A1E3-2D92732CD6E2}" dt="2026-04-24T20:16:54.261" v="55" actId="21"/>
         <pc:sldMkLst>
@@ -266,30 +275,6 @@
             <ac:spMk id="11" creationId="{E7585B40-CC23-8828-633D-7F296358D19A}"/>
           </ac:spMkLst>
         </pc:spChg>
-        <pc:picChg chg="del">
-          <ac:chgData name="Lines, Todd" userId="afaf7c3a-e8aa-4568-882a-02ad8f9e19b0" providerId="ADAL" clId="{5FF5AC1B-ABA9-43D7-A1E3-2D92732CD6E2}" dt="2026-04-24T20:16:09.674" v="45" actId="478"/>
-          <ac:picMkLst>
-            <pc:docMk/>
-            <pc:sldMk cId="1643441071" sldId="347"/>
-            <ac:picMk id="2" creationId="{3BDD161A-FF67-C485-9258-A5DFBE8652EF}"/>
-          </ac:picMkLst>
-        </pc:picChg>
-        <pc:picChg chg="del">
-          <ac:chgData name="Lines, Todd" userId="afaf7c3a-e8aa-4568-882a-02ad8f9e19b0" providerId="ADAL" clId="{5FF5AC1B-ABA9-43D7-A1E3-2D92732CD6E2}" dt="2026-04-24T20:16:29.447" v="50" actId="478"/>
-          <ac:picMkLst>
-            <pc:docMk/>
-            <pc:sldMk cId="1643441071" sldId="347"/>
-            <ac:picMk id="3" creationId="{D210F6D0-1984-60DB-37BB-096A9A7F3E3B}"/>
-          </ac:picMkLst>
-        </pc:picChg>
-        <pc:picChg chg="del mod">
-          <ac:chgData name="Lines, Todd" userId="afaf7c3a-e8aa-4568-882a-02ad8f9e19b0" providerId="ADAL" clId="{5FF5AC1B-ABA9-43D7-A1E3-2D92732CD6E2}" dt="2026-04-24T20:16:54.261" v="55" actId="21"/>
-          <ac:picMkLst>
-            <pc:docMk/>
-            <pc:sldMk cId="1643441071" sldId="347"/>
-            <ac:picMk id="8" creationId="{EA45425E-DD19-94FA-FBFC-13DF269603B2}"/>
-          </ac:picMkLst>
-        </pc:picChg>
       </pc:sldChg>
       <pc:sldChg chg="addSp delSp modSp mod">
         <pc:chgData name="Lines, Todd" userId="afaf7c3a-e8aa-4568-882a-02ad8f9e19b0" providerId="ADAL" clId="{5FF5AC1B-ABA9-43D7-A1E3-2D92732CD6E2}" dt="2026-04-24T20:33:12.171" v="62" actId="1076"/>
@@ -297,22 +282,6 @@
           <pc:docMk/>
           <pc:sldMk cId="619843192" sldId="358"/>
         </pc:sldMkLst>
-        <pc:spChg chg="add del">
-          <ac:chgData name="Lines, Todd" userId="afaf7c3a-e8aa-4568-882a-02ad8f9e19b0" providerId="ADAL" clId="{5FF5AC1B-ABA9-43D7-A1E3-2D92732CD6E2}" dt="2026-04-24T20:33:04.519" v="58" actId="22"/>
-          <ac:spMkLst>
-            <pc:docMk/>
-            <pc:sldMk cId="619843192" sldId="358"/>
-            <ac:spMk id="4" creationId="{1DA6E969-146E-E931-71AA-EDFE996DD6BB}"/>
-          </ac:spMkLst>
-        </pc:spChg>
-        <pc:grpChg chg="del">
-          <ac:chgData name="Lines, Todd" userId="afaf7c3a-e8aa-4568-882a-02ad8f9e19b0" providerId="ADAL" clId="{5FF5AC1B-ABA9-43D7-A1E3-2D92732CD6E2}" dt="2026-04-24T20:33:02.362" v="56" actId="478"/>
-          <ac:grpSpMkLst>
-            <pc:docMk/>
-            <pc:sldMk cId="619843192" sldId="358"/>
-            <ac:grpSpMk id="2" creationId="{00000000-0000-0000-0000-000000000000}"/>
-          </ac:grpSpMkLst>
-        </pc:grpChg>
         <pc:picChg chg="add mod">
           <ac:chgData name="Lines, Todd" userId="afaf7c3a-e8aa-4568-882a-02ad8f9e19b0" providerId="ADAL" clId="{5FF5AC1B-ABA9-43D7-A1E3-2D92732CD6E2}" dt="2026-04-24T20:33:12.171" v="62" actId="1076"/>
           <ac:picMkLst>
@@ -321,6 +290,20 @@
             <ac:picMk id="6" creationId="{EAE5FC2A-0A7E-59BF-C54F-818F688A10F7}"/>
           </ac:picMkLst>
         </pc:picChg>
+      </pc:sldChg>
+      <pc:sldChg chg="add">
+        <pc:chgData name="Lines, Todd" userId="afaf7c3a-e8aa-4568-882a-02ad8f9e19b0" providerId="ADAL" clId="{5FF5AC1B-ABA9-43D7-A1E3-2D92732CD6E2}" dt="2026-04-27T15:44:26.554" v="65"/>
+        <pc:sldMkLst>
+          <pc:docMk/>
+          <pc:sldMk cId="2085196998" sldId="369"/>
+        </pc:sldMkLst>
+      </pc:sldChg>
+      <pc:sldChg chg="add">
+        <pc:chgData name="Lines, Todd" userId="afaf7c3a-e8aa-4568-882a-02ad8f9e19b0" providerId="ADAL" clId="{5FF5AC1B-ABA9-43D7-A1E3-2D92732CD6E2}" dt="2026-04-27T15:44:36.687" v="66"/>
+        <pc:sldMkLst>
+          <pc:docMk/>
+          <pc:sldMk cId="3064395866" sldId="370"/>
+        </pc:sldMkLst>
       </pc:sldChg>
     </pc:docChg>
   </pc:docChgLst>
@@ -409,7 +392,7 @@
           <a:p>
             <a:fld id="{DA081139-F0BA-49F9-93A6-6F626C1CF540}" type="datetimeFigureOut">
               <a:rPr lang="en-US" smtClean="0"/>
-              <a:t>4/24/2026</a:t>
+              <a:t>4/27/2026</a:t>
             </a:fld>
             <a:endParaRPr lang="en-US"/>
           </a:p>
@@ -786,7 +769,7 @@
                   <a:spcPct val="0"/>
                 </a:spcAft>
               </a:pPr>
-              <a:t>42</a:t>
+              <a:t>44</a:t>
             </a:fld>
             <a:endParaRPr lang="en-US"/>
           </a:p>
@@ -984,7 +967,7 @@
           <a:p>
             <a:fld id="{EDF140B7-8B0E-44A6-9E20-D5135BF064F6}" type="datetimeFigureOut">
               <a:rPr lang="en-US" smtClean="0"/>
-              <a:t>4/24/2026</a:t>
+              <a:t>4/27/2026</a:t>
             </a:fld>
             <a:endParaRPr lang="en-US"/>
           </a:p>
@@ -1147,7 +1130,7 @@
           <a:p>
             <a:fld id="{EDF140B7-8B0E-44A6-9E20-D5135BF064F6}" type="datetimeFigureOut">
               <a:rPr lang="en-US" smtClean="0"/>
-              <a:t>4/24/2026</a:t>
+              <a:t>4/27/2026</a:t>
             </a:fld>
             <a:endParaRPr lang="en-US"/>
           </a:p>
@@ -1320,7 +1303,7 @@
           <a:p>
             <a:fld id="{EDF140B7-8B0E-44A6-9E20-D5135BF064F6}" type="datetimeFigureOut">
               <a:rPr lang="en-US" smtClean="0"/>
-              <a:t>4/24/2026</a:t>
+              <a:t>4/27/2026</a:t>
             </a:fld>
             <a:endParaRPr lang="en-US"/>
           </a:p>
@@ -1483,7 +1466,7 @@
           <a:p>
             <a:fld id="{EDF140B7-8B0E-44A6-9E20-D5135BF064F6}" type="datetimeFigureOut">
               <a:rPr lang="en-US" smtClean="0"/>
-              <a:t>4/24/2026</a:t>
+              <a:t>4/27/2026</a:t>
             </a:fld>
             <a:endParaRPr lang="en-US"/>
           </a:p>
@@ -1723,7 +1706,7 @@
           <a:p>
             <a:fld id="{EDF140B7-8B0E-44A6-9E20-D5135BF064F6}" type="datetimeFigureOut">
               <a:rPr lang="en-US" smtClean="0"/>
-              <a:t>4/24/2026</a:t>
+              <a:t>4/27/2026</a:t>
             </a:fld>
             <a:endParaRPr lang="en-US"/>
           </a:p>
@@ -2003,7 +1986,7 @@
           <a:p>
             <a:fld id="{EDF140B7-8B0E-44A6-9E20-D5135BF064F6}" type="datetimeFigureOut">
               <a:rPr lang="en-US" smtClean="0"/>
-              <a:t>4/24/2026</a:t>
+              <a:t>4/27/2026</a:t>
             </a:fld>
             <a:endParaRPr lang="en-US"/>
           </a:p>
@@ -2417,7 +2400,7 @@
           <a:p>
             <a:fld id="{EDF140B7-8B0E-44A6-9E20-D5135BF064F6}" type="datetimeFigureOut">
               <a:rPr lang="en-US" smtClean="0"/>
-              <a:t>4/24/2026</a:t>
+              <a:t>4/27/2026</a:t>
             </a:fld>
             <a:endParaRPr lang="en-US"/>
           </a:p>
@@ -2529,7 +2512,7 @@
           <a:p>
             <a:fld id="{EDF140B7-8B0E-44A6-9E20-D5135BF064F6}" type="datetimeFigureOut">
               <a:rPr lang="en-US" smtClean="0"/>
-              <a:t>4/24/2026</a:t>
+              <a:t>4/27/2026</a:t>
             </a:fld>
             <a:endParaRPr lang="en-US"/>
           </a:p>
@@ -2619,7 +2602,7 @@
           <a:p>
             <a:fld id="{EDF140B7-8B0E-44A6-9E20-D5135BF064F6}" type="datetimeFigureOut">
               <a:rPr lang="en-US" smtClean="0"/>
-              <a:t>4/24/2026</a:t>
+              <a:t>4/27/2026</a:t>
             </a:fld>
             <a:endParaRPr lang="en-US"/>
           </a:p>
@@ -2889,7 +2872,7 @@
           <a:p>
             <a:fld id="{EDF140B7-8B0E-44A6-9E20-D5135BF064F6}" type="datetimeFigureOut">
               <a:rPr lang="en-US" smtClean="0"/>
-              <a:t>4/24/2026</a:t>
+              <a:t>4/27/2026</a:t>
             </a:fld>
             <a:endParaRPr lang="en-US"/>
           </a:p>
@@ -3136,7 +3119,7 @@
           <a:p>
             <a:fld id="{EDF140B7-8B0E-44A6-9E20-D5135BF064F6}" type="datetimeFigureOut">
               <a:rPr lang="en-US" smtClean="0"/>
-              <a:t>4/24/2026</a:t>
+              <a:t>4/27/2026</a:t>
             </a:fld>
             <a:endParaRPr lang="en-US"/>
           </a:p>
@@ -3342,7 +3325,7 @@
           <a:p>
             <a:fld id="{EDF140B7-8B0E-44A6-9E20-D5135BF064F6}" type="datetimeFigureOut">
               <a:rPr lang="en-US" smtClean="0"/>
-              <a:t>4/24/2026</a:t>
+              <a:t>4/27/2026</a:t>
             </a:fld>
             <a:endParaRPr lang="en-US"/>
           </a:p>
@@ -4426,131 +4409,6 @@
 </file>
 
 <file path=ppt/slides/slide13.xml><?xml version="1.0" encoding="utf-8"?>
-<p:sld xmlns:a="http://schemas.openxmlformats.org/drawingml/2006/main" xmlns:r="http://schemas.openxmlformats.org/officeDocument/2006/relationships" xmlns:p="http://schemas.openxmlformats.org/presentationml/2006/main">
-  <p:cSld>
-    <p:spTree>
-      <p:nvGrpSpPr>
-        <p:cNvPr id="1" name=""/>
-        <p:cNvGrpSpPr/>
-        <p:nvPr/>
-      </p:nvGrpSpPr>
-      <p:grpSpPr>
-        <a:xfrm>
-          <a:off x="0" y="0"/>
-          <a:ext cx="0" cy="0"/>
-          <a:chOff x="0" y="0"/>
-          <a:chExt cx="0" cy="0"/>
-        </a:xfrm>
-      </p:grpSpPr>
-      <p:sp>
-        <p:nvSpPr>
-          <p:cNvPr id="539649" name="Title 1"/>
-          <p:cNvSpPr>
-            <a:spLocks noGrp="1"/>
-          </p:cNvSpPr>
-          <p:nvPr>
-            <p:ph type="title"/>
-          </p:nvPr>
-        </p:nvSpPr>
-        <p:spPr/>
-        <p:txBody>
-          <a:bodyPr/>
-          <a:lstStyle/>
-          <a:p>
-            <a:r>
-              <a:rPr lang="en-US" dirty="0"/>
-              <a:t>Question 223.4.10  123.22.5</a:t>
-            </a:r>
-          </a:p>
-        </p:txBody>
-      </p:sp>
-      <p:sp>
-        <p:nvSpPr>
-          <p:cNvPr id="539650" name="Content Placeholder 2"/>
-          <p:cNvSpPr>
-            <a:spLocks noGrp="1"/>
-          </p:cNvSpPr>
-          <p:nvPr>
-            <p:ph idx="1"/>
-          </p:nvPr>
-        </p:nvSpPr>
-        <p:spPr/>
-        <p:txBody>
-          <a:bodyPr/>
-          <a:lstStyle/>
-          <a:p>
-            <a:pPr>
-              <a:buFontTx/>
-              <a:buNone/>
-            </a:pPr>
-            <a:r>
-              <a:rPr lang="en-US" dirty="0"/>
-              <a:t>I have 100W of power coming from my speaker. What is the intensity 0.5m from the speaker?</a:t>
-            </a:r>
-          </a:p>
-          <a:p>
-            <a:pPr>
-              <a:buFontTx/>
-              <a:buNone/>
-            </a:pPr>
-            <a:r>
-              <a:rPr lang="en-US" dirty="0"/>
-              <a:t>a) 0.01W</a:t>
-            </a:r>
-          </a:p>
-          <a:p>
-            <a:pPr>
-              <a:buFontTx/>
-              <a:buNone/>
-            </a:pPr>
-            <a:r>
-              <a:rPr lang="en-US" dirty="0"/>
-              <a:t>b) Just under 1W</a:t>
-            </a:r>
-          </a:p>
-          <a:p>
-            <a:pPr>
-              <a:buFontTx/>
-              <a:buNone/>
-            </a:pPr>
-            <a:r>
-              <a:rPr lang="en-US" dirty="0"/>
-              <a:t>c) A little over 10W</a:t>
-            </a:r>
-          </a:p>
-          <a:p>
-            <a:pPr>
-              <a:buFontTx/>
-              <a:buNone/>
-            </a:pPr>
-            <a:r>
-              <a:rPr lang="en-US" dirty="0"/>
-              <a:t>d) A little over 30W</a:t>
-            </a:r>
-          </a:p>
-          <a:p>
-            <a:pPr>
-              <a:buFontTx/>
-              <a:buNone/>
-            </a:pPr>
-            <a:endParaRPr lang="en-US" dirty="0"/>
-          </a:p>
-        </p:txBody>
-      </p:sp>
-    </p:spTree>
-    <p:extLst>
-      <p:ext uri="{BB962C8B-B14F-4D97-AF65-F5344CB8AC3E}">
-        <p14:creationId xmlns:p14="http://schemas.microsoft.com/office/powerpoint/2010/main" val="3337956701"/>
-      </p:ext>
-    </p:extLst>
-  </p:cSld>
-  <p:clrMapOvr>
-    <a:masterClrMapping/>
-  </p:clrMapOvr>
-</p:sld>
-</file>
-
-<file path=ppt/slides/slide14.xml><?xml version="1.0" encoding="utf-8"?>
 <p:sld xmlns:a="http://schemas.openxmlformats.org/drawingml/2006/main" xmlns:r="http://schemas.openxmlformats.org/officeDocument/2006/relationships" xmlns:p="http://schemas.openxmlformats.org/presentationml/2006/main">
   <p:cSld>
     <p:spTree>
@@ -6371,6 +6229,131 @@
     <p:extLst>
       <p:ext uri="{BB962C8B-B14F-4D97-AF65-F5344CB8AC3E}">
         <p14:creationId xmlns:p14="http://schemas.microsoft.com/office/powerpoint/2010/main" val="3767951174"/>
+      </p:ext>
+    </p:extLst>
+  </p:cSld>
+  <p:clrMapOvr>
+    <a:masterClrMapping/>
+  </p:clrMapOvr>
+</p:sld>
+</file>
+
+<file path=ppt/slides/slide14.xml><?xml version="1.0" encoding="utf-8"?>
+<p:sld xmlns:a="http://schemas.openxmlformats.org/drawingml/2006/main" xmlns:r="http://schemas.openxmlformats.org/officeDocument/2006/relationships" xmlns:p="http://schemas.openxmlformats.org/presentationml/2006/main">
+  <p:cSld>
+    <p:spTree>
+      <p:nvGrpSpPr>
+        <p:cNvPr id="1" name=""/>
+        <p:cNvGrpSpPr/>
+        <p:nvPr/>
+      </p:nvGrpSpPr>
+      <p:grpSpPr>
+        <a:xfrm>
+          <a:off x="0" y="0"/>
+          <a:ext cx="0" cy="0"/>
+          <a:chOff x="0" y="0"/>
+          <a:chExt cx="0" cy="0"/>
+        </a:xfrm>
+      </p:grpSpPr>
+      <p:sp>
+        <p:nvSpPr>
+          <p:cNvPr id="539649" name="Title 1"/>
+          <p:cNvSpPr>
+            <a:spLocks noGrp="1"/>
+          </p:cNvSpPr>
+          <p:nvPr>
+            <p:ph type="title"/>
+          </p:nvPr>
+        </p:nvSpPr>
+        <p:spPr/>
+        <p:txBody>
+          <a:bodyPr/>
+          <a:lstStyle/>
+          <a:p>
+            <a:r>
+              <a:rPr lang="en-US" dirty="0"/>
+              <a:t>Question 223.4.10  123.22.5</a:t>
+            </a:r>
+          </a:p>
+        </p:txBody>
+      </p:sp>
+      <p:sp>
+        <p:nvSpPr>
+          <p:cNvPr id="539650" name="Content Placeholder 2"/>
+          <p:cNvSpPr>
+            <a:spLocks noGrp="1"/>
+          </p:cNvSpPr>
+          <p:nvPr>
+            <p:ph idx="1"/>
+          </p:nvPr>
+        </p:nvSpPr>
+        <p:spPr/>
+        <p:txBody>
+          <a:bodyPr/>
+          <a:lstStyle/>
+          <a:p>
+            <a:pPr>
+              <a:buFontTx/>
+              <a:buNone/>
+            </a:pPr>
+            <a:r>
+              <a:rPr lang="en-US" dirty="0"/>
+              <a:t>I have 100W of power coming from my speaker. What is the intensity 0.5m from the speaker?</a:t>
+            </a:r>
+          </a:p>
+          <a:p>
+            <a:pPr>
+              <a:buFontTx/>
+              <a:buNone/>
+            </a:pPr>
+            <a:r>
+              <a:rPr lang="en-US" dirty="0"/>
+              <a:t>a) 0.01W</a:t>
+            </a:r>
+          </a:p>
+          <a:p>
+            <a:pPr>
+              <a:buFontTx/>
+              <a:buNone/>
+            </a:pPr>
+            <a:r>
+              <a:rPr lang="en-US" dirty="0"/>
+              <a:t>b) Just under 1W</a:t>
+            </a:r>
+          </a:p>
+          <a:p>
+            <a:pPr>
+              <a:buFontTx/>
+              <a:buNone/>
+            </a:pPr>
+            <a:r>
+              <a:rPr lang="en-US" dirty="0"/>
+              <a:t>c) A little over 10W</a:t>
+            </a:r>
+          </a:p>
+          <a:p>
+            <a:pPr>
+              <a:buFontTx/>
+              <a:buNone/>
+            </a:pPr>
+            <a:r>
+              <a:rPr lang="en-US" dirty="0"/>
+              <a:t>d) A little over 30W</a:t>
+            </a:r>
+          </a:p>
+          <a:p>
+            <a:pPr>
+              <a:buFontTx/>
+              <a:buNone/>
+            </a:pPr>
+            <a:endParaRPr lang="en-US" dirty="0"/>
+          </a:p>
+        </p:txBody>
+      </p:sp>
+    </p:spTree>
+    <p:extLst>
+      <p:ext uri="{BB962C8B-B14F-4D97-AF65-F5344CB8AC3E}">
+        <p14:creationId xmlns:p14="http://schemas.microsoft.com/office/powerpoint/2010/main" val="3337956701"/>
       </p:ext>
     </p:extLst>
   </p:cSld>
@@ -20985,6 +20968,356 @@
   <p:cSld>
     <p:spTree>
       <p:nvGrpSpPr>
+        <p:cNvPr id="1" name="">
+          <a:extLst>
+            <a:ext uri="{FF2B5EF4-FFF2-40B4-BE49-F238E27FC236}">
+              <a16:creationId xmlns:a16="http://schemas.microsoft.com/office/drawing/2014/main" id="{DD88AECC-1563-18CB-52DF-D67311E7FC92}"/>
+            </a:ext>
+          </a:extLst>
+        </p:cNvPr>
+        <p:cNvGrpSpPr/>
+        <p:nvPr/>
+      </p:nvGrpSpPr>
+      <p:grpSpPr>
+        <a:xfrm>
+          <a:off x="0" y="0"/>
+          <a:ext cx="0" cy="0"/>
+          <a:chOff x="0" y="0"/>
+          <a:chExt cx="0" cy="0"/>
+        </a:xfrm>
+      </p:grpSpPr>
+      <p:sp>
+        <p:nvSpPr>
+          <p:cNvPr id="2" name="Title 1">
+            <a:extLst>
+              <a:ext uri="{FF2B5EF4-FFF2-40B4-BE49-F238E27FC236}">
+                <a16:creationId xmlns:a16="http://schemas.microsoft.com/office/drawing/2014/main" id="{93D92E87-9D64-FEF1-F05F-143B84D814BF}"/>
+              </a:ext>
+            </a:extLst>
+          </p:cNvPr>
+          <p:cNvSpPr>
+            <a:spLocks noGrp="1"/>
+          </p:cNvSpPr>
+          <p:nvPr>
+            <p:ph type="title"/>
+          </p:nvPr>
+        </p:nvSpPr>
+        <p:spPr/>
+        <p:txBody>
+          <a:bodyPr/>
+          <a:lstStyle/>
+          <a:p>
+            <a:endParaRPr lang="en-US"/>
+          </a:p>
+        </p:txBody>
+      </p:sp>
+      <p:pic>
+        <p:nvPicPr>
+          <p:cNvPr id="4" name="oC6ZAOiIfKo">
+            <a:extLst>
+              <a:ext uri="{FF2B5EF4-FFF2-40B4-BE49-F238E27FC236}">
+                <a16:creationId xmlns:a16="http://schemas.microsoft.com/office/drawing/2014/main" id="{B78A4F52-3416-5502-A169-10DBE2D1D304}"/>
+              </a:ext>
+            </a:extLst>
+          </p:cNvPr>
+          <p:cNvPicPr>
+            <a:picLocks noGrp="1" noRot="1" noChangeAspect="1"/>
+          </p:cNvPicPr>
+          <p:nvPr>
+            <p:ph idx="1"/>
+            <a:videoFile r:link="rId1"/>
+          </p:nvPr>
+        </p:nvPicPr>
+        <p:blipFill>
+          <a:blip r:embed="rId3"/>
+          <a:stretch>
+            <a:fillRect/>
+          </a:stretch>
+        </p:blipFill>
+        <p:spPr>
+          <a:xfrm>
+            <a:off x="762000" y="1719263"/>
+            <a:ext cx="8001000" cy="4500563"/>
+          </a:xfrm>
+          <a:prstGeom prst="rect">
+            <a:avLst/>
+          </a:prstGeom>
+        </p:spPr>
+      </p:pic>
+    </p:spTree>
+    <p:extLst>
+      <p:ext uri="{BB962C8B-B14F-4D97-AF65-F5344CB8AC3E}">
+        <p14:creationId xmlns:p14="http://schemas.microsoft.com/office/powerpoint/2010/main" val="2085196998"/>
+      </p:ext>
+    </p:extLst>
+  </p:cSld>
+  <p:clrMapOvr>
+    <a:masterClrMapping/>
+  </p:clrMapOvr>
+</p:sld>
+</file>
+
+<file path=ppt/slides/slide4.xml><?xml version="1.0" encoding="utf-8"?>
+<p:sld xmlns:a="http://schemas.openxmlformats.org/drawingml/2006/main" xmlns:r="http://schemas.openxmlformats.org/officeDocument/2006/relationships" xmlns:p="http://schemas.openxmlformats.org/presentationml/2006/main">
+  <p:cSld>
+    <p:spTree>
+      <p:nvGrpSpPr>
+        <p:cNvPr id="1" name=""/>
+        <p:cNvGrpSpPr/>
+        <p:nvPr/>
+      </p:nvGrpSpPr>
+      <p:grpSpPr>
+        <a:xfrm>
+          <a:off x="0" y="0"/>
+          <a:ext cx="0" cy="0"/>
+          <a:chOff x="0" y="0"/>
+          <a:chExt cx="0" cy="0"/>
+        </a:xfrm>
+      </p:grpSpPr>
+      <p:sp>
+        <p:nvSpPr>
+          <p:cNvPr id="2" name="Title 1"/>
+          <p:cNvSpPr>
+            <a:spLocks noGrp="1"/>
+          </p:cNvSpPr>
+          <p:nvPr>
+            <p:ph type="title"/>
+          </p:nvPr>
+        </p:nvSpPr>
+        <p:spPr/>
+        <p:txBody>
+          <a:bodyPr/>
+          <a:lstStyle/>
+          <a:p>
+            <a:r>
+              <a:rPr lang="en-US" dirty="0"/>
+              <a:t>Question  223.4.5     123.22.1</a:t>
+            </a:r>
+          </a:p>
+        </p:txBody>
+      </p:sp>
+      <p:sp>
+        <p:nvSpPr>
+          <p:cNvPr id="3" name="Content Placeholder 2"/>
+          <p:cNvSpPr>
+            <a:spLocks noGrp="1"/>
+          </p:cNvSpPr>
+          <p:nvPr>
+            <p:ph idx="1"/>
+          </p:nvPr>
+        </p:nvSpPr>
+        <p:spPr/>
+        <p:txBody>
+          <a:bodyPr/>
+          <a:lstStyle/>
+          <a:p>
+            <a:pPr>
+              <a:buNone/>
+            </a:pPr>
+            <a:r>
+              <a:rPr lang="en-US" dirty="0"/>
+              <a:t>A 60W light bulb is allowed to burn for 3600s. How much energy has been used?</a:t>
+            </a:r>
+          </a:p>
+          <a:p>
+            <a:pPr marL="514350" indent="-514350">
+              <a:buFont typeface="+mj-lt"/>
+              <a:buAutoNum type="alphaLcParenR"/>
+            </a:pPr>
+            <a:r>
+              <a:rPr lang="en-US" dirty="0"/>
+              <a:t>36000J</a:t>
+            </a:r>
+          </a:p>
+          <a:p>
+            <a:pPr marL="514350" indent="-514350">
+              <a:buFont typeface="+mj-lt"/>
+              <a:buAutoNum type="alphaLcParenR"/>
+            </a:pPr>
+            <a:r>
+              <a:rPr lang="en-US" dirty="0"/>
+              <a:t>72000J</a:t>
+            </a:r>
+          </a:p>
+          <a:p>
+            <a:pPr marL="514350" indent="-514350">
+              <a:buFont typeface="+mj-lt"/>
+              <a:buAutoNum type="alphaLcParenR"/>
+            </a:pPr>
+            <a:r>
+              <a:rPr lang="en-US" dirty="0"/>
+              <a:t>144000J</a:t>
+            </a:r>
+          </a:p>
+          <a:p>
+            <a:pPr marL="514350" indent="-514350">
+              <a:buFont typeface="+mj-lt"/>
+              <a:buAutoNum type="alphaLcParenR"/>
+            </a:pPr>
+            <a:r>
+              <a:rPr lang="en-US" dirty="0"/>
+              <a:t>216000J</a:t>
+            </a:r>
+          </a:p>
+          <a:p>
+            <a:pPr marL="514350" indent="-514350">
+              <a:buFont typeface="+mj-lt"/>
+              <a:buAutoNum type="alphaLcParenR"/>
+            </a:pPr>
+            <a:r>
+              <a:rPr lang="en-US" dirty="0"/>
+              <a:t>5400000J</a:t>
+            </a:r>
+          </a:p>
+          <a:p>
+            <a:pPr>
+              <a:buNone/>
+            </a:pPr>
+            <a:endParaRPr lang="en-US" dirty="0"/>
+          </a:p>
+        </p:txBody>
+      </p:sp>
+      <p:sp>
+        <p:nvSpPr>
+          <p:cNvPr id="4" name="Slide Number Placeholder 3"/>
+          <p:cNvSpPr>
+            <a:spLocks noGrp="1"/>
+          </p:cNvSpPr>
+          <p:nvPr>
+            <p:ph type="sldNum" sz="quarter" idx="12"/>
+          </p:nvPr>
+        </p:nvSpPr>
+        <p:spPr/>
+        <p:txBody>
+          <a:bodyPr/>
+          <a:lstStyle/>
+          <a:p>
+            <a:pPr>
+              <a:defRPr/>
+            </a:pPr>
+            <a:fld id="{64137B81-8888-4253-92EC-0AED2A590749}" type="slidenum">
+              <a:rPr lang="en-US" smtClean="0"/>
+              <a:pPr>
+                <a:defRPr/>
+              </a:pPr>
+              <a:t>4</a:t>
+            </a:fld>
+            <a:endParaRPr lang="en-US"/>
+          </a:p>
+        </p:txBody>
+      </p:sp>
+    </p:spTree>
+    <p:extLst>
+      <p:ext uri="{BB962C8B-B14F-4D97-AF65-F5344CB8AC3E}">
+        <p14:creationId xmlns:p14="http://schemas.microsoft.com/office/powerpoint/2010/main" val="1716686287"/>
+      </p:ext>
+    </p:extLst>
+  </p:cSld>
+  <p:clrMapOvr>
+    <a:masterClrMapping/>
+  </p:clrMapOvr>
+</p:sld>
+</file>
+
+<file path=ppt/slides/slide40.xml><?xml version="1.0" encoding="utf-8"?>
+<p:sld xmlns:a="http://schemas.openxmlformats.org/drawingml/2006/main" xmlns:r="http://schemas.openxmlformats.org/officeDocument/2006/relationships" xmlns:p="http://schemas.openxmlformats.org/presentationml/2006/main">
+  <p:cSld>
+    <p:spTree>
+      <p:nvGrpSpPr>
+        <p:cNvPr id="1" name="">
+          <a:extLst>
+            <a:ext uri="{FF2B5EF4-FFF2-40B4-BE49-F238E27FC236}">
+              <a16:creationId xmlns:a16="http://schemas.microsoft.com/office/drawing/2014/main" id="{3EEBEF48-DDB6-B109-9250-E6B55295ADFD}"/>
+            </a:ext>
+          </a:extLst>
+        </p:cNvPr>
+        <p:cNvGrpSpPr/>
+        <p:nvPr/>
+      </p:nvGrpSpPr>
+      <p:grpSpPr>
+        <a:xfrm>
+          <a:off x="0" y="0"/>
+          <a:ext cx="0" cy="0"/>
+          <a:chOff x="0" y="0"/>
+          <a:chExt cx="0" cy="0"/>
+        </a:xfrm>
+      </p:grpSpPr>
+      <p:sp>
+        <p:nvSpPr>
+          <p:cNvPr id="2" name="Title 1">
+            <a:extLst>
+              <a:ext uri="{FF2B5EF4-FFF2-40B4-BE49-F238E27FC236}">
+                <a16:creationId xmlns:a16="http://schemas.microsoft.com/office/drawing/2014/main" id="{F85BF613-F866-5543-8B68-2B3E438EFA11}"/>
+              </a:ext>
+            </a:extLst>
+          </p:cNvPr>
+          <p:cNvSpPr>
+            <a:spLocks noGrp="1"/>
+          </p:cNvSpPr>
+          <p:nvPr>
+            <p:ph type="title"/>
+          </p:nvPr>
+        </p:nvSpPr>
+        <p:spPr/>
+        <p:txBody>
+          <a:bodyPr/>
+          <a:lstStyle/>
+          <a:p>
+            <a:endParaRPr lang="en-US"/>
+          </a:p>
+        </p:txBody>
+      </p:sp>
+      <p:pic>
+        <p:nvPicPr>
+          <p:cNvPr id="4" name="xoKNyUpnn20">
+            <a:extLst>
+              <a:ext uri="{FF2B5EF4-FFF2-40B4-BE49-F238E27FC236}">
+                <a16:creationId xmlns:a16="http://schemas.microsoft.com/office/drawing/2014/main" id="{37523D85-4506-B491-2381-51F7EB3E055E}"/>
+              </a:ext>
+            </a:extLst>
+          </p:cNvPr>
+          <p:cNvPicPr>
+            <a:picLocks noGrp="1" noRot="1" noChangeAspect="1"/>
+          </p:cNvPicPr>
+          <p:nvPr>
+            <p:ph idx="1"/>
+            <a:videoFile r:link="rId1"/>
+          </p:nvPr>
+        </p:nvPicPr>
+        <p:blipFill>
+          <a:blip r:embed="rId3"/>
+          <a:stretch>
+            <a:fillRect/>
+          </a:stretch>
+        </p:blipFill>
+        <p:spPr>
+          <a:xfrm>
+            <a:off x="76200" y="1333500"/>
+            <a:ext cx="9067800" cy="5100638"/>
+          </a:xfrm>
+          <a:prstGeom prst="rect">
+            <a:avLst/>
+          </a:prstGeom>
+        </p:spPr>
+      </p:pic>
+    </p:spTree>
+    <p:extLst>
+      <p:ext uri="{BB962C8B-B14F-4D97-AF65-F5344CB8AC3E}">
+        <p14:creationId xmlns:p14="http://schemas.microsoft.com/office/powerpoint/2010/main" val="3064395866"/>
+      </p:ext>
+    </p:extLst>
+  </p:cSld>
+  <p:clrMapOvr>
+    <a:masterClrMapping/>
+  </p:clrMapOvr>
+</p:sld>
+</file>
+
+<file path=ppt/slides/slide41.xml><?xml version="1.0" encoding="utf-8"?>
+<p:sld xmlns:a="http://schemas.openxmlformats.org/drawingml/2006/main" xmlns:r="http://schemas.openxmlformats.org/officeDocument/2006/relationships" xmlns:p="http://schemas.openxmlformats.org/presentationml/2006/main">
+  <p:cSld>
+    <p:spTree>
+      <p:nvGrpSpPr>
         <p:cNvPr id="1" name=""/>
         <p:cNvGrpSpPr/>
         <p:nvPr/>
@@ -21215,169 +21548,7 @@
 </p:sld>
 </file>
 
-<file path=ppt/slides/slide4.xml><?xml version="1.0" encoding="utf-8"?>
-<p:sld xmlns:a="http://schemas.openxmlformats.org/drawingml/2006/main" xmlns:r="http://schemas.openxmlformats.org/officeDocument/2006/relationships" xmlns:p="http://schemas.openxmlformats.org/presentationml/2006/main">
-  <p:cSld>
-    <p:spTree>
-      <p:nvGrpSpPr>
-        <p:cNvPr id="1" name=""/>
-        <p:cNvGrpSpPr/>
-        <p:nvPr/>
-      </p:nvGrpSpPr>
-      <p:grpSpPr>
-        <a:xfrm>
-          <a:off x="0" y="0"/>
-          <a:ext cx="0" cy="0"/>
-          <a:chOff x="0" y="0"/>
-          <a:chExt cx="0" cy="0"/>
-        </a:xfrm>
-      </p:grpSpPr>
-      <p:sp>
-        <p:nvSpPr>
-          <p:cNvPr id="2" name="Title 1"/>
-          <p:cNvSpPr>
-            <a:spLocks noGrp="1"/>
-          </p:cNvSpPr>
-          <p:nvPr>
-            <p:ph type="title"/>
-          </p:nvPr>
-        </p:nvSpPr>
-        <p:spPr/>
-        <p:txBody>
-          <a:bodyPr/>
-          <a:lstStyle/>
-          <a:p>
-            <a:r>
-              <a:rPr lang="en-US" dirty="0"/>
-              <a:t>Question  223.4.5     123.22.1</a:t>
-            </a:r>
-          </a:p>
-        </p:txBody>
-      </p:sp>
-      <p:sp>
-        <p:nvSpPr>
-          <p:cNvPr id="3" name="Content Placeholder 2"/>
-          <p:cNvSpPr>
-            <a:spLocks noGrp="1"/>
-          </p:cNvSpPr>
-          <p:nvPr>
-            <p:ph idx="1"/>
-          </p:nvPr>
-        </p:nvSpPr>
-        <p:spPr/>
-        <p:txBody>
-          <a:bodyPr/>
-          <a:lstStyle/>
-          <a:p>
-            <a:pPr>
-              <a:buNone/>
-            </a:pPr>
-            <a:r>
-              <a:rPr lang="en-US" dirty="0"/>
-              <a:t>A 60W light bulb is allowed to burn for 3600s. How much energy has been used?</a:t>
-            </a:r>
-          </a:p>
-          <a:p>
-            <a:pPr marL="514350" indent="-514350">
-              <a:buFont typeface="+mj-lt"/>
-              <a:buAutoNum type="alphaLcParenR"/>
-            </a:pPr>
-            <a:r>
-              <a:rPr lang="en-US" dirty="0"/>
-              <a:t>36000J</a:t>
-            </a:r>
-          </a:p>
-          <a:p>
-            <a:pPr marL="514350" indent="-514350">
-              <a:buFont typeface="+mj-lt"/>
-              <a:buAutoNum type="alphaLcParenR"/>
-            </a:pPr>
-            <a:r>
-              <a:rPr lang="en-US" dirty="0"/>
-              <a:t>72000J</a:t>
-            </a:r>
-          </a:p>
-          <a:p>
-            <a:pPr marL="514350" indent="-514350">
-              <a:buFont typeface="+mj-lt"/>
-              <a:buAutoNum type="alphaLcParenR"/>
-            </a:pPr>
-            <a:r>
-              <a:rPr lang="en-US" dirty="0"/>
-              <a:t>144000J</a:t>
-            </a:r>
-          </a:p>
-          <a:p>
-            <a:pPr marL="514350" indent="-514350">
-              <a:buFont typeface="+mj-lt"/>
-              <a:buAutoNum type="alphaLcParenR"/>
-            </a:pPr>
-            <a:r>
-              <a:rPr lang="en-US" dirty="0"/>
-              <a:t>216000J</a:t>
-            </a:r>
-          </a:p>
-          <a:p>
-            <a:pPr marL="514350" indent="-514350">
-              <a:buFont typeface="+mj-lt"/>
-              <a:buAutoNum type="alphaLcParenR"/>
-            </a:pPr>
-            <a:r>
-              <a:rPr lang="en-US" dirty="0"/>
-              <a:t>5400000J</a:t>
-            </a:r>
-          </a:p>
-          <a:p>
-            <a:pPr>
-              <a:buNone/>
-            </a:pPr>
-            <a:endParaRPr lang="en-US" dirty="0"/>
-          </a:p>
-        </p:txBody>
-      </p:sp>
-      <p:sp>
-        <p:nvSpPr>
-          <p:cNvPr id="4" name="Slide Number Placeholder 3"/>
-          <p:cNvSpPr>
-            <a:spLocks noGrp="1"/>
-          </p:cNvSpPr>
-          <p:nvPr>
-            <p:ph type="sldNum" sz="quarter" idx="12"/>
-          </p:nvPr>
-        </p:nvSpPr>
-        <p:spPr/>
-        <p:txBody>
-          <a:bodyPr/>
-          <a:lstStyle/>
-          <a:p>
-            <a:pPr>
-              <a:defRPr/>
-            </a:pPr>
-            <a:fld id="{64137B81-8888-4253-92EC-0AED2A590749}" type="slidenum">
-              <a:rPr lang="en-US" smtClean="0"/>
-              <a:pPr>
-                <a:defRPr/>
-              </a:pPr>
-              <a:t>4</a:t>
-            </a:fld>
-            <a:endParaRPr lang="en-US"/>
-          </a:p>
-        </p:txBody>
-      </p:sp>
-    </p:spTree>
-    <p:extLst>
-      <p:ext uri="{BB962C8B-B14F-4D97-AF65-F5344CB8AC3E}">
-        <p14:creationId xmlns:p14="http://schemas.microsoft.com/office/powerpoint/2010/main" val="1716686287"/>
-      </p:ext>
-    </p:extLst>
-  </p:cSld>
-  <p:clrMapOvr>
-    <a:masterClrMapping/>
-  </p:clrMapOvr>
-</p:sld>
-</file>
-
-<file path=ppt/slides/slide40.xml><?xml version="1.0" encoding="utf-8"?>
+<file path=ppt/slides/slide42.xml><?xml version="1.0" encoding="utf-8"?>
 <p:sld xmlns:a="http://schemas.openxmlformats.org/drawingml/2006/main" xmlns:r="http://schemas.openxmlformats.org/officeDocument/2006/relationships" xmlns:p="http://schemas.openxmlformats.org/presentationml/2006/main">
   <p:cSld>
     <p:spTree>
@@ -21439,7 +21610,7 @@
 </p:sld>
 </file>
 
-<file path=ppt/slides/slide41.xml><?xml version="1.0" encoding="utf-8"?>
+<file path=ppt/slides/slide43.xml><?xml version="1.0" encoding="utf-8"?>
 <p:sld xmlns:a="http://schemas.openxmlformats.org/drawingml/2006/main" xmlns:r="http://schemas.openxmlformats.org/officeDocument/2006/relationships" xmlns:p="http://schemas.openxmlformats.org/presentationml/2006/main">
   <p:cSld>
     <p:spTree>
@@ -21495,7 +21666,7 @@
 </p:sld>
 </file>
 
-<file path=ppt/slides/slide42.xml><?xml version="1.0" encoding="utf-8"?>
+<file path=ppt/slides/slide44.xml><?xml version="1.0" encoding="utf-8"?>
 <p:sld xmlns:a="http://schemas.openxmlformats.org/drawingml/2006/main" xmlns:r="http://schemas.openxmlformats.org/officeDocument/2006/relationships" xmlns:p="http://schemas.openxmlformats.org/presentationml/2006/main">
   <p:cSld>
     <p:spTree>
@@ -21551,7 +21722,7 @@
 </p:sld>
 </file>
 
-<file path=ppt/slides/slide43.xml><?xml version="1.0" encoding="utf-8"?>
+<file path=ppt/slides/slide45.xml><?xml version="1.0" encoding="utf-8"?>
 <p:sld xmlns:a="http://schemas.openxmlformats.org/drawingml/2006/main" xmlns:r="http://schemas.openxmlformats.org/officeDocument/2006/relationships" xmlns:p="http://schemas.openxmlformats.org/presentationml/2006/main">
   <p:cSld>
     <p:spTree>
@@ -21696,7 +21867,7 @@
             <a:fld id="{85539879-F00E-4549-815A-3F0634DD4490}" type="slidenum">
               <a:rPr lang="en-US" smtClean="0"/>
               <a:pPr/>
-              <a:t>43</a:t>
+              <a:t>45</a:t>
             </a:fld>
             <a:endParaRPr lang="en-US"/>
           </a:p>
@@ -21715,7 +21886,7 @@
 </p:sld>
 </file>
 
-<file path=ppt/slides/slide44.xml><?xml version="1.0" encoding="utf-8"?>
+<file path=ppt/slides/slide46.xml><?xml version="1.0" encoding="utf-8"?>
 <p:sld xmlns:a="http://schemas.openxmlformats.org/drawingml/2006/main" xmlns:r="http://schemas.openxmlformats.org/officeDocument/2006/relationships" xmlns:p="http://schemas.openxmlformats.org/presentationml/2006/main">
   <p:cSld>
     <p:spTree>
@@ -21876,7 +22047,7 @@
 </p:sld>
 </file>
 
-<file path=ppt/slides/slide45.xml><?xml version="1.0" encoding="utf-8"?>
+<file path=ppt/slides/slide47.xml><?xml version="1.0" encoding="utf-8"?>
 <p:sld xmlns:a="http://schemas.openxmlformats.org/drawingml/2006/main" xmlns:r="http://schemas.openxmlformats.org/officeDocument/2006/relationships" xmlns:p="http://schemas.openxmlformats.org/presentationml/2006/main">
   <p:cSld>
     <p:spTree>
@@ -22065,7 +22236,7 @@
 </p:sld>
 </file>
 
-<file path=ppt/slides/slide46.xml><?xml version="1.0" encoding="utf-8"?>
+<file path=ppt/slides/slide48.xml><?xml version="1.0" encoding="utf-8"?>
 <p:sld xmlns:a="http://schemas.openxmlformats.org/drawingml/2006/main" xmlns:r="http://schemas.openxmlformats.org/officeDocument/2006/relationships" xmlns:p="http://schemas.openxmlformats.org/presentationml/2006/main">
   <p:cSld>
     <p:spTree>
@@ -22254,272 +22425,6 @@
 </p:sld>
 </file>
 
-<file path=ppt/slides/slide47.xml><?xml version="1.0" encoding="utf-8"?>
-<p:sld xmlns:a="http://schemas.openxmlformats.org/drawingml/2006/main" xmlns:r="http://schemas.openxmlformats.org/officeDocument/2006/relationships" xmlns:p="http://schemas.openxmlformats.org/presentationml/2006/main">
-  <p:cSld>
-    <p:spTree>
-      <p:nvGrpSpPr>
-        <p:cNvPr id="1" name=""/>
-        <p:cNvGrpSpPr/>
-        <p:nvPr/>
-      </p:nvGrpSpPr>
-      <p:grpSpPr>
-        <a:xfrm>
-          <a:off x="0" y="0"/>
-          <a:ext cx="0" cy="0"/>
-          <a:chOff x="0" y="0"/>
-          <a:chExt cx="0" cy="0"/>
-        </a:xfrm>
-      </p:grpSpPr>
-      <p:sp>
-        <p:nvSpPr>
-          <p:cNvPr id="2" name="Title 1"/>
-          <p:cNvSpPr>
-            <a:spLocks noGrp="1"/>
-          </p:cNvSpPr>
-          <p:nvPr>
-            <p:ph type="title"/>
-          </p:nvPr>
-        </p:nvSpPr>
-        <p:spPr/>
-        <p:txBody>
-          <a:bodyPr/>
-          <a:lstStyle/>
-          <a:p>
-            <a:r>
-              <a:rPr lang="en-US" dirty="0"/>
-              <a:t>Question 223.6.0.1</a:t>
-            </a:r>
-          </a:p>
-        </p:txBody>
-      </p:sp>
-      <p:sp>
-        <p:nvSpPr>
-          <p:cNvPr id="3" name="Content Placeholder 2"/>
-          <p:cNvSpPr>
-            <a:spLocks noGrp="1"/>
-          </p:cNvSpPr>
-          <p:nvPr>
-            <p:ph idx="1"/>
-          </p:nvPr>
-        </p:nvSpPr>
-        <p:spPr/>
-        <p:txBody>
-          <a:bodyPr/>
-          <a:lstStyle/>
-          <a:p>
-            <a:pPr marL="0" indent="0">
-              <a:buNone/>
-            </a:pPr>
-            <a:r>
-              <a:rPr lang="en-US" dirty="0"/>
-              <a:t>I have two sinusoidal waves in the same medium. The waves travel the same direction (unlike our class demonstration).  If the resultant wave has a larger amplitude than the original waves we call this…</a:t>
-            </a:r>
-          </a:p>
-          <a:p>
-            <a:pPr marL="514350" indent="-514350">
-              <a:buAutoNum type="alphaLcParenR"/>
-            </a:pPr>
-            <a:r>
-              <a:rPr lang="en-US" dirty="0"/>
-              <a:t>Constructive interference</a:t>
-            </a:r>
-          </a:p>
-          <a:p>
-            <a:pPr marL="514350" indent="-514350">
-              <a:buAutoNum type="alphaLcParenR"/>
-            </a:pPr>
-            <a:r>
-              <a:rPr lang="en-US" dirty="0"/>
-              <a:t>Destructive interference</a:t>
-            </a:r>
-          </a:p>
-          <a:p>
-            <a:pPr marL="514350" indent="-514350">
-              <a:buAutoNum type="alphaLcParenR"/>
-            </a:pPr>
-            <a:r>
-              <a:rPr lang="en-US" dirty="0"/>
-              <a:t>A miracle</a:t>
-            </a:r>
-          </a:p>
-        </p:txBody>
-      </p:sp>
-      <p:sp>
-        <p:nvSpPr>
-          <p:cNvPr id="4" name="Slide Number Placeholder 3"/>
-          <p:cNvSpPr>
-            <a:spLocks noGrp="1"/>
-          </p:cNvSpPr>
-          <p:nvPr>
-            <p:ph type="sldNum" sz="quarter" idx="12"/>
-          </p:nvPr>
-        </p:nvSpPr>
-        <p:spPr/>
-        <p:txBody>
-          <a:bodyPr/>
-          <a:lstStyle/>
-          <a:p>
-            <a:pPr>
-              <a:defRPr/>
-            </a:pPr>
-            <a:fld id="{64137B81-8888-4253-92EC-0AED2A590749}" type="slidenum">
-              <a:rPr lang="en-US" smtClean="0"/>
-              <a:pPr>
-                <a:defRPr/>
-              </a:pPr>
-              <a:t>47</a:t>
-            </a:fld>
-            <a:endParaRPr lang="en-US"/>
-          </a:p>
-        </p:txBody>
-      </p:sp>
-    </p:spTree>
-    <p:extLst>
-      <p:ext uri="{BB962C8B-B14F-4D97-AF65-F5344CB8AC3E}">
-        <p14:creationId xmlns:p14="http://schemas.microsoft.com/office/powerpoint/2010/main" val="1497180699"/>
-      </p:ext>
-    </p:extLst>
-  </p:cSld>
-  <p:clrMapOvr>
-    <a:masterClrMapping/>
-  </p:clrMapOvr>
-</p:sld>
-</file>
-
-<file path=ppt/slides/slide48.xml><?xml version="1.0" encoding="utf-8"?>
-<p:sld xmlns:a="http://schemas.openxmlformats.org/drawingml/2006/main" xmlns:r="http://schemas.openxmlformats.org/officeDocument/2006/relationships" xmlns:p="http://schemas.openxmlformats.org/presentationml/2006/main">
-  <p:cSld>
-    <p:spTree>
-      <p:nvGrpSpPr>
-        <p:cNvPr id="1" name=""/>
-        <p:cNvGrpSpPr/>
-        <p:nvPr/>
-      </p:nvGrpSpPr>
-      <p:grpSpPr>
-        <a:xfrm>
-          <a:off x="0" y="0"/>
-          <a:ext cx="0" cy="0"/>
-          <a:chOff x="0" y="0"/>
-          <a:chExt cx="0" cy="0"/>
-        </a:xfrm>
-      </p:grpSpPr>
-      <p:sp>
-        <p:nvSpPr>
-          <p:cNvPr id="2" name="Title 1"/>
-          <p:cNvSpPr>
-            <a:spLocks noGrp="1"/>
-          </p:cNvSpPr>
-          <p:nvPr>
-            <p:ph type="title"/>
-          </p:nvPr>
-        </p:nvSpPr>
-        <p:spPr/>
-        <p:txBody>
-          <a:bodyPr/>
-          <a:lstStyle/>
-          <a:p>
-            <a:r>
-              <a:rPr lang="en-US" dirty="0"/>
-              <a:t>Question 223.6.0.2</a:t>
-            </a:r>
-          </a:p>
-        </p:txBody>
-      </p:sp>
-      <p:sp>
-        <p:nvSpPr>
-          <p:cNvPr id="3" name="Content Placeholder 2"/>
-          <p:cNvSpPr>
-            <a:spLocks noGrp="1"/>
-          </p:cNvSpPr>
-          <p:nvPr>
-            <p:ph idx="1"/>
-          </p:nvPr>
-        </p:nvSpPr>
-        <p:spPr/>
-        <p:txBody>
-          <a:bodyPr/>
-          <a:lstStyle/>
-          <a:p>
-            <a:pPr marL="0" indent="0">
-              <a:buNone/>
-            </a:pPr>
-            <a:r>
-              <a:rPr lang="en-US" dirty="0"/>
-              <a:t>I have two sinusoidal waves in the same medium. The waves travel the same direction (unlike our class demonstration).  If the resultant wave has a smaller amplitude than the original waves we call this…</a:t>
-            </a:r>
-          </a:p>
-          <a:p>
-            <a:pPr marL="514350" indent="-514350">
-              <a:buAutoNum type="alphaLcParenR"/>
-            </a:pPr>
-            <a:r>
-              <a:rPr lang="en-US" dirty="0"/>
-              <a:t>Constructive interference</a:t>
-            </a:r>
-          </a:p>
-          <a:p>
-            <a:pPr marL="514350" indent="-514350">
-              <a:buAutoNum type="alphaLcParenR"/>
-            </a:pPr>
-            <a:r>
-              <a:rPr lang="en-US" dirty="0"/>
-              <a:t>Destructive interference</a:t>
-            </a:r>
-          </a:p>
-          <a:p>
-            <a:pPr marL="514350" indent="-514350">
-              <a:buAutoNum type="alphaLcParenR"/>
-            </a:pPr>
-            <a:r>
-              <a:rPr lang="en-US" dirty="0"/>
-              <a:t>Depressing</a:t>
-            </a:r>
-          </a:p>
-        </p:txBody>
-      </p:sp>
-      <p:sp>
-        <p:nvSpPr>
-          <p:cNvPr id="4" name="Slide Number Placeholder 3"/>
-          <p:cNvSpPr>
-            <a:spLocks noGrp="1"/>
-          </p:cNvSpPr>
-          <p:nvPr>
-            <p:ph type="sldNum" sz="quarter" idx="12"/>
-          </p:nvPr>
-        </p:nvSpPr>
-        <p:spPr/>
-        <p:txBody>
-          <a:bodyPr/>
-          <a:lstStyle/>
-          <a:p>
-            <a:pPr>
-              <a:defRPr/>
-            </a:pPr>
-            <a:fld id="{64137B81-8888-4253-92EC-0AED2A590749}" type="slidenum">
-              <a:rPr lang="en-US" smtClean="0"/>
-              <a:pPr>
-                <a:defRPr/>
-              </a:pPr>
-              <a:t>48</a:t>
-            </a:fld>
-            <a:endParaRPr lang="en-US"/>
-          </a:p>
-        </p:txBody>
-      </p:sp>
-    </p:spTree>
-    <p:extLst>
-      <p:ext uri="{BB962C8B-B14F-4D97-AF65-F5344CB8AC3E}">
-        <p14:creationId xmlns:p14="http://schemas.microsoft.com/office/powerpoint/2010/main" val="4119617871"/>
-      </p:ext>
-    </p:extLst>
-  </p:cSld>
-  <p:clrMapOvr>
-    <a:masterClrMapping/>
-  </p:clrMapOvr>
-</p:sld>
-</file>
-
 <file path=ppt/slides/slide49.xml><?xml version="1.0" encoding="utf-8"?>
 <p:sld xmlns:a="http://schemas.openxmlformats.org/drawingml/2006/main" xmlns:r="http://schemas.openxmlformats.org/officeDocument/2006/relationships" xmlns:p="http://schemas.openxmlformats.org/presentationml/2006/main">
   <p:cSld>
@@ -22554,7 +22459,7 @@
           <a:p>
             <a:r>
               <a:rPr lang="en-US" dirty="0"/>
-              <a:t>Question 223.6.0.3</a:t>
+              <a:t>Question 223.6.0.1</a:t>
             </a:r>
           </a:p>
         </p:txBody>
@@ -22571,9 +22476,7 @@
         </p:nvSpPr>
         <p:spPr/>
         <p:txBody>
-          <a:bodyPr>
-            <a:normAutofit lnSpcReduction="10000"/>
-          </a:bodyPr>
+          <a:bodyPr/>
           <a:lstStyle/>
           <a:p>
             <a:pPr marL="0" indent="0">
@@ -22581,7 +22484,7 @@
             </a:pPr>
             <a:r>
               <a:rPr lang="en-US" dirty="0"/>
-              <a:t>I have two sinusoidal waves in the same medium. The waves travel the same direction (unlike our class demonstration).  Sometimes we get constructive and sometimes destructive interference. What makes the difference?</a:t>
+              <a:t>I have two sinusoidal waves in the same medium. The waves travel the same direction (unlike our class demonstration).  If the resultant wave has a larger amplitude than the original waves we call this…</a:t>
             </a:r>
           </a:p>
           <a:p>
@@ -22590,7 +22493,7 @@
             </a:pPr>
             <a:r>
               <a:rPr lang="en-US" dirty="0"/>
-              <a:t>The relative amplitude of the waves</a:t>
+              <a:t>Constructive interference</a:t>
             </a:r>
           </a:p>
           <a:p>
@@ -22599,7 +22502,7 @@
             </a:pPr>
             <a:r>
               <a:rPr lang="en-US" dirty="0"/>
-              <a:t>The relative phase constant of the waves</a:t>
+              <a:t>Destructive interference</a:t>
             </a:r>
           </a:p>
           <a:p>
@@ -22608,16 +22511,7 @@
             </a:pPr>
             <a:r>
               <a:rPr lang="en-US" dirty="0"/>
-              <a:t>The wavelength of the waves</a:t>
-            </a:r>
-          </a:p>
-          <a:p>
-            <a:pPr marL="514350" indent="-514350">
-              <a:buAutoNum type="alphaLcParenR"/>
-            </a:pPr>
-            <a:r>
-              <a:rPr lang="en-US" dirty="0"/>
-              <a:t>Random processes</a:t>
+              <a:t>A miracle</a:t>
             </a:r>
           </a:p>
         </p:txBody>
@@ -22654,7 +22548,7 @@
     </p:spTree>
     <p:extLst>
       <p:ext uri="{BB962C8B-B14F-4D97-AF65-F5344CB8AC3E}">
-        <p14:creationId xmlns:p14="http://schemas.microsoft.com/office/powerpoint/2010/main" val="778798007"/>
+        <p14:creationId xmlns:p14="http://schemas.microsoft.com/office/powerpoint/2010/main" val="1497180699"/>
       </p:ext>
     </p:extLst>
   </p:cSld>
@@ -22796,6 +22690,283 @@
 </file>
 
 <file path=ppt/slides/slide50.xml><?xml version="1.0" encoding="utf-8"?>
+<p:sld xmlns:a="http://schemas.openxmlformats.org/drawingml/2006/main" xmlns:r="http://schemas.openxmlformats.org/officeDocument/2006/relationships" xmlns:p="http://schemas.openxmlformats.org/presentationml/2006/main">
+  <p:cSld>
+    <p:spTree>
+      <p:nvGrpSpPr>
+        <p:cNvPr id="1" name=""/>
+        <p:cNvGrpSpPr/>
+        <p:nvPr/>
+      </p:nvGrpSpPr>
+      <p:grpSpPr>
+        <a:xfrm>
+          <a:off x="0" y="0"/>
+          <a:ext cx="0" cy="0"/>
+          <a:chOff x="0" y="0"/>
+          <a:chExt cx="0" cy="0"/>
+        </a:xfrm>
+      </p:grpSpPr>
+      <p:sp>
+        <p:nvSpPr>
+          <p:cNvPr id="2" name="Title 1"/>
+          <p:cNvSpPr>
+            <a:spLocks noGrp="1"/>
+          </p:cNvSpPr>
+          <p:nvPr>
+            <p:ph type="title"/>
+          </p:nvPr>
+        </p:nvSpPr>
+        <p:spPr/>
+        <p:txBody>
+          <a:bodyPr/>
+          <a:lstStyle/>
+          <a:p>
+            <a:r>
+              <a:rPr lang="en-US" dirty="0"/>
+              <a:t>Question 223.6.0.2</a:t>
+            </a:r>
+          </a:p>
+        </p:txBody>
+      </p:sp>
+      <p:sp>
+        <p:nvSpPr>
+          <p:cNvPr id="3" name="Content Placeholder 2"/>
+          <p:cNvSpPr>
+            <a:spLocks noGrp="1"/>
+          </p:cNvSpPr>
+          <p:nvPr>
+            <p:ph idx="1"/>
+          </p:nvPr>
+        </p:nvSpPr>
+        <p:spPr/>
+        <p:txBody>
+          <a:bodyPr/>
+          <a:lstStyle/>
+          <a:p>
+            <a:pPr marL="0" indent="0">
+              <a:buNone/>
+            </a:pPr>
+            <a:r>
+              <a:rPr lang="en-US" dirty="0"/>
+              <a:t>I have two sinusoidal waves in the same medium. The waves travel the same direction (unlike our class demonstration).  If the resultant wave has a smaller amplitude than the original waves we call this…</a:t>
+            </a:r>
+          </a:p>
+          <a:p>
+            <a:pPr marL="514350" indent="-514350">
+              <a:buAutoNum type="alphaLcParenR"/>
+            </a:pPr>
+            <a:r>
+              <a:rPr lang="en-US" dirty="0"/>
+              <a:t>Constructive interference</a:t>
+            </a:r>
+          </a:p>
+          <a:p>
+            <a:pPr marL="514350" indent="-514350">
+              <a:buAutoNum type="alphaLcParenR"/>
+            </a:pPr>
+            <a:r>
+              <a:rPr lang="en-US" dirty="0"/>
+              <a:t>Destructive interference</a:t>
+            </a:r>
+          </a:p>
+          <a:p>
+            <a:pPr marL="514350" indent="-514350">
+              <a:buAutoNum type="alphaLcParenR"/>
+            </a:pPr>
+            <a:r>
+              <a:rPr lang="en-US" dirty="0"/>
+              <a:t>Depressing</a:t>
+            </a:r>
+          </a:p>
+        </p:txBody>
+      </p:sp>
+      <p:sp>
+        <p:nvSpPr>
+          <p:cNvPr id="4" name="Slide Number Placeholder 3"/>
+          <p:cNvSpPr>
+            <a:spLocks noGrp="1"/>
+          </p:cNvSpPr>
+          <p:nvPr>
+            <p:ph type="sldNum" sz="quarter" idx="12"/>
+          </p:nvPr>
+        </p:nvSpPr>
+        <p:spPr/>
+        <p:txBody>
+          <a:bodyPr/>
+          <a:lstStyle/>
+          <a:p>
+            <a:pPr>
+              <a:defRPr/>
+            </a:pPr>
+            <a:fld id="{64137B81-8888-4253-92EC-0AED2A590749}" type="slidenum">
+              <a:rPr lang="en-US" smtClean="0"/>
+              <a:pPr>
+                <a:defRPr/>
+              </a:pPr>
+              <a:t>50</a:t>
+            </a:fld>
+            <a:endParaRPr lang="en-US"/>
+          </a:p>
+        </p:txBody>
+      </p:sp>
+    </p:spTree>
+    <p:extLst>
+      <p:ext uri="{BB962C8B-B14F-4D97-AF65-F5344CB8AC3E}">
+        <p14:creationId xmlns:p14="http://schemas.microsoft.com/office/powerpoint/2010/main" val="4119617871"/>
+      </p:ext>
+    </p:extLst>
+  </p:cSld>
+  <p:clrMapOvr>
+    <a:masterClrMapping/>
+  </p:clrMapOvr>
+</p:sld>
+</file>
+
+<file path=ppt/slides/slide51.xml><?xml version="1.0" encoding="utf-8"?>
+<p:sld xmlns:a="http://schemas.openxmlformats.org/drawingml/2006/main" xmlns:r="http://schemas.openxmlformats.org/officeDocument/2006/relationships" xmlns:p="http://schemas.openxmlformats.org/presentationml/2006/main">
+  <p:cSld>
+    <p:spTree>
+      <p:nvGrpSpPr>
+        <p:cNvPr id="1" name=""/>
+        <p:cNvGrpSpPr/>
+        <p:nvPr/>
+      </p:nvGrpSpPr>
+      <p:grpSpPr>
+        <a:xfrm>
+          <a:off x="0" y="0"/>
+          <a:ext cx="0" cy="0"/>
+          <a:chOff x="0" y="0"/>
+          <a:chExt cx="0" cy="0"/>
+        </a:xfrm>
+      </p:grpSpPr>
+      <p:sp>
+        <p:nvSpPr>
+          <p:cNvPr id="2" name="Title 1"/>
+          <p:cNvSpPr>
+            <a:spLocks noGrp="1"/>
+          </p:cNvSpPr>
+          <p:nvPr>
+            <p:ph type="title"/>
+          </p:nvPr>
+        </p:nvSpPr>
+        <p:spPr/>
+        <p:txBody>
+          <a:bodyPr/>
+          <a:lstStyle/>
+          <a:p>
+            <a:r>
+              <a:rPr lang="en-US" dirty="0"/>
+              <a:t>Question 223.6.0.3</a:t>
+            </a:r>
+          </a:p>
+        </p:txBody>
+      </p:sp>
+      <p:sp>
+        <p:nvSpPr>
+          <p:cNvPr id="3" name="Content Placeholder 2"/>
+          <p:cNvSpPr>
+            <a:spLocks noGrp="1"/>
+          </p:cNvSpPr>
+          <p:nvPr>
+            <p:ph idx="1"/>
+          </p:nvPr>
+        </p:nvSpPr>
+        <p:spPr/>
+        <p:txBody>
+          <a:bodyPr>
+            <a:normAutofit lnSpcReduction="10000"/>
+          </a:bodyPr>
+          <a:lstStyle/>
+          <a:p>
+            <a:pPr marL="0" indent="0">
+              <a:buNone/>
+            </a:pPr>
+            <a:r>
+              <a:rPr lang="en-US" dirty="0"/>
+              <a:t>I have two sinusoidal waves in the same medium. The waves travel the same direction (unlike our class demonstration).  Sometimes we get constructive and sometimes destructive interference. What makes the difference?</a:t>
+            </a:r>
+          </a:p>
+          <a:p>
+            <a:pPr marL="514350" indent="-514350">
+              <a:buAutoNum type="alphaLcParenR"/>
+            </a:pPr>
+            <a:r>
+              <a:rPr lang="en-US" dirty="0"/>
+              <a:t>The relative amplitude of the waves</a:t>
+            </a:r>
+          </a:p>
+          <a:p>
+            <a:pPr marL="514350" indent="-514350">
+              <a:buAutoNum type="alphaLcParenR"/>
+            </a:pPr>
+            <a:r>
+              <a:rPr lang="en-US" dirty="0"/>
+              <a:t>The relative phase constant of the waves</a:t>
+            </a:r>
+          </a:p>
+          <a:p>
+            <a:pPr marL="514350" indent="-514350">
+              <a:buAutoNum type="alphaLcParenR"/>
+            </a:pPr>
+            <a:r>
+              <a:rPr lang="en-US" dirty="0"/>
+              <a:t>The wavelength of the waves</a:t>
+            </a:r>
+          </a:p>
+          <a:p>
+            <a:pPr marL="514350" indent="-514350">
+              <a:buAutoNum type="alphaLcParenR"/>
+            </a:pPr>
+            <a:r>
+              <a:rPr lang="en-US" dirty="0"/>
+              <a:t>Random processes</a:t>
+            </a:r>
+          </a:p>
+        </p:txBody>
+      </p:sp>
+      <p:sp>
+        <p:nvSpPr>
+          <p:cNvPr id="4" name="Slide Number Placeholder 3"/>
+          <p:cNvSpPr>
+            <a:spLocks noGrp="1"/>
+          </p:cNvSpPr>
+          <p:nvPr>
+            <p:ph type="sldNum" sz="quarter" idx="12"/>
+          </p:nvPr>
+        </p:nvSpPr>
+        <p:spPr/>
+        <p:txBody>
+          <a:bodyPr/>
+          <a:lstStyle/>
+          <a:p>
+            <a:pPr>
+              <a:defRPr/>
+            </a:pPr>
+            <a:fld id="{64137B81-8888-4253-92EC-0AED2A590749}" type="slidenum">
+              <a:rPr lang="en-US" smtClean="0"/>
+              <a:pPr>
+                <a:defRPr/>
+              </a:pPr>
+              <a:t>51</a:t>
+            </a:fld>
+            <a:endParaRPr lang="en-US"/>
+          </a:p>
+        </p:txBody>
+      </p:sp>
+    </p:spTree>
+    <p:extLst>
+      <p:ext uri="{BB962C8B-B14F-4D97-AF65-F5344CB8AC3E}">
+        <p14:creationId xmlns:p14="http://schemas.microsoft.com/office/powerpoint/2010/main" val="778798007"/>
+      </p:ext>
+    </p:extLst>
+  </p:cSld>
+  <p:clrMapOvr>
+    <a:masterClrMapping/>
+  </p:clrMapOvr>
+</p:sld>
+</file>
+
+<file path=ppt/slides/slide52.xml><?xml version="1.0" encoding="utf-8"?>
 <p:sld xmlns:a="http://schemas.openxmlformats.org/drawingml/2006/main" xmlns:r="http://schemas.openxmlformats.org/officeDocument/2006/relationships" xmlns:p="http://schemas.openxmlformats.org/presentationml/2006/main">
   <p:cSld>
     <p:spTree>
@@ -23380,7 +23551,7 @@
 </p:sld>
 </file>
 
-<file path=ppt/slides/slide51.xml><?xml version="1.0" encoding="utf-8"?>
+<file path=ppt/slides/slide53.xml><?xml version="1.0" encoding="utf-8"?>
 <p:sld xmlns:a="http://schemas.openxmlformats.org/drawingml/2006/main" xmlns:r="http://schemas.openxmlformats.org/officeDocument/2006/relationships" xmlns:p="http://schemas.openxmlformats.org/presentationml/2006/main">
   <p:cSld>
     <p:spTree>
@@ -23589,7 +23760,7 @@
 </p:sld>
 </file>
 
-<file path=ppt/slides/slide52.xml><?xml version="1.0" encoding="utf-8"?>
+<file path=ppt/slides/slide54.xml><?xml version="1.0" encoding="utf-8"?>
 <p:sld xmlns:a="http://schemas.openxmlformats.org/drawingml/2006/main" xmlns:r="http://schemas.openxmlformats.org/officeDocument/2006/relationships" xmlns:p="http://schemas.openxmlformats.org/presentationml/2006/main">
   <p:cSld>
     <p:spTree>
@@ -23858,7 +24029,7 @@
 </p:sld>
 </file>
 
-<file path=ppt/slides/slide53.xml><?xml version="1.0" encoding="utf-8"?>
+<file path=ppt/slides/slide55.xml><?xml version="1.0" encoding="utf-8"?>
 <p:sld xmlns:a="http://schemas.openxmlformats.org/drawingml/2006/main" xmlns:r="http://schemas.openxmlformats.org/officeDocument/2006/relationships" xmlns:p="http://schemas.openxmlformats.org/presentationml/2006/main">
   <p:cSld>
     <p:spTree>
@@ -24781,7 +24952,7 @@
 </p:sld>
 </file>
 
-<file path=ppt/slides/slide54.xml><?xml version="1.0" encoding="utf-8"?>
+<file path=ppt/slides/slide56.xml><?xml version="1.0" encoding="utf-8"?>
 <p:sld xmlns:a="http://schemas.openxmlformats.org/drawingml/2006/main" xmlns:r="http://schemas.openxmlformats.org/officeDocument/2006/relationships" xmlns:p="http://schemas.openxmlformats.org/presentationml/2006/main">
   <p:cSld>
     <p:spTree>
@@ -25778,7 +25949,7 @@
 </p:sld>
 </file>
 
-<file path=ppt/slides/slide55.xml><?xml version="1.0" encoding="utf-8"?>
+<file path=ppt/slides/slide57.xml><?xml version="1.0" encoding="utf-8"?>
 <p:sld xmlns:a="http://schemas.openxmlformats.org/drawingml/2006/main" xmlns:r="http://schemas.openxmlformats.org/officeDocument/2006/relationships" xmlns:p="http://schemas.openxmlformats.org/presentationml/2006/main">
   <p:cSld>
     <p:spTree>
@@ -27373,7 +27544,7 @@
 </p:sld>
 </file>
 
-<file path=ppt/slides/slide56.xml><?xml version="1.0" encoding="utf-8"?>
+<file path=ppt/slides/slide58.xml><?xml version="1.0" encoding="utf-8"?>
 <p:sld xmlns:a="http://schemas.openxmlformats.org/drawingml/2006/main" xmlns:r="http://schemas.openxmlformats.org/officeDocument/2006/relationships" xmlns:p="http://schemas.openxmlformats.org/presentationml/2006/main">
   <p:cSld>
     <p:spTree>
@@ -28370,7 +28541,7 @@
 </p:sld>
 </file>
 
-<file path=ppt/slides/slide57.xml><?xml version="1.0" encoding="utf-8"?>
+<file path=ppt/slides/slide59.xml><?xml version="1.0" encoding="utf-8"?>
 <p:sld xmlns:a="http://schemas.openxmlformats.org/drawingml/2006/main" xmlns:r="http://schemas.openxmlformats.org/officeDocument/2006/relationships" xmlns:p="http://schemas.openxmlformats.org/presentationml/2006/main">
   <p:cSld>
     <p:spTree>
@@ -29619,252 +29790,6 @@
 </p:sld>
 </file>
 
-<file path=ppt/slides/slide58.xml><?xml version="1.0" encoding="utf-8"?>
-<p:sld xmlns:a="http://schemas.openxmlformats.org/drawingml/2006/main" xmlns:r="http://schemas.openxmlformats.org/officeDocument/2006/relationships" xmlns:p="http://schemas.openxmlformats.org/presentationml/2006/main">
-  <p:cSld>
-    <p:spTree>
-      <p:nvGrpSpPr>
-        <p:cNvPr id="1" name=""/>
-        <p:cNvGrpSpPr/>
-        <p:nvPr/>
-      </p:nvGrpSpPr>
-      <p:grpSpPr>
-        <a:xfrm>
-          <a:off x="0" y="0"/>
-          <a:ext cx="0" cy="0"/>
-          <a:chOff x="0" y="0"/>
-          <a:chExt cx="0" cy="0"/>
-        </a:xfrm>
-      </p:grpSpPr>
-      <p:sp>
-        <p:nvSpPr>
-          <p:cNvPr id="586753" name="Title 1"/>
-          <p:cNvSpPr>
-            <a:spLocks noGrp="1"/>
-          </p:cNvSpPr>
-          <p:nvPr>
-            <p:ph type="title"/>
-          </p:nvPr>
-        </p:nvSpPr>
-        <p:spPr/>
-        <p:txBody>
-          <a:bodyPr/>
-          <a:lstStyle/>
-          <a:p>
-            <a:r>
-              <a:rPr lang="en-US" dirty="0"/>
-              <a:t>Question 223.8.3</a:t>
-            </a:r>
-          </a:p>
-        </p:txBody>
-      </p:sp>
-      <p:sp>
-        <p:nvSpPr>
-          <p:cNvPr id="3" name="Content Placeholder 2"/>
-          <p:cNvSpPr>
-            <a:spLocks noGrp="1"/>
-          </p:cNvSpPr>
-          <p:nvPr>
-            <p:ph idx="1"/>
-          </p:nvPr>
-        </p:nvSpPr>
-        <p:spPr/>
-        <p:txBody>
-          <a:bodyPr/>
-          <a:lstStyle/>
-          <a:p>
-            <a:pPr>
-              <a:buFontTx/>
-              <a:buNone/>
-              <a:defRPr/>
-            </a:pPr>
-            <a:r>
-              <a:rPr lang="en-US" dirty="0"/>
-              <a:t>I have two waves coming from speakers in my room. I am sitting 3 wavelengths away from one speaker and 4.5 wavelengths away from the other speaker. I hear..</a:t>
-            </a:r>
-          </a:p>
-          <a:p>
-            <a:pPr marL="514350" indent="-514350">
-              <a:buFontTx/>
-              <a:buAutoNum type="alphaLcParenR"/>
-              <a:defRPr/>
-            </a:pPr>
-            <a:r>
-              <a:rPr lang="en-US" dirty="0"/>
-              <a:t>Twice the normal loudness</a:t>
-            </a:r>
-          </a:p>
-          <a:p>
-            <a:pPr marL="514350" indent="-514350">
-              <a:buFontTx/>
-              <a:buAutoNum type="alphaLcParenR"/>
-              <a:defRPr/>
-            </a:pPr>
-            <a:r>
-              <a:rPr lang="en-US" dirty="0"/>
-              <a:t>4 times the normal loudness</a:t>
-            </a:r>
-          </a:p>
-          <a:p>
-            <a:pPr marL="514350" indent="-514350">
-              <a:buFontTx/>
-              <a:buAutoNum type="alphaLcParenR"/>
-              <a:defRPr/>
-            </a:pPr>
-            <a:r>
-              <a:rPr lang="en-US" dirty="0"/>
-              <a:t>8 times the normal loudness</a:t>
-            </a:r>
-          </a:p>
-          <a:p>
-            <a:pPr marL="514350" indent="-514350">
-              <a:buFontTx/>
-              <a:buAutoNum type="alphaLcParenR"/>
-              <a:defRPr/>
-            </a:pPr>
-            <a:r>
-              <a:rPr lang="en-US" dirty="0"/>
-              <a:t>Practically nothing</a:t>
-            </a:r>
-          </a:p>
-        </p:txBody>
-      </p:sp>
-    </p:spTree>
-    <p:extLst>
-      <p:ext uri="{BB962C8B-B14F-4D97-AF65-F5344CB8AC3E}">
-        <p14:creationId xmlns:p14="http://schemas.microsoft.com/office/powerpoint/2010/main" val="342519277"/>
-      </p:ext>
-    </p:extLst>
-  </p:cSld>
-  <p:clrMapOvr>
-    <a:masterClrMapping/>
-  </p:clrMapOvr>
-</p:sld>
-</file>
-
-<file path=ppt/slides/slide59.xml><?xml version="1.0" encoding="utf-8"?>
-<p:sld xmlns:a="http://schemas.openxmlformats.org/drawingml/2006/main" xmlns:r="http://schemas.openxmlformats.org/officeDocument/2006/relationships" xmlns:p="http://schemas.openxmlformats.org/presentationml/2006/main">
-  <p:cSld>
-    <p:spTree>
-      <p:nvGrpSpPr>
-        <p:cNvPr id="1" name=""/>
-        <p:cNvGrpSpPr/>
-        <p:nvPr/>
-      </p:nvGrpSpPr>
-      <p:grpSpPr>
-        <a:xfrm>
-          <a:off x="0" y="0"/>
-          <a:ext cx="0" cy="0"/>
-          <a:chOff x="0" y="0"/>
-          <a:chExt cx="0" cy="0"/>
-        </a:xfrm>
-      </p:grpSpPr>
-      <p:sp>
-        <p:nvSpPr>
-          <p:cNvPr id="587777" name="Title 1"/>
-          <p:cNvSpPr>
-            <a:spLocks noGrp="1"/>
-          </p:cNvSpPr>
-          <p:nvPr>
-            <p:ph type="title"/>
-          </p:nvPr>
-        </p:nvSpPr>
-        <p:spPr/>
-        <p:txBody>
-          <a:bodyPr/>
-          <a:lstStyle/>
-          <a:p>
-            <a:r>
-              <a:rPr lang="en-US" dirty="0"/>
-              <a:t>Question 223.8.4</a:t>
-            </a:r>
-          </a:p>
-        </p:txBody>
-      </p:sp>
-      <p:sp>
-        <p:nvSpPr>
-          <p:cNvPr id="3" name="Content Placeholder 2"/>
-          <p:cNvSpPr>
-            <a:spLocks noGrp="1"/>
-          </p:cNvSpPr>
-          <p:nvPr>
-            <p:ph idx="1"/>
-          </p:nvPr>
-        </p:nvSpPr>
-        <p:spPr/>
-        <p:txBody>
-          <a:bodyPr/>
-          <a:lstStyle/>
-          <a:p>
-            <a:pPr>
-              <a:buFontTx/>
-              <a:buNone/>
-              <a:defRPr/>
-            </a:pPr>
-            <a:r>
-              <a:rPr lang="en-US" dirty="0"/>
-              <a:t>I have two waves coming from speakers in my room. I am sitting 3 wavelengths away from one speaker and 6 wavelengths away from the other speaker. I hear..</a:t>
-            </a:r>
-          </a:p>
-          <a:p>
-            <a:pPr marL="514350" indent="-514350">
-              <a:buFontTx/>
-              <a:buAutoNum type="alphaLcParenR"/>
-              <a:defRPr/>
-            </a:pPr>
-            <a:r>
-              <a:rPr lang="en-US" dirty="0"/>
-              <a:t>Twice the normal loudness</a:t>
-            </a:r>
-          </a:p>
-          <a:p>
-            <a:pPr marL="514350" indent="-514350">
-              <a:buFontTx/>
-              <a:buAutoNum type="alphaLcParenR"/>
-              <a:defRPr/>
-            </a:pPr>
-            <a:r>
-              <a:rPr lang="en-US" dirty="0"/>
-              <a:t>4 times the normal loudness</a:t>
-            </a:r>
-          </a:p>
-          <a:p>
-            <a:pPr marL="514350" indent="-514350">
-              <a:buFontTx/>
-              <a:buAutoNum type="alphaLcParenR"/>
-              <a:defRPr/>
-            </a:pPr>
-            <a:r>
-              <a:rPr lang="en-US" dirty="0"/>
-              <a:t>8 times the normal loudness</a:t>
-            </a:r>
-          </a:p>
-          <a:p>
-            <a:pPr marL="514350" indent="-514350">
-              <a:buFontTx/>
-              <a:buAutoNum type="alphaLcParenR"/>
-              <a:defRPr/>
-            </a:pPr>
-            <a:r>
-              <a:rPr lang="en-US" dirty="0"/>
-              <a:t>Practically nothing</a:t>
-            </a:r>
-          </a:p>
-        </p:txBody>
-      </p:sp>
-    </p:spTree>
-    <p:extLst>
-      <p:ext uri="{BB962C8B-B14F-4D97-AF65-F5344CB8AC3E}">
-        <p14:creationId xmlns:p14="http://schemas.microsoft.com/office/powerpoint/2010/main" val="1990105726"/>
-      </p:ext>
-    </p:extLst>
-  </p:cSld>
-  <p:clrMapOvr>
-    <a:masterClrMapping/>
-  </p:clrMapOvr>
-</p:sld>
-</file>
-
 <file path=ppt/slides/slide6.xml><?xml version="1.0" encoding="utf-8"?>
 <p:sld xmlns:a="http://schemas.openxmlformats.org/drawingml/2006/main" xmlns:r="http://schemas.openxmlformats.org/officeDocument/2006/relationships" xmlns:p="http://schemas.openxmlformats.org/presentationml/2006/main">
   <p:cSld>
@@ -30014,6 +29939,252 @@
 </file>
 
 <file path=ppt/slides/slide60.xml><?xml version="1.0" encoding="utf-8"?>
+<p:sld xmlns:a="http://schemas.openxmlformats.org/drawingml/2006/main" xmlns:r="http://schemas.openxmlformats.org/officeDocument/2006/relationships" xmlns:p="http://schemas.openxmlformats.org/presentationml/2006/main">
+  <p:cSld>
+    <p:spTree>
+      <p:nvGrpSpPr>
+        <p:cNvPr id="1" name=""/>
+        <p:cNvGrpSpPr/>
+        <p:nvPr/>
+      </p:nvGrpSpPr>
+      <p:grpSpPr>
+        <a:xfrm>
+          <a:off x="0" y="0"/>
+          <a:ext cx="0" cy="0"/>
+          <a:chOff x="0" y="0"/>
+          <a:chExt cx="0" cy="0"/>
+        </a:xfrm>
+      </p:grpSpPr>
+      <p:sp>
+        <p:nvSpPr>
+          <p:cNvPr id="586753" name="Title 1"/>
+          <p:cNvSpPr>
+            <a:spLocks noGrp="1"/>
+          </p:cNvSpPr>
+          <p:nvPr>
+            <p:ph type="title"/>
+          </p:nvPr>
+        </p:nvSpPr>
+        <p:spPr/>
+        <p:txBody>
+          <a:bodyPr/>
+          <a:lstStyle/>
+          <a:p>
+            <a:r>
+              <a:rPr lang="en-US" dirty="0"/>
+              <a:t>Question 223.8.3</a:t>
+            </a:r>
+          </a:p>
+        </p:txBody>
+      </p:sp>
+      <p:sp>
+        <p:nvSpPr>
+          <p:cNvPr id="3" name="Content Placeholder 2"/>
+          <p:cNvSpPr>
+            <a:spLocks noGrp="1"/>
+          </p:cNvSpPr>
+          <p:nvPr>
+            <p:ph idx="1"/>
+          </p:nvPr>
+        </p:nvSpPr>
+        <p:spPr/>
+        <p:txBody>
+          <a:bodyPr/>
+          <a:lstStyle/>
+          <a:p>
+            <a:pPr>
+              <a:buFontTx/>
+              <a:buNone/>
+              <a:defRPr/>
+            </a:pPr>
+            <a:r>
+              <a:rPr lang="en-US" dirty="0"/>
+              <a:t>I have two waves coming from speakers in my room. I am sitting 3 wavelengths away from one speaker and 4.5 wavelengths away from the other speaker. I hear..</a:t>
+            </a:r>
+          </a:p>
+          <a:p>
+            <a:pPr marL="514350" indent="-514350">
+              <a:buFontTx/>
+              <a:buAutoNum type="alphaLcParenR"/>
+              <a:defRPr/>
+            </a:pPr>
+            <a:r>
+              <a:rPr lang="en-US" dirty="0"/>
+              <a:t>Twice the normal loudness</a:t>
+            </a:r>
+          </a:p>
+          <a:p>
+            <a:pPr marL="514350" indent="-514350">
+              <a:buFontTx/>
+              <a:buAutoNum type="alphaLcParenR"/>
+              <a:defRPr/>
+            </a:pPr>
+            <a:r>
+              <a:rPr lang="en-US" dirty="0"/>
+              <a:t>4 times the normal loudness</a:t>
+            </a:r>
+          </a:p>
+          <a:p>
+            <a:pPr marL="514350" indent="-514350">
+              <a:buFontTx/>
+              <a:buAutoNum type="alphaLcParenR"/>
+              <a:defRPr/>
+            </a:pPr>
+            <a:r>
+              <a:rPr lang="en-US" dirty="0"/>
+              <a:t>8 times the normal loudness</a:t>
+            </a:r>
+          </a:p>
+          <a:p>
+            <a:pPr marL="514350" indent="-514350">
+              <a:buFontTx/>
+              <a:buAutoNum type="alphaLcParenR"/>
+              <a:defRPr/>
+            </a:pPr>
+            <a:r>
+              <a:rPr lang="en-US" dirty="0"/>
+              <a:t>Practically nothing</a:t>
+            </a:r>
+          </a:p>
+        </p:txBody>
+      </p:sp>
+    </p:spTree>
+    <p:extLst>
+      <p:ext uri="{BB962C8B-B14F-4D97-AF65-F5344CB8AC3E}">
+        <p14:creationId xmlns:p14="http://schemas.microsoft.com/office/powerpoint/2010/main" val="342519277"/>
+      </p:ext>
+    </p:extLst>
+  </p:cSld>
+  <p:clrMapOvr>
+    <a:masterClrMapping/>
+  </p:clrMapOvr>
+</p:sld>
+</file>
+
+<file path=ppt/slides/slide61.xml><?xml version="1.0" encoding="utf-8"?>
+<p:sld xmlns:a="http://schemas.openxmlformats.org/drawingml/2006/main" xmlns:r="http://schemas.openxmlformats.org/officeDocument/2006/relationships" xmlns:p="http://schemas.openxmlformats.org/presentationml/2006/main">
+  <p:cSld>
+    <p:spTree>
+      <p:nvGrpSpPr>
+        <p:cNvPr id="1" name=""/>
+        <p:cNvGrpSpPr/>
+        <p:nvPr/>
+      </p:nvGrpSpPr>
+      <p:grpSpPr>
+        <a:xfrm>
+          <a:off x="0" y="0"/>
+          <a:ext cx="0" cy="0"/>
+          <a:chOff x="0" y="0"/>
+          <a:chExt cx="0" cy="0"/>
+        </a:xfrm>
+      </p:grpSpPr>
+      <p:sp>
+        <p:nvSpPr>
+          <p:cNvPr id="587777" name="Title 1"/>
+          <p:cNvSpPr>
+            <a:spLocks noGrp="1"/>
+          </p:cNvSpPr>
+          <p:nvPr>
+            <p:ph type="title"/>
+          </p:nvPr>
+        </p:nvSpPr>
+        <p:spPr/>
+        <p:txBody>
+          <a:bodyPr/>
+          <a:lstStyle/>
+          <a:p>
+            <a:r>
+              <a:rPr lang="en-US" dirty="0"/>
+              <a:t>Question 223.8.4</a:t>
+            </a:r>
+          </a:p>
+        </p:txBody>
+      </p:sp>
+      <p:sp>
+        <p:nvSpPr>
+          <p:cNvPr id="3" name="Content Placeholder 2"/>
+          <p:cNvSpPr>
+            <a:spLocks noGrp="1"/>
+          </p:cNvSpPr>
+          <p:nvPr>
+            <p:ph idx="1"/>
+          </p:nvPr>
+        </p:nvSpPr>
+        <p:spPr/>
+        <p:txBody>
+          <a:bodyPr/>
+          <a:lstStyle/>
+          <a:p>
+            <a:pPr>
+              <a:buFontTx/>
+              <a:buNone/>
+              <a:defRPr/>
+            </a:pPr>
+            <a:r>
+              <a:rPr lang="en-US" dirty="0"/>
+              <a:t>I have two waves coming from speakers in my room. I am sitting 3 wavelengths away from one speaker and 6 wavelengths away from the other speaker. I hear..</a:t>
+            </a:r>
+          </a:p>
+          <a:p>
+            <a:pPr marL="514350" indent="-514350">
+              <a:buFontTx/>
+              <a:buAutoNum type="alphaLcParenR"/>
+              <a:defRPr/>
+            </a:pPr>
+            <a:r>
+              <a:rPr lang="en-US" dirty="0"/>
+              <a:t>Twice the normal loudness</a:t>
+            </a:r>
+          </a:p>
+          <a:p>
+            <a:pPr marL="514350" indent="-514350">
+              <a:buFontTx/>
+              <a:buAutoNum type="alphaLcParenR"/>
+              <a:defRPr/>
+            </a:pPr>
+            <a:r>
+              <a:rPr lang="en-US" dirty="0"/>
+              <a:t>4 times the normal loudness</a:t>
+            </a:r>
+          </a:p>
+          <a:p>
+            <a:pPr marL="514350" indent="-514350">
+              <a:buFontTx/>
+              <a:buAutoNum type="alphaLcParenR"/>
+              <a:defRPr/>
+            </a:pPr>
+            <a:r>
+              <a:rPr lang="en-US" dirty="0"/>
+              <a:t>8 times the normal loudness</a:t>
+            </a:r>
+          </a:p>
+          <a:p>
+            <a:pPr marL="514350" indent="-514350">
+              <a:buFontTx/>
+              <a:buAutoNum type="alphaLcParenR"/>
+              <a:defRPr/>
+            </a:pPr>
+            <a:r>
+              <a:rPr lang="en-US" dirty="0"/>
+              <a:t>Practically nothing</a:t>
+            </a:r>
+          </a:p>
+        </p:txBody>
+      </p:sp>
+    </p:spTree>
+    <p:extLst>
+      <p:ext uri="{BB962C8B-B14F-4D97-AF65-F5344CB8AC3E}">
+        <p14:creationId xmlns:p14="http://schemas.microsoft.com/office/powerpoint/2010/main" val="1990105726"/>
+      </p:ext>
+    </p:extLst>
+  </p:cSld>
+  <p:clrMapOvr>
+    <a:masterClrMapping/>
+  </p:clrMapOvr>
+</p:sld>
+</file>
+
+<file path=ppt/slides/slide62.xml><?xml version="1.0" encoding="utf-8"?>
 <p:sld xmlns:a="http://schemas.openxmlformats.org/drawingml/2006/main" xmlns:r="http://schemas.openxmlformats.org/officeDocument/2006/relationships" xmlns:p="http://schemas.openxmlformats.org/presentationml/2006/main">
   <p:cSld>
     <p:spTree>
@@ -30772,7 +30943,7 @@
 </p:sld>
 </file>
 
-<file path=ppt/slides/slide61.xml><?xml version="1.0" encoding="utf-8"?>
+<file path=ppt/slides/slide63.xml><?xml version="1.0" encoding="utf-8"?>
 <p:sld xmlns:a="http://schemas.openxmlformats.org/drawingml/2006/main" xmlns:r="http://schemas.openxmlformats.org/officeDocument/2006/relationships" xmlns:p="http://schemas.openxmlformats.org/presentationml/2006/main">
   <p:cSld>
     <p:spTree>
@@ -30855,7 +31026,7 @@
 </p:sld>
 </file>
 
-<file path=ppt/slides/slide62.xml><?xml version="1.0" encoding="utf-8"?>
+<file path=ppt/slides/slide64.xml><?xml version="1.0" encoding="utf-8"?>
 <p:sld xmlns:a="http://schemas.openxmlformats.org/drawingml/2006/main" xmlns:r="http://schemas.openxmlformats.org/officeDocument/2006/relationships" xmlns:p="http://schemas.openxmlformats.org/presentationml/2006/main">
   <p:cSld>
     <p:spTree>
@@ -31227,7 +31398,7 @@
 </p:sld>
 </file>
 
-<file path=ppt/slides/slide63.xml><?xml version="1.0" encoding="utf-8"?>
+<file path=ppt/slides/slide65.xml><?xml version="1.0" encoding="utf-8"?>
 <p:sld xmlns:a="http://schemas.openxmlformats.org/drawingml/2006/main" xmlns:r="http://schemas.openxmlformats.org/officeDocument/2006/relationships" xmlns:p="http://schemas.openxmlformats.org/presentationml/2006/main">
   <p:cSld>
     <p:spTree>
@@ -31350,7 +31521,7 @@
               <a:pPr>
                 <a:defRPr/>
               </a:pPr>
-              <a:t>63</a:t>
+              <a:t>65</a:t>
             </a:fld>
             <a:endParaRPr lang="en-US"/>
           </a:p>
@@ -31369,7 +31540,7 @@
 </p:sld>
 </file>
 
-<file path=ppt/slides/slide64.xml><?xml version="1.0" encoding="utf-8"?>
+<file path=ppt/slides/slide66.xml><?xml version="1.0" encoding="utf-8"?>
 <p:sld xmlns:a="http://schemas.openxmlformats.org/drawingml/2006/main" xmlns:r="http://schemas.openxmlformats.org/officeDocument/2006/relationships" xmlns:p="http://schemas.openxmlformats.org/presentationml/2006/main">
   <p:cSld>
     <p:spTree>
@@ -31487,7 +31658,7 @@
 </p:sld>
 </file>
 
-<file path=ppt/slides/slide65.xml><?xml version="1.0" encoding="utf-8"?>
+<file path=ppt/slides/slide67.xml><?xml version="1.0" encoding="utf-8"?>
 <p:sld xmlns:a="http://schemas.openxmlformats.org/drawingml/2006/main" xmlns:r="http://schemas.openxmlformats.org/officeDocument/2006/relationships" xmlns:p="http://schemas.openxmlformats.org/presentationml/2006/main">
   <p:cSld>
     <p:spTree>
@@ -31625,7 +31796,7 @@
 </p:sld>
 </file>
 
-<file path=ppt/slides/slide66.xml><?xml version="1.0" encoding="utf-8"?>
+<file path=ppt/slides/slide68.xml><?xml version="1.0" encoding="utf-8"?>
 <p:sld xmlns:a="http://schemas.openxmlformats.org/drawingml/2006/main" xmlns:r="http://schemas.openxmlformats.org/officeDocument/2006/relationships" xmlns:p="http://schemas.openxmlformats.org/presentationml/2006/main">
   <p:cSld>
     <p:spTree>
@@ -31743,7 +31914,7 @@
 </p:sld>
 </file>
 
-<file path=ppt/slides/slide67.xml><?xml version="1.0" encoding="utf-8"?>
+<file path=ppt/slides/slide69.xml><?xml version="1.0" encoding="utf-8"?>
 <p:sld xmlns:a="http://schemas.openxmlformats.org/drawingml/2006/main" xmlns:r="http://schemas.openxmlformats.org/officeDocument/2006/relationships" xmlns:p="http://schemas.openxmlformats.org/presentationml/2006/main">
   <p:cSld>
     <p:spTree>
@@ -31862,250 +32033,6 @@
     <p:extLst>
       <p:ext uri="{BB962C8B-B14F-4D97-AF65-F5344CB8AC3E}">
         <p14:creationId xmlns:p14="http://schemas.microsoft.com/office/powerpoint/2010/main" val="3235514585"/>
-      </p:ext>
-    </p:extLst>
-  </p:cSld>
-  <p:clrMapOvr>
-    <a:masterClrMapping/>
-  </p:clrMapOvr>
-</p:sld>
-</file>
-
-<file path=ppt/slides/slide68.xml><?xml version="1.0" encoding="utf-8"?>
-<p:sld xmlns:a="http://schemas.openxmlformats.org/drawingml/2006/main" xmlns:r="http://schemas.openxmlformats.org/officeDocument/2006/relationships" xmlns:p="http://schemas.openxmlformats.org/presentationml/2006/main">
-  <p:cSld>
-    <p:spTree>
-      <p:nvGrpSpPr>
-        <p:cNvPr id="1" name=""/>
-        <p:cNvGrpSpPr/>
-        <p:nvPr/>
-      </p:nvGrpSpPr>
-      <p:grpSpPr>
-        <a:xfrm>
-          <a:off x="0" y="0"/>
-          <a:ext cx="0" cy="0"/>
-          <a:chOff x="0" y="0"/>
-          <a:chExt cx="0" cy="0"/>
-        </a:xfrm>
-      </p:grpSpPr>
-      <p:sp>
-        <p:nvSpPr>
-          <p:cNvPr id="548865" name="Title 1"/>
-          <p:cNvSpPr>
-            <a:spLocks noGrp="1"/>
-          </p:cNvSpPr>
-          <p:nvPr>
-            <p:ph type="title"/>
-          </p:nvPr>
-        </p:nvSpPr>
-        <p:spPr/>
-        <p:txBody>
-          <a:bodyPr>
-            <a:normAutofit/>
-          </a:bodyPr>
-          <a:lstStyle/>
-          <a:p>
-            <a:r>
-              <a:rPr lang="en-US" dirty="0"/>
-              <a:t>Question 223.4.14  123.22.10</a:t>
-            </a:r>
-          </a:p>
-        </p:txBody>
-      </p:sp>
-      <p:sp>
-        <p:nvSpPr>
-          <p:cNvPr id="548866" name="Content Placeholder 2"/>
-          <p:cNvSpPr>
-            <a:spLocks noGrp="1"/>
-          </p:cNvSpPr>
-          <p:nvPr>
-            <p:ph idx="1"/>
-          </p:nvPr>
-        </p:nvSpPr>
-        <p:spPr/>
-        <p:txBody>
-          <a:bodyPr>
-            <a:normAutofit lnSpcReduction="10000"/>
-          </a:bodyPr>
-          <a:lstStyle/>
-          <a:p>
-            <a:pPr>
-              <a:buFontTx/>
-              <a:buNone/>
-            </a:pPr>
-            <a:r>
-              <a:rPr lang="en-US" dirty="0"/>
-              <a:t>You are sitting in church. The speaker is talking into a microphone. The sound system radiates sound with a power of 50W . You are 20m  from the sound system output. What is the sound level? </a:t>
-            </a:r>
-          </a:p>
-          <a:p>
-            <a:pPr>
-              <a:buFontTx/>
-              <a:buNone/>
-            </a:pPr>
-            <a:r>
-              <a:rPr lang="en-US" b="1" dirty="0"/>
-              <a:t>a) 78dB</a:t>
-            </a:r>
-          </a:p>
-          <a:p>
-            <a:pPr>
-              <a:buFontTx/>
-              <a:buNone/>
-            </a:pPr>
-            <a:r>
-              <a:rPr lang="en-US" b="1" dirty="0"/>
-              <a:t>b) 80dB</a:t>
-            </a:r>
-          </a:p>
-          <a:p>
-            <a:pPr>
-              <a:buFontTx/>
-              <a:buNone/>
-            </a:pPr>
-            <a:r>
-              <a:rPr lang="en-US" b="1" dirty="0"/>
-              <a:t>c) 100dB</a:t>
-            </a:r>
-          </a:p>
-          <a:p>
-            <a:pPr>
-              <a:buFontTx/>
-              <a:buNone/>
-            </a:pPr>
-            <a:r>
-              <a:rPr lang="en-US" b="1" dirty="0"/>
-              <a:t>d) 120dB</a:t>
-            </a:r>
-          </a:p>
-        </p:txBody>
-      </p:sp>
-    </p:spTree>
-    <p:extLst>
-      <p:ext uri="{BB962C8B-B14F-4D97-AF65-F5344CB8AC3E}">
-        <p14:creationId xmlns:p14="http://schemas.microsoft.com/office/powerpoint/2010/main" val="1123963185"/>
-      </p:ext>
-    </p:extLst>
-  </p:cSld>
-  <p:clrMapOvr>
-    <a:masterClrMapping/>
-  </p:clrMapOvr>
-</p:sld>
-</file>
-
-<file path=ppt/slides/slide69.xml><?xml version="1.0" encoding="utf-8"?>
-<p:sld xmlns:a="http://schemas.openxmlformats.org/drawingml/2006/main" xmlns:r="http://schemas.openxmlformats.org/officeDocument/2006/relationships" xmlns:p="http://schemas.openxmlformats.org/presentationml/2006/main">
-  <p:cSld>
-    <p:spTree>
-      <p:nvGrpSpPr>
-        <p:cNvPr id="1" name=""/>
-        <p:cNvGrpSpPr/>
-        <p:nvPr/>
-      </p:nvGrpSpPr>
-      <p:grpSpPr>
-        <a:xfrm>
-          <a:off x="0" y="0"/>
-          <a:ext cx="0" cy="0"/>
-          <a:chOff x="0" y="0"/>
-          <a:chExt cx="0" cy="0"/>
-        </a:xfrm>
-      </p:grpSpPr>
-      <p:sp>
-        <p:nvSpPr>
-          <p:cNvPr id="549889" name="Title 1"/>
-          <p:cNvSpPr>
-            <a:spLocks noGrp="1"/>
-          </p:cNvSpPr>
-          <p:nvPr>
-            <p:ph type="title"/>
-          </p:nvPr>
-        </p:nvSpPr>
-        <p:spPr/>
-        <p:txBody>
-          <a:bodyPr>
-            <a:normAutofit fontScale="90000"/>
-          </a:bodyPr>
-          <a:lstStyle/>
-          <a:p>
-            <a:r>
-              <a:rPr lang="en-US" dirty="0"/>
-              <a:t>Question 223.4.15 GR 123.22.11 GR</a:t>
-            </a:r>
-          </a:p>
-        </p:txBody>
-      </p:sp>
-      <p:sp>
-        <p:nvSpPr>
-          <p:cNvPr id="549890" name="Content Placeholder 2"/>
-          <p:cNvSpPr>
-            <a:spLocks noGrp="1"/>
-          </p:cNvSpPr>
-          <p:nvPr>
-            <p:ph idx="1"/>
-          </p:nvPr>
-        </p:nvSpPr>
-        <p:spPr/>
-        <p:txBody>
-          <a:bodyPr>
-            <a:normAutofit fontScale="92500" lnSpcReduction="20000"/>
-          </a:bodyPr>
-          <a:lstStyle/>
-          <a:p>
-            <a:pPr>
-              <a:buFontTx/>
-              <a:buNone/>
-            </a:pPr>
-            <a:r>
-              <a:rPr lang="en-US" dirty="0"/>
-              <a:t>You are standing outside a Guns &amp; Roses Concert. The concert is in a stadium. You are 40 m from the stadium. You have a sound level meter with you and find that where you stand the sound level is 120dB. How much acoustic power are the “musicians” creating at their output location?</a:t>
-            </a:r>
-          </a:p>
-          <a:p>
-            <a:pPr>
-              <a:buFontTx/>
-              <a:buNone/>
-            </a:pPr>
-            <a:r>
-              <a:rPr lang="en-US" b="1" dirty="0"/>
-              <a:t>a) 78W</a:t>
-            </a:r>
-          </a:p>
-          <a:p>
-            <a:pPr>
-              <a:buFontTx/>
-              <a:buNone/>
-            </a:pPr>
-            <a:r>
-              <a:rPr lang="en-US" b="1" dirty="0"/>
-              <a:t>b) 134W</a:t>
-            </a:r>
-          </a:p>
-          <a:p>
-            <a:pPr>
-              <a:buFontTx/>
-              <a:buNone/>
-            </a:pPr>
-            <a:r>
-              <a:rPr lang="en-US" b="1" dirty="0"/>
-              <a:t>c) 545W</a:t>
-            </a:r>
-          </a:p>
-          <a:p>
-            <a:pPr>
-              <a:buFontTx/>
-              <a:buNone/>
-            </a:pPr>
-            <a:r>
-              <a:rPr lang="en-US" b="1" dirty="0"/>
-              <a:t>d) 20106W</a:t>
-            </a:r>
-          </a:p>
-        </p:txBody>
-      </p:sp>
-    </p:spTree>
-    <p:extLst>
-      <p:ext uri="{BB962C8B-B14F-4D97-AF65-F5344CB8AC3E}">
-        <p14:creationId xmlns:p14="http://schemas.microsoft.com/office/powerpoint/2010/main" val="3912737715"/>
       </p:ext>
     </p:extLst>
   </p:cSld>
@@ -33927,6 +33854,250 @@
       </p:grpSpPr>
       <p:sp>
         <p:nvSpPr>
+          <p:cNvPr id="548865" name="Title 1"/>
+          <p:cNvSpPr>
+            <a:spLocks noGrp="1"/>
+          </p:cNvSpPr>
+          <p:nvPr>
+            <p:ph type="title"/>
+          </p:nvPr>
+        </p:nvSpPr>
+        <p:spPr/>
+        <p:txBody>
+          <a:bodyPr>
+            <a:normAutofit/>
+          </a:bodyPr>
+          <a:lstStyle/>
+          <a:p>
+            <a:r>
+              <a:rPr lang="en-US" dirty="0"/>
+              <a:t>Question 223.4.14  123.22.10</a:t>
+            </a:r>
+          </a:p>
+        </p:txBody>
+      </p:sp>
+      <p:sp>
+        <p:nvSpPr>
+          <p:cNvPr id="548866" name="Content Placeholder 2"/>
+          <p:cNvSpPr>
+            <a:spLocks noGrp="1"/>
+          </p:cNvSpPr>
+          <p:nvPr>
+            <p:ph idx="1"/>
+          </p:nvPr>
+        </p:nvSpPr>
+        <p:spPr/>
+        <p:txBody>
+          <a:bodyPr>
+            <a:normAutofit lnSpcReduction="10000"/>
+          </a:bodyPr>
+          <a:lstStyle/>
+          <a:p>
+            <a:pPr>
+              <a:buFontTx/>
+              <a:buNone/>
+            </a:pPr>
+            <a:r>
+              <a:rPr lang="en-US" dirty="0"/>
+              <a:t>You are sitting in church. The speaker is talking into a microphone. The sound system radiates sound with a power of 50W . You are 20m  from the sound system output. What is the sound level? </a:t>
+            </a:r>
+          </a:p>
+          <a:p>
+            <a:pPr>
+              <a:buFontTx/>
+              <a:buNone/>
+            </a:pPr>
+            <a:r>
+              <a:rPr lang="en-US" b="1" dirty="0"/>
+              <a:t>a) 78dB</a:t>
+            </a:r>
+          </a:p>
+          <a:p>
+            <a:pPr>
+              <a:buFontTx/>
+              <a:buNone/>
+            </a:pPr>
+            <a:r>
+              <a:rPr lang="en-US" b="1" dirty="0"/>
+              <a:t>b) 80dB</a:t>
+            </a:r>
+          </a:p>
+          <a:p>
+            <a:pPr>
+              <a:buFontTx/>
+              <a:buNone/>
+            </a:pPr>
+            <a:r>
+              <a:rPr lang="en-US" b="1" dirty="0"/>
+              <a:t>c) 100dB</a:t>
+            </a:r>
+          </a:p>
+          <a:p>
+            <a:pPr>
+              <a:buFontTx/>
+              <a:buNone/>
+            </a:pPr>
+            <a:r>
+              <a:rPr lang="en-US" b="1" dirty="0"/>
+              <a:t>d) 120dB</a:t>
+            </a:r>
+          </a:p>
+        </p:txBody>
+      </p:sp>
+    </p:spTree>
+    <p:extLst>
+      <p:ext uri="{BB962C8B-B14F-4D97-AF65-F5344CB8AC3E}">
+        <p14:creationId xmlns:p14="http://schemas.microsoft.com/office/powerpoint/2010/main" val="1123963185"/>
+      </p:ext>
+    </p:extLst>
+  </p:cSld>
+  <p:clrMapOvr>
+    <a:masterClrMapping/>
+  </p:clrMapOvr>
+</p:sld>
+</file>
+
+<file path=ppt/slides/slide71.xml><?xml version="1.0" encoding="utf-8"?>
+<p:sld xmlns:a="http://schemas.openxmlformats.org/drawingml/2006/main" xmlns:r="http://schemas.openxmlformats.org/officeDocument/2006/relationships" xmlns:p="http://schemas.openxmlformats.org/presentationml/2006/main">
+  <p:cSld>
+    <p:spTree>
+      <p:nvGrpSpPr>
+        <p:cNvPr id="1" name=""/>
+        <p:cNvGrpSpPr/>
+        <p:nvPr/>
+      </p:nvGrpSpPr>
+      <p:grpSpPr>
+        <a:xfrm>
+          <a:off x="0" y="0"/>
+          <a:ext cx="0" cy="0"/>
+          <a:chOff x="0" y="0"/>
+          <a:chExt cx="0" cy="0"/>
+        </a:xfrm>
+      </p:grpSpPr>
+      <p:sp>
+        <p:nvSpPr>
+          <p:cNvPr id="549889" name="Title 1"/>
+          <p:cNvSpPr>
+            <a:spLocks noGrp="1"/>
+          </p:cNvSpPr>
+          <p:nvPr>
+            <p:ph type="title"/>
+          </p:nvPr>
+        </p:nvSpPr>
+        <p:spPr/>
+        <p:txBody>
+          <a:bodyPr>
+            <a:normAutofit fontScale="90000"/>
+          </a:bodyPr>
+          <a:lstStyle/>
+          <a:p>
+            <a:r>
+              <a:rPr lang="en-US" dirty="0"/>
+              <a:t>Question 223.4.15 GR 123.22.11 GR</a:t>
+            </a:r>
+          </a:p>
+        </p:txBody>
+      </p:sp>
+      <p:sp>
+        <p:nvSpPr>
+          <p:cNvPr id="549890" name="Content Placeholder 2"/>
+          <p:cNvSpPr>
+            <a:spLocks noGrp="1"/>
+          </p:cNvSpPr>
+          <p:nvPr>
+            <p:ph idx="1"/>
+          </p:nvPr>
+        </p:nvSpPr>
+        <p:spPr/>
+        <p:txBody>
+          <a:bodyPr>
+            <a:normAutofit fontScale="92500" lnSpcReduction="20000"/>
+          </a:bodyPr>
+          <a:lstStyle/>
+          <a:p>
+            <a:pPr>
+              <a:buFontTx/>
+              <a:buNone/>
+            </a:pPr>
+            <a:r>
+              <a:rPr lang="en-US" dirty="0"/>
+              <a:t>You are standing outside a Guns &amp; Roses Concert. The concert is in a stadium. You are 40 m from the stadium. You have a sound level meter with you and find that where you stand the sound level is 120dB. How much acoustic power are the “musicians” creating at their output location?</a:t>
+            </a:r>
+          </a:p>
+          <a:p>
+            <a:pPr>
+              <a:buFontTx/>
+              <a:buNone/>
+            </a:pPr>
+            <a:r>
+              <a:rPr lang="en-US" b="1" dirty="0"/>
+              <a:t>a) 78W</a:t>
+            </a:r>
+          </a:p>
+          <a:p>
+            <a:pPr>
+              <a:buFontTx/>
+              <a:buNone/>
+            </a:pPr>
+            <a:r>
+              <a:rPr lang="en-US" b="1" dirty="0"/>
+              <a:t>b) 134W</a:t>
+            </a:r>
+          </a:p>
+          <a:p>
+            <a:pPr>
+              <a:buFontTx/>
+              <a:buNone/>
+            </a:pPr>
+            <a:r>
+              <a:rPr lang="en-US" b="1" dirty="0"/>
+              <a:t>c) 545W</a:t>
+            </a:r>
+          </a:p>
+          <a:p>
+            <a:pPr>
+              <a:buFontTx/>
+              <a:buNone/>
+            </a:pPr>
+            <a:r>
+              <a:rPr lang="en-US" b="1" dirty="0"/>
+              <a:t>d) 20106W</a:t>
+            </a:r>
+          </a:p>
+        </p:txBody>
+      </p:sp>
+    </p:spTree>
+    <p:extLst>
+      <p:ext uri="{BB962C8B-B14F-4D97-AF65-F5344CB8AC3E}">
+        <p14:creationId xmlns:p14="http://schemas.microsoft.com/office/powerpoint/2010/main" val="3912737715"/>
+      </p:ext>
+    </p:extLst>
+  </p:cSld>
+  <p:clrMapOvr>
+    <a:masterClrMapping/>
+  </p:clrMapOvr>
+</p:sld>
+</file>
+
+<file path=ppt/slides/slide72.xml><?xml version="1.0" encoding="utf-8"?>
+<p:sld xmlns:a="http://schemas.openxmlformats.org/drawingml/2006/main" xmlns:r="http://schemas.openxmlformats.org/officeDocument/2006/relationships" xmlns:p="http://schemas.openxmlformats.org/presentationml/2006/main">
+  <p:cSld>
+    <p:spTree>
+      <p:nvGrpSpPr>
+        <p:cNvPr id="1" name=""/>
+        <p:cNvGrpSpPr/>
+        <p:nvPr/>
+      </p:nvGrpSpPr>
+      <p:grpSpPr>
+        <a:xfrm>
+          <a:off x="0" y="0"/>
+          <a:ext cx="0" cy="0"/>
+          <a:chOff x="0" y="0"/>
+          <a:chExt cx="0" cy="0"/>
+        </a:xfrm>
+      </p:grpSpPr>
+      <p:sp>
+        <p:nvSpPr>
           <p:cNvPr id="550913" name="Title 1"/>
           <p:cNvSpPr>
             <a:spLocks noGrp="1"/>
@@ -34028,7 +34199,7 @@
 </p:sld>
 </file>
 
-<file path=ppt/slides/slide71.xml><?xml version="1.0" encoding="utf-8"?>
+<file path=ppt/slides/slide73.xml><?xml version="1.0" encoding="utf-8"?>
 <p:sld xmlns:a="http://schemas.openxmlformats.org/drawingml/2006/main" xmlns:r="http://schemas.openxmlformats.org/officeDocument/2006/relationships" xmlns:p="http://schemas.openxmlformats.org/presentationml/2006/main">
   <p:cSld>
     <p:spTree>
@@ -34153,7 +34324,7 @@
 </p:sld>
 </file>
 
-<file path=ppt/slides/slide72.xml><?xml version="1.0" encoding="utf-8"?>
+<file path=ppt/slides/slide74.xml><?xml version="1.0" encoding="utf-8"?>
 <p:sld xmlns:a="http://schemas.openxmlformats.org/drawingml/2006/main" xmlns:r="http://schemas.openxmlformats.org/officeDocument/2006/relationships" xmlns:p="http://schemas.openxmlformats.org/presentationml/2006/main">
   <p:cSld>
     <p:spTree>
@@ -35212,7 +35383,7 @@
 </p:sld>
 </file>
 
-<file path=ppt/slides/slide73.xml><?xml version="1.0" encoding="utf-8"?>
+<file path=ppt/slides/slide75.xml><?xml version="1.0" encoding="utf-8"?>
 <p:sld xmlns:a="http://schemas.openxmlformats.org/drawingml/2006/main" xmlns:r="http://schemas.openxmlformats.org/officeDocument/2006/relationships" xmlns:p="http://schemas.openxmlformats.org/presentationml/2006/main">
   <p:cSld>
     <p:spTree>
@@ -35846,7 +36017,7 @@
 </p:sld>
 </file>
 
-<file path=ppt/slides/slide74.xml><?xml version="1.0" encoding="utf-8"?>
+<file path=ppt/slides/slide76.xml><?xml version="1.0" encoding="utf-8"?>
 <p:sld xmlns:a="http://schemas.openxmlformats.org/drawingml/2006/main" xmlns:r="http://schemas.openxmlformats.org/officeDocument/2006/relationships" xmlns:p="http://schemas.openxmlformats.org/presentationml/2006/main">
   <p:cSld>
     <p:spTree>
@@ -36255,7 +36426,7 @@
 </p:sld>
 </file>
 
-<file path=ppt/slides/slide75.xml><?xml version="1.0" encoding="utf-8"?>
+<file path=ppt/slides/slide77.xml><?xml version="1.0" encoding="utf-8"?>
 <p:sld xmlns:a="http://schemas.openxmlformats.org/drawingml/2006/main" xmlns:r="http://schemas.openxmlformats.org/officeDocument/2006/relationships" xmlns:p="http://schemas.openxmlformats.org/presentationml/2006/main">
   <p:cSld>
     <p:spTree>
@@ -36664,7 +36835,7 @@
 </p:sld>
 </file>
 
-<file path=ppt/slides/slide76.xml><?xml version="1.0" encoding="utf-8"?>
+<file path=ppt/slides/slide78.xml><?xml version="1.0" encoding="utf-8"?>
 <p:sld xmlns:a="http://schemas.openxmlformats.org/drawingml/2006/main" xmlns:r="http://schemas.openxmlformats.org/officeDocument/2006/relationships" xmlns:p="http://schemas.openxmlformats.org/presentationml/2006/main">
   <p:cSld>
     <p:spTree>
@@ -36816,7 +36987,7 @@
             <a:fld id="{23A722F0-04E0-4C85-BB4F-F38C170A22CE}" type="slidenum">
               <a:rPr lang="en-US" smtClean="0"/>
               <a:pPr/>
-              <a:t>76</a:t>
+              <a:t>78</a:t>
             </a:fld>
             <a:endParaRPr lang="en-US"/>
           </a:p>
@@ -36835,7 +37006,7 @@
 </p:sld>
 </file>
 
-<file path=ppt/slides/slide77.xml><?xml version="1.0" encoding="utf-8"?>
+<file path=ppt/slides/slide79.xml><?xml version="1.0" encoding="utf-8"?>
 <p:sld xmlns:a="http://schemas.openxmlformats.org/drawingml/2006/main" xmlns:r="http://schemas.openxmlformats.org/officeDocument/2006/relationships" xmlns:p="http://schemas.openxmlformats.org/presentationml/2006/main">
   <p:cSld>
     <p:spTree>
@@ -36953,301 +37124,6 @@
     <p:extLst>
       <p:ext uri="{BB962C8B-B14F-4D97-AF65-F5344CB8AC3E}">
         <p14:creationId xmlns:p14="http://schemas.microsoft.com/office/powerpoint/2010/main" val="2918768208"/>
-      </p:ext>
-    </p:extLst>
-  </p:cSld>
-  <p:clrMapOvr>
-    <a:masterClrMapping/>
-  </p:clrMapOvr>
-</p:sld>
-</file>
-
-<file path=ppt/slides/slide78.xml><?xml version="1.0" encoding="utf-8"?>
-<p:sld xmlns:a="http://schemas.openxmlformats.org/drawingml/2006/main" xmlns:r="http://schemas.openxmlformats.org/officeDocument/2006/relationships" xmlns:p="http://schemas.openxmlformats.org/presentationml/2006/main">
-  <p:cSld>
-    <p:spTree>
-      <p:nvGrpSpPr>
-        <p:cNvPr id="1" name=""/>
-        <p:cNvGrpSpPr/>
-        <p:nvPr/>
-      </p:nvGrpSpPr>
-      <p:grpSpPr>
-        <a:xfrm>
-          <a:off x="0" y="0"/>
-          <a:ext cx="0" cy="0"/>
-          <a:chOff x="0" y="0"/>
-          <a:chExt cx="0" cy="0"/>
-        </a:xfrm>
-      </p:grpSpPr>
-      <p:sp>
-        <p:nvSpPr>
-          <p:cNvPr id="69635" name="Rectangle 2"/>
-          <p:cNvSpPr>
-            <a:spLocks noGrp="1" noChangeArrowheads="1"/>
-          </p:cNvSpPr>
-          <p:nvPr>
-            <p:ph type="title"/>
-          </p:nvPr>
-        </p:nvSpPr>
-        <p:spPr/>
-        <p:txBody>
-          <a:bodyPr/>
-          <a:lstStyle/>
-          <a:p>
-            <a:pPr eaLnBrk="1" hangingPunct="1"/>
-            <a:r>
-              <a:rPr lang="en-US" dirty="0"/>
-              <a:t>Question 225.5.4</a:t>
-            </a:r>
-          </a:p>
-        </p:txBody>
-      </p:sp>
-      <p:sp>
-        <p:nvSpPr>
-          <p:cNvPr id="69636" name="Rectangle 3"/>
-          <p:cNvSpPr>
-            <a:spLocks noGrp="1" noChangeArrowheads="1"/>
-          </p:cNvSpPr>
-          <p:nvPr>
-            <p:ph idx="1"/>
-          </p:nvPr>
-        </p:nvSpPr>
-        <p:spPr/>
-        <p:txBody>
-          <a:bodyPr/>
-          <a:lstStyle/>
-          <a:p>
-            <a:pPr marL="609600" indent="-609600" eaLnBrk="1" hangingPunct="1">
-              <a:lnSpc>
-                <a:spcPct val="90000"/>
-              </a:lnSpc>
-              <a:buFontTx/>
-              <a:buNone/>
-            </a:pPr>
-            <a:r>
-              <a:rPr lang="en-US" dirty="0"/>
-              <a:t>Often a single jet will create two sonic booms, why?</a:t>
-            </a:r>
-          </a:p>
-          <a:p>
-            <a:pPr marL="609600" indent="-609600" eaLnBrk="1" hangingPunct="1">
-              <a:lnSpc>
-                <a:spcPct val="90000"/>
-              </a:lnSpc>
-              <a:buFontTx/>
-              <a:buAutoNum type="alphaLcParenR"/>
-            </a:pPr>
-            <a:r>
-              <a:rPr lang="en-US" dirty="0"/>
-              <a:t>One is from the plane and one is from the condensation trail that follows the plane</a:t>
-            </a:r>
-          </a:p>
-          <a:p>
-            <a:pPr marL="609600" indent="-609600" eaLnBrk="1" hangingPunct="1">
-              <a:lnSpc>
-                <a:spcPct val="90000"/>
-              </a:lnSpc>
-              <a:buFontTx/>
-              <a:buAutoNum type="alphaLcParenR"/>
-            </a:pPr>
-            <a:r>
-              <a:rPr lang="en-US" dirty="0"/>
-              <a:t>The nose and the tail both act as wave sources</a:t>
-            </a:r>
-          </a:p>
-          <a:p>
-            <a:pPr marL="609600" indent="-609600" eaLnBrk="1" hangingPunct="1">
-              <a:lnSpc>
-                <a:spcPct val="90000"/>
-              </a:lnSpc>
-              <a:buFontTx/>
-              <a:buAutoNum type="alphaLcParenR"/>
-            </a:pPr>
-            <a:r>
-              <a:rPr lang="en-US" dirty="0"/>
-              <a:t>One is from the plane and one is a Newton's third law reaction</a:t>
-            </a:r>
-          </a:p>
-        </p:txBody>
-      </p:sp>
-      <p:sp>
-        <p:nvSpPr>
-          <p:cNvPr id="69634" name="Slide Number Placeholder 5"/>
-          <p:cNvSpPr>
-            <a:spLocks noGrp="1"/>
-          </p:cNvSpPr>
-          <p:nvPr>
-            <p:ph type="sldNum" sz="quarter" idx="12"/>
-          </p:nvPr>
-        </p:nvSpPr>
-        <p:spPr>
-          <a:noFill/>
-        </p:spPr>
-        <p:txBody>
-          <a:bodyPr/>
-          <a:lstStyle/>
-          <a:p>
-            <a:fld id="{0444647A-B62D-46AC-8BB6-871103D5B2E6}" type="slidenum">
-              <a:rPr lang="en-US" smtClean="0"/>
-              <a:pPr/>
-              <a:t>78</a:t>
-            </a:fld>
-            <a:endParaRPr lang="en-US"/>
-          </a:p>
-        </p:txBody>
-      </p:sp>
-    </p:spTree>
-    <p:extLst>
-      <p:ext uri="{BB962C8B-B14F-4D97-AF65-F5344CB8AC3E}">
-        <p14:creationId xmlns:p14="http://schemas.microsoft.com/office/powerpoint/2010/main" val="2700378708"/>
-      </p:ext>
-    </p:extLst>
-  </p:cSld>
-  <p:clrMapOvr>
-    <a:masterClrMapping/>
-  </p:clrMapOvr>
-</p:sld>
-</file>
-
-<file path=ppt/slides/slide79.xml><?xml version="1.0" encoding="utf-8"?>
-<p:sld xmlns:a="http://schemas.openxmlformats.org/drawingml/2006/main" xmlns:r="http://schemas.openxmlformats.org/officeDocument/2006/relationships" xmlns:p="http://schemas.openxmlformats.org/presentationml/2006/main">
-  <p:cSld>
-    <p:spTree>
-      <p:nvGrpSpPr>
-        <p:cNvPr id="1" name=""/>
-        <p:cNvGrpSpPr/>
-        <p:nvPr/>
-      </p:nvGrpSpPr>
-      <p:grpSpPr>
-        <a:xfrm>
-          <a:off x="0" y="0"/>
-          <a:ext cx="0" cy="0"/>
-          <a:chOff x="0" y="0"/>
-          <a:chExt cx="0" cy="0"/>
-        </a:xfrm>
-      </p:grpSpPr>
-      <p:sp>
-        <p:nvSpPr>
-          <p:cNvPr id="2" name="Title 1"/>
-          <p:cNvSpPr>
-            <a:spLocks noGrp="1"/>
-          </p:cNvSpPr>
-          <p:nvPr>
-            <p:ph type="title"/>
-          </p:nvPr>
-        </p:nvSpPr>
-        <p:spPr/>
-        <p:txBody>
-          <a:bodyPr/>
-          <a:lstStyle/>
-          <a:p>
-            <a:r>
-              <a:rPr lang="en-US" dirty="0"/>
-              <a:t>Question 223.5.4.1</a:t>
-            </a:r>
-          </a:p>
-        </p:txBody>
-      </p:sp>
-      <p:sp>
-        <p:nvSpPr>
-          <p:cNvPr id="3" name="Content Placeholder 2"/>
-          <p:cNvSpPr>
-            <a:spLocks noGrp="1"/>
-          </p:cNvSpPr>
-          <p:nvPr>
-            <p:ph idx="1"/>
-          </p:nvPr>
-        </p:nvSpPr>
-        <p:spPr/>
-        <p:txBody>
-          <a:bodyPr/>
-          <a:lstStyle/>
-          <a:p>
-            <a:pPr marL="0" indent="0">
-              <a:buNone/>
-            </a:pPr>
-            <a:r>
-              <a:rPr lang="en-US" dirty="0"/>
-              <a:t>You are playing your Irish tin whistle at 440Hz. Your friend runs toward you at 10m/s. What frequency does your friend hear? (take 343m.s as the speed of sound)</a:t>
-            </a:r>
-          </a:p>
-          <a:p>
-            <a:pPr marL="514350" indent="-514350">
-              <a:buAutoNum type="alphaLcParenR"/>
-            </a:pPr>
-            <a:r>
-              <a:rPr lang="en-US" dirty="0"/>
-              <a:t>453.8Hz</a:t>
-            </a:r>
-          </a:p>
-          <a:p>
-            <a:pPr marL="514350" indent="-514350">
-              <a:buAutoNum type="alphaLcParenR"/>
-            </a:pPr>
-            <a:r>
-              <a:rPr lang="en-US" dirty="0"/>
-              <a:t>427.1Hz</a:t>
-            </a:r>
-          </a:p>
-          <a:p>
-            <a:pPr marL="514350" indent="-514350">
-              <a:buAutoNum type="alphaLcParenR"/>
-            </a:pPr>
-            <a:r>
-              <a:rPr lang="en-US" dirty="0"/>
-              <a:t>453.2</a:t>
-            </a:r>
-          </a:p>
-          <a:p>
-            <a:pPr marL="514350" indent="-514350">
-              <a:buAutoNum type="alphaLcParenR"/>
-            </a:pPr>
-            <a:r>
-              <a:rPr lang="en-US" dirty="0"/>
-              <a:t>427.5</a:t>
-            </a:r>
-          </a:p>
-          <a:p>
-            <a:pPr marL="0" indent="0">
-              <a:buNone/>
-            </a:pPr>
-            <a:endParaRPr lang="en-US" dirty="0"/>
-          </a:p>
-        </p:txBody>
-      </p:sp>
-      <p:sp>
-        <p:nvSpPr>
-          <p:cNvPr id="4" name="Slide Number Placeholder 3"/>
-          <p:cNvSpPr>
-            <a:spLocks noGrp="1"/>
-          </p:cNvSpPr>
-          <p:nvPr>
-            <p:ph type="sldNum" sz="quarter" idx="12"/>
-          </p:nvPr>
-        </p:nvSpPr>
-        <p:spPr/>
-        <p:txBody>
-          <a:bodyPr/>
-          <a:lstStyle/>
-          <a:p>
-            <a:pPr>
-              <a:defRPr/>
-            </a:pPr>
-            <a:fld id="{64137B81-8888-4253-92EC-0AED2A590749}" type="slidenum">
-              <a:rPr lang="en-US" smtClean="0"/>
-              <a:pPr>
-                <a:defRPr/>
-              </a:pPr>
-              <a:t>79</a:t>
-            </a:fld>
-            <a:endParaRPr lang="en-US"/>
-          </a:p>
-        </p:txBody>
-      </p:sp>
-    </p:spTree>
-    <p:extLst>
-      <p:ext uri="{BB962C8B-B14F-4D97-AF65-F5344CB8AC3E}">
-        <p14:creationId xmlns:p14="http://schemas.microsoft.com/office/powerpoint/2010/main" val="4011188011"/>
       </p:ext>
     </p:extLst>
   </p:cSld>
@@ -37886,6 +37762,301 @@
 </file>
 
 <file path=ppt/slides/slide80.xml><?xml version="1.0" encoding="utf-8"?>
+<p:sld xmlns:a="http://schemas.openxmlformats.org/drawingml/2006/main" xmlns:r="http://schemas.openxmlformats.org/officeDocument/2006/relationships" xmlns:p="http://schemas.openxmlformats.org/presentationml/2006/main">
+  <p:cSld>
+    <p:spTree>
+      <p:nvGrpSpPr>
+        <p:cNvPr id="1" name=""/>
+        <p:cNvGrpSpPr/>
+        <p:nvPr/>
+      </p:nvGrpSpPr>
+      <p:grpSpPr>
+        <a:xfrm>
+          <a:off x="0" y="0"/>
+          <a:ext cx="0" cy="0"/>
+          <a:chOff x="0" y="0"/>
+          <a:chExt cx="0" cy="0"/>
+        </a:xfrm>
+      </p:grpSpPr>
+      <p:sp>
+        <p:nvSpPr>
+          <p:cNvPr id="69635" name="Rectangle 2"/>
+          <p:cNvSpPr>
+            <a:spLocks noGrp="1" noChangeArrowheads="1"/>
+          </p:cNvSpPr>
+          <p:nvPr>
+            <p:ph type="title"/>
+          </p:nvPr>
+        </p:nvSpPr>
+        <p:spPr/>
+        <p:txBody>
+          <a:bodyPr/>
+          <a:lstStyle/>
+          <a:p>
+            <a:pPr eaLnBrk="1" hangingPunct="1"/>
+            <a:r>
+              <a:rPr lang="en-US" dirty="0"/>
+              <a:t>Question 225.5.4</a:t>
+            </a:r>
+          </a:p>
+        </p:txBody>
+      </p:sp>
+      <p:sp>
+        <p:nvSpPr>
+          <p:cNvPr id="69636" name="Rectangle 3"/>
+          <p:cNvSpPr>
+            <a:spLocks noGrp="1" noChangeArrowheads="1"/>
+          </p:cNvSpPr>
+          <p:nvPr>
+            <p:ph idx="1"/>
+          </p:nvPr>
+        </p:nvSpPr>
+        <p:spPr/>
+        <p:txBody>
+          <a:bodyPr/>
+          <a:lstStyle/>
+          <a:p>
+            <a:pPr marL="609600" indent="-609600" eaLnBrk="1" hangingPunct="1">
+              <a:lnSpc>
+                <a:spcPct val="90000"/>
+              </a:lnSpc>
+              <a:buFontTx/>
+              <a:buNone/>
+            </a:pPr>
+            <a:r>
+              <a:rPr lang="en-US" dirty="0"/>
+              <a:t>Often a single jet will create two sonic booms, why?</a:t>
+            </a:r>
+          </a:p>
+          <a:p>
+            <a:pPr marL="609600" indent="-609600" eaLnBrk="1" hangingPunct="1">
+              <a:lnSpc>
+                <a:spcPct val="90000"/>
+              </a:lnSpc>
+              <a:buFontTx/>
+              <a:buAutoNum type="alphaLcParenR"/>
+            </a:pPr>
+            <a:r>
+              <a:rPr lang="en-US" dirty="0"/>
+              <a:t>One is from the plane and one is from the condensation trail that follows the plane</a:t>
+            </a:r>
+          </a:p>
+          <a:p>
+            <a:pPr marL="609600" indent="-609600" eaLnBrk="1" hangingPunct="1">
+              <a:lnSpc>
+                <a:spcPct val="90000"/>
+              </a:lnSpc>
+              <a:buFontTx/>
+              <a:buAutoNum type="alphaLcParenR"/>
+            </a:pPr>
+            <a:r>
+              <a:rPr lang="en-US" dirty="0"/>
+              <a:t>The nose and the tail both act as wave sources</a:t>
+            </a:r>
+          </a:p>
+          <a:p>
+            <a:pPr marL="609600" indent="-609600" eaLnBrk="1" hangingPunct="1">
+              <a:lnSpc>
+                <a:spcPct val="90000"/>
+              </a:lnSpc>
+              <a:buFontTx/>
+              <a:buAutoNum type="alphaLcParenR"/>
+            </a:pPr>
+            <a:r>
+              <a:rPr lang="en-US" dirty="0"/>
+              <a:t>One is from the plane and one is a Newton's third law reaction</a:t>
+            </a:r>
+          </a:p>
+        </p:txBody>
+      </p:sp>
+      <p:sp>
+        <p:nvSpPr>
+          <p:cNvPr id="69634" name="Slide Number Placeholder 5"/>
+          <p:cNvSpPr>
+            <a:spLocks noGrp="1"/>
+          </p:cNvSpPr>
+          <p:nvPr>
+            <p:ph type="sldNum" sz="quarter" idx="12"/>
+          </p:nvPr>
+        </p:nvSpPr>
+        <p:spPr>
+          <a:noFill/>
+        </p:spPr>
+        <p:txBody>
+          <a:bodyPr/>
+          <a:lstStyle/>
+          <a:p>
+            <a:fld id="{0444647A-B62D-46AC-8BB6-871103D5B2E6}" type="slidenum">
+              <a:rPr lang="en-US" smtClean="0"/>
+              <a:pPr/>
+              <a:t>80</a:t>
+            </a:fld>
+            <a:endParaRPr lang="en-US"/>
+          </a:p>
+        </p:txBody>
+      </p:sp>
+    </p:spTree>
+    <p:extLst>
+      <p:ext uri="{BB962C8B-B14F-4D97-AF65-F5344CB8AC3E}">
+        <p14:creationId xmlns:p14="http://schemas.microsoft.com/office/powerpoint/2010/main" val="2700378708"/>
+      </p:ext>
+    </p:extLst>
+  </p:cSld>
+  <p:clrMapOvr>
+    <a:masterClrMapping/>
+  </p:clrMapOvr>
+</p:sld>
+</file>
+
+<file path=ppt/slides/slide81.xml><?xml version="1.0" encoding="utf-8"?>
+<p:sld xmlns:a="http://schemas.openxmlformats.org/drawingml/2006/main" xmlns:r="http://schemas.openxmlformats.org/officeDocument/2006/relationships" xmlns:p="http://schemas.openxmlformats.org/presentationml/2006/main">
+  <p:cSld>
+    <p:spTree>
+      <p:nvGrpSpPr>
+        <p:cNvPr id="1" name=""/>
+        <p:cNvGrpSpPr/>
+        <p:nvPr/>
+      </p:nvGrpSpPr>
+      <p:grpSpPr>
+        <a:xfrm>
+          <a:off x="0" y="0"/>
+          <a:ext cx="0" cy="0"/>
+          <a:chOff x="0" y="0"/>
+          <a:chExt cx="0" cy="0"/>
+        </a:xfrm>
+      </p:grpSpPr>
+      <p:sp>
+        <p:nvSpPr>
+          <p:cNvPr id="2" name="Title 1"/>
+          <p:cNvSpPr>
+            <a:spLocks noGrp="1"/>
+          </p:cNvSpPr>
+          <p:nvPr>
+            <p:ph type="title"/>
+          </p:nvPr>
+        </p:nvSpPr>
+        <p:spPr/>
+        <p:txBody>
+          <a:bodyPr/>
+          <a:lstStyle/>
+          <a:p>
+            <a:r>
+              <a:rPr lang="en-US" dirty="0"/>
+              <a:t>Question 223.5.4.1</a:t>
+            </a:r>
+          </a:p>
+        </p:txBody>
+      </p:sp>
+      <p:sp>
+        <p:nvSpPr>
+          <p:cNvPr id="3" name="Content Placeholder 2"/>
+          <p:cNvSpPr>
+            <a:spLocks noGrp="1"/>
+          </p:cNvSpPr>
+          <p:nvPr>
+            <p:ph idx="1"/>
+          </p:nvPr>
+        </p:nvSpPr>
+        <p:spPr/>
+        <p:txBody>
+          <a:bodyPr/>
+          <a:lstStyle/>
+          <a:p>
+            <a:pPr marL="0" indent="0">
+              <a:buNone/>
+            </a:pPr>
+            <a:r>
+              <a:rPr lang="en-US" dirty="0"/>
+              <a:t>You are playing your Irish tin whistle at 440Hz. Your friend runs toward you at 10m/s. What frequency does your friend hear? (take 343m.s as the speed of sound)</a:t>
+            </a:r>
+          </a:p>
+          <a:p>
+            <a:pPr marL="514350" indent="-514350">
+              <a:buAutoNum type="alphaLcParenR"/>
+            </a:pPr>
+            <a:r>
+              <a:rPr lang="en-US" dirty="0"/>
+              <a:t>453.8Hz</a:t>
+            </a:r>
+          </a:p>
+          <a:p>
+            <a:pPr marL="514350" indent="-514350">
+              <a:buAutoNum type="alphaLcParenR"/>
+            </a:pPr>
+            <a:r>
+              <a:rPr lang="en-US" dirty="0"/>
+              <a:t>427.1Hz</a:t>
+            </a:r>
+          </a:p>
+          <a:p>
+            <a:pPr marL="514350" indent="-514350">
+              <a:buAutoNum type="alphaLcParenR"/>
+            </a:pPr>
+            <a:r>
+              <a:rPr lang="en-US" dirty="0"/>
+              <a:t>453.2</a:t>
+            </a:r>
+          </a:p>
+          <a:p>
+            <a:pPr marL="514350" indent="-514350">
+              <a:buAutoNum type="alphaLcParenR"/>
+            </a:pPr>
+            <a:r>
+              <a:rPr lang="en-US" dirty="0"/>
+              <a:t>427.5</a:t>
+            </a:r>
+          </a:p>
+          <a:p>
+            <a:pPr marL="0" indent="0">
+              <a:buNone/>
+            </a:pPr>
+            <a:endParaRPr lang="en-US" dirty="0"/>
+          </a:p>
+        </p:txBody>
+      </p:sp>
+      <p:sp>
+        <p:nvSpPr>
+          <p:cNvPr id="4" name="Slide Number Placeholder 3"/>
+          <p:cNvSpPr>
+            <a:spLocks noGrp="1"/>
+          </p:cNvSpPr>
+          <p:nvPr>
+            <p:ph type="sldNum" sz="quarter" idx="12"/>
+          </p:nvPr>
+        </p:nvSpPr>
+        <p:spPr/>
+        <p:txBody>
+          <a:bodyPr/>
+          <a:lstStyle/>
+          <a:p>
+            <a:pPr>
+              <a:defRPr/>
+            </a:pPr>
+            <a:fld id="{64137B81-8888-4253-92EC-0AED2A590749}" type="slidenum">
+              <a:rPr lang="en-US" smtClean="0"/>
+              <a:pPr>
+                <a:defRPr/>
+              </a:pPr>
+              <a:t>81</a:t>
+            </a:fld>
+            <a:endParaRPr lang="en-US"/>
+          </a:p>
+        </p:txBody>
+      </p:sp>
+    </p:spTree>
+    <p:extLst>
+      <p:ext uri="{BB962C8B-B14F-4D97-AF65-F5344CB8AC3E}">
+        <p14:creationId xmlns:p14="http://schemas.microsoft.com/office/powerpoint/2010/main" val="4011188011"/>
+      </p:ext>
+    </p:extLst>
+  </p:cSld>
+  <p:clrMapOvr>
+    <a:masterClrMapping/>
+  </p:clrMapOvr>
+</p:sld>
+</file>
+
+<file path=ppt/slides/slide82.xml><?xml version="1.0" encoding="utf-8"?>
 <p:sld xmlns:a="http://schemas.openxmlformats.org/drawingml/2006/main" xmlns:r="http://schemas.openxmlformats.org/officeDocument/2006/relationships" xmlns:p="http://schemas.openxmlformats.org/presentationml/2006/main">
   <p:cSld>
     <p:spTree>
@@ -39275,7 +39446,7 @@
 </p:sld>
 </file>
 
-<file path=ppt/slides/slide81.xml><?xml version="1.0" encoding="utf-8"?>
+<file path=ppt/slides/slide83.xml><?xml version="1.0" encoding="utf-8"?>
 <p:sld xmlns:a="http://schemas.openxmlformats.org/drawingml/2006/main" xmlns:r="http://schemas.openxmlformats.org/officeDocument/2006/relationships" xmlns:p="http://schemas.openxmlformats.org/presentationml/2006/main">
   <p:cSld>
     <p:spTree>
@@ -39344,7 +39515,7 @@
 </p:sld>
 </file>
 
-<file path=ppt/slides/slide82.xml><?xml version="1.0" encoding="utf-8"?>
+<file path=ppt/slides/slide84.xml><?xml version="1.0" encoding="utf-8"?>
 <p:sld xmlns:a="http://schemas.openxmlformats.org/drawingml/2006/main" xmlns:r="http://schemas.openxmlformats.org/officeDocument/2006/relationships" xmlns:p="http://schemas.openxmlformats.org/presentationml/2006/main">
   <p:cSld>
     <p:spTree>
@@ -39453,7 +39624,7 @@
 </p:sld>
 </file>
 
-<file path=ppt/slides/slide83.xml><?xml version="1.0" encoding="utf-8"?>
+<file path=ppt/slides/slide85.xml><?xml version="1.0" encoding="utf-8"?>
 <p:sld xmlns:a="http://schemas.openxmlformats.org/drawingml/2006/main" xmlns:r="http://schemas.openxmlformats.org/officeDocument/2006/relationships" xmlns:p="http://schemas.openxmlformats.org/presentationml/2006/main">
   <p:cSld>
     <p:spTree>
@@ -39509,7 +39680,7 @@
 </p:sld>
 </file>
 
-<file path=ppt/slides/slide84.xml><?xml version="1.0" encoding="utf-8"?>
+<file path=ppt/slides/slide86.xml><?xml version="1.0" encoding="utf-8"?>
 <p:sld xmlns:a="http://schemas.openxmlformats.org/drawingml/2006/main" xmlns:r="http://schemas.openxmlformats.org/officeDocument/2006/relationships" xmlns:p="http://schemas.openxmlformats.org/presentationml/2006/main">
   <p:cSld>
     <p:spTree>
@@ -39629,7 +39800,7 @@
 </p:sld>
 </file>
 
-<file path=ppt/slides/slide85.xml><?xml version="1.0" encoding="utf-8"?>
+<file path=ppt/slides/slide87.xml><?xml version="1.0" encoding="utf-8"?>
 <p:sld xmlns:a="http://schemas.openxmlformats.org/drawingml/2006/main" xmlns:r="http://schemas.openxmlformats.org/officeDocument/2006/relationships" xmlns:p="http://schemas.openxmlformats.org/presentationml/2006/main">
   <p:cSld>
     <p:spTree>
@@ -39753,7 +39924,7 @@
 </p:sld>
 </file>
 
-<file path=ppt/slides/slide86.xml><?xml version="1.0" encoding="utf-8"?>
+<file path=ppt/slides/slide88.xml><?xml version="1.0" encoding="utf-8"?>
 <p:sld xmlns:a="http://schemas.openxmlformats.org/drawingml/2006/main" xmlns:r="http://schemas.openxmlformats.org/officeDocument/2006/relationships" xmlns:p="http://schemas.openxmlformats.org/presentationml/2006/main">
   <p:cSld>
     <p:spTree>
